--- a/الصف-الرابع/رحلة-المستكشفة-السلسلة-والشبكة-الغذائية.pptx
+++ b/الصف-الرابع/رحلة-المستكشفة-السلسلة-والشبكة-الغذائية.pptx
@@ -5112,7 +5112,7 @@
                                   </p:childTnLst>
                                   <p:subTnLst>
                                     <p:audio>
-                                      <p:cMediaNode vol="80000" showWhenStopped="0">
+                                      <p:cMediaNode vol="50000" showWhenStopped="0">
                                         <p:cTn id="32" display="0" masterRel="sameClick">
                                           <p:stCondLst>
                                             <p:cond evt="onBegin" delay="0">
@@ -5172,7 +5172,7 @@
                                   </p:childTnLst>
                                   <p:subTnLst>
                                     <p:audio>
-                                      <p:cMediaNode vol="80000" showWhenStopped="0">
+                                      <p:cMediaNode vol="50000" showWhenStopped="0">
                                         <p:cTn id="37" display="0" masterRel="sameClick">
                                           <p:stCondLst>
                                             <p:cond evt="onBegin" delay="0">
@@ -6549,22 +6549,6 @@
                                       <p:by x="118000" y="118000"/>
                                     </p:animScale>
                                   </p:childTnLst>
-                                  <p:subTnLst>
-                                    <p:audio>
-                                      <p:cMediaNode vol="80000" showWhenStopped="0">
-                                        <p:cTn id="7" display="0" masterRel="sameClick">
-                                          <p:stCondLst>
-                                            <p:cond evt="onBegin" delay="0">
-                                              <p:tn val="5"/>
-                                            </p:cond>
-                                          </p:stCondLst>
-                                        </p:cTn>
-                                        <p:tgtEl>
-                                          <p:sndTgt r:embed="rId13" name="sparkle.wav"/>
-                                        </p:tgtEl>
-                                      </p:cMediaNode>
-                                    </p:audio>
-                                  </p:subTnLst>
                                 </p:cTn>
                               </p:par>
                             </p:childTnLst>
@@ -7408,21 +7392,11 @@
     <mc:Choice Requires="p159">
       <p:transition spd="slow" p14:dur="2000">
         <p159:morph option="byObject"/>
-        <p:sndAc>
-          <p:stSnd>
-            <p:snd r:embed="rId12" name="whoosh.wav"/>
-          </p:stSnd>
-        </p:sndAc>
       </p:transition>
     </mc:Choice>
     <mc:Fallback>
       <p:transition spd="slow">
         <p:fade/>
-        <p:sndAc>
-          <p:stSnd>
-            <p:snd r:embed="rId12" name="whoosh.wav"/>
-          </p:stSnd>
-        </p:sndAc>
       </p:transition>
     </mc:Fallback>
   </mc:AlternateContent>
@@ -7467,33 +7441,17 @@
                                       <p:by x="118000" y="118000"/>
                                     </p:animScale>
                                   </p:childTnLst>
-                                  <p:subTnLst>
-                                    <p:audio>
-                                      <p:cMediaNode vol="80000" showWhenStopped="0">
-                                        <p:cTn id="7" display="0" masterRel="sameClick">
-                                          <p:stCondLst>
-                                            <p:cond evt="onBegin" delay="0">
-                                              <p:tn val="5"/>
-                                            </p:cond>
-                                          </p:stCondLst>
-                                        </p:cTn>
-                                        <p:tgtEl>
-                                          <p:sndTgt r:embed="rId13" name="pop.wav"/>
-                                        </p:tgtEl>
-                                      </p:cMediaNode>
-                                    </p:audio>
-                                  </p:subTnLst>
                                 </p:cTn>
                               </p:par>
                               <p:par>
-                                <p:cTn id="8" presetID="6" presetClass="emph" presetSubtype="0" fill="hold" grpId="0" nodeType="withEffect">
+                                <p:cTn id="7" presetID="6" presetClass="emph" presetSubtype="0" fill="hold" grpId="0" nodeType="withEffect">
                                   <p:stCondLst>
                                     <p:cond delay="200"/>
                                   </p:stCondLst>
                                   <p:childTnLst>
                                     <p:animScale>
                                       <p:cBhvr>
-                                        <p:cTn id="9" dur="500" autoRev="1" fill="hold"/>
+                                        <p:cTn id="8" dur="500" autoRev="1" fill="hold"/>
                                         <p:tgtEl>
                                           <p:spTgt spid="15"/>
                                         </p:tgtEl>
@@ -7510,26 +7468,26 @@
                     </p:cTn>
                   </p:par>
                   <p:par>
-                    <p:cTn id="10" fill="hold">
+                    <p:cTn id="9" fill="hold">
                       <p:stCondLst>
                         <p:cond delay="indefinite"/>
                       </p:stCondLst>
                       <p:childTnLst>
                         <p:par>
-                          <p:cTn id="11" fill="hold">
+                          <p:cTn id="10" fill="hold">
                             <p:stCondLst>
                               <p:cond delay="0"/>
                             </p:stCondLst>
                             <p:childTnLst>
                               <p:par>
-                                <p:cTn id="12" presetID="10" presetClass="entr" presetSubtype="0" fill="hold" grpId="0" nodeType="clickEffect">
+                                <p:cTn id="11" presetID="10" presetClass="entr" presetSubtype="0" fill="hold" grpId="0" nodeType="clickEffect">
                                   <p:stCondLst>
                                     <p:cond delay="0"/>
                                   </p:stCondLst>
                                   <p:childTnLst>
                                     <p:set>
                                       <p:cBhvr>
-                                        <p:cTn id="13" dur="1" fill="hold">
+                                        <p:cTn id="12" dur="1" fill="hold">
                                           <p:stCondLst>
                                             <p:cond delay="0"/>
                                           </p:stCondLst>
@@ -7547,7 +7505,7 @@
                                     </p:set>
                                     <p:animEffect transition="in" filter="fade">
                                       <p:cBhvr>
-                                        <p:cTn id="14" dur="500"/>
+                                        <p:cTn id="13" dur="500"/>
                                         <p:tgtEl>
                                           <p:spTgt spid="19"/>
                                         </p:tgtEl>
@@ -7556,16 +7514,16 @@
                                   </p:childTnLst>
                                   <p:subTnLst>
                                     <p:audio>
-                                      <p:cMediaNode vol="80000" showWhenStopped="0">
-                                        <p:cTn id="15" display="0" masterRel="sameClick">
+                                      <p:cMediaNode vol="50000" showWhenStopped="0">
+                                        <p:cTn id="14" display="0" masterRel="sameClick">
                                           <p:stCondLst>
                                             <p:cond evt="onBegin" delay="0">
-                                              <p:tn val="12"/>
+                                              <p:tn val="11"/>
                                             </p:cond>
                                           </p:stCondLst>
                                         </p:cTn>
                                         <p:tgtEl>
-                                          <p:sndTgt r:embed="rId14" name="chime.wav"/>
+                                          <p:sndTgt r:embed="rId12" name="chime.wav"/>
                                         </p:tgtEl>
                                       </p:cMediaNode>
                                     </p:audio>
@@ -8489,33 +8447,17 @@
                                       <p:by x="118000" y="118000"/>
                                     </p:animScale>
                                   </p:childTnLst>
-                                  <p:subTnLst>
-                                    <p:audio>
-                                      <p:cMediaNode vol="80000" showWhenStopped="0">
-                                        <p:cTn id="7" display="0" masterRel="sameClick">
-                                          <p:stCondLst>
-                                            <p:cond evt="onBegin" delay="0">
-                                              <p:tn val="5"/>
-                                            </p:cond>
-                                          </p:stCondLst>
-                                        </p:cTn>
-                                        <p:tgtEl>
-                                          <p:sndTgt r:embed="rId12" name="pop.wav"/>
-                                        </p:tgtEl>
-                                      </p:cMediaNode>
-                                    </p:audio>
-                                  </p:subTnLst>
                                 </p:cTn>
                               </p:par>
                               <p:par>
-                                <p:cTn id="8" presetID="6" presetClass="emph" presetSubtype="0" fill="hold" grpId="0" nodeType="withEffect">
+                                <p:cTn id="7" presetID="6" presetClass="emph" presetSubtype="0" fill="hold" grpId="0" nodeType="withEffect">
                                   <p:stCondLst>
                                     <p:cond delay="200"/>
                                   </p:stCondLst>
                                   <p:childTnLst>
                                     <p:animScale>
                                       <p:cBhvr>
-                                        <p:cTn id="9" dur="500" autoRev="1" fill="hold"/>
+                                        <p:cTn id="8" dur="500" autoRev="1" fill="hold"/>
                                         <p:tgtEl>
                                           <p:spTgt spid="16"/>
                                         </p:tgtEl>
@@ -8532,26 +8474,26 @@
                     </p:cTn>
                   </p:par>
                   <p:par>
-                    <p:cTn id="10" fill="hold">
+                    <p:cTn id="9" fill="hold">
                       <p:stCondLst>
                         <p:cond delay="indefinite"/>
                       </p:stCondLst>
                       <p:childTnLst>
                         <p:par>
-                          <p:cTn id="11" fill="hold">
+                          <p:cTn id="10" fill="hold">
                             <p:stCondLst>
                               <p:cond delay="0"/>
                             </p:stCondLst>
                             <p:childTnLst>
                               <p:par>
-                                <p:cTn id="12" presetID="10" presetClass="entr" presetSubtype="0" fill="hold" grpId="0" nodeType="clickEffect">
+                                <p:cTn id="11" presetID="10" presetClass="entr" presetSubtype="0" fill="hold" grpId="0" nodeType="clickEffect">
                                   <p:stCondLst>
                                     <p:cond delay="0"/>
                                   </p:stCondLst>
                                   <p:childTnLst>
                                     <p:set>
                                       <p:cBhvr>
-                                        <p:cTn id="13" dur="1" fill="hold">
+                                        <p:cTn id="12" dur="1" fill="hold">
                                           <p:stCondLst>
                                             <p:cond delay="0"/>
                                           </p:stCondLst>
@@ -8569,7 +8511,7 @@
                                     </p:set>
                                     <p:animEffect transition="in" filter="fade">
                                       <p:cBhvr>
-                                        <p:cTn id="14" dur="500"/>
+                                        <p:cTn id="13" dur="500"/>
                                         <p:tgtEl>
                                           <p:spTgt spid="20"/>
                                         </p:tgtEl>
@@ -8578,16 +8520,16 @@
                                   </p:childTnLst>
                                   <p:subTnLst>
                                     <p:audio>
-                                      <p:cMediaNode vol="80000" showWhenStopped="0">
-                                        <p:cTn id="15" display="0" masterRel="sameClick">
+                                      <p:cMediaNode vol="50000" showWhenStopped="0">
+                                        <p:cTn id="14" display="0" masterRel="sameClick">
                                           <p:stCondLst>
                                             <p:cond evt="onBegin" delay="0">
-                                              <p:tn val="12"/>
+                                              <p:tn val="11"/>
                                             </p:cond>
                                           </p:stCondLst>
                                         </p:cTn>
                                         <p:tgtEl>
-                                          <p:sndTgt r:embed="rId13" name="chime.wav"/>
+                                          <p:sndTgt r:embed="rId12" name="chime.wav"/>
                                         </p:tgtEl>
                                       </p:cMediaNode>
                                     </p:audio>
@@ -9535,33 +9477,17 @@
                                       <p:by x="118000" y="118000"/>
                                     </p:animScale>
                                   </p:childTnLst>
-                                  <p:subTnLst>
-                                    <p:audio>
-                                      <p:cMediaNode vol="80000" showWhenStopped="0">
-                                        <p:cTn id="7" display="0" masterRel="sameClick">
-                                          <p:stCondLst>
-                                            <p:cond evt="onBegin" delay="0">
-                                              <p:tn val="5"/>
-                                            </p:cond>
-                                          </p:stCondLst>
-                                        </p:cTn>
-                                        <p:tgtEl>
-                                          <p:sndTgt r:embed="rId12" name="pop.wav"/>
-                                        </p:tgtEl>
-                                      </p:cMediaNode>
-                                    </p:audio>
-                                  </p:subTnLst>
                                 </p:cTn>
                               </p:par>
                               <p:par>
-                                <p:cTn id="8" presetID="6" presetClass="emph" presetSubtype="0" fill="hold" grpId="0" nodeType="withEffect">
+                                <p:cTn id="7" presetID="6" presetClass="emph" presetSubtype="0" fill="hold" grpId="0" nodeType="withEffect">
                                   <p:stCondLst>
                                     <p:cond delay="200"/>
                                   </p:stCondLst>
                                   <p:childTnLst>
                                     <p:animScale>
                                       <p:cBhvr>
-                                        <p:cTn id="9" dur="500" autoRev="1" fill="hold"/>
+                                        <p:cTn id="8" dur="500" autoRev="1" fill="hold"/>
                                         <p:tgtEl>
                                           <p:spTgt spid="17"/>
                                         </p:tgtEl>
@@ -9578,26 +9504,26 @@
                     </p:cTn>
                   </p:par>
                   <p:par>
-                    <p:cTn id="10" fill="hold">
+                    <p:cTn id="9" fill="hold">
                       <p:stCondLst>
                         <p:cond delay="indefinite"/>
                       </p:stCondLst>
                       <p:childTnLst>
                         <p:par>
-                          <p:cTn id="11" fill="hold">
+                          <p:cTn id="10" fill="hold">
                             <p:stCondLst>
                               <p:cond delay="0"/>
                             </p:stCondLst>
                             <p:childTnLst>
                               <p:par>
-                                <p:cTn id="12" presetID="10" presetClass="entr" presetSubtype="0" fill="hold" grpId="0" nodeType="clickEffect">
+                                <p:cTn id="11" presetID="10" presetClass="entr" presetSubtype="0" fill="hold" grpId="0" nodeType="clickEffect">
                                   <p:stCondLst>
                                     <p:cond delay="0"/>
                                   </p:stCondLst>
                                   <p:childTnLst>
                                     <p:set>
                                       <p:cBhvr>
-                                        <p:cTn id="13" dur="1" fill="hold">
+                                        <p:cTn id="12" dur="1" fill="hold">
                                           <p:stCondLst>
                                             <p:cond delay="0"/>
                                           </p:stCondLst>
@@ -9615,7 +9541,7 @@
                                     </p:set>
                                     <p:animEffect transition="in" filter="fade">
                                       <p:cBhvr>
-                                        <p:cTn id="14" dur="500"/>
+                                        <p:cTn id="13" dur="500"/>
                                         <p:tgtEl>
                                           <p:spTgt spid="21"/>
                                         </p:tgtEl>
@@ -9624,16 +9550,16 @@
                                   </p:childTnLst>
                                   <p:subTnLst>
                                     <p:audio>
-                                      <p:cMediaNode vol="80000" showWhenStopped="0">
-                                        <p:cTn id="15" display="0" masterRel="sameClick">
+                                      <p:cMediaNode vol="50000" showWhenStopped="0">
+                                        <p:cTn id="14" display="0" masterRel="sameClick">
                                           <p:stCondLst>
                                             <p:cond evt="onBegin" delay="0">
-                                              <p:tn val="12"/>
+                                              <p:tn val="11"/>
                                             </p:cond>
                                           </p:stCondLst>
                                         </p:cTn>
                                         <p:tgtEl>
-                                          <p:sndTgt r:embed="rId13" name="chime.wav"/>
+                                          <p:sndTgt r:embed="rId12" name="chime.wav"/>
                                         </p:tgtEl>
                                       </p:cMediaNode>
                                     </p:audio>
@@ -10605,33 +10531,17 @@
                                       <p:by x="118000" y="118000"/>
                                     </p:animScale>
                                   </p:childTnLst>
-                                  <p:subTnLst>
-                                    <p:audio>
-                                      <p:cMediaNode vol="80000" showWhenStopped="0">
-                                        <p:cTn id="7" display="0" masterRel="sameClick">
-                                          <p:stCondLst>
-                                            <p:cond evt="onBegin" delay="0">
-                                              <p:tn val="5"/>
-                                            </p:cond>
-                                          </p:stCondLst>
-                                        </p:cTn>
-                                        <p:tgtEl>
-                                          <p:sndTgt r:embed="rId12" name="pop.wav"/>
-                                        </p:tgtEl>
-                                      </p:cMediaNode>
-                                    </p:audio>
-                                  </p:subTnLst>
                                 </p:cTn>
                               </p:par>
                               <p:par>
-                                <p:cTn id="8" presetID="6" presetClass="emph" presetSubtype="0" fill="hold" grpId="0" nodeType="withEffect">
+                                <p:cTn id="7" presetID="6" presetClass="emph" presetSubtype="0" fill="hold" grpId="0" nodeType="withEffect">
                                   <p:stCondLst>
                                     <p:cond delay="200"/>
                                   </p:stCondLst>
                                   <p:childTnLst>
                                     <p:animScale>
                                       <p:cBhvr>
-                                        <p:cTn id="9" dur="500" autoRev="1" fill="hold"/>
+                                        <p:cTn id="8" dur="500" autoRev="1" fill="hold"/>
                                         <p:tgtEl>
                                           <p:spTgt spid="18"/>
                                         </p:tgtEl>
@@ -10648,26 +10558,26 @@
                     </p:cTn>
                   </p:par>
                   <p:par>
-                    <p:cTn id="10" fill="hold">
+                    <p:cTn id="9" fill="hold">
                       <p:stCondLst>
                         <p:cond delay="indefinite"/>
                       </p:stCondLst>
                       <p:childTnLst>
                         <p:par>
-                          <p:cTn id="11" fill="hold">
+                          <p:cTn id="10" fill="hold">
                             <p:stCondLst>
                               <p:cond delay="0"/>
                             </p:stCondLst>
                             <p:childTnLst>
                               <p:par>
-                                <p:cTn id="12" presetID="10" presetClass="entr" presetSubtype="0" fill="hold" grpId="0" nodeType="clickEffect">
+                                <p:cTn id="11" presetID="10" presetClass="entr" presetSubtype="0" fill="hold" grpId="0" nodeType="clickEffect">
                                   <p:stCondLst>
                                     <p:cond delay="0"/>
                                   </p:stCondLst>
                                   <p:childTnLst>
                                     <p:set>
                                       <p:cBhvr>
-                                        <p:cTn id="13" dur="1" fill="hold">
+                                        <p:cTn id="12" dur="1" fill="hold">
                                           <p:stCondLst>
                                             <p:cond delay="0"/>
                                           </p:stCondLst>
@@ -10685,7 +10595,7 @@
                                     </p:set>
                                     <p:animEffect transition="in" filter="fade">
                                       <p:cBhvr>
-                                        <p:cTn id="14" dur="500"/>
+                                        <p:cTn id="13" dur="500"/>
                                         <p:tgtEl>
                                           <p:spTgt spid="22"/>
                                         </p:tgtEl>
@@ -10694,16 +10604,16 @@
                                   </p:childTnLst>
                                   <p:subTnLst>
                                     <p:audio>
-                                      <p:cMediaNode vol="80000" showWhenStopped="0">
-                                        <p:cTn id="15" display="0" masterRel="sameClick">
+                                      <p:cMediaNode vol="50000" showWhenStopped="0">
+                                        <p:cTn id="14" display="0" masterRel="sameClick">
                                           <p:stCondLst>
                                             <p:cond evt="onBegin" delay="0">
-                                              <p:tn val="12"/>
+                                              <p:tn val="11"/>
                                             </p:cond>
                                           </p:stCondLst>
                                         </p:cTn>
                                         <p:tgtEl>
-                                          <p:sndTgt r:embed="rId13" name="chime.wav"/>
+                                          <p:sndTgt r:embed="rId12" name="chime.wav"/>
                                         </p:tgtEl>
                                       </p:cMediaNode>
                                     </p:audio>
@@ -11699,33 +11609,17 @@
                                       <p:by x="118000" y="118000"/>
                                     </p:animScale>
                                   </p:childTnLst>
-                                  <p:subTnLst>
-                                    <p:audio>
-                                      <p:cMediaNode vol="80000" showWhenStopped="0">
-                                        <p:cTn id="7" display="0" masterRel="sameClick">
-                                          <p:stCondLst>
-                                            <p:cond evt="onBegin" delay="0">
-                                              <p:tn val="5"/>
-                                            </p:cond>
-                                          </p:stCondLst>
-                                        </p:cTn>
-                                        <p:tgtEl>
-                                          <p:sndTgt r:embed="rId12" name="pop.wav"/>
-                                        </p:tgtEl>
-                                      </p:cMediaNode>
-                                    </p:audio>
-                                  </p:subTnLst>
                                 </p:cTn>
                               </p:par>
                               <p:par>
-                                <p:cTn id="8" presetID="6" presetClass="emph" presetSubtype="0" fill="hold" grpId="0" nodeType="withEffect">
+                                <p:cTn id="7" presetID="6" presetClass="emph" presetSubtype="0" fill="hold" grpId="0" nodeType="withEffect">
                                   <p:stCondLst>
                                     <p:cond delay="200"/>
                                   </p:stCondLst>
                                   <p:childTnLst>
                                     <p:animScale>
                                       <p:cBhvr>
-                                        <p:cTn id="9" dur="500" autoRev="1" fill="hold"/>
+                                        <p:cTn id="8" dur="500" autoRev="1" fill="hold"/>
                                         <p:tgtEl>
                                           <p:spTgt spid="19"/>
                                         </p:tgtEl>
@@ -11742,26 +11636,26 @@
                     </p:cTn>
                   </p:par>
                   <p:par>
-                    <p:cTn id="10" fill="hold">
+                    <p:cTn id="9" fill="hold">
                       <p:stCondLst>
                         <p:cond delay="indefinite"/>
                       </p:stCondLst>
                       <p:childTnLst>
                         <p:par>
-                          <p:cTn id="11" fill="hold">
+                          <p:cTn id="10" fill="hold">
                             <p:stCondLst>
                               <p:cond delay="0"/>
                             </p:stCondLst>
                             <p:childTnLst>
                               <p:par>
-                                <p:cTn id="12" presetID="10" presetClass="entr" presetSubtype="0" fill="hold" grpId="0" nodeType="clickEffect">
+                                <p:cTn id="11" presetID="10" presetClass="entr" presetSubtype="0" fill="hold" grpId="0" nodeType="clickEffect">
                                   <p:stCondLst>
                                     <p:cond delay="0"/>
                                   </p:stCondLst>
                                   <p:childTnLst>
                                     <p:set>
                                       <p:cBhvr>
-                                        <p:cTn id="13" dur="1" fill="hold">
+                                        <p:cTn id="12" dur="1" fill="hold">
                                           <p:stCondLst>
                                             <p:cond delay="0"/>
                                           </p:stCondLst>
@@ -11779,7 +11673,7 @@
                                     </p:set>
                                     <p:animEffect transition="in" filter="fade">
                                       <p:cBhvr>
-                                        <p:cTn id="14" dur="500"/>
+                                        <p:cTn id="13" dur="500"/>
                                         <p:tgtEl>
                                           <p:spTgt spid="23"/>
                                         </p:tgtEl>
@@ -11788,16 +11682,16 @@
                                   </p:childTnLst>
                                   <p:subTnLst>
                                     <p:audio>
-                                      <p:cMediaNode vol="80000" showWhenStopped="0">
-                                        <p:cTn id="15" display="0" masterRel="sameClick">
+                                      <p:cMediaNode vol="50000" showWhenStopped="0">
+                                        <p:cTn id="14" display="0" masterRel="sameClick">
                                           <p:stCondLst>
                                             <p:cond evt="onBegin" delay="0">
-                                              <p:tn val="12"/>
+                                              <p:tn val="11"/>
                                             </p:cond>
                                           </p:stCondLst>
                                         </p:cTn>
                                         <p:tgtEl>
-                                          <p:sndTgt r:embed="rId13" name="chime.wav"/>
+                                          <p:sndTgt r:embed="rId12" name="chime.wav"/>
                                         </p:tgtEl>
                                       </p:cMediaNode>
                                     </p:audio>
@@ -12774,7 +12668,7 @@
                                   </p:childTnLst>
                                   <p:subTnLst>
                                     <p:audio>
-                                      <p:cMediaNode vol="80000" showWhenStopped="0">
+                                      <p:cMediaNode vol="50000" showWhenStopped="0">
                                         <p:cTn id="8" display="0" masterRel="sameClick">
                                           <p:stCondLst>
                                             <p:cond evt="onBegin" delay="0">
@@ -12841,22 +12735,6 @@
                                       </p:cBhvr>
                                     </p:animEffect>
                                   </p:childTnLst>
-                                  <p:subTnLst>
-                                    <p:audio>
-                                      <p:cMediaNode vol="80000" showWhenStopped="0">
-                                        <p:cTn id="14" display="0" masterRel="sameClick">
-                                          <p:stCondLst>
-                                            <p:cond evt="onBegin" delay="0">
-                                              <p:tn val="11"/>
-                                            </p:cond>
-                                          </p:stCondLst>
-                                        </p:cTn>
-                                        <p:tgtEl>
-                                          <p:sndTgt r:embed="rId14" name="sparkle.wav"/>
-                                        </p:tgtEl>
-                                      </p:cMediaNode>
-                                    </p:audio>
-                                  </p:subTnLst>
                                 </p:cTn>
                               </p:par>
                             </p:childTnLst>
@@ -13901,22 +13779,6 @@
                                       </p:cBhvr>
                                     </p:animEffect>
                                   </p:childTnLst>
-                                  <p:subTnLst>
-                                    <p:audio>
-                                      <p:cMediaNode vol="80000" showWhenStopped="0">
-                                        <p:cTn id="8" display="0" masterRel="sameClick">
-                                          <p:stCondLst>
-                                            <p:cond evt="onBegin" delay="0">
-                                              <p:tn val="5"/>
-                                            </p:cond>
-                                          </p:stCondLst>
-                                        </p:cTn>
-                                        <p:tgtEl>
-                                          <p:sndTgt r:embed="rId10" name="sparkle.wav"/>
-                                        </p:tgtEl>
-                                      </p:cMediaNode>
-                                    </p:audio>
-                                  </p:subTnLst>
                                 </p:cTn>
                               </p:par>
                             </p:childTnLst>
@@ -13926,26 +13788,26 @@
                     </p:cTn>
                   </p:par>
                   <p:par>
-                    <p:cTn id="9" fill="hold">
+                    <p:cTn id="8" fill="hold">
                       <p:stCondLst>
                         <p:cond delay="indefinite"/>
                       </p:stCondLst>
                       <p:childTnLst>
                         <p:par>
-                          <p:cTn id="10" fill="hold">
+                          <p:cTn id="9" fill="hold">
                             <p:stCondLst>
                               <p:cond delay="0"/>
                             </p:stCondLst>
                             <p:childTnLst>
                               <p:par>
-                                <p:cTn id="11" presetID="10" presetClass="entr" presetSubtype="0" fill="hold" grpId="0" nodeType="clickEffect">
+                                <p:cTn id="10" presetID="10" presetClass="entr" presetSubtype="0" fill="hold" grpId="0" nodeType="clickEffect">
                                   <p:stCondLst>
                                     <p:cond delay="0"/>
                                   </p:stCondLst>
                                   <p:childTnLst>
                                     <p:set>
                                       <p:cBhvr>
-                                        <p:cTn id="12" dur="1" fill="hold">
+                                        <p:cTn id="11" dur="1" fill="hold">
                                           <p:stCondLst>
                                             <p:cond delay="0"/>
                                           </p:stCondLst>
@@ -13963,7 +13825,7 @@
                                     </p:set>
                                     <p:animEffect transition="in" filter="fade">
                                       <p:cBhvr>
-                                        <p:cTn id="13" dur="500"/>
+                                        <p:cTn id="12" dur="500"/>
                                         <p:tgtEl>
                                           <p:spTgt spid="21"/>
                                         </p:tgtEl>
@@ -13972,16 +13834,16 @@
                                   </p:childTnLst>
                                   <p:subTnLst>
                                     <p:audio>
-                                      <p:cMediaNode vol="80000" showWhenStopped="0">
-                                        <p:cTn id="14" display="0" masterRel="sameClick">
+                                      <p:cMediaNode vol="50000" showWhenStopped="0">
+                                        <p:cTn id="13" display="0" masterRel="sameClick">
                                           <p:stCondLst>
                                             <p:cond evt="onBegin" delay="0">
-                                              <p:tn val="11"/>
+                                              <p:tn val="10"/>
                                             </p:cond>
                                           </p:stCondLst>
                                         </p:cTn>
                                         <p:tgtEl>
-                                          <p:sndTgt r:embed="rId11" name="chime.wav"/>
+                                          <p:sndTgt r:embed="rId10" name="chime.wav"/>
                                         </p:tgtEl>
                                       </p:cMediaNode>
                                     </p:audio>
@@ -14012,7 +13874,7 @@
               </p:nextCondLst>
             </p:seq>
             <p:seq concurrent="1" nextAc="seek">
-              <p:cTn id="15" restart="whenNotActive" fill="hold" evtFilter="cancelBubble" nodeType="interactiveSeq">
+              <p:cTn id="14" restart="whenNotActive" fill="hold" evtFilter="cancelBubble" nodeType="interactiveSeq">
                 <p:stCondLst>
                   <p:cond evt="onClick" delay="0">
                     <p:tgtEl>
@@ -14025,26 +13887,26 @@
                 </p:endSync>
                 <p:childTnLst>
                   <p:par>
-                    <p:cTn id="16" fill="hold">
+                    <p:cTn id="15" fill="hold">
                       <p:stCondLst>
                         <p:cond delay="0"/>
                       </p:stCondLst>
                       <p:childTnLst>
                         <p:par>
-                          <p:cTn id="17" fill="hold">
+                          <p:cTn id="16" fill="hold">
                             <p:stCondLst>
                               <p:cond delay="0"/>
                             </p:stCondLst>
                             <p:childTnLst>
                               <p:par>
-                                <p:cTn id="18" presetID="10" presetClass="entr" presetSubtype="0" fill="hold" grpId="0" nodeType="clickEffect">
+                                <p:cTn id="17" presetID="10" presetClass="entr" presetSubtype="0" fill="hold" grpId="0" nodeType="clickEffect">
                                   <p:stCondLst>
                                     <p:cond delay="0"/>
                                   </p:stCondLst>
                                   <p:childTnLst>
                                     <p:set>
                                       <p:cBhvr>
-                                        <p:cTn id="19" dur="1" fill="hold">
+                                        <p:cTn id="18" dur="1" fill="hold">
                                           <p:stCondLst>
                                             <p:cond delay="0"/>
                                           </p:stCondLst>
@@ -14062,29 +13924,13 @@
                                     </p:set>
                                     <p:animEffect transition="in" filter="fade">
                                       <p:cBhvr>
-                                        <p:cTn id="20" dur="500"/>
+                                        <p:cTn id="19" dur="500"/>
                                         <p:tgtEl>
                                           <p:spTgt spid="7"/>
                                         </p:tgtEl>
                                       </p:cBhvr>
                                     </p:animEffect>
                                   </p:childTnLst>
-                                  <p:subTnLst>
-                                    <p:audio>
-                                      <p:cMediaNode vol="80000" showWhenStopped="0">
-                                        <p:cTn id="21" display="0" masterRel="sameClick">
-                                          <p:stCondLst>
-                                            <p:cond evt="onBegin" delay="0">
-                                              <p:tn val="18"/>
-                                            </p:cond>
-                                          </p:stCondLst>
-                                        </p:cTn>
-                                        <p:tgtEl>
-                                          <p:sndTgt r:embed="rId12" name="pop.wav"/>
-                                        </p:tgtEl>
-                                      </p:cMediaNode>
-                                    </p:audio>
-                                  </p:subTnLst>
                                 </p:cTn>
                               </p:par>
                             </p:childTnLst>
@@ -14104,7 +13950,7 @@
               </p:nextCondLst>
             </p:seq>
             <p:seq concurrent="1" nextAc="seek">
-              <p:cTn id="22" restart="whenNotActive" fill="hold" evtFilter="cancelBubble" nodeType="interactiveSeq">
+              <p:cTn id="20" restart="whenNotActive" fill="hold" evtFilter="cancelBubble" nodeType="interactiveSeq">
                 <p:stCondLst>
                   <p:cond evt="onClick" delay="0">
                     <p:tgtEl>
@@ -14117,26 +13963,26 @@
                 </p:endSync>
                 <p:childTnLst>
                   <p:par>
-                    <p:cTn id="23" fill="hold">
+                    <p:cTn id="21" fill="hold">
                       <p:stCondLst>
                         <p:cond delay="0"/>
                       </p:stCondLst>
                       <p:childTnLst>
                         <p:par>
-                          <p:cTn id="24" fill="hold">
+                          <p:cTn id="22" fill="hold">
                             <p:stCondLst>
                               <p:cond delay="0"/>
                             </p:stCondLst>
                             <p:childTnLst>
                               <p:par>
-                                <p:cTn id="25" presetID="10" presetClass="entr" presetSubtype="0" fill="hold" grpId="0" nodeType="clickEffect">
+                                <p:cTn id="23" presetID="10" presetClass="entr" presetSubtype="0" fill="hold" grpId="0" nodeType="clickEffect">
                                   <p:stCondLst>
                                     <p:cond delay="0"/>
                                   </p:stCondLst>
                                   <p:childTnLst>
                                     <p:set>
                                       <p:cBhvr>
-                                        <p:cTn id="26" dur="1" fill="hold">
+                                        <p:cTn id="24" dur="1" fill="hold">
                                           <p:stCondLst>
                                             <p:cond delay="0"/>
                                           </p:stCondLst>
@@ -14154,29 +14000,13 @@
                                     </p:set>
                                     <p:animEffect transition="in" filter="fade">
                                       <p:cBhvr>
-                                        <p:cTn id="27" dur="500"/>
+                                        <p:cTn id="25" dur="500"/>
                                         <p:tgtEl>
                                           <p:spTgt spid="10"/>
                                         </p:tgtEl>
                                       </p:cBhvr>
                                     </p:animEffect>
                                   </p:childTnLst>
-                                  <p:subTnLst>
-                                    <p:audio>
-                                      <p:cMediaNode vol="80000" showWhenStopped="0">
-                                        <p:cTn id="28" display="0" masterRel="sameClick">
-                                          <p:stCondLst>
-                                            <p:cond evt="onBegin" delay="0">
-                                              <p:tn val="25"/>
-                                            </p:cond>
-                                          </p:stCondLst>
-                                        </p:cTn>
-                                        <p:tgtEl>
-                                          <p:sndTgt r:embed="rId12" name="pop.wav"/>
-                                        </p:tgtEl>
-                                      </p:cMediaNode>
-                                    </p:audio>
-                                  </p:subTnLst>
                                 </p:cTn>
                               </p:par>
                             </p:childTnLst>
@@ -14196,7 +14026,7 @@
               </p:nextCondLst>
             </p:seq>
             <p:seq concurrent="1" nextAc="seek">
-              <p:cTn id="29" restart="whenNotActive" fill="hold" evtFilter="cancelBubble" nodeType="interactiveSeq">
+              <p:cTn id="26" restart="whenNotActive" fill="hold" evtFilter="cancelBubble" nodeType="interactiveSeq">
                 <p:stCondLst>
                   <p:cond evt="onClick" delay="0">
                     <p:tgtEl>
@@ -14209,26 +14039,26 @@
                 </p:endSync>
                 <p:childTnLst>
                   <p:par>
-                    <p:cTn id="30" fill="hold">
+                    <p:cTn id="27" fill="hold">
                       <p:stCondLst>
                         <p:cond delay="0"/>
                       </p:stCondLst>
                       <p:childTnLst>
                         <p:par>
-                          <p:cTn id="31" fill="hold">
+                          <p:cTn id="28" fill="hold">
                             <p:stCondLst>
                               <p:cond delay="0"/>
                             </p:stCondLst>
                             <p:childTnLst>
                               <p:par>
-                                <p:cTn id="32" presetID="10" presetClass="entr" presetSubtype="0" fill="hold" grpId="0" nodeType="clickEffect">
+                                <p:cTn id="29" presetID="10" presetClass="entr" presetSubtype="0" fill="hold" grpId="0" nodeType="clickEffect">
                                   <p:stCondLst>
                                     <p:cond delay="0"/>
                                   </p:stCondLst>
                                   <p:childTnLst>
                                     <p:set>
                                       <p:cBhvr>
-                                        <p:cTn id="33" dur="1" fill="hold">
+                                        <p:cTn id="30" dur="1" fill="hold">
                                           <p:stCondLst>
                                             <p:cond delay="0"/>
                                           </p:stCondLst>
@@ -14246,29 +14076,13 @@
                                     </p:set>
                                     <p:animEffect transition="in" filter="fade">
                                       <p:cBhvr>
-                                        <p:cTn id="34" dur="500"/>
+                                        <p:cTn id="31" dur="500"/>
                                         <p:tgtEl>
                                           <p:spTgt spid="13"/>
                                         </p:tgtEl>
                                       </p:cBhvr>
                                     </p:animEffect>
                                   </p:childTnLst>
-                                  <p:subTnLst>
-                                    <p:audio>
-                                      <p:cMediaNode vol="80000" showWhenStopped="0">
-                                        <p:cTn id="35" display="0" masterRel="sameClick">
-                                          <p:stCondLst>
-                                            <p:cond evt="onBegin" delay="0">
-                                              <p:tn val="32"/>
-                                            </p:cond>
-                                          </p:stCondLst>
-                                        </p:cTn>
-                                        <p:tgtEl>
-                                          <p:sndTgt r:embed="rId12" name="pop.wav"/>
-                                        </p:tgtEl>
-                                      </p:cMediaNode>
-                                    </p:audio>
-                                  </p:subTnLst>
                                 </p:cTn>
                               </p:par>
                             </p:childTnLst>
@@ -14288,7 +14102,7 @@
               </p:nextCondLst>
             </p:seq>
             <p:seq concurrent="1" nextAc="seek">
-              <p:cTn id="36" restart="whenNotActive" fill="hold" evtFilter="cancelBubble" nodeType="interactiveSeq">
+              <p:cTn id="32" restart="whenNotActive" fill="hold" evtFilter="cancelBubble" nodeType="interactiveSeq">
                 <p:stCondLst>
                   <p:cond evt="onClick" delay="0">
                     <p:tgtEl>
@@ -14301,26 +14115,26 @@
                 </p:endSync>
                 <p:childTnLst>
                   <p:par>
-                    <p:cTn id="37" fill="hold">
+                    <p:cTn id="33" fill="hold">
                       <p:stCondLst>
                         <p:cond delay="0"/>
                       </p:stCondLst>
                       <p:childTnLst>
                         <p:par>
-                          <p:cTn id="38" fill="hold">
+                          <p:cTn id="34" fill="hold">
                             <p:stCondLst>
                               <p:cond delay="0"/>
                             </p:stCondLst>
                             <p:childTnLst>
                               <p:par>
-                                <p:cTn id="39" presetID="10" presetClass="entr" presetSubtype="0" fill="hold" grpId="0" nodeType="clickEffect">
+                                <p:cTn id="35" presetID="10" presetClass="entr" presetSubtype="0" fill="hold" grpId="0" nodeType="clickEffect">
                                   <p:stCondLst>
                                     <p:cond delay="0"/>
                                   </p:stCondLst>
                                   <p:childTnLst>
                                     <p:set>
                                       <p:cBhvr>
-                                        <p:cTn id="40" dur="1" fill="hold">
+                                        <p:cTn id="36" dur="1" fill="hold">
                                           <p:stCondLst>
                                             <p:cond delay="0"/>
                                           </p:stCondLst>
@@ -14338,29 +14152,13 @@
                                     </p:set>
                                     <p:animEffect transition="in" filter="fade">
                                       <p:cBhvr>
-                                        <p:cTn id="41" dur="500"/>
+                                        <p:cTn id="37" dur="500"/>
                                         <p:tgtEl>
                                           <p:spTgt spid="16"/>
                                         </p:tgtEl>
                                       </p:cBhvr>
                                     </p:animEffect>
                                   </p:childTnLst>
-                                  <p:subTnLst>
-                                    <p:audio>
-                                      <p:cMediaNode vol="80000" showWhenStopped="0">
-                                        <p:cTn id="42" display="0" masterRel="sameClick">
-                                          <p:stCondLst>
-                                            <p:cond evt="onBegin" delay="0">
-                                              <p:tn val="39"/>
-                                            </p:cond>
-                                          </p:stCondLst>
-                                        </p:cTn>
-                                        <p:tgtEl>
-                                          <p:sndTgt r:embed="rId12" name="pop.wav"/>
-                                        </p:tgtEl>
-                                      </p:cMediaNode>
-                                    </p:audio>
-                                  </p:subTnLst>
                                 </p:cTn>
                               </p:par>
                             </p:childTnLst>
@@ -14380,7 +14178,7 @@
               </p:nextCondLst>
             </p:seq>
             <p:seq concurrent="1" nextAc="seek">
-              <p:cTn id="43" restart="whenNotActive" fill="hold" evtFilter="cancelBubble" nodeType="interactiveSeq">
+              <p:cTn id="38" restart="whenNotActive" fill="hold" evtFilter="cancelBubble" nodeType="interactiveSeq">
                 <p:stCondLst>
                   <p:cond evt="onClick" delay="0">
                     <p:tgtEl>
@@ -14393,26 +14191,26 @@
                 </p:endSync>
                 <p:childTnLst>
                   <p:par>
-                    <p:cTn id="44" fill="hold">
+                    <p:cTn id="39" fill="hold">
                       <p:stCondLst>
                         <p:cond delay="0"/>
                       </p:stCondLst>
                       <p:childTnLst>
                         <p:par>
-                          <p:cTn id="45" fill="hold">
+                          <p:cTn id="40" fill="hold">
                             <p:stCondLst>
                               <p:cond delay="0"/>
                             </p:stCondLst>
                             <p:childTnLst>
                               <p:par>
-                                <p:cTn id="46" presetID="10" presetClass="entr" presetSubtype="0" fill="hold" grpId="0" nodeType="clickEffect">
+                                <p:cTn id="41" presetID="10" presetClass="entr" presetSubtype="0" fill="hold" grpId="0" nodeType="clickEffect">
                                   <p:stCondLst>
                                     <p:cond delay="0"/>
                                   </p:stCondLst>
                                   <p:childTnLst>
                                     <p:set>
                                       <p:cBhvr>
-                                        <p:cTn id="47" dur="1" fill="hold">
+                                        <p:cTn id="42" dur="1" fill="hold">
                                           <p:stCondLst>
                                             <p:cond delay="0"/>
                                           </p:stCondLst>
@@ -14430,29 +14228,13 @@
                                     </p:set>
                                     <p:animEffect transition="in" filter="fade">
                                       <p:cBhvr>
-                                        <p:cTn id="48" dur="500"/>
+                                        <p:cTn id="43" dur="500"/>
                                         <p:tgtEl>
                                           <p:spTgt spid="19"/>
                                         </p:tgtEl>
                                       </p:cBhvr>
                                     </p:animEffect>
                                   </p:childTnLst>
-                                  <p:subTnLst>
-                                    <p:audio>
-                                      <p:cMediaNode vol="80000" showWhenStopped="0">
-                                        <p:cTn id="49" display="0" masterRel="sameClick">
-                                          <p:stCondLst>
-                                            <p:cond evt="onBegin" delay="0">
-                                              <p:tn val="46"/>
-                                            </p:cond>
-                                          </p:stCondLst>
-                                        </p:cTn>
-                                        <p:tgtEl>
-                                          <p:sndTgt r:embed="rId12" name="pop.wav"/>
-                                        </p:tgtEl>
-                                      </p:cMediaNode>
-                                    </p:audio>
-                                  </p:subTnLst>
                                 </p:cTn>
                               </p:par>
                             </p:childTnLst>
@@ -15379,7 +15161,7 @@
                                   </p:childTnLst>
                                   <p:subTnLst>
                                     <p:audio>
-                                      <p:cMediaNode vol="80000" showWhenStopped="0">
+                                      <p:cMediaNode vol="50000" showWhenStopped="0">
                                         <p:cTn id="18" display="0" masterRel="sameClick">
                                           <p:stCondLst>
                                             <p:cond evt="onBegin" delay="0">
@@ -15554,7 +15336,7 @@
                                   </p:childTnLst>
                                   <p:subTnLst>
                                     <p:audio>
-                                      <p:cMediaNode vol="80000" showWhenStopped="0">
+                                      <p:cMediaNode vol="50000" showWhenStopped="0">
                                         <p:cTn id="34" display="0" masterRel="sameClick">
                                           <p:stCondLst>
                                             <p:cond evt="onBegin" delay="0">
@@ -15729,7 +15511,7 @@
                                   </p:childTnLst>
                                   <p:subTnLst>
                                     <p:audio>
-                                      <p:cMediaNode vol="80000" showWhenStopped="0">
+                                      <p:cMediaNode vol="50000" showWhenStopped="0">
                                         <p:cTn id="50" display="0" masterRel="sameClick">
                                           <p:stCondLst>
                                             <p:cond evt="onBegin" delay="0">
@@ -16566,22 +16348,6 @@
                                       </p:cBhvr>
                                     </p:animEffect>
                                   </p:childTnLst>
-                                  <p:subTnLst>
-                                    <p:audio>
-                                      <p:cMediaNode vol="80000" showWhenStopped="0">
-                                        <p:cTn id="18" display="0" masterRel="sameClick">
-                                          <p:stCondLst>
-                                            <p:cond evt="onBegin" delay="0">
-                                              <p:tn val="15"/>
-                                            </p:cond>
-                                          </p:stCondLst>
-                                        </p:cTn>
-                                        <p:tgtEl>
-                                          <p:sndTgt r:embed="rId6" name="pop.wav"/>
-                                        </p:tgtEl>
-                                      </p:cMediaNode>
-                                    </p:audio>
-                                  </p:subTnLst>
                                 </p:cTn>
                               </p:par>
                             </p:childTnLst>
@@ -16591,26 +16357,26 @@
                     </p:cTn>
                   </p:par>
                   <p:par>
-                    <p:cTn id="19" fill="hold">
+                    <p:cTn id="18" fill="hold">
                       <p:stCondLst>
                         <p:cond delay="indefinite"/>
                       </p:stCondLst>
                       <p:childTnLst>
                         <p:par>
-                          <p:cTn id="20" fill="hold">
+                          <p:cTn id="19" fill="hold">
                             <p:stCondLst>
                               <p:cond delay="0"/>
                             </p:stCondLst>
                             <p:childTnLst>
                               <p:par>
-                                <p:cTn id="21" presetID="10" presetClass="entr" presetSubtype="0" fill="hold" grpId="0" nodeType="clickEffect">
+                                <p:cTn id="20" presetID="10" presetClass="entr" presetSubtype="0" fill="hold" grpId="0" nodeType="clickEffect">
                                   <p:stCondLst>
                                     <p:cond delay="0"/>
                                   </p:stCondLst>
                                   <p:childTnLst>
                                     <p:set>
                                       <p:cBhvr>
-                                        <p:cTn id="22" dur="1" fill="hold">
+                                        <p:cTn id="21" dur="1" fill="hold">
                                           <p:stCondLst>
                                             <p:cond delay="0"/>
                                           </p:stCondLst>
@@ -16628,29 +16394,13 @@
                                     </p:set>
                                     <p:animEffect transition="in" filter="fade">
                                       <p:cBhvr>
-                                        <p:cTn id="23" dur="500"/>
+                                        <p:cTn id="22" dur="500"/>
                                         <p:tgtEl>
                                           <p:spTgt spid="10"/>
                                         </p:tgtEl>
                                       </p:cBhvr>
                                     </p:animEffect>
                                   </p:childTnLst>
-                                  <p:subTnLst>
-                                    <p:audio>
-                                      <p:cMediaNode vol="80000" showWhenStopped="0">
-                                        <p:cTn id="24" display="0" masterRel="sameClick">
-                                          <p:stCondLst>
-                                            <p:cond evt="onBegin" delay="0">
-                                              <p:tn val="21"/>
-                                            </p:cond>
-                                          </p:stCondLst>
-                                        </p:cTn>
-                                        <p:tgtEl>
-                                          <p:sndTgt r:embed="rId6" name="pop.wav"/>
-                                        </p:tgtEl>
-                                      </p:cMediaNode>
-                                    </p:audio>
-                                  </p:subTnLst>
                                 </p:cTn>
                               </p:par>
                             </p:childTnLst>
@@ -16660,26 +16410,26 @@
                     </p:cTn>
                   </p:par>
                   <p:par>
-                    <p:cTn id="25" fill="hold">
+                    <p:cTn id="23" fill="hold">
                       <p:stCondLst>
                         <p:cond delay="indefinite"/>
                       </p:stCondLst>
                       <p:childTnLst>
                         <p:par>
-                          <p:cTn id="26" fill="hold">
+                          <p:cTn id="24" fill="hold">
                             <p:stCondLst>
                               <p:cond delay="0"/>
                             </p:stCondLst>
                             <p:childTnLst>
                               <p:par>
-                                <p:cTn id="27" presetID="10" presetClass="entr" presetSubtype="0" fill="hold" grpId="0" nodeType="clickEffect">
+                                <p:cTn id="25" presetID="10" presetClass="entr" presetSubtype="0" fill="hold" grpId="0" nodeType="clickEffect">
                                   <p:stCondLst>
                                     <p:cond delay="0"/>
                                   </p:stCondLst>
                                   <p:childTnLst>
                                     <p:set>
                                       <p:cBhvr>
-                                        <p:cTn id="28" dur="1" fill="hold">
+                                        <p:cTn id="26" dur="1" fill="hold">
                                           <p:stCondLst>
                                             <p:cond delay="0"/>
                                           </p:stCondLst>
@@ -16697,29 +16447,13 @@
                                     </p:set>
                                     <p:animEffect transition="in" filter="fade">
                                       <p:cBhvr>
-                                        <p:cTn id="29" dur="500"/>
+                                        <p:cTn id="27" dur="500"/>
                                         <p:tgtEl>
                                           <p:spTgt spid="11"/>
                                         </p:tgtEl>
                                       </p:cBhvr>
                                     </p:animEffect>
                                   </p:childTnLst>
-                                  <p:subTnLst>
-                                    <p:audio>
-                                      <p:cMediaNode vol="80000" showWhenStopped="0">
-                                        <p:cTn id="30" display="0" masterRel="sameClick">
-                                          <p:stCondLst>
-                                            <p:cond evt="onBegin" delay="0">
-                                              <p:tn val="27"/>
-                                            </p:cond>
-                                          </p:stCondLst>
-                                        </p:cTn>
-                                        <p:tgtEl>
-                                          <p:sndTgt r:embed="rId6" name="pop.wav"/>
-                                        </p:tgtEl>
-                                      </p:cMediaNode>
-                                    </p:audio>
-                                  </p:subTnLst>
                                 </p:cTn>
                               </p:par>
                             </p:childTnLst>
@@ -16729,26 +16463,26 @@
                     </p:cTn>
                   </p:par>
                   <p:par>
-                    <p:cTn id="31" fill="hold">
+                    <p:cTn id="28" fill="hold">
                       <p:stCondLst>
                         <p:cond delay="indefinite"/>
                       </p:stCondLst>
                       <p:childTnLst>
                         <p:par>
-                          <p:cTn id="32" fill="hold">
+                          <p:cTn id="29" fill="hold">
                             <p:stCondLst>
                               <p:cond delay="0"/>
                             </p:stCondLst>
                             <p:childTnLst>
                               <p:par>
-                                <p:cTn id="33" presetID="10" presetClass="entr" presetSubtype="0" fill="hold" grpId="0" nodeType="clickEffect">
+                                <p:cTn id="30" presetID="10" presetClass="entr" presetSubtype="0" fill="hold" grpId="0" nodeType="clickEffect">
                                   <p:stCondLst>
                                     <p:cond delay="0"/>
                                   </p:stCondLst>
                                   <p:childTnLst>
                                     <p:set>
                                       <p:cBhvr>
-                                        <p:cTn id="34" dur="1" fill="hold">
+                                        <p:cTn id="31" dur="1" fill="hold">
                                           <p:stCondLst>
                                             <p:cond delay="0"/>
                                           </p:stCondLst>
@@ -16766,29 +16500,13 @@
                                     </p:set>
                                     <p:animEffect transition="in" filter="fade">
                                       <p:cBhvr>
-                                        <p:cTn id="35" dur="500"/>
+                                        <p:cTn id="32" dur="500"/>
                                         <p:tgtEl>
                                           <p:spTgt spid="12"/>
                                         </p:tgtEl>
                                       </p:cBhvr>
                                     </p:animEffect>
                                   </p:childTnLst>
-                                  <p:subTnLst>
-                                    <p:audio>
-                                      <p:cMediaNode vol="80000" showWhenStopped="0">
-                                        <p:cTn id="36" display="0" masterRel="sameClick">
-                                          <p:stCondLst>
-                                            <p:cond evt="onBegin" delay="0">
-                                              <p:tn val="33"/>
-                                            </p:cond>
-                                          </p:stCondLst>
-                                        </p:cTn>
-                                        <p:tgtEl>
-                                          <p:sndTgt r:embed="rId6" name="pop.wav"/>
-                                        </p:tgtEl>
-                                      </p:cMediaNode>
-                                    </p:audio>
-                                  </p:subTnLst>
                                 </p:cTn>
                               </p:par>
                             </p:childTnLst>
@@ -17504,7 +17222,7 @@
                                   </p:childTnLst>
                                   <p:subTnLst>
                                     <p:audio>
-                                      <p:cMediaNode vol="80000" showWhenStopped="0">
+                                      <p:cMediaNode vol="50000" showWhenStopped="0">
                                         <p:cTn id="9" display="0" masterRel="sameClick">
                                           <p:stCondLst>
                                             <p:cond evt="onBegin" delay="0">
@@ -17610,7 +17328,7 @@
                                   </p:childTnLst>
                                   <p:subTnLst>
                                     <p:audio>
-                                      <p:cMediaNode vol="80000" showWhenStopped="0">
+                                      <p:cMediaNode vol="50000" showWhenStopped="0">
                                         <p:cTn id="16" display="0" masterRel="sameClick">
                                           <p:stCondLst>
                                             <p:cond evt="onBegin" delay="0">
@@ -18043,22 +17761,6 @@
                                       </p:cBhvr>
                                     </p:animEffect>
                                   </p:childTnLst>
-                                  <p:subTnLst>
-                                    <p:audio>
-                                      <p:cMediaNode vol="80000" showWhenStopped="0">
-                                        <p:cTn id="52" display="0" masterRel="sameClick">
-                                          <p:stCondLst>
-                                            <p:cond evt="onBegin" delay="0">
-                                              <p:tn val="47"/>
-                                            </p:cond>
-                                          </p:stCondLst>
-                                        </p:cTn>
-                                        <p:tgtEl>
-                                          <p:sndTgt r:embed="rId11" name="sparkle.wav"/>
-                                        </p:tgtEl>
-                                      </p:cMediaNode>
-                                    </p:audio>
-                                  </p:subTnLst>
                                 </p:cTn>
                               </p:par>
                             </p:childTnLst>
@@ -18068,26 +17770,26 @@
                     </p:cTn>
                   </p:par>
                   <p:par>
-                    <p:cTn id="53" fill="hold">
+                    <p:cTn id="52" fill="hold">
                       <p:stCondLst>
                         <p:cond delay="indefinite"/>
                       </p:stCondLst>
                       <p:childTnLst>
                         <p:par>
-                          <p:cTn id="54" fill="hold">
+                          <p:cTn id="53" fill="hold">
                             <p:stCondLst>
                               <p:cond delay="0"/>
                             </p:stCondLst>
                             <p:childTnLst>
                               <p:par>
-                                <p:cTn id="55" presetID="10" presetClass="entr" presetSubtype="0" fill="hold" grpId="0" nodeType="clickEffect">
+                                <p:cTn id="54" presetID="10" presetClass="entr" presetSubtype="0" fill="hold" grpId="0" nodeType="clickEffect">
                                   <p:stCondLst>
                                     <p:cond delay="0"/>
                                   </p:stCondLst>
                                   <p:childTnLst>
                                     <p:set>
                                       <p:cBhvr>
-                                        <p:cTn id="56" dur="1" fill="hold">
+                                        <p:cTn id="55" dur="1" fill="hold">
                                           <p:stCondLst>
                                             <p:cond delay="0"/>
                                           </p:stCondLst>
@@ -18105,7 +17807,7 @@
                                     </p:set>
                                     <p:animEffect transition="in" filter="fade">
                                       <p:cBhvr>
-                                        <p:cTn id="57" dur="500"/>
+                                        <p:cTn id="56" dur="500"/>
                                         <p:tgtEl>
                                           <p:spTgt spid="13"/>
                                         </p:tgtEl>
@@ -18114,11 +17816,11 @@
                                   </p:childTnLst>
                                   <p:subTnLst>
                                     <p:audio>
-                                      <p:cMediaNode vol="80000" showWhenStopped="0">
-                                        <p:cTn id="58" display="0" masterRel="sameClick">
+                                      <p:cMediaNode vol="50000" showWhenStopped="0">
+                                        <p:cTn id="57" display="0" masterRel="sameClick">
                                           <p:stCondLst>
                                             <p:cond evt="onBegin" delay="0">
-                                              <p:tn val="55"/>
+                                              <p:tn val="54"/>
                                             </p:cond>
                                           </p:stCondLst>
                                         </p:cTn>
@@ -19163,7 +18865,7 @@
                                   </p:childTnLst>
                                   <p:subTnLst>
                                     <p:audio>
-                                      <p:cMediaNode vol="80000" showWhenStopped="0">
+                                      <p:cMediaNode vol="50000" showWhenStopped="0">
                                         <p:cTn id="8" display="0" masterRel="sameClick">
                                           <p:stCondLst>
                                             <p:cond evt="onBegin" delay="0">
@@ -19290,7 +18992,7 @@
                                   </p:childTnLst>
                                   <p:subTnLst>
                                     <p:audio>
-                                      <p:cMediaNode vol="80000" showWhenStopped="0">
+                                      <p:cMediaNode vol="50000" showWhenStopped="0">
                                         <p:cTn id="18" display="0" masterRel="sameClick">
                                           <p:stCondLst>
                                             <p:cond evt="onBegin" delay="0">
@@ -19417,7 +19119,7 @@
                                   </p:childTnLst>
                                   <p:subTnLst>
                                     <p:audio>
-                                      <p:cMediaNode vol="80000" showWhenStopped="0">
+                                      <p:cMediaNode vol="50000" showWhenStopped="0">
                                         <p:cTn id="28" display="0" masterRel="sameClick">
                                           <p:stCondLst>
                                             <p:cond evt="onBegin" delay="0">
@@ -19544,7 +19246,7 @@
                                   </p:childTnLst>
                                   <p:subTnLst>
                                     <p:audio>
-                                      <p:cMediaNode vol="80000" showWhenStopped="0">
+                                      <p:cMediaNode vol="50000" showWhenStopped="0">
                                         <p:cTn id="38" display="0" masterRel="sameClick">
                                           <p:stCondLst>
                                             <p:cond evt="onBegin" delay="0">
@@ -20903,7 +20605,7 @@
                                   </p:childTnLst>
                                   <p:subTnLst>
                                     <p:audio>
-                                      <p:cMediaNode vol="80000" showWhenStopped="0">
+                                      <p:cMediaNode vol="50000" showWhenStopped="0">
                                         <p:cTn id="19" display="0" masterRel="sameClick">
                                           <p:stCondLst>
                                             <p:cond evt="onBegin" delay="0">
@@ -21016,33 +20718,17 @@
                                       </p:cBhvr>
                                     </p:animEffect>
                                   </p:childTnLst>
-                                  <p:subTnLst>
-                                    <p:audio>
-                                      <p:cMediaNode vol="80000" showWhenStopped="0">
-                                        <p:cTn id="27" display="0" masterRel="sameClick">
-                                          <p:stCondLst>
-                                            <p:cond evt="onBegin" delay="0">
-                                              <p:tn val="22"/>
-                                            </p:cond>
-                                          </p:stCondLst>
-                                        </p:cTn>
-                                        <p:tgtEl>
-                                          <p:sndTgt r:embed="rId21" name="sparkle.wav"/>
-                                        </p:tgtEl>
-                                      </p:cMediaNode>
-                                    </p:audio>
-                                  </p:subTnLst>
                                 </p:cTn>
                               </p:par>
                               <p:par>
-                                <p:cTn id="28" presetID="0" presetClass="path" presetSubtype="0" fill="hold" grpId="1" nodeType="withEffect">
+                                <p:cTn id="27" presetID="0" presetClass="path" presetSubtype="0" fill="hold" grpId="1" nodeType="withEffect">
                                   <p:stCondLst>
                                     <p:cond delay="350"/>
                                   </p:stCondLst>
                                   <p:childTnLst>
                                     <p:animMotion origin="layout" path="M 0 0 L -0.0578 0.3760 E" pathEditMode="relative" ptsTypes="">
                                       <p:cBhvr>
-                                        <p:cTn id="29" dur="1500" fill="hold" accel="40000" decel="40000"/>
+                                        <p:cTn id="28" dur="1500" fill="hold" accel="40000" decel="40000"/>
                                         <p:tgtEl>
                                           <p:spTgt spid="16"/>
                                         </p:tgtEl>
@@ -21057,14 +20743,14 @@
                                 </p:cTn>
                               </p:par>
                               <p:par>
-                                <p:cTn id="30" presetID="6" presetClass="emph" presetSubtype="0" fill="hold" grpId="0" nodeType="withEffect">
+                                <p:cTn id="29" presetID="6" presetClass="emph" presetSubtype="0" fill="hold" grpId="0" nodeType="withEffect">
                                   <p:stCondLst>
                                     <p:cond delay="1850"/>
                                   </p:stCondLst>
                                   <p:childTnLst>
                                     <p:animScale>
                                       <p:cBhvr>
-                                        <p:cTn id="31" dur="400" autoRev="1" fill="hold"/>
+                                        <p:cTn id="30" dur="400" autoRev="1" fill="hold"/>
                                         <p:tgtEl>
                                           <p:spTgt spid="5"/>
                                         </p:tgtEl>
@@ -21072,33 +20758,17 @@
                                       <p:by x="118000" y="118000"/>
                                     </p:animScale>
                                   </p:childTnLst>
-                                  <p:subTnLst>
-                                    <p:audio>
-                                      <p:cMediaNode vol="80000" showWhenStopped="0">
-                                        <p:cTn id="32" display="0" masterRel="sameClick">
-                                          <p:stCondLst>
-                                            <p:cond evt="onBegin" delay="0">
-                                              <p:tn val="30"/>
-                                            </p:cond>
-                                          </p:stCondLst>
-                                        </p:cTn>
-                                        <p:tgtEl>
-                                          <p:sndTgt r:embed="rId22" name="pop.wav"/>
-                                        </p:tgtEl>
-                                      </p:cMediaNode>
-                                    </p:audio>
-                                  </p:subTnLst>
                                 </p:cTn>
                               </p:par>
                               <p:par>
-                                <p:cTn id="33" presetID="10" presetClass="exit" presetSubtype="0" fill="hold" grpId="2" nodeType="withEffect">
+                                <p:cTn id="31" presetID="10" presetClass="exit" presetSubtype="0" fill="hold" grpId="2" nodeType="withEffect">
                                   <p:stCondLst>
                                     <p:cond delay="2350"/>
                                   </p:stCondLst>
                                   <p:childTnLst>
                                     <p:animEffect transition="out" filter="fade">
                                       <p:cBhvr>
-                                        <p:cTn id="34" dur="400"/>
+                                        <p:cTn id="32" dur="400"/>
                                         <p:tgtEl>
                                           <p:spTgt spid="16"/>
                                         </p:tgtEl>
@@ -21106,7 +20776,7 @@
                                     </p:animEffect>
                                     <p:set>
                                       <p:cBhvr>
-                                        <p:cTn id="35" dur="1" fill="hold">
+                                        <p:cTn id="33" dur="1" fill="hold">
                                           <p:stCondLst>
                                             <p:cond delay="399"/>
                                           </p:stCondLst>
@@ -21126,14 +20796,14 @@
                                 </p:cTn>
                               </p:par>
                               <p:par>
-                                <p:cTn id="36" presetID="10" presetClass="entr" presetSubtype="0" fill="hold" grpId="0" nodeType="withEffect">
+                                <p:cTn id="34" presetID="10" presetClass="entr" presetSubtype="0" fill="hold" grpId="0" nodeType="withEffect">
                                   <p:stCondLst>
                                     <p:cond delay="1850"/>
                                   </p:stCondLst>
                                   <p:childTnLst>
                                     <p:set>
                                       <p:cBhvr>
-                                        <p:cTn id="37" dur="1" fill="hold">
+                                        <p:cTn id="35" dur="1" fill="hold">
                                           <p:stCondLst>
                                             <p:cond delay="0"/>
                                           </p:stCondLst>
@@ -21151,7 +20821,7 @@
                                     </p:set>
                                     <p:animEffect transition="in" filter="fade">
                                       <p:cBhvr>
-                                        <p:cTn id="38" dur="400"/>
+                                        <p:cTn id="36" dur="400"/>
                                         <p:tgtEl>
                                           <p:spTgt spid="17"/>
                                         </p:tgtEl>
@@ -21167,26 +20837,26 @@
                     </p:cTn>
                   </p:par>
                   <p:par>
-                    <p:cTn id="39" fill="hold">
+                    <p:cTn id="37" fill="hold">
                       <p:stCondLst>
                         <p:cond delay="indefinite"/>
                       </p:stCondLst>
                       <p:childTnLst>
                         <p:par>
-                          <p:cTn id="40" fill="hold">
+                          <p:cTn id="38" fill="hold">
                             <p:stCondLst>
                               <p:cond delay="0"/>
                             </p:stCondLst>
                             <p:childTnLst>
                               <p:par>
-                                <p:cTn id="41" presetID="53" presetClass="entr" presetSubtype="16" fill="hold" grpId="0" nodeType="clickEffect">
+                                <p:cTn id="39" presetID="53" presetClass="entr" presetSubtype="16" fill="hold" grpId="0" nodeType="clickEffect">
                                   <p:stCondLst>
                                     <p:cond delay="0"/>
                                   </p:stCondLst>
                                   <p:childTnLst>
                                     <p:set>
                                       <p:cBhvr>
-                                        <p:cTn id="42" dur="1" fill="hold">
+                                        <p:cTn id="40" dur="1" fill="hold">
                                           <p:stCondLst>
                                             <p:cond delay="0"/>
                                           </p:stCondLst>
@@ -21204,7 +20874,7 @@
                                     </p:set>
                                     <p:anim calcmode="lin" valueType="num">
                                       <p:cBhvr additive="base">
-                                        <p:cTn id="43" dur="350" fill="hold"/>
+                                        <p:cTn id="41" dur="350" fill="hold"/>
                                         <p:tgtEl>
                                           <p:spTgt spid="18"/>
                                         </p:tgtEl>
@@ -21227,7 +20897,7 @@
                                     </p:anim>
                                     <p:anim calcmode="lin" valueType="num">
                                       <p:cBhvr additive="base">
-                                        <p:cTn id="44" dur="350" fill="hold"/>
+                                        <p:cTn id="42" dur="350" fill="hold"/>
                                         <p:tgtEl>
                                           <p:spTgt spid="18"/>
                                         </p:tgtEl>
@@ -21250,40 +20920,24 @@
                                     </p:anim>
                                     <p:animEffect transition="in" filter="fade">
                                       <p:cBhvr>
-                                        <p:cTn id="45" dur="350"/>
+                                        <p:cTn id="43" dur="350"/>
                                         <p:tgtEl>
                                           <p:spTgt spid="18"/>
                                         </p:tgtEl>
                                       </p:cBhvr>
                                     </p:animEffect>
                                   </p:childTnLst>
-                                  <p:subTnLst>
-                                    <p:audio>
-                                      <p:cMediaNode vol="80000" showWhenStopped="0">
-                                        <p:cTn id="46" display="0" masterRel="sameClick">
-                                          <p:stCondLst>
-                                            <p:cond evt="onBegin" delay="0">
-                                              <p:tn val="41"/>
-                                            </p:cond>
-                                          </p:stCondLst>
-                                        </p:cTn>
-                                        <p:tgtEl>
-                                          <p:sndTgt r:embed="rId21" name="sparkle.wav"/>
-                                        </p:tgtEl>
-                                      </p:cMediaNode>
-                                    </p:audio>
-                                  </p:subTnLst>
                                 </p:cTn>
                               </p:par>
                               <p:par>
-                                <p:cTn id="47" presetID="0" presetClass="path" presetSubtype="0" fill="hold" grpId="1" nodeType="withEffect">
+                                <p:cTn id="44" presetID="0" presetClass="path" presetSubtype="0" fill="hold" grpId="1" nodeType="withEffect">
                                   <p:stCondLst>
                                     <p:cond delay="350"/>
                                   </p:stCondLst>
                                   <p:childTnLst>
                                     <p:animMotion origin="layout" path="M 0 0 L -0.2138 -0.1533 E" pathEditMode="relative" ptsTypes="">
                                       <p:cBhvr>
-                                        <p:cTn id="48" dur="1500" fill="hold" accel="40000" decel="40000"/>
+                                        <p:cTn id="45" dur="1500" fill="hold" accel="40000" decel="40000"/>
                                         <p:tgtEl>
                                           <p:spTgt spid="18"/>
                                         </p:tgtEl>
@@ -21298,14 +20952,14 @@
                                 </p:cTn>
                               </p:par>
                               <p:par>
-                                <p:cTn id="49" presetID="22" presetClass="entr" presetSubtype="2" fill="hold" grpId="0" nodeType="withEffect">
+                                <p:cTn id="46" presetID="22" presetClass="entr" presetSubtype="2" fill="hold" grpId="0" nodeType="withEffect">
                                   <p:stCondLst>
                                     <p:cond delay="400"/>
                                   </p:stCondLst>
                                   <p:childTnLst>
                                     <p:set>
                                       <p:cBhvr>
-                                        <p:cTn id="50" dur="1" fill="hold">
+                                        <p:cTn id="47" dur="1" fill="hold">
                                           <p:stCondLst>
                                             <p:cond delay="0"/>
                                           </p:stCondLst>
@@ -21323,7 +20977,7 @@
                                     </p:set>
                                     <p:animEffect transition="in" filter="wipe(right)">
                                       <p:cBhvr>
-                                        <p:cTn id="51" dur="900"/>
+                                        <p:cTn id="48" dur="900"/>
                                         <p:tgtEl>
                                           <p:spTgt spid="13"/>
                                         </p:tgtEl>
@@ -21333,14 +20987,14 @@
                                 </p:cTn>
                               </p:par>
                               <p:par>
-                                <p:cTn id="52" presetID="6" presetClass="emph" presetSubtype="0" fill="hold" grpId="0" nodeType="withEffect">
+                                <p:cTn id="49" presetID="6" presetClass="emph" presetSubtype="0" fill="hold" grpId="0" nodeType="withEffect">
                                   <p:stCondLst>
                                     <p:cond delay="1850"/>
                                   </p:stCondLst>
                                   <p:childTnLst>
                                     <p:animScale>
                                       <p:cBhvr>
-                                        <p:cTn id="53" dur="400" autoRev="1" fill="hold"/>
+                                        <p:cTn id="50" dur="400" autoRev="1" fill="hold"/>
                                         <p:tgtEl>
                                           <p:spTgt spid="7"/>
                                         </p:tgtEl>
@@ -21348,33 +21002,17 @@
                                       <p:by x="118000" y="118000"/>
                                     </p:animScale>
                                   </p:childTnLst>
-                                  <p:subTnLst>
-                                    <p:audio>
-                                      <p:cMediaNode vol="80000" showWhenStopped="0">
-                                        <p:cTn id="54" display="0" masterRel="sameClick">
-                                          <p:stCondLst>
-                                            <p:cond evt="onBegin" delay="0">
-                                              <p:tn val="52"/>
-                                            </p:cond>
-                                          </p:stCondLst>
-                                        </p:cTn>
-                                        <p:tgtEl>
-                                          <p:sndTgt r:embed="rId22" name="pop.wav"/>
-                                        </p:tgtEl>
-                                      </p:cMediaNode>
-                                    </p:audio>
-                                  </p:subTnLst>
                                 </p:cTn>
                               </p:par>
                               <p:par>
-                                <p:cTn id="55" presetID="10" presetClass="exit" presetSubtype="0" fill="hold" grpId="2" nodeType="withEffect">
+                                <p:cTn id="51" presetID="10" presetClass="exit" presetSubtype="0" fill="hold" grpId="2" nodeType="withEffect">
                                   <p:stCondLst>
                                     <p:cond delay="2350"/>
                                   </p:stCondLst>
                                   <p:childTnLst>
                                     <p:animEffect transition="out" filter="fade">
                                       <p:cBhvr>
-                                        <p:cTn id="56" dur="400"/>
+                                        <p:cTn id="52" dur="400"/>
                                         <p:tgtEl>
                                           <p:spTgt spid="18"/>
                                         </p:tgtEl>
@@ -21382,7 +21020,7 @@
                                     </p:animEffect>
                                     <p:set>
                                       <p:cBhvr>
-                                        <p:cTn id="57" dur="1" fill="hold">
+                                        <p:cTn id="53" dur="1" fill="hold">
                                           <p:stCondLst>
                                             <p:cond delay="399"/>
                                           </p:stCondLst>
@@ -21402,14 +21040,14 @@
                                 </p:cTn>
                               </p:par>
                               <p:par>
-                                <p:cTn id="58" presetID="10" presetClass="entr" presetSubtype="0" fill="hold" grpId="0" nodeType="withEffect">
+                                <p:cTn id="54" presetID="10" presetClass="entr" presetSubtype="0" fill="hold" grpId="0" nodeType="withEffect">
                                   <p:stCondLst>
                                     <p:cond delay="1850"/>
                                   </p:stCondLst>
                                   <p:childTnLst>
                                     <p:set>
                                       <p:cBhvr>
-                                        <p:cTn id="59" dur="1" fill="hold">
+                                        <p:cTn id="55" dur="1" fill="hold">
                                           <p:stCondLst>
                                             <p:cond delay="0"/>
                                           </p:stCondLst>
@@ -21427,7 +21065,7 @@
                                     </p:set>
                                     <p:animEffect transition="in" filter="fade">
                                       <p:cBhvr>
-                                        <p:cTn id="60" dur="400"/>
+                                        <p:cTn id="56" dur="400"/>
                                         <p:tgtEl>
                                           <p:spTgt spid="19"/>
                                         </p:tgtEl>
@@ -21443,26 +21081,26 @@
                     </p:cTn>
                   </p:par>
                   <p:par>
-                    <p:cTn id="61" fill="hold">
+                    <p:cTn id="57" fill="hold">
                       <p:stCondLst>
                         <p:cond delay="indefinite"/>
                       </p:stCondLst>
                       <p:childTnLst>
                         <p:par>
-                          <p:cTn id="62" fill="hold">
+                          <p:cTn id="58" fill="hold">
                             <p:stCondLst>
                               <p:cond delay="0"/>
                             </p:stCondLst>
                             <p:childTnLst>
                               <p:par>
-                                <p:cTn id="63" presetID="53" presetClass="entr" presetSubtype="16" fill="hold" grpId="0" nodeType="clickEffect">
+                                <p:cTn id="59" presetID="53" presetClass="entr" presetSubtype="16" fill="hold" grpId="0" nodeType="clickEffect">
                                   <p:stCondLst>
                                     <p:cond delay="0"/>
                                   </p:stCondLst>
                                   <p:childTnLst>
                                     <p:set>
                                       <p:cBhvr>
-                                        <p:cTn id="64" dur="1" fill="hold">
+                                        <p:cTn id="60" dur="1" fill="hold">
                                           <p:stCondLst>
                                             <p:cond delay="0"/>
                                           </p:stCondLst>
@@ -21480,7 +21118,7 @@
                                     </p:set>
                                     <p:anim calcmode="lin" valueType="num">
                                       <p:cBhvr additive="base">
-                                        <p:cTn id="65" dur="350" fill="hold"/>
+                                        <p:cTn id="61" dur="350" fill="hold"/>
                                         <p:tgtEl>
                                           <p:spTgt spid="20"/>
                                         </p:tgtEl>
@@ -21503,7 +21141,7 @@
                                     </p:anim>
                                     <p:anim calcmode="lin" valueType="num">
                                       <p:cBhvr additive="base">
-                                        <p:cTn id="66" dur="350" fill="hold"/>
+                                        <p:cTn id="62" dur="350" fill="hold"/>
                                         <p:tgtEl>
                                           <p:spTgt spid="20"/>
                                         </p:tgtEl>
@@ -21526,40 +21164,24 @@
                                     </p:anim>
                                     <p:animEffect transition="in" filter="fade">
                                       <p:cBhvr>
-                                        <p:cTn id="67" dur="350"/>
+                                        <p:cTn id="63" dur="350"/>
                                         <p:tgtEl>
                                           <p:spTgt spid="20"/>
                                         </p:tgtEl>
                                       </p:cBhvr>
                                     </p:animEffect>
                                   </p:childTnLst>
-                                  <p:subTnLst>
-                                    <p:audio>
-                                      <p:cMediaNode vol="80000" showWhenStopped="0">
-                                        <p:cTn id="68" display="0" masterRel="sameClick">
-                                          <p:stCondLst>
-                                            <p:cond evt="onBegin" delay="0">
-                                              <p:tn val="63"/>
-                                            </p:cond>
-                                          </p:stCondLst>
-                                        </p:cTn>
-                                        <p:tgtEl>
-                                          <p:sndTgt r:embed="rId21" name="sparkle.wav"/>
-                                        </p:tgtEl>
-                                      </p:cMediaNode>
-                                    </p:audio>
-                                  </p:subTnLst>
                                 </p:cTn>
                               </p:par>
                               <p:par>
-                                <p:cTn id="69" presetID="0" presetClass="path" presetSubtype="0" fill="hold" grpId="1" nodeType="withEffect">
+                                <p:cTn id="64" presetID="0" presetClass="path" presetSubtype="0" fill="hold" grpId="1" nodeType="withEffect">
                                   <p:stCondLst>
                                     <p:cond delay="350"/>
                                   </p:stCondLst>
                                   <p:childTnLst>
                                     <p:animMotion origin="layout" path="M 0 0 L -0.2100 0.1333 E" pathEditMode="relative" ptsTypes="">
                                       <p:cBhvr>
-                                        <p:cTn id="70" dur="1500" fill="hold" accel="40000" decel="40000"/>
+                                        <p:cTn id="65" dur="1500" fill="hold" accel="40000" decel="40000"/>
                                         <p:tgtEl>
                                           <p:spTgt spid="20"/>
                                         </p:tgtEl>
@@ -21574,14 +21196,14 @@
                                 </p:cTn>
                               </p:par>
                               <p:par>
-                                <p:cTn id="71" presetID="22" presetClass="entr" presetSubtype="2" fill="hold" grpId="0" nodeType="withEffect">
+                                <p:cTn id="66" presetID="22" presetClass="entr" presetSubtype="2" fill="hold" grpId="0" nodeType="withEffect">
                                   <p:stCondLst>
                                     <p:cond delay="400"/>
                                   </p:stCondLst>
                                   <p:childTnLst>
                                     <p:set>
                                       <p:cBhvr>
-                                        <p:cTn id="72" dur="1" fill="hold">
+                                        <p:cTn id="67" dur="1" fill="hold">
                                           <p:stCondLst>
                                             <p:cond delay="0"/>
                                           </p:stCondLst>
@@ -21599,7 +21221,7 @@
                                     </p:set>
                                     <p:animEffect transition="in" filter="wipe(right)">
                                       <p:cBhvr>
-                                        <p:cTn id="73" dur="900"/>
+                                        <p:cTn id="68" dur="900"/>
                                         <p:tgtEl>
                                           <p:spTgt spid="14"/>
                                         </p:tgtEl>
@@ -21609,14 +21231,14 @@
                                 </p:cTn>
                               </p:par>
                               <p:par>
-                                <p:cTn id="74" presetID="6" presetClass="emph" presetSubtype="0" fill="hold" grpId="0" nodeType="withEffect">
+                                <p:cTn id="69" presetID="6" presetClass="emph" presetSubtype="0" fill="hold" grpId="0" nodeType="withEffect">
                                   <p:stCondLst>
                                     <p:cond delay="1850"/>
                                   </p:stCondLst>
                                   <p:childTnLst>
                                     <p:animScale>
                                       <p:cBhvr>
-                                        <p:cTn id="75" dur="400" autoRev="1" fill="hold"/>
+                                        <p:cTn id="70" dur="400" autoRev="1" fill="hold"/>
                                         <p:tgtEl>
                                           <p:spTgt spid="9"/>
                                         </p:tgtEl>
@@ -21624,33 +21246,17 @@
                                       <p:by x="118000" y="118000"/>
                                     </p:animScale>
                                   </p:childTnLst>
-                                  <p:subTnLst>
-                                    <p:audio>
-                                      <p:cMediaNode vol="80000" showWhenStopped="0">
-                                        <p:cTn id="76" display="0" masterRel="sameClick">
-                                          <p:stCondLst>
-                                            <p:cond evt="onBegin" delay="0">
-                                              <p:tn val="74"/>
-                                            </p:cond>
-                                          </p:stCondLst>
-                                        </p:cTn>
-                                        <p:tgtEl>
-                                          <p:sndTgt r:embed="rId22" name="pop.wav"/>
-                                        </p:tgtEl>
-                                      </p:cMediaNode>
-                                    </p:audio>
-                                  </p:subTnLst>
                                 </p:cTn>
                               </p:par>
                               <p:par>
-                                <p:cTn id="77" presetID="10" presetClass="exit" presetSubtype="0" fill="hold" grpId="2" nodeType="withEffect">
+                                <p:cTn id="71" presetID="10" presetClass="exit" presetSubtype="0" fill="hold" grpId="2" nodeType="withEffect">
                                   <p:stCondLst>
                                     <p:cond delay="2350"/>
                                   </p:stCondLst>
                                   <p:childTnLst>
                                     <p:animEffect transition="out" filter="fade">
                                       <p:cBhvr>
-                                        <p:cTn id="78" dur="400"/>
+                                        <p:cTn id="72" dur="400"/>
                                         <p:tgtEl>
                                           <p:spTgt spid="20"/>
                                         </p:tgtEl>
@@ -21658,7 +21264,7 @@
                                     </p:animEffect>
                                     <p:set>
                                       <p:cBhvr>
-                                        <p:cTn id="79" dur="1" fill="hold">
+                                        <p:cTn id="73" dur="1" fill="hold">
                                           <p:stCondLst>
                                             <p:cond delay="399"/>
                                           </p:stCondLst>
@@ -21678,14 +21284,14 @@
                                 </p:cTn>
                               </p:par>
                               <p:par>
-                                <p:cTn id="80" presetID="10" presetClass="entr" presetSubtype="0" fill="hold" grpId="0" nodeType="withEffect">
+                                <p:cTn id="74" presetID="10" presetClass="entr" presetSubtype="0" fill="hold" grpId="0" nodeType="withEffect">
                                   <p:stCondLst>
                                     <p:cond delay="1850"/>
                                   </p:stCondLst>
                                   <p:childTnLst>
                                     <p:set>
                                       <p:cBhvr>
-                                        <p:cTn id="81" dur="1" fill="hold">
+                                        <p:cTn id="75" dur="1" fill="hold">
                                           <p:stCondLst>
                                             <p:cond delay="0"/>
                                           </p:stCondLst>
@@ -21703,7 +21309,7 @@
                                     </p:set>
                                     <p:animEffect transition="in" filter="fade">
                                       <p:cBhvr>
-                                        <p:cTn id="82" dur="400"/>
+                                        <p:cTn id="76" dur="400"/>
                                         <p:tgtEl>
                                           <p:spTgt spid="21"/>
                                         </p:tgtEl>
@@ -21719,26 +21325,26 @@
                     </p:cTn>
                   </p:par>
                   <p:par>
-                    <p:cTn id="83" fill="hold">
+                    <p:cTn id="77" fill="hold">
                       <p:stCondLst>
                         <p:cond delay="indefinite"/>
                       </p:stCondLst>
                       <p:childTnLst>
                         <p:par>
-                          <p:cTn id="84" fill="hold">
+                          <p:cTn id="78" fill="hold">
                             <p:stCondLst>
                               <p:cond delay="0"/>
                             </p:stCondLst>
                             <p:childTnLst>
                               <p:par>
-                                <p:cTn id="85" presetID="53" presetClass="entr" presetSubtype="16" fill="hold" grpId="0" nodeType="clickEffect">
+                                <p:cTn id="79" presetID="53" presetClass="entr" presetSubtype="16" fill="hold" grpId="0" nodeType="clickEffect">
                                   <p:stCondLst>
                                     <p:cond delay="0"/>
                                   </p:stCondLst>
                                   <p:childTnLst>
                                     <p:set>
                                       <p:cBhvr>
-                                        <p:cTn id="86" dur="1" fill="hold">
+                                        <p:cTn id="80" dur="1" fill="hold">
                                           <p:stCondLst>
                                             <p:cond delay="0"/>
                                           </p:stCondLst>
@@ -21756,7 +21362,7 @@
                                     </p:set>
                                     <p:anim calcmode="lin" valueType="num">
                                       <p:cBhvr additive="base">
-                                        <p:cTn id="87" dur="350" fill="hold"/>
+                                        <p:cTn id="81" dur="350" fill="hold"/>
                                         <p:tgtEl>
                                           <p:spTgt spid="22"/>
                                         </p:tgtEl>
@@ -21779,7 +21385,7 @@
                                     </p:anim>
                                     <p:anim calcmode="lin" valueType="num">
                                       <p:cBhvr additive="base">
-                                        <p:cTn id="88" dur="350" fill="hold"/>
+                                        <p:cTn id="82" dur="350" fill="hold"/>
                                         <p:tgtEl>
                                           <p:spTgt spid="22"/>
                                         </p:tgtEl>
@@ -21802,40 +21408,24 @@
                                     </p:anim>
                                     <p:animEffect transition="in" filter="fade">
                                       <p:cBhvr>
-                                        <p:cTn id="89" dur="350"/>
+                                        <p:cTn id="83" dur="350"/>
                                         <p:tgtEl>
                                           <p:spTgt spid="22"/>
                                         </p:tgtEl>
                                       </p:cBhvr>
                                     </p:animEffect>
                                   </p:childTnLst>
-                                  <p:subTnLst>
-                                    <p:audio>
-                                      <p:cMediaNode vol="80000" showWhenStopped="0">
-                                        <p:cTn id="90" display="0" masterRel="sameClick">
-                                          <p:stCondLst>
-                                            <p:cond evt="onBegin" delay="0">
-                                              <p:tn val="85"/>
-                                            </p:cond>
-                                          </p:stCondLst>
-                                        </p:cTn>
-                                        <p:tgtEl>
-                                          <p:sndTgt r:embed="rId21" name="sparkle.wav"/>
-                                        </p:tgtEl>
-                                      </p:cMediaNode>
-                                    </p:audio>
-                                  </p:subTnLst>
                                 </p:cTn>
                               </p:par>
                               <p:par>
-                                <p:cTn id="91" presetID="0" presetClass="path" presetSubtype="0" fill="hold" grpId="1" nodeType="withEffect">
+                                <p:cTn id="84" presetID="0" presetClass="path" presetSubtype="0" fill="hold" grpId="1" nodeType="withEffect">
                                   <p:stCondLst>
                                     <p:cond delay="350"/>
                                   </p:stCondLst>
                                   <p:childTnLst>
                                     <p:animMotion origin="layout" path="M 0 0 L -0.2063 -0.3733 E" pathEditMode="relative" ptsTypes="">
                                       <p:cBhvr>
-                                        <p:cTn id="92" dur="1500" fill="hold" accel="40000" decel="40000"/>
+                                        <p:cTn id="85" dur="1500" fill="hold" accel="40000" decel="40000"/>
                                         <p:tgtEl>
                                           <p:spTgt spid="22"/>
                                         </p:tgtEl>
@@ -21850,14 +21440,14 @@
                                 </p:cTn>
                               </p:par>
                               <p:par>
-                                <p:cTn id="93" presetID="22" presetClass="entr" presetSubtype="2" fill="hold" grpId="0" nodeType="withEffect">
+                                <p:cTn id="86" presetID="22" presetClass="entr" presetSubtype="2" fill="hold" grpId="0" nodeType="withEffect">
                                   <p:stCondLst>
                                     <p:cond delay="400"/>
                                   </p:stCondLst>
                                   <p:childTnLst>
                                     <p:set>
                                       <p:cBhvr>
-                                        <p:cTn id="94" dur="1" fill="hold">
+                                        <p:cTn id="87" dur="1" fill="hold">
                                           <p:stCondLst>
                                             <p:cond delay="0"/>
                                           </p:stCondLst>
@@ -21875,7 +21465,7 @@
                                     </p:set>
                                     <p:animEffect transition="in" filter="wipe(right)">
                                       <p:cBhvr>
-                                        <p:cTn id="95" dur="900"/>
+                                        <p:cTn id="88" dur="900"/>
                                         <p:tgtEl>
                                           <p:spTgt spid="15"/>
                                         </p:tgtEl>
@@ -21885,14 +21475,14 @@
                                 </p:cTn>
                               </p:par>
                               <p:par>
-                                <p:cTn id="96" presetID="6" presetClass="emph" presetSubtype="0" fill="hold" grpId="0" nodeType="withEffect">
+                                <p:cTn id="89" presetID="6" presetClass="emph" presetSubtype="0" fill="hold" grpId="0" nodeType="withEffect">
                                   <p:stCondLst>
                                     <p:cond delay="1850"/>
                                   </p:stCondLst>
                                   <p:childTnLst>
                                     <p:animScale>
                                       <p:cBhvr>
-                                        <p:cTn id="97" dur="400" autoRev="1" fill="hold"/>
+                                        <p:cTn id="90" dur="400" autoRev="1" fill="hold"/>
                                         <p:tgtEl>
                                           <p:spTgt spid="11"/>
                                         </p:tgtEl>
@@ -21900,33 +21490,17 @@
                                       <p:by x="118000" y="118000"/>
                                     </p:animScale>
                                   </p:childTnLst>
-                                  <p:subTnLst>
-                                    <p:audio>
-                                      <p:cMediaNode vol="80000" showWhenStopped="0">
-                                        <p:cTn id="98" display="0" masterRel="sameClick">
-                                          <p:stCondLst>
-                                            <p:cond evt="onBegin" delay="0">
-                                              <p:tn val="96"/>
-                                            </p:cond>
-                                          </p:stCondLst>
-                                        </p:cTn>
-                                        <p:tgtEl>
-                                          <p:sndTgt r:embed="rId22" name="pop.wav"/>
-                                        </p:tgtEl>
-                                      </p:cMediaNode>
-                                    </p:audio>
-                                  </p:subTnLst>
                                 </p:cTn>
                               </p:par>
                               <p:par>
-                                <p:cTn id="99" presetID="10" presetClass="exit" presetSubtype="0" fill="hold" grpId="2" nodeType="withEffect">
+                                <p:cTn id="91" presetID="10" presetClass="exit" presetSubtype="0" fill="hold" grpId="2" nodeType="withEffect">
                                   <p:stCondLst>
                                     <p:cond delay="2350"/>
                                   </p:stCondLst>
                                   <p:childTnLst>
                                     <p:animEffect transition="out" filter="fade">
                                       <p:cBhvr>
-                                        <p:cTn id="100" dur="400"/>
+                                        <p:cTn id="92" dur="400"/>
                                         <p:tgtEl>
                                           <p:spTgt spid="22"/>
                                         </p:tgtEl>
@@ -21934,7 +21508,7 @@
                                     </p:animEffect>
                                     <p:set>
                                       <p:cBhvr>
-                                        <p:cTn id="101" dur="1" fill="hold">
+                                        <p:cTn id="93" dur="1" fill="hold">
                                           <p:stCondLst>
                                             <p:cond delay="399"/>
                                           </p:stCondLst>
@@ -21954,14 +21528,14 @@
                                 </p:cTn>
                               </p:par>
                               <p:par>
-                                <p:cTn id="102" presetID="10" presetClass="entr" presetSubtype="0" fill="hold" grpId="0" nodeType="withEffect">
+                                <p:cTn id="94" presetID="10" presetClass="entr" presetSubtype="0" fill="hold" grpId="0" nodeType="withEffect">
                                   <p:stCondLst>
                                     <p:cond delay="1850"/>
                                   </p:stCondLst>
                                   <p:childTnLst>
                                     <p:set>
                                       <p:cBhvr>
-                                        <p:cTn id="103" dur="1" fill="hold">
+                                        <p:cTn id="95" dur="1" fill="hold">
                                           <p:stCondLst>
                                             <p:cond delay="0"/>
                                           </p:stCondLst>
@@ -21979,7 +21553,7 @@
                                     </p:set>
                                     <p:animEffect transition="in" filter="fade">
                                       <p:cBhvr>
-                                        <p:cTn id="104" dur="400"/>
+                                        <p:cTn id="96" dur="400"/>
                                         <p:tgtEl>
                                           <p:spTgt spid="23"/>
                                         </p:tgtEl>
@@ -21995,26 +21569,26 @@
                     </p:cTn>
                   </p:par>
                   <p:par>
-                    <p:cTn id="105" fill="hold">
+                    <p:cTn id="97" fill="hold">
                       <p:stCondLst>
                         <p:cond delay="indefinite"/>
                       </p:stCondLst>
                       <p:childTnLst>
                         <p:par>
-                          <p:cTn id="106" fill="hold">
+                          <p:cTn id="98" fill="hold">
                             <p:stCondLst>
                               <p:cond delay="0"/>
                             </p:stCondLst>
                             <p:childTnLst>
                               <p:par>
-                                <p:cTn id="107" presetID="53" presetClass="entr" presetSubtype="16" fill="hold" grpId="0" nodeType="clickEffect">
+                                <p:cTn id="99" presetID="53" presetClass="entr" presetSubtype="16" fill="hold" grpId="0" nodeType="clickEffect">
                                   <p:stCondLst>
                                     <p:cond delay="0"/>
                                   </p:stCondLst>
                                   <p:childTnLst>
                                     <p:set>
                                       <p:cBhvr>
-                                        <p:cTn id="108" dur="1" fill="hold">
+                                        <p:cTn id="100" dur="1" fill="hold">
                                           <p:stCondLst>
                                             <p:cond delay="0"/>
                                           </p:stCondLst>
@@ -22032,7 +21606,7 @@
                                     </p:set>
                                     <p:anim calcmode="lin" valueType="num">
                                       <p:cBhvr additive="base">
-                                        <p:cTn id="109" dur="500" fill="hold"/>
+                                        <p:cTn id="101" dur="500" fill="hold"/>
                                         <p:tgtEl>
                                           <p:spTgt spid="24"/>
                                         </p:tgtEl>
@@ -22055,7 +21629,7 @@
                                     </p:anim>
                                     <p:anim calcmode="lin" valueType="num">
                                       <p:cBhvr additive="base">
-                                        <p:cTn id="110" dur="500" fill="hold"/>
+                                        <p:cTn id="102" dur="500" fill="hold"/>
                                         <p:tgtEl>
                                           <p:spTgt spid="24"/>
                                         </p:tgtEl>
@@ -22078,7 +21652,7 @@
                                     </p:anim>
                                     <p:animEffect transition="in" filter="fade">
                                       <p:cBhvr>
-                                        <p:cTn id="111" dur="500"/>
+                                        <p:cTn id="103" dur="500"/>
                                         <p:tgtEl>
                                           <p:spTgt spid="24"/>
                                         </p:tgtEl>
@@ -22087,16 +21661,16 @@
                                   </p:childTnLst>
                                   <p:subTnLst>
                                     <p:audio>
-                                      <p:cMediaNode vol="80000" showWhenStopped="0">
-                                        <p:cTn id="112" display="0" masterRel="sameClick">
+                                      <p:cMediaNode vol="50000" showWhenStopped="0">
+                                        <p:cTn id="104" display="0" masterRel="sameClick">
                                           <p:stCondLst>
                                             <p:cond evt="onBegin" delay="0">
-                                              <p:tn val="107"/>
+                                              <p:tn val="99"/>
                                             </p:cond>
                                           </p:stCondLst>
                                         </p:cTn>
                                         <p:tgtEl>
-                                          <p:sndTgt r:embed="rId23" name="chime.wav"/>
+                                          <p:sndTgt r:embed="rId21" name="chime.wav"/>
                                         </p:tgtEl>
                                       </p:cMediaNode>
                                     </p:audio>
@@ -23309,33 +22883,17 @@
                                       </p:cBhvr>
                                     </p:animEffect>
                                   </p:childTnLst>
-                                  <p:subTnLst>
-                                    <p:audio>
-                                      <p:cMediaNode vol="80000" showWhenStopped="0">
-                                        <p:cTn id="8" display="0" masterRel="sameClick">
-                                          <p:stCondLst>
-                                            <p:cond evt="onBegin" delay="0">
-                                              <p:tn val="5"/>
-                                            </p:cond>
-                                          </p:stCondLst>
-                                        </p:cTn>
-                                        <p:tgtEl>
-                                          <p:sndTgt r:embed="rId5" name="pop.wav"/>
-                                        </p:tgtEl>
-                                      </p:cMediaNode>
-                                    </p:audio>
-                                  </p:subTnLst>
                                 </p:cTn>
                               </p:par>
                               <p:par>
-                                <p:cTn id="9" presetID="10" presetClass="entr" presetSubtype="0" fill="hold" grpId="0" nodeType="withEffect">
+                                <p:cTn id="8" presetID="10" presetClass="entr" presetSubtype="0" fill="hold" grpId="0" nodeType="withEffect">
                                   <p:stCondLst>
                                     <p:cond delay="0"/>
                                   </p:stCondLst>
                                   <p:childTnLst>
                                     <p:set>
                                       <p:cBhvr>
-                                        <p:cTn id="10" dur="1" fill="hold">
+                                        <p:cTn id="9" dur="1" fill="hold">
                                           <p:stCondLst>
                                             <p:cond delay="0"/>
                                           </p:stCondLst>
@@ -23353,7 +22911,7 @@
                                     </p:set>
                                     <p:animEffect transition="in" filter="fade">
                                       <p:cBhvr>
-                                        <p:cTn id="11" dur="500"/>
+                                        <p:cTn id="10" dur="500"/>
                                         <p:tgtEl>
                                           <p:spTgt spid="9"/>
                                         </p:tgtEl>
@@ -23369,26 +22927,26 @@
                     </p:cTn>
                   </p:par>
                   <p:par>
-                    <p:cTn id="12" fill="hold">
+                    <p:cTn id="11" fill="hold">
                       <p:stCondLst>
                         <p:cond delay="indefinite"/>
                       </p:stCondLst>
                       <p:childTnLst>
                         <p:par>
-                          <p:cTn id="13" fill="hold">
+                          <p:cTn id="12" fill="hold">
                             <p:stCondLst>
                               <p:cond delay="0"/>
                             </p:stCondLst>
                             <p:childTnLst>
                               <p:par>
-                                <p:cTn id="14" presetID="10" presetClass="entr" presetSubtype="0" fill="hold" grpId="0" nodeType="clickEffect">
+                                <p:cTn id="13" presetID="10" presetClass="entr" presetSubtype="0" fill="hold" grpId="0" nodeType="clickEffect">
                                   <p:stCondLst>
                                     <p:cond delay="0"/>
                                   </p:stCondLst>
                                   <p:childTnLst>
                                     <p:set>
                                       <p:cBhvr>
-                                        <p:cTn id="15" dur="1" fill="hold">
+                                        <p:cTn id="14" dur="1" fill="hold">
                                           <p:stCondLst>
                                             <p:cond delay="0"/>
                                           </p:stCondLst>
@@ -23406,40 +22964,24 @@
                                     </p:set>
                                     <p:animEffect transition="in" filter="fade">
                                       <p:cBhvr>
-                                        <p:cTn id="16" dur="500"/>
+                                        <p:cTn id="15" dur="500"/>
                                         <p:tgtEl>
                                           <p:spTgt spid="11"/>
                                         </p:tgtEl>
                                       </p:cBhvr>
                                     </p:animEffect>
                                   </p:childTnLst>
-                                  <p:subTnLst>
-                                    <p:audio>
-                                      <p:cMediaNode vol="80000" showWhenStopped="0">
-                                        <p:cTn id="17" display="0" masterRel="sameClick">
-                                          <p:stCondLst>
-                                            <p:cond evt="onBegin" delay="0">
-                                              <p:tn val="14"/>
-                                            </p:cond>
-                                          </p:stCondLst>
-                                        </p:cTn>
-                                        <p:tgtEl>
-                                          <p:sndTgt r:embed="rId5" name="pop.wav"/>
-                                        </p:tgtEl>
-                                      </p:cMediaNode>
-                                    </p:audio>
-                                  </p:subTnLst>
                                 </p:cTn>
                               </p:par>
                               <p:par>
-                                <p:cTn id="18" presetID="10" presetClass="entr" presetSubtype="0" fill="hold" grpId="0" nodeType="withEffect">
+                                <p:cTn id="16" presetID="10" presetClass="entr" presetSubtype="0" fill="hold" grpId="0" nodeType="withEffect">
                                   <p:stCondLst>
                                     <p:cond delay="0"/>
                                   </p:stCondLst>
                                   <p:childTnLst>
                                     <p:set>
                                       <p:cBhvr>
-                                        <p:cTn id="19" dur="1" fill="hold">
+                                        <p:cTn id="17" dur="1" fill="hold">
                                           <p:stCondLst>
                                             <p:cond delay="0"/>
                                           </p:stCondLst>
@@ -23457,7 +22999,7 @@
                                     </p:set>
                                     <p:animEffect transition="in" filter="fade">
                                       <p:cBhvr>
-                                        <p:cTn id="20" dur="500"/>
+                                        <p:cTn id="18" dur="500"/>
                                         <p:tgtEl>
                                           <p:spTgt spid="12"/>
                                         </p:tgtEl>
@@ -23473,26 +23015,26 @@
                     </p:cTn>
                   </p:par>
                   <p:par>
-                    <p:cTn id="21" fill="hold">
+                    <p:cTn id="19" fill="hold">
                       <p:stCondLst>
                         <p:cond delay="indefinite"/>
                       </p:stCondLst>
                       <p:childTnLst>
                         <p:par>
-                          <p:cTn id="22" fill="hold">
+                          <p:cTn id="20" fill="hold">
                             <p:stCondLst>
                               <p:cond delay="0"/>
                             </p:stCondLst>
                             <p:childTnLst>
                               <p:par>
-                                <p:cTn id="23" presetID="10" presetClass="entr" presetSubtype="0" fill="hold" grpId="0" nodeType="clickEffect">
+                                <p:cTn id="21" presetID="10" presetClass="entr" presetSubtype="0" fill="hold" grpId="0" nodeType="clickEffect">
                                   <p:stCondLst>
                                     <p:cond delay="0"/>
                                   </p:stCondLst>
                                   <p:childTnLst>
                                     <p:set>
                                       <p:cBhvr>
-                                        <p:cTn id="24" dur="1" fill="hold">
+                                        <p:cTn id="22" dur="1" fill="hold">
                                           <p:stCondLst>
                                             <p:cond delay="0"/>
                                           </p:stCondLst>
@@ -23510,40 +23052,24 @@
                                     </p:set>
                                     <p:animEffect transition="in" filter="fade">
                                       <p:cBhvr>
-                                        <p:cTn id="25" dur="500"/>
+                                        <p:cTn id="23" dur="500"/>
                                         <p:tgtEl>
                                           <p:spTgt spid="14"/>
                                         </p:tgtEl>
                                       </p:cBhvr>
                                     </p:animEffect>
                                   </p:childTnLst>
-                                  <p:subTnLst>
-                                    <p:audio>
-                                      <p:cMediaNode vol="80000" showWhenStopped="0">
-                                        <p:cTn id="26" display="0" masterRel="sameClick">
-                                          <p:stCondLst>
-                                            <p:cond evt="onBegin" delay="0">
-                                              <p:tn val="23"/>
-                                            </p:cond>
-                                          </p:stCondLst>
-                                        </p:cTn>
-                                        <p:tgtEl>
-                                          <p:sndTgt r:embed="rId5" name="pop.wav"/>
-                                        </p:tgtEl>
-                                      </p:cMediaNode>
-                                    </p:audio>
-                                  </p:subTnLst>
                                 </p:cTn>
                               </p:par>
                               <p:par>
-                                <p:cTn id="27" presetID="10" presetClass="entr" presetSubtype="0" fill="hold" grpId="0" nodeType="withEffect">
+                                <p:cTn id="24" presetID="10" presetClass="entr" presetSubtype="0" fill="hold" grpId="0" nodeType="withEffect">
                                   <p:stCondLst>
                                     <p:cond delay="0"/>
                                   </p:stCondLst>
                                   <p:childTnLst>
                                     <p:set>
                                       <p:cBhvr>
-                                        <p:cTn id="28" dur="1" fill="hold">
+                                        <p:cTn id="25" dur="1" fill="hold">
                                           <p:stCondLst>
                                             <p:cond delay="0"/>
                                           </p:stCondLst>
@@ -23561,7 +23087,7 @@
                                     </p:set>
                                     <p:animEffect transition="in" filter="fade">
                                       <p:cBhvr>
-                                        <p:cTn id="29" dur="500"/>
+                                        <p:cTn id="26" dur="500"/>
                                         <p:tgtEl>
                                           <p:spTgt spid="15"/>
                                         </p:tgtEl>
@@ -23577,32 +23103,67 @@
                     </p:cTn>
                   </p:par>
                   <p:par>
-                    <p:cTn id="30" fill="hold">
+                    <p:cTn id="27" fill="hold">
                       <p:stCondLst>
                         <p:cond delay="indefinite"/>
                       </p:stCondLst>
                       <p:childTnLst>
                         <p:par>
-                          <p:cTn id="31" fill="hold">
+                          <p:cTn id="28" fill="hold">
                             <p:stCondLst>
                               <p:cond delay="0"/>
                             </p:stCondLst>
                             <p:childTnLst>
                               <p:par>
-                                <p:cTn id="32" presetID="10" presetClass="entr" presetSubtype="0" fill="hold" grpId="0" nodeType="clickEffect">
+                                <p:cTn id="29" presetID="10" presetClass="entr" presetSubtype="0" fill="hold" grpId="0" nodeType="clickEffect">
                                   <p:stCondLst>
                                     <p:cond delay="0"/>
                                   </p:stCondLst>
                                   <p:childTnLst>
                                     <p:set>
                                       <p:cBhvr>
+                                        <p:cTn id="30" dur="1" fill="hold">
+                                          <p:stCondLst>
+                                            <p:cond delay="0"/>
+                                          </p:stCondLst>
+                                        </p:cTn>
+                                        <p:tgtEl>
+                                          <p:spTgt spid="17"/>
+                                        </p:tgtEl>
+                                        <p:attrNameLst>
+                                          <p:attrName>style.visibility</p:attrName>
+                                        </p:attrNameLst>
+                                      </p:cBhvr>
+                                      <p:to>
+                                        <p:strVal val="visible"/>
+                                      </p:to>
+                                    </p:set>
+                                    <p:animEffect transition="in" filter="fade">
+                                      <p:cBhvr>
+                                        <p:cTn id="31" dur="500"/>
+                                        <p:tgtEl>
+                                          <p:spTgt spid="17"/>
+                                        </p:tgtEl>
+                                      </p:cBhvr>
+                                    </p:animEffect>
+                                  </p:childTnLst>
+                                </p:cTn>
+                              </p:par>
+                              <p:par>
+                                <p:cTn id="32" presetID="10" presetClass="entr" presetSubtype="0" fill="hold" grpId="0" nodeType="withEffect">
+                                  <p:stCondLst>
+                                    <p:cond delay="0"/>
+                                  </p:stCondLst>
+                                  <p:childTnLst>
+                                    <p:set>
+                                      <p:cBhvr>
                                         <p:cTn id="33" dur="1" fill="hold">
                                           <p:stCondLst>
                                             <p:cond delay="0"/>
                                           </p:stCondLst>
                                         </p:cTn>
                                         <p:tgtEl>
-                                          <p:spTgt spid="17"/>
+                                          <p:spTgt spid="18"/>
                                         </p:tgtEl>
                                         <p:attrNameLst>
                                           <p:attrName>style.visibility</p:attrName>
@@ -23615,57 +23176,6 @@
                                     <p:animEffect transition="in" filter="fade">
                                       <p:cBhvr>
                                         <p:cTn id="34" dur="500"/>
-                                        <p:tgtEl>
-                                          <p:spTgt spid="17"/>
-                                        </p:tgtEl>
-                                      </p:cBhvr>
-                                    </p:animEffect>
-                                  </p:childTnLst>
-                                  <p:subTnLst>
-                                    <p:audio>
-                                      <p:cMediaNode vol="80000" showWhenStopped="0">
-                                        <p:cTn id="35" display="0" masterRel="sameClick">
-                                          <p:stCondLst>
-                                            <p:cond evt="onBegin" delay="0">
-                                              <p:tn val="32"/>
-                                            </p:cond>
-                                          </p:stCondLst>
-                                        </p:cTn>
-                                        <p:tgtEl>
-                                          <p:sndTgt r:embed="rId5" name="pop.wav"/>
-                                        </p:tgtEl>
-                                      </p:cMediaNode>
-                                    </p:audio>
-                                  </p:subTnLst>
-                                </p:cTn>
-                              </p:par>
-                              <p:par>
-                                <p:cTn id="36" presetID="10" presetClass="entr" presetSubtype="0" fill="hold" grpId="0" nodeType="withEffect">
-                                  <p:stCondLst>
-                                    <p:cond delay="0"/>
-                                  </p:stCondLst>
-                                  <p:childTnLst>
-                                    <p:set>
-                                      <p:cBhvr>
-                                        <p:cTn id="37" dur="1" fill="hold">
-                                          <p:stCondLst>
-                                            <p:cond delay="0"/>
-                                          </p:stCondLst>
-                                        </p:cTn>
-                                        <p:tgtEl>
-                                          <p:spTgt spid="18"/>
-                                        </p:tgtEl>
-                                        <p:attrNameLst>
-                                          <p:attrName>style.visibility</p:attrName>
-                                        </p:attrNameLst>
-                                      </p:cBhvr>
-                                      <p:to>
-                                        <p:strVal val="visible"/>
-                                      </p:to>
-                                    </p:set>
-                                    <p:animEffect transition="in" filter="fade">
-                                      <p:cBhvr>
-                                        <p:cTn id="38" dur="500"/>
                                         <p:tgtEl>
                                           <p:spTgt spid="18"/>
                                         </p:tgtEl>
@@ -23681,26 +23191,26 @@
                     </p:cTn>
                   </p:par>
                   <p:par>
-                    <p:cTn id="39" fill="hold">
+                    <p:cTn id="35" fill="hold">
                       <p:stCondLst>
                         <p:cond delay="indefinite"/>
                       </p:stCondLst>
                       <p:childTnLst>
                         <p:par>
-                          <p:cTn id="40" fill="hold">
+                          <p:cTn id="36" fill="hold">
                             <p:stCondLst>
                               <p:cond delay="0"/>
                             </p:stCondLst>
                             <p:childTnLst>
                               <p:par>
-                                <p:cTn id="41" presetID="10" presetClass="entr" presetSubtype="0" fill="hold" grpId="0" nodeType="clickEffect">
+                                <p:cTn id="37" presetID="10" presetClass="entr" presetSubtype="0" fill="hold" grpId="0" nodeType="clickEffect">
                                   <p:stCondLst>
                                     <p:cond delay="0"/>
                                   </p:stCondLst>
                                   <p:childTnLst>
                                     <p:set>
                                       <p:cBhvr>
-                                        <p:cTn id="42" dur="1" fill="hold">
+                                        <p:cTn id="38" dur="1" fill="hold">
                                           <p:stCondLst>
                                             <p:cond delay="0"/>
                                           </p:stCondLst>
@@ -23718,40 +23228,24 @@
                                     </p:set>
                                     <p:animEffect transition="in" filter="fade">
                                       <p:cBhvr>
-                                        <p:cTn id="43" dur="500"/>
+                                        <p:cTn id="39" dur="500"/>
                                         <p:tgtEl>
                                           <p:spTgt spid="20"/>
                                         </p:tgtEl>
                                       </p:cBhvr>
                                     </p:animEffect>
                                   </p:childTnLst>
-                                  <p:subTnLst>
-                                    <p:audio>
-                                      <p:cMediaNode vol="80000" showWhenStopped="0">
-                                        <p:cTn id="44" display="0" masterRel="sameClick">
-                                          <p:stCondLst>
-                                            <p:cond evt="onBegin" delay="0">
-                                              <p:tn val="41"/>
-                                            </p:cond>
-                                          </p:stCondLst>
-                                        </p:cTn>
-                                        <p:tgtEl>
-                                          <p:sndTgt r:embed="rId5" name="pop.wav"/>
-                                        </p:tgtEl>
-                                      </p:cMediaNode>
-                                    </p:audio>
-                                  </p:subTnLst>
                                 </p:cTn>
                               </p:par>
                               <p:par>
-                                <p:cTn id="45" presetID="10" presetClass="entr" presetSubtype="0" fill="hold" grpId="0" nodeType="withEffect">
+                                <p:cTn id="40" presetID="10" presetClass="entr" presetSubtype="0" fill="hold" grpId="0" nodeType="withEffect">
                                   <p:stCondLst>
                                     <p:cond delay="0"/>
                                   </p:stCondLst>
                                   <p:childTnLst>
                                     <p:set>
                                       <p:cBhvr>
-                                        <p:cTn id="46" dur="1" fill="hold">
+                                        <p:cTn id="41" dur="1" fill="hold">
                                           <p:stCondLst>
                                             <p:cond delay="0"/>
                                           </p:stCondLst>
@@ -23769,7 +23263,7 @@
                                     </p:set>
                                     <p:animEffect transition="in" filter="fade">
                                       <p:cBhvr>
-                                        <p:cTn id="47" dur="500"/>
+                                        <p:cTn id="42" dur="500"/>
                                         <p:tgtEl>
                                           <p:spTgt spid="21"/>
                                         </p:tgtEl>
@@ -23785,26 +23279,26 @@
                     </p:cTn>
                   </p:par>
                   <p:par>
-                    <p:cTn id="48" fill="hold">
+                    <p:cTn id="43" fill="hold">
                       <p:stCondLst>
                         <p:cond delay="indefinite"/>
                       </p:stCondLst>
                       <p:childTnLst>
                         <p:par>
-                          <p:cTn id="49" fill="hold">
+                          <p:cTn id="44" fill="hold">
                             <p:stCondLst>
                               <p:cond delay="0"/>
                             </p:stCondLst>
                             <p:childTnLst>
                               <p:par>
-                                <p:cTn id="50" presetID="10" presetClass="entr" presetSubtype="0" fill="hold" grpId="0" nodeType="clickEffect">
+                                <p:cTn id="45" presetID="10" presetClass="entr" presetSubtype="0" fill="hold" grpId="0" nodeType="clickEffect">
                                   <p:stCondLst>
                                     <p:cond delay="0"/>
                                   </p:stCondLst>
                                   <p:childTnLst>
                                     <p:set>
                                       <p:cBhvr>
-                                        <p:cTn id="51" dur="1" fill="hold">
+                                        <p:cTn id="46" dur="1" fill="hold">
                                           <p:stCondLst>
                                             <p:cond delay="0"/>
                                           </p:stCondLst>
@@ -23822,7 +23316,7 @@
                                     </p:set>
                                     <p:animEffect transition="in" filter="fade">
                                       <p:cBhvr>
-                                        <p:cTn id="52" dur="500"/>
+                                        <p:cTn id="47" dur="500"/>
                                         <p:tgtEl>
                                           <p:spTgt spid="22"/>
                                         </p:tgtEl>
@@ -23831,16 +23325,16 @@
                                   </p:childTnLst>
                                   <p:subTnLst>
                                     <p:audio>
-                                      <p:cMediaNode vol="80000" showWhenStopped="0">
-                                        <p:cTn id="53" display="0" masterRel="sameClick">
+                                      <p:cMediaNode vol="50000" showWhenStopped="0">
+                                        <p:cTn id="48" display="0" masterRel="sameClick">
                                           <p:stCondLst>
                                             <p:cond evt="onBegin" delay="0">
-                                              <p:tn val="50"/>
+                                              <p:tn val="45"/>
                                             </p:cond>
                                           </p:stCondLst>
                                         </p:cTn>
                                         <p:tgtEl>
-                                          <p:sndTgt r:embed="rId6" name="chime.wav"/>
+                                          <p:sndTgt r:embed="rId5" name="chime.wav"/>
                                         </p:tgtEl>
                                       </p:cMediaNode>
                                     </p:audio>
@@ -24897,7 +24391,7 @@
                                   </p:childTnLst>
                                   <p:subTnLst>
                                     <p:audio>
-                                      <p:cMediaNode vol="80000" showWhenStopped="0">
+                                      <p:cMediaNode vol="50000" showWhenStopped="0">
                                         <p:cTn id="13" display="0" masterRel="sameClick">
                                           <p:stCondLst>
                                             <p:cond evt="onBegin" delay="0">
@@ -25019,7 +24513,7 @@
                                   </p:childTnLst>
                                   <p:subTnLst>
                                     <p:audio>
-                                      <p:cMediaNode vol="80000" showWhenStopped="0">
+                                      <p:cMediaNode vol="50000" showWhenStopped="0">
                                         <p:cTn id="24" display="0" masterRel="sameClick">
                                           <p:stCondLst>
                                             <p:cond evt="onBegin" delay="0">
@@ -25141,7 +24635,7 @@
                                   </p:childTnLst>
                                   <p:subTnLst>
                                     <p:audio>
-                                      <p:cMediaNode vol="80000" showWhenStopped="0">
+                                      <p:cMediaNode vol="50000" showWhenStopped="0">
                                         <p:cTn id="35" display="0" masterRel="sameClick">
                                           <p:stCondLst>
                                             <p:cond evt="onBegin" delay="0">
@@ -25809,7 +25303,7 @@
                                   </p:childTnLst>
                                   <p:subTnLst>
                                     <p:audio>
-                                      <p:cMediaNode vol="80000" showWhenStopped="0">
+                                      <p:cMediaNode vol="50000" showWhenStopped="0">
                                         <p:cTn id="8" display="0" masterRel="sameClick">
                                           <p:stCondLst>
                                             <p:cond evt="onBegin" delay="0">
@@ -25929,22 +25423,6 @@
                                       </p:cBhvr>
                                     </p:animEffect>
                                   </p:childTnLst>
-                                  <p:subTnLst>
-                                    <p:audio>
-                                      <p:cMediaNode vol="80000" showWhenStopped="0">
-                                        <p:cTn id="19" display="0" masterRel="sameClick">
-                                          <p:stCondLst>
-                                            <p:cond evt="onBegin" delay="0">
-                                              <p:tn val="16"/>
-                                            </p:cond>
-                                          </p:stCondLst>
-                                        </p:cTn>
-                                        <p:tgtEl>
-                                          <p:sndTgt r:embed="rId7" name="sparkle.wav"/>
-                                        </p:tgtEl>
-                                      </p:cMediaNode>
-                                    </p:audio>
-                                  </p:subTnLst>
                                 </p:cTn>
                               </p:par>
                             </p:childTnLst>
@@ -26515,7 +25993,7 @@
                                   </p:childTnLst>
                                   <p:subTnLst>
                                     <p:audio>
-                                      <p:cMediaNode vol="80000" showWhenStopped="0">
+                                      <p:cMediaNode vol="50000" showWhenStopped="0">
                                         <p:cTn id="9" display="0" masterRel="sameClick">
                                           <p:stCondLst>
                                             <p:cond evt="onBegin" delay="0">
@@ -26575,7 +26053,7 @@
                                   </p:childTnLst>
                                   <p:subTnLst>
                                     <p:audio>
-                                      <p:cMediaNode vol="80000" showWhenStopped="0">
+                                      <p:cMediaNode vol="50000" showWhenStopped="0">
                                         <p:cTn id="14" display="0" masterRel="sameClick">
                                           <p:stCondLst>
                                             <p:cond evt="onBegin" delay="0">
@@ -26712,22 +26190,6 @@
                                       </p:cBhvr>
                                     </p:animEffect>
                                   </p:childTnLst>
-                                  <p:subTnLst>
-                                    <p:audio>
-                                      <p:cMediaNode vol="80000" showWhenStopped="0">
-                                        <p:cTn id="26" display="0" masterRel="sameClick">
-                                          <p:stCondLst>
-                                            <p:cond evt="onBegin" delay="0">
-                                              <p:tn val="23"/>
-                                            </p:cond>
-                                          </p:stCondLst>
-                                        </p:cTn>
-                                        <p:tgtEl>
-                                          <p:sndTgt r:embed="rId9" name="sparkle.wav"/>
-                                        </p:tgtEl>
-                                      </p:cMediaNode>
-                                    </p:audio>
-                                  </p:subTnLst>
                                 </p:cTn>
                               </p:par>
                             </p:childTnLst>
@@ -27731,7 +27193,7 @@
                                   </p:childTnLst>
                                   <p:subTnLst>
                                     <p:audio>
-                                      <p:cMediaNode vol="80000" showWhenStopped="0">
+                                      <p:cMediaNode vol="50000" showWhenStopped="0">
                                         <p:cTn id="8" display="0" masterRel="sameClick">
                                           <p:stCondLst>
                                             <p:cond evt="onBegin" delay="0">
@@ -27858,7 +27320,7 @@
                                   </p:childTnLst>
                                   <p:subTnLst>
                                     <p:audio>
-                                      <p:cMediaNode vol="80000" showWhenStopped="0">
+                                      <p:cMediaNode vol="50000" showWhenStopped="0">
                                         <p:cTn id="18" display="0" masterRel="sameClick">
                                           <p:stCondLst>
                                             <p:cond evt="onBegin" delay="0">
@@ -27985,7 +27447,7 @@
                                   </p:childTnLst>
                                   <p:subTnLst>
                                     <p:audio>
-                                      <p:cMediaNode vol="80000" showWhenStopped="0">
+                                      <p:cMediaNode vol="50000" showWhenStopped="0">
                                         <p:cTn id="28" display="0" masterRel="sameClick">
                                           <p:stCondLst>
                                             <p:cond evt="onBegin" delay="0">
@@ -28112,7 +27574,7 @@
                                   </p:childTnLst>
                                   <p:subTnLst>
                                     <p:audio>
-                                      <p:cMediaNode vol="80000" showWhenStopped="0">
+                                      <p:cMediaNode vol="50000" showWhenStopped="0">
                                         <p:cTn id="38" display="0" masterRel="sameClick">
                                           <p:stCondLst>
                                             <p:cond evt="onBegin" delay="0">
@@ -28819,22 +28281,6 @@
                                       </p:cBhvr>
                                     </p:animEffect>
                                   </p:childTnLst>
-                                  <p:subTnLst>
-                                    <p:audio>
-                                      <p:cMediaNode vol="80000" showWhenStopped="0">
-                                        <p:cTn id="8" display="0" masterRel="sameClick">
-                                          <p:stCondLst>
-                                            <p:cond evt="onBegin" delay="0">
-                                              <p:tn val="5"/>
-                                            </p:cond>
-                                          </p:stCondLst>
-                                        </p:cTn>
-                                        <p:tgtEl>
-                                          <p:sndTgt r:embed="rId5" name="sparkle.wav"/>
-                                        </p:tgtEl>
-                                      </p:cMediaNode>
-                                    </p:audio>
-                                  </p:subTnLst>
                                 </p:cTn>
                               </p:par>
                             </p:childTnLst>
@@ -28861,7 +28307,7 @@
               </p:nextCondLst>
             </p:seq>
             <p:seq concurrent="1" nextAc="seek">
-              <p:cTn id="9" restart="whenNotActive" fill="hold" evtFilter="cancelBubble" nodeType="interactiveSeq">
+              <p:cTn id="8" restart="whenNotActive" fill="hold" evtFilter="cancelBubble" nodeType="interactiveSeq">
                 <p:stCondLst>
                   <p:cond evt="onClick" delay="0">
                     <p:tgtEl>
@@ -28874,26 +28320,26 @@
                 </p:endSync>
                 <p:childTnLst>
                   <p:par>
-                    <p:cTn id="10" fill="hold">
+                    <p:cTn id="9" fill="hold">
                       <p:stCondLst>
                         <p:cond delay="0"/>
                       </p:stCondLst>
                       <p:childTnLst>
                         <p:par>
-                          <p:cTn id="11" fill="hold">
+                          <p:cTn id="10" fill="hold">
                             <p:stCondLst>
                               <p:cond delay="0"/>
                             </p:stCondLst>
                             <p:childTnLst>
                               <p:par>
-                                <p:cTn id="12" presetID="10" presetClass="entr" presetSubtype="0" fill="hold" grpId="0" nodeType="clickEffect">
+                                <p:cTn id="11" presetID="10" presetClass="entr" presetSubtype="0" fill="hold" grpId="0" nodeType="clickEffect">
                                   <p:stCondLst>
                                     <p:cond delay="0"/>
                                   </p:stCondLst>
                                   <p:childTnLst>
                                     <p:set>
                                       <p:cBhvr>
-                                        <p:cTn id="13" dur="1" fill="hold">
+                                        <p:cTn id="12" dur="1" fill="hold">
                                           <p:stCondLst>
                                             <p:cond delay="0"/>
                                           </p:stCondLst>
@@ -28911,7 +28357,7 @@
                                     </p:set>
                                     <p:animEffect transition="in" filter="fade">
                                       <p:cBhvr>
-                                        <p:cTn id="14" dur="500"/>
+                                        <p:cTn id="13" dur="500"/>
                                         <p:tgtEl>
                                           <p:spTgt spid="6"/>
                                         </p:tgtEl>
@@ -28920,16 +28366,16 @@
                                   </p:childTnLst>
                                   <p:subTnLst>
                                     <p:audio>
-                                      <p:cMediaNode vol="80000" showWhenStopped="0">
-                                        <p:cTn id="15" display="0" masterRel="sameClick">
+                                      <p:cMediaNode vol="50000" showWhenStopped="0">
+                                        <p:cTn id="14" display="0" masterRel="sameClick">
                                           <p:stCondLst>
                                             <p:cond evt="onBegin" delay="0">
-                                              <p:tn val="12"/>
+                                              <p:tn val="11"/>
                                             </p:cond>
                                           </p:stCondLst>
                                         </p:cTn>
                                         <p:tgtEl>
-                                          <p:sndTgt r:embed="rId6" name="chime.wav"/>
+                                          <p:sndTgt r:embed="rId5" name="chime.wav"/>
                                         </p:tgtEl>
                                       </p:cMediaNode>
                                     </p:audio>
@@ -28953,7 +28399,7 @@
               </p:nextCondLst>
             </p:seq>
             <p:seq concurrent="1" nextAc="seek">
-              <p:cTn id="16" restart="whenNotActive" fill="hold" evtFilter="cancelBubble" nodeType="interactiveSeq">
+              <p:cTn id="15" restart="whenNotActive" fill="hold" evtFilter="cancelBubble" nodeType="interactiveSeq">
                 <p:stCondLst>
                   <p:cond evt="onClick" delay="0">
                     <p:tgtEl>
@@ -28966,26 +28412,26 @@
                 </p:endSync>
                 <p:childTnLst>
                   <p:par>
-                    <p:cTn id="17" fill="hold">
+                    <p:cTn id="16" fill="hold">
                       <p:stCondLst>
                         <p:cond delay="0"/>
                       </p:stCondLst>
                       <p:childTnLst>
                         <p:par>
-                          <p:cTn id="18" fill="hold">
+                          <p:cTn id="17" fill="hold">
                             <p:stCondLst>
                               <p:cond delay="0"/>
                             </p:stCondLst>
                             <p:childTnLst>
                               <p:par>
-                                <p:cTn id="19" presetID="10" presetClass="entr" presetSubtype="0" fill="hold" grpId="0" nodeType="clickEffect">
+                                <p:cTn id="18" presetID="10" presetClass="entr" presetSubtype="0" fill="hold" grpId="0" nodeType="clickEffect">
                                   <p:stCondLst>
                                     <p:cond delay="0"/>
                                   </p:stCondLst>
                                   <p:childTnLst>
                                     <p:set>
                                       <p:cBhvr>
-                                        <p:cTn id="20" dur="1" fill="hold">
+                                        <p:cTn id="19" dur="1" fill="hold">
                                           <p:stCondLst>
                                             <p:cond delay="0"/>
                                           </p:stCondLst>
@@ -29003,7 +28449,7 @@
                                     </p:set>
                                     <p:animEffect transition="in" filter="fade">
                                       <p:cBhvr>
-                                        <p:cTn id="21" dur="500"/>
+                                        <p:cTn id="20" dur="500"/>
                                         <p:tgtEl>
                                           <p:spTgt spid="8"/>
                                         </p:tgtEl>
@@ -29012,16 +28458,16 @@
                                   </p:childTnLst>
                                   <p:subTnLst>
                                     <p:audio>
-                                      <p:cMediaNode vol="80000" showWhenStopped="0">
-                                        <p:cTn id="22" display="0" masterRel="sameClick">
+                                      <p:cMediaNode vol="50000" showWhenStopped="0">
+                                        <p:cTn id="21" display="0" masterRel="sameClick">
                                           <p:stCondLst>
                                             <p:cond evt="onBegin" delay="0">
-                                              <p:tn val="19"/>
+                                              <p:tn val="18"/>
                                             </p:cond>
                                           </p:stCondLst>
                                         </p:cTn>
                                         <p:tgtEl>
-                                          <p:sndTgt r:embed="rId6" name="chime.wav"/>
+                                          <p:sndTgt r:embed="rId5" name="chime.wav"/>
                                         </p:tgtEl>
                                       </p:cMediaNode>
                                     </p:audio>
@@ -30335,33 +29781,17 @@
                                       <p:by x="118000" y="118000"/>
                                     </p:animScale>
                                   </p:childTnLst>
-                                  <p:subTnLst>
-                                    <p:audio>
-                                      <p:cMediaNode vol="80000" showWhenStopped="0">
-                                        <p:cTn id="37" display="0" masterRel="sameClick">
-                                          <p:stCondLst>
-                                            <p:cond evt="onBegin" delay="0">
-                                              <p:tn val="35"/>
-                                            </p:cond>
-                                          </p:stCondLst>
-                                        </p:cTn>
-                                        <p:tgtEl>
-                                          <p:sndTgt r:embed="rId14" name="pop.wav"/>
-                                        </p:tgtEl>
-                                      </p:cMediaNode>
-                                    </p:audio>
-                                  </p:subTnLst>
                                 </p:cTn>
                               </p:par>
                               <p:par>
-                                <p:cTn id="38" presetID="10" presetClass="entr" presetSubtype="0" fill="hold" grpId="0" nodeType="withEffect">
+                                <p:cTn id="37" presetID="10" presetClass="entr" presetSubtype="0" fill="hold" grpId="0" nodeType="withEffect">
                                   <p:stCondLst>
                                     <p:cond delay="1800"/>
                                   </p:stCondLst>
                                   <p:childTnLst>
                                     <p:set>
                                       <p:cBhvr>
-                                        <p:cTn id="39" dur="1" fill="hold">
+                                        <p:cTn id="38" dur="1" fill="hold">
                                           <p:stCondLst>
                                             <p:cond delay="0"/>
                                           </p:stCondLst>
@@ -30379,7 +29809,7 @@
                                     </p:set>
                                     <p:animEffect transition="in" filter="fade">
                                       <p:cBhvr>
-                                        <p:cTn id="40" dur="400"/>
+                                        <p:cTn id="39" dur="400"/>
                                         <p:tgtEl>
                                           <p:spTgt spid="21"/>
                                         </p:tgtEl>
@@ -30395,26 +29825,26 @@
                     </p:cTn>
                   </p:par>
                   <p:par>
-                    <p:cTn id="41" fill="hold">
+                    <p:cTn id="40" fill="hold">
                       <p:stCondLst>
                         <p:cond delay="indefinite"/>
                       </p:stCondLst>
                       <p:childTnLst>
                         <p:par>
-                          <p:cTn id="42" fill="hold">
+                          <p:cTn id="41" fill="hold">
                             <p:stCondLst>
                               <p:cond delay="0"/>
                             </p:stCondLst>
                             <p:childTnLst>
                               <p:par>
-                                <p:cTn id="43" presetID="53" presetClass="entr" presetSubtype="16" fill="hold" grpId="0" nodeType="clickEffect">
+                                <p:cTn id="42" presetID="53" presetClass="entr" presetSubtype="16" fill="hold" grpId="0" nodeType="clickEffect">
                                   <p:stCondLst>
                                     <p:cond delay="0"/>
                                   </p:stCondLst>
                                   <p:childTnLst>
                                     <p:set>
                                       <p:cBhvr>
-                                        <p:cTn id="44" dur="1" fill="hold">
+                                        <p:cTn id="43" dur="1" fill="hold">
                                           <p:stCondLst>
                                             <p:cond delay="0"/>
                                           </p:stCondLst>
@@ -30432,7 +29862,7 @@
                                     </p:set>
                                     <p:anim calcmode="lin" valueType="num">
                                       <p:cBhvr additive="base">
-                                        <p:cTn id="45" dur="300" fill="hold"/>
+                                        <p:cTn id="44" dur="300" fill="hold"/>
                                         <p:tgtEl>
                                           <p:spTgt spid="13"/>
                                         </p:tgtEl>
@@ -30455,7 +29885,7 @@
                                     </p:anim>
                                     <p:anim calcmode="lin" valueType="num">
                                       <p:cBhvr additive="base">
-                                        <p:cTn id="46" dur="300" fill="hold"/>
+                                        <p:cTn id="45" dur="300" fill="hold"/>
                                         <p:tgtEl>
                                           <p:spTgt spid="13"/>
                                         </p:tgtEl>
@@ -30478,7 +29908,7 @@
                                     </p:anim>
                                     <p:animEffect transition="in" filter="fade">
                                       <p:cBhvr>
-                                        <p:cTn id="47" dur="300"/>
+                                        <p:cTn id="46" dur="300"/>
                                         <p:tgtEl>
                                           <p:spTgt spid="13"/>
                                         </p:tgtEl>
@@ -30488,14 +29918,14 @@
                                 </p:cTn>
                               </p:par>
                               <p:par>
-                                <p:cTn id="48" presetID="0" presetClass="path" presetSubtype="0" fill="hold" grpId="1" nodeType="withEffect">
+                                <p:cTn id="47" presetID="0" presetClass="path" presetSubtype="0" fill="hold" grpId="1" nodeType="withEffect">
                                   <p:stCondLst>
                                     <p:cond delay="300"/>
                                   </p:stCondLst>
                                   <p:childTnLst>
                                     <p:animMotion origin="layout" path="M 0 0 L 0.1784 -0.0352 E" pathEditMode="relative" ptsTypes="">
                                       <p:cBhvr>
-                                        <p:cTn id="49" dur="1500" fill="hold" accel="40000" decel="40000"/>
+                                        <p:cTn id="48" dur="1500" fill="hold" accel="40000" decel="40000"/>
                                         <p:tgtEl>
                                           <p:spTgt spid="13"/>
                                         </p:tgtEl>
@@ -30510,14 +29940,14 @@
                                 </p:cTn>
                               </p:par>
                               <p:par>
-                                <p:cTn id="50" presetID="10" presetClass="exit" presetSubtype="0" fill="hold" grpId="2" nodeType="withEffect">
+                                <p:cTn id="49" presetID="10" presetClass="exit" presetSubtype="0" fill="hold" grpId="2" nodeType="withEffect">
                                   <p:stCondLst>
                                     <p:cond delay="1900"/>
                                   </p:stCondLst>
                                   <p:childTnLst>
                                     <p:animEffect transition="out" filter="fade">
                                       <p:cBhvr>
-                                        <p:cTn id="51" dur="300"/>
+                                        <p:cTn id="50" dur="300"/>
                                         <p:tgtEl>
                                           <p:spTgt spid="13"/>
                                         </p:tgtEl>
@@ -30525,7 +29955,7 @@
                                     </p:animEffect>
                                     <p:set>
                                       <p:cBhvr>
-                                        <p:cTn id="52" dur="1" fill="hold">
+                                        <p:cTn id="51" dur="1" fill="hold">
                                           <p:stCondLst>
                                             <p:cond delay="299"/>
                                           </p:stCondLst>
@@ -30545,14 +29975,14 @@
                                 </p:cTn>
                               </p:par>
                               <p:par>
-                                <p:cTn id="53" presetID="6" presetClass="emph" presetSubtype="0" fill="hold" grpId="1" nodeType="withEffect">
+                                <p:cTn id="52" presetID="6" presetClass="emph" presetSubtype="0" fill="hold" grpId="1" nodeType="withEffect">
                                   <p:stCondLst>
                                     <p:cond delay="1800"/>
                                   </p:stCondLst>
                                   <p:childTnLst>
                                     <p:animScale>
                                       <p:cBhvr>
-                                        <p:cTn id="54" dur="400" autoRev="1" fill="hold"/>
+                                        <p:cTn id="53" dur="400" autoRev="1" fill="hold"/>
                                         <p:tgtEl>
                                           <p:spTgt spid="7"/>
                                         </p:tgtEl>
@@ -30560,33 +29990,17 @@
                                       <p:by x="118000" y="118000"/>
                                     </p:animScale>
                                   </p:childTnLst>
-                                  <p:subTnLst>
-                                    <p:audio>
-                                      <p:cMediaNode vol="80000" showWhenStopped="0">
-                                        <p:cTn id="55" display="0" masterRel="sameClick">
-                                          <p:stCondLst>
-                                            <p:cond evt="onBegin" delay="0">
-                                              <p:tn val="53"/>
-                                            </p:cond>
-                                          </p:stCondLst>
-                                        </p:cTn>
-                                        <p:tgtEl>
-                                          <p:sndTgt r:embed="rId14" name="pop.wav"/>
-                                        </p:tgtEl>
-                                      </p:cMediaNode>
-                                    </p:audio>
-                                  </p:subTnLst>
                                 </p:cTn>
                               </p:par>
                               <p:par>
-                                <p:cTn id="56" presetID="10" presetClass="entr" presetSubtype="0" fill="hold" grpId="0" nodeType="withEffect">
+                                <p:cTn id="54" presetID="10" presetClass="entr" presetSubtype="0" fill="hold" grpId="0" nodeType="withEffect">
                                   <p:stCondLst>
                                     <p:cond delay="1800"/>
                                   </p:stCondLst>
                                   <p:childTnLst>
                                     <p:set>
                                       <p:cBhvr>
-                                        <p:cTn id="57" dur="1" fill="hold">
+                                        <p:cTn id="55" dur="1" fill="hold">
                                           <p:stCondLst>
                                             <p:cond delay="0"/>
                                           </p:stCondLst>
@@ -30604,7 +30018,7 @@
                                     </p:set>
                                     <p:animEffect transition="in" filter="fade">
                                       <p:cBhvr>
-                                        <p:cTn id="58" dur="400"/>
+                                        <p:cTn id="56" dur="400"/>
                                         <p:tgtEl>
                                           <p:spTgt spid="22"/>
                                         </p:tgtEl>
@@ -30620,26 +30034,26 @@
                     </p:cTn>
                   </p:par>
                   <p:par>
-                    <p:cTn id="59" fill="hold">
+                    <p:cTn id="57" fill="hold">
                       <p:stCondLst>
                         <p:cond delay="indefinite"/>
                       </p:stCondLst>
                       <p:childTnLst>
                         <p:par>
-                          <p:cTn id="60" fill="hold">
+                          <p:cTn id="58" fill="hold">
                             <p:stCondLst>
                               <p:cond delay="0"/>
                             </p:stCondLst>
                             <p:childTnLst>
                               <p:par>
-                                <p:cTn id="61" presetID="53" presetClass="entr" presetSubtype="16" fill="hold" grpId="0" nodeType="clickEffect">
+                                <p:cTn id="59" presetID="53" presetClass="entr" presetSubtype="16" fill="hold" grpId="0" nodeType="clickEffect">
                                   <p:stCondLst>
                                     <p:cond delay="0"/>
                                   </p:stCondLst>
                                   <p:childTnLst>
                                     <p:set>
                                       <p:cBhvr>
-                                        <p:cTn id="62" dur="1" fill="hold">
+                                        <p:cTn id="60" dur="1" fill="hold">
                                           <p:stCondLst>
                                             <p:cond delay="0"/>
                                           </p:stCondLst>
@@ -30657,7 +30071,7 @@
                                     </p:set>
                                     <p:anim calcmode="lin" valueType="num">
                                       <p:cBhvr additive="base">
-                                        <p:cTn id="63" dur="300" fill="hold"/>
+                                        <p:cTn id="61" dur="300" fill="hold"/>
                                         <p:tgtEl>
                                           <p:spTgt spid="14"/>
                                         </p:tgtEl>
@@ -30680,7 +30094,7 @@
                                     </p:anim>
                                     <p:anim calcmode="lin" valueType="num">
                                       <p:cBhvr additive="base">
-                                        <p:cTn id="64" dur="300" fill="hold"/>
+                                        <p:cTn id="62" dur="300" fill="hold"/>
                                         <p:tgtEl>
                                           <p:spTgt spid="14"/>
                                         </p:tgtEl>
@@ -30703,7 +30117,7 @@
                                     </p:anim>
                                     <p:animEffect transition="in" filter="fade">
                                       <p:cBhvr>
-                                        <p:cTn id="65" dur="300"/>
+                                        <p:cTn id="63" dur="300"/>
                                         <p:tgtEl>
                                           <p:spTgt spid="14"/>
                                         </p:tgtEl>
@@ -30713,14 +30127,14 @@
                                 </p:cTn>
                               </p:par>
                               <p:par>
-                                <p:cTn id="66" presetID="0" presetClass="path" presetSubtype="0" fill="hold" grpId="1" nodeType="withEffect">
+                                <p:cTn id="64" presetID="0" presetClass="path" presetSubtype="0" fill="hold" grpId="1" nodeType="withEffect">
                                   <p:stCondLst>
                                     <p:cond delay="300"/>
                                   </p:stCondLst>
                                   <p:childTnLst>
                                     <p:animMotion origin="layout" path="M 0 0 L 0.1167 0.1292 E" pathEditMode="relative" ptsTypes="">
                                       <p:cBhvr>
-                                        <p:cTn id="67" dur="1500" fill="hold" accel="40000" decel="40000"/>
+                                        <p:cTn id="65" dur="1500" fill="hold" accel="40000" decel="40000"/>
                                         <p:tgtEl>
                                           <p:spTgt spid="14"/>
                                         </p:tgtEl>
@@ -30735,14 +30149,14 @@
                                 </p:cTn>
                               </p:par>
                               <p:par>
-                                <p:cTn id="68" presetID="10" presetClass="exit" presetSubtype="0" fill="hold" grpId="2" nodeType="withEffect">
+                                <p:cTn id="66" presetID="10" presetClass="exit" presetSubtype="0" fill="hold" grpId="2" nodeType="withEffect">
                                   <p:stCondLst>
                                     <p:cond delay="1900"/>
                                   </p:stCondLst>
                                   <p:childTnLst>
                                     <p:animEffect transition="out" filter="fade">
                                       <p:cBhvr>
-                                        <p:cTn id="69" dur="300"/>
+                                        <p:cTn id="67" dur="300"/>
                                         <p:tgtEl>
                                           <p:spTgt spid="14"/>
                                         </p:tgtEl>
@@ -30750,7 +30164,7 @@
                                     </p:animEffect>
                                     <p:set>
                                       <p:cBhvr>
-                                        <p:cTn id="70" dur="1" fill="hold">
+                                        <p:cTn id="68" dur="1" fill="hold">
                                           <p:stCondLst>
                                             <p:cond delay="299"/>
                                           </p:stCondLst>
@@ -30770,14 +30184,14 @@
                                 </p:cTn>
                               </p:par>
                               <p:par>
-                                <p:cTn id="71" presetID="53" presetClass="entr" presetSubtype="16" fill="hold" grpId="0" nodeType="withEffect">
+                                <p:cTn id="69" presetID="53" presetClass="entr" presetSubtype="16" fill="hold" grpId="0" nodeType="withEffect">
                                   <p:stCondLst>
                                     <p:cond delay="0"/>
                                   </p:stCondLst>
                                   <p:childTnLst>
                                     <p:set>
                                       <p:cBhvr>
-                                        <p:cTn id="72" dur="1" fill="hold">
+                                        <p:cTn id="70" dur="1" fill="hold">
                                           <p:stCondLst>
                                             <p:cond delay="0"/>
                                           </p:stCondLst>
@@ -30795,7 +30209,7 @@
                                     </p:set>
                                     <p:anim calcmode="lin" valueType="num">
                                       <p:cBhvr additive="base">
-                                        <p:cTn id="73" dur="300" fill="hold"/>
+                                        <p:cTn id="71" dur="300" fill="hold"/>
                                         <p:tgtEl>
                                           <p:spTgt spid="15"/>
                                         </p:tgtEl>
@@ -30818,7 +30232,7 @@
                                     </p:anim>
                                     <p:anim calcmode="lin" valueType="num">
                                       <p:cBhvr additive="base">
-                                        <p:cTn id="74" dur="300" fill="hold"/>
+                                        <p:cTn id="72" dur="300" fill="hold"/>
                                         <p:tgtEl>
                                           <p:spTgt spid="15"/>
                                         </p:tgtEl>
@@ -30841,7 +30255,7 @@
                                     </p:anim>
                                     <p:animEffect transition="in" filter="fade">
                                       <p:cBhvr>
-                                        <p:cTn id="75" dur="300"/>
+                                        <p:cTn id="73" dur="300"/>
                                         <p:tgtEl>
                                           <p:spTgt spid="15"/>
                                         </p:tgtEl>
@@ -30851,14 +30265,14 @@
                                 </p:cTn>
                               </p:par>
                               <p:par>
-                                <p:cTn id="76" presetID="0" presetClass="path" presetSubtype="0" fill="hold" grpId="1" nodeType="withEffect">
+                                <p:cTn id="74" presetID="0" presetClass="path" presetSubtype="0" fill="hold" grpId="1" nodeType="withEffect">
                                   <p:stCondLst>
                                     <p:cond delay="300"/>
                                   </p:stCondLst>
                                   <p:childTnLst>
                                     <p:animMotion origin="layout" path="M 0 0 L -0.1079 0.2114 E" pathEditMode="relative" ptsTypes="">
                                       <p:cBhvr>
-                                        <p:cTn id="77" dur="1500" fill="hold" accel="40000" decel="40000"/>
+                                        <p:cTn id="75" dur="1500" fill="hold" accel="40000" decel="40000"/>
                                         <p:tgtEl>
                                           <p:spTgt spid="15"/>
                                         </p:tgtEl>
@@ -30873,14 +30287,14 @@
                                 </p:cTn>
                               </p:par>
                               <p:par>
-                                <p:cTn id="78" presetID="10" presetClass="exit" presetSubtype="0" fill="hold" grpId="2" nodeType="withEffect">
+                                <p:cTn id="76" presetID="10" presetClass="exit" presetSubtype="0" fill="hold" grpId="2" nodeType="withEffect">
                                   <p:stCondLst>
                                     <p:cond delay="1900"/>
                                   </p:stCondLst>
                                   <p:childTnLst>
                                     <p:animEffect transition="out" filter="fade">
                                       <p:cBhvr>
-                                        <p:cTn id="79" dur="300"/>
+                                        <p:cTn id="77" dur="300"/>
                                         <p:tgtEl>
                                           <p:spTgt spid="15"/>
                                         </p:tgtEl>
@@ -30888,7 +30302,7 @@
                                     </p:animEffect>
                                     <p:set>
                                       <p:cBhvr>
-                                        <p:cTn id="80" dur="1" fill="hold">
+                                        <p:cTn id="78" dur="1" fill="hold">
                                           <p:stCondLst>
                                             <p:cond delay="299"/>
                                           </p:stCondLst>
@@ -30908,14 +30322,14 @@
                                 </p:cTn>
                               </p:par>
                               <p:par>
-                                <p:cTn id="81" presetID="53" presetClass="entr" presetSubtype="16" fill="hold" grpId="0" nodeType="withEffect">
+                                <p:cTn id="79" presetID="53" presetClass="entr" presetSubtype="16" fill="hold" grpId="0" nodeType="withEffect">
                                   <p:stCondLst>
                                     <p:cond delay="0"/>
                                   </p:stCondLst>
                                   <p:childTnLst>
                                     <p:set>
                                       <p:cBhvr>
-                                        <p:cTn id="82" dur="1" fill="hold">
+                                        <p:cTn id="80" dur="1" fill="hold">
                                           <p:stCondLst>
                                             <p:cond delay="0"/>
                                           </p:stCondLst>
@@ -30933,7 +30347,7 @@
                                     </p:set>
                                     <p:anim calcmode="lin" valueType="num">
                                       <p:cBhvr additive="base">
-                                        <p:cTn id="83" dur="300" fill="hold"/>
+                                        <p:cTn id="81" dur="300" fill="hold"/>
                                         <p:tgtEl>
                                           <p:spTgt spid="16"/>
                                         </p:tgtEl>
@@ -30956,7 +30370,7 @@
                                     </p:anim>
                                     <p:anim calcmode="lin" valueType="num">
                                       <p:cBhvr additive="base">
-                                        <p:cTn id="84" dur="300" fill="hold"/>
+                                        <p:cTn id="82" dur="300" fill="hold"/>
                                         <p:tgtEl>
                                           <p:spTgt spid="16"/>
                                         </p:tgtEl>
@@ -30979,7 +30393,7 @@
                                     </p:anim>
                                     <p:animEffect transition="in" filter="fade">
                                       <p:cBhvr>
-                                        <p:cTn id="85" dur="300"/>
+                                        <p:cTn id="83" dur="300"/>
                                         <p:tgtEl>
                                           <p:spTgt spid="16"/>
                                         </p:tgtEl>
@@ -30989,14 +30403,14 @@
                                 </p:cTn>
                               </p:par>
                               <p:par>
-                                <p:cTn id="86" presetID="0" presetClass="path" presetSubtype="0" fill="hold" grpId="1" nodeType="withEffect">
+                                <p:cTn id="84" presetID="0" presetClass="path" presetSubtype="0" fill="hold" grpId="1" nodeType="withEffect">
                                   <p:stCondLst>
                                     <p:cond delay="300"/>
                                   </p:stCondLst>
                                   <p:childTnLst>
                                     <p:animMotion origin="layout" path="M 0 0 L -0.0683 -0.1762 E" pathEditMode="relative" ptsTypes="">
                                       <p:cBhvr>
-                                        <p:cTn id="87" dur="1500" fill="hold" accel="40000" decel="40000"/>
+                                        <p:cTn id="85" dur="1500" fill="hold" accel="40000" decel="40000"/>
                                         <p:tgtEl>
                                           <p:spTgt spid="16"/>
                                         </p:tgtEl>
@@ -31011,14 +30425,14 @@
                                 </p:cTn>
                               </p:par>
                               <p:par>
-                                <p:cTn id="88" presetID="10" presetClass="exit" presetSubtype="0" fill="hold" grpId="2" nodeType="withEffect">
+                                <p:cTn id="86" presetID="10" presetClass="exit" presetSubtype="0" fill="hold" grpId="2" nodeType="withEffect">
                                   <p:stCondLst>
                                     <p:cond delay="1900"/>
                                   </p:stCondLst>
                                   <p:childTnLst>
                                     <p:animEffect transition="out" filter="fade">
                                       <p:cBhvr>
-                                        <p:cTn id="89" dur="300"/>
+                                        <p:cTn id="87" dur="300"/>
                                         <p:tgtEl>
                                           <p:spTgt spid="16"/>
                                         </p:tgtEl>
@@ -31026,7 +30440,7 @@
                                     </p:animEffect>
                                     <p:set>
                                       <p:cBhvr>
-                                        <p:cTn id="90" dur="1" fill="hold">
+                                        <p:cTn id="88" dur="1" fill="hold">
                                           <p:stCondLst>
                                             <p:cond delay="299"/>
                                           </p:stCondLst>
@@ -31042,6 +30456,24 @@
                                         <p:strVal val="hidden"/>
                                       </p:to>
                                     </p:set>
+                                  </p:childTnLst>
+                                </p:cTn>
+                              </p:par>
+                              <p:par>
+                                <p:cTn id="89" presetID="6" presetClass="emph" presetSubtype="0" fill="hold" grpId="1" nodeType="withEffect">
+                                  <p:stCondLst>
+                                    <p:cond delay="1800"/>
+                                  </p:stCondLst>
+                                  <p:childTnLst>
+                                    <p:animScale>
+                                      <p:cBhvr>
+                                        <p:cTn id="90" dur="400" autoRev="1" fill="hold"/>
+                                        <p:tgtEl>
+                                          <p:spTgt spid="8"/>
+                                        </p:tgtEl>
+                                      </p:cBhvr>
+                                      <p:by x="118000" y="118000"/>
+                                    </p:animScale>
                                   </p:childTnLst>
                                 </p:cTn>
                               </p:par>
@@ -31055,40 +30487,6 @@
                                       <p:cBhvr>
                                         <p:cTn id="92" dur="400" autoRev="1" fill="hold"/>
                                         <p:tgtEl>
-                                          <p:spTgt spid="8"/>
-                                        </p:tgtEl>
-                                      </p:cBhvr>
-                                      <p:by x="118000" y="118000"/>
-                                    </p:animScale>
-                                  </p:childTnLst>
-                                  <p:subTnLst>
-                                    <p:audio>
-                                      <p:cMediaNode vol="80000" showWhenStopped="0">
-                                        <p:cTn id="93" display="0" masterRel="sameClick">
-                                          <p:stCondLst>
-                                            <p:cond evt="onBegin" delay="0">
-                                              <p:tn val="91"/>
-                                            </p:cond>
-                                          </p:stCondLst>
-                                        </p:cTn>
-                                        <p:tgtEl>
-                                          <p:sndTgt r:embed="rId15" name="sparkle.wav"/>
-                                        </p:tgtEl>
-                                      </p:cMediaNode>
-                                    </p:audio>
-                                  </p:subTnLst>
-                                </p:cTn>
-                              </p:par>
-                              <p:par>
-                                <p:cTn id="94" presetID="6" presetClass="emph" presetSubtype="0" fill="hold" grpId="1" nodeType="withEffect">
-                                  <p:stCondLst>
-                                    <p:cond delay="1800"/>
-                                  </p:stCondLst>
-                                  <p:childTnLst>
-                                    <p:animScale>
-                                      <p:cBhvr>
-                                        <p:cTn id="95" dur="400" autoRev="1" fill="hold"/>
-                                        <p:tgtEl>
                                           <p:spTgt spid="9"/>
                                         </p:tgtEl>
                                       </p:cBhvr>
@@ -31098,14 +30496,14 @@
                                 </p:cTn>
                               </p:par>
                               <p:par>
-                                <p:cTn id="96" presetID="6" presetClass="emph" presetSubtype="0" fill="hold" grpId="1" nodeType="withEffect">
+                                <p:cTn id="93" presetID="6" presetClass="emph" presetSubtype="0" fill="hold" grpId="1" nodeType="withEffect">
                                   <p:stCondLst>
                                     <p:cond delay="1800"/>
                                   </p:stCondLst>
                                   <p:childTnLst>
                                     <p:animScale>
                                       <p:cBhvr>
-                                        <p:cTn id="97" dur="400" autoRev="1" fill="hold"/>
+                                        <p:cTn id="94" dur="400" autoRev="1" fill="hold"/>
                                         <p:tgtEl>
                                           <p:spTgt spid="10"/>
                                         </p:tgtEl>
@@ -31116,14 +30514,14 @@
                                 </p:cTn>
                               </p:par>
                               <p:par>
-                                <p:cTn id="98" presetID="10" presetClass="entr" presetSubtype="0" fill="hold" grpId="0" nodeType="withEffect">
+                                <p:cTn id="95" presetID="10" presetClass="entr" presetSubtype="0" fill="hold" grpId="0" nodeType="withEffect">
                                   <p:stCondLst>
                                     <p:cond delay="1800"/>
                                   </p:stCondLst>
                                   <p:childTnLst>
                                     <p:set>
                                       <p:cBhvr>
-                                        <p:cTn id="99" dur="1" fill="hold">
+                                        <p:cTn id="96" dur="1" fill="hold">
                                           <p:stCondLst>
                                             <p:cond delay="0"/>
                                           </p:stCondLst>
@@ -31141,7 +30539,7 @@
                                     </p:set>
                                     <p:animEffect transition="in" filter="fade">
                                       <p:cBhvr>
-                                        <p:cTn id="100" dur="400"/>
+                                        <p:cTn id="97" dur="400"/>
                                         <p:tgtEl>
                                           <p:spTgt spid="23"/>
                                         </p:tgtEl>
@@ -31157,26 +30555,26 @@
                     </p:cTn>
                   </p:par>
                   <p:par>
-                    <p:cTn id="101" fill="hold">
+                    <p:cTn id="98" fill="hold">
                       <p:stCondLst>
                         <p:cond delay="indefinite"/>
                       </p:stCondLst>
                       <p:childTnLst>
                         <p:par>
-                          <p:cTn id="102" fill="hold">
+                          <p:cTn id="99" fill="hold">
                             <p:stCondLst>
                               <p:cond delay="0"/>
                             </p:stCondLst>
                             <p:childTnLst>
                               <p:par>
-                                <p:cTn id="103" presetID="53" presetClass="entr" presetSubtype="16" fill="hold" grpId="0" nodeType="clickEffect">
+                                <p:cTn id="100" presetID="53" presetClass="entr" presetSubtype="16" fill="hold" grpId="0" nodeType="clickEffect">
                                   <p:stCondLst>
                                     <p:cond delay="0"/>
                                   </p:stCondLst>
                                   <p:childTnLst>
                                     <p:set>
                                       <p:cBhvr>
-                                        <p:cTn id="104" dur="1" fill="hold">
+                                        <p:cTn id="101" dur="1" fill="hold">
                                           <p:stCondLst>
                                             <p:cond delay="0"/>
                                           </p:stCondLst>
@@ -31194,7 +30592,7 @@
                                     </p:set>
                                     <p:anim calcmode="lin" valueType="num">
                                       <p:cBhvr additive="base">
-                                        <p:cTn id="105" dur="300" fill="hold"/>
+                                        <p:cTn id="102" dur="300" fill="hold"/>
                                         <p:tgtEl>
                                           <p:spTgt spid="17"/>
                                         </p:tgtEl>
@@ -31217,7 +30615,7 @@
                                     </p:anim>
                                     <p:anim calcmode="lin" valueType="num">
                                       <p:cBhvr additive="base">
-                                        <p:cTn id="106" dur="300" fill="hold"/>
+                                        <p:cTn id="103" dur="300" fill="hold"/>
                                         <p:tgtEl>
                                           <p:spTgt spid="17"/>
                                         </p:tgtEl>
@@ -31240,7 +30638,7 @@
                                     </p:anim>
                                     <p:animEffect transition="in" filter="fade">
                                       <p:cBhvr>
-                                        <p:cTn id="107" dur="300"/>
+                                        <p:cTn id="104" dur="300"/>
                                         <p:tgtEl>
                                           <p:spTgt spid="17"/>
                                         </p:tgtEl>
@@ -31250,14 +30648,14 @@
                                 </p:cTn>
                               </p:par>
                               <p:par>
-                                <p:cTn id="108" presetID="0" presetClass="path" presetSubtype="0" fill="hold" grpId="1" nodeType="withEffect">
+                                <p:cTn id="105" presetID="0" presetClass="path" presetSubtype="0" fill="hold" grpId="1" nodeType="withEffect">
                                   <p:stCondLst>
                                     <p:cond delay="300"/>
                                   </p:stCondLst>
                                   <p:childTnLst>
                                     <p:animMotion origin="layout" path="M 0 0 L 0.0758 0.2710 E" pathEditMode="relative" ptsTypes="">
                                       <p:cBhvr>
-                                        <p:cTn id="109" dur="1500" fill="hold" accel="40000" decel="40000"/>
+                                        <p:cTn id="106" dur="1500" fill="hold" accel="40000" decel="40000"/>
                                         <p:tgtEl>
                                           <p:spTgt spid="17"/>
                                         </p:tgtEl>
@@ -31272,14 +30670,14 @@
                                 </p:cTn>
                               </p:par>
                               <p:par>
-                                <p:cTn id="110" presetID="10" presetClass="exit" presetSubtype="0" fill="hold" grpId="2" nodeType="withEffect">
+                                <p:cTn id="107" presetID="10" presetClass="exit" presetSubtype="0" fill="hold" grpId="2" nodeType="withEffect">
                                   <p:stCondLst>
                                     <p:cond delay="1900"/>
                                   </p:stCondLst>
                                   <p:childTnLst>
                                     <p:animEffect transition="out" filter="fade">
                                       <p:cBhvr>
-                                        <p:cTn id="111" dur="300"/>
+                                        <p:cTn id="108" dur="300"/>
                                         <p:tgtEl>
                                           <p:spTgt spid="17"/>
                                         </p:tgtEl>
@@ -31287,7 +30685,7 @@
                                     </p:animEffect>
                                     <p:set>
                                       <p:cBhvr>
-                                        <p:cTn id="112" dur="1" fill="hold">
+                                        <p:cTn id="109" dur="1" fill="hold">
                                           <p:stCondLst>
                                             <p:cond delay="299"/>
                                           </p:stCondLst>
@@ -31307,14 +30705,14 @@
                                 </p:cTn>
                               </p:par>
                               <p:par>
-                                <p:cTn id="113" presetID="53" presetClass="entr" presetSubtype="16" fill="hold" grpId="0" nodeType="withEffect">
+                                <p:cTn id="110" presetID="53" presetClass="entr" presetSubtype="16" fill="hold" grpId="0" nodeType="withEffect">
                                   <p:stCondLst>
                                     <p:cond delay="0"/>
                                   </p:stCondLst>
                                   <p:childTnLst>
                                     <p:set>
                                       <p:cBhvr>
-                                        <p:cTn id="114" dur="1" fill="hold">
+                                        <p:cTn id="111" dur="1" fill="hold">
                                           <p:stCondLst>
                                             <p:cond delay="0"/>
                                           </p:stCondLst>
@@ -31332,7 +30730,7 @@
                                     </p:set>
                                     <p:anim calcmode="lin" valueType="num">
                                       <p:cBhvr additive="base">
-                                        <p:cTn id="115" dur="300" fill="hold"/>
+                                        <p:cTn id="112" dur="300" fill="hold"/>
                                         <p:tgtEl>
                                           <p:spTgt spid="18"/>
                                         </p:tgtEl>
@@ -31355,7 +30753,7 @@
                                     </p:anim>
                                     <p:anim calcmode="lin" valueType="num">
                                       <p:cBhvr additive="base">
-                                        <p:cTn id="116" dur="300" fill="hold"/>
+                                        <p:cTn id="113" dur="300" fill="hold"/>
                                         <p:tgtEl>
                                           <p:spTgt spid="18"/>
                                         </p:tgtEl>
@@ -31378,7 +30776,7 @@
                                     </p:anim>
                                     <p:animEffect transition="in" filter="fade">
                                       <p:cBhvr>
-                                        <p:cTn id="117" dur="300"/>
+                                        <p:cTn id="114" dur="300"/>
                                         <p:tgtEl>
                                           <p:spTgt spid="18"/>
                                         </p:tgtEl>
@@ -31388,14 +30786,14 @@
                                 </p:cTn>
                               </p:par>
                               <p:par>
-                                <p:cTn id="118" presetID="0" presetClass="path" presetSubtype="0" fill="hold" grpId="1" nodeType="withEffect">
+                                <p:cTn id="115" presetID="0" presetClass="path" presetSubtype="0" fill="hold" grpId="1" nodeType="withEffect">
                                   <p:stCondLst>
                                     <p:cond delay="300"/>
                                   </p:stCondLst>
                                   <p:childTnLst>
                                     <p:animMotion origin="layout" path="M 0 0 L 0.3004 0.1887 E" pathEditMode="relative" ptsTypes="">
                                       <p:cBhvr>
-                                        <p:cTn id="119" dur="1500" fill="hold" accel="40000" decel="40000"/>
+                                        <p:cTn id="116" dur="1500" fill="hold" accel="40000" decel="40000"/>
                                         <p:tgtEl>
                                           <p:spTgt spid="18"/>
                                         </p:tgtEl>
@@ -31410,14 +30808,14 @@
                                 </p:cTn>
                               </p:par>
                               <p:par>
-                                <p:cTn id="120" presetID="10" presetClass="exit" presetSubtype="0" fill="hold" grpId="2" nodeType="withEffect">
+                                <p:cTn id="117" presetID="10" presetClass="exit" presetSubtype="0" fill="hold" grpId="2" nodeType="withEffect">
                                   <p:stCondLst>
                                     <p:cond delay="1900"/>
                                   </p:stCondLst>
                                   <p:childTnLst>
                                     <p:animEffect transition="out" filter="fade">
                                       <p:cBhvr>
-                                        <p:cTn id="121" dur="300"/>
+                                        <p:cTn id="118" dur="300"/>
                                         <p:tgtEl>
                                           <p:spTgt spid="18"/>
                                         </p:tgtEl>
@@ -31425,7 +30823,7 @@
                                     </p:animEffect>
                                     <p:set>
                                       <p:cBhvr>
-                                        <p:cTn id="122" dur="1" fill="hold">
+                                        <p:cTn id="119" dur="1" fill="hold">
                                           <p:stCondLst>
                                             <p:cond delay="299"/>
                                           </p:stCondLst>
@@ -31445,14 +30843,14 @@
                                 </p:cTn>
                               </p:par>
                               <p:par>
-                                <p:cTn id="123" presetID="53" presetClass="entr" presetSubtype="16" fill="hold" grpId="0" nodeType="withEffect">
+                                <p:cTn id="120" presetID="53" presetClass="entr" presetSubtype="16" fill="hold" grpId="0" nodeType="withEffect">
                                   <p:stCondLst>
                                     <p:cond delay="0"/>
                                   </p:stCondLst>
                                   <p:childTnLst>
                                     <p:set>
                                       <p:cBhvr>
-                                        <p:cTn id="124" dur="1" fill="hold">
+                                        <p:cTn id="121" dur="1" fill="hold">
                                           <p:stCondLst>
                                             <p:cond delay="0"/>
                                           </p:stCondLst>
@@ -31470,7 +30868,7 @@
                                     </p:set>
                                     <p:anim calcmode="lin" valueType="num">
                                       <p:cBhvr additive="base">
-                                        <p:cTn id="125" dur="300" fill="hold"/>
+                                        <p:cTn id="122" dur="300" fill="hold"/>
                                         <p:tgtEl>
                                           <p:spTgt spid="19"/>
                                         </p:tgtEl>
@@ -31493,7 +30891,7 @@
                                     </p:anim>
                                     <p:anim calcmode="lin" valueType="num">
                                       <p:cBhvr additive="base">
-                                        <p:cTn id="126" dur="300" fill="hold"/>
+                                        <p:cTn id="123" dur="300" fill="hold"/>
                                         <p:tgtEl>
                                           <p:spTgt spid="19"/>
                                         </p:tgtEl>
@@ -31516,7 +30914,7 @@
                                     </p:anim>
                                     <p:animEffect transition="in" filter="fade">
                                       <p:cBhvr>
-                                        <p:cTn id="127" dur="300"/>
+                                        <p:cTn id="124" dur="300"/>
                                         <p:tgtEl>
                                           <p:spTgt spid="19"/>
                                         </p:tgtEl>
@@ -31526,14 +30924,14 @@
                                 </p:cTn>
                               </p:par>
                               <p:par>
-                                <p:cTn id="128" presetID="0" presetClass="path" presetSubtype="0" fill="hold" grpId="1" nodeType="withEffect">
+                                <p:cTn id="125" presetID="0" presetClass="path" presetSubtype="0" fill="hold" grpId="1" nodeType="withEffect">
                                   <p:stCondLst>
                                     <p:cond delay="300"/>
                                   </p:stCondLst>
                                   <p:childTnLst>
                                     <p:animMotion origin="layout" path="M 0 0 L 0.2608 0.5764 E" pathEditMode="relative" ptsTypes="">
                                       <p:cBhvr>
-                                        <p:cTn id="129" dur="1500" fill="hold" accel="40000" decel="40000"/>
+                                        <p:cTn id="126" dur="1500" fill="hold" accel="40000" decel="40000"/>
                                         <p:tgtEl>
                                           <p:spTgt spid="19"/>
                                         </p:tgtEl>
@@ -31548,14 +30946,14 @@
                                 </p:cTn>
                               </p:par>
                               <p:par>
-                                <p:cTn id="130" presetID="10" presetClass="exit" presetSubtype="0" fill="hold" grpId="2" nodeType="withEffect">
+                                <p:cTn id="127" presetID="10" presetClass="exit" presetSubtype="0" fill="hold" grpId="2" nodeType="withEffect">
                                   <p:stCondLst>
                                     <p:cond delay="1900"/>
                                   </p:stCondLst>
                                   <p:childTnLst>
                                     <p:animEffect transition="out" filter="fade">
                                       <p:cBhvr>
-                                        <p:cTn id="131" dur="300"/>
+                                        <p:cTn id="128" dur="300"/>
                                         <p:tgtEl>
                                           <p:spTgt spid="19"/>
                                         </p:tgtEl>
@@ -31563,7 +30961,7 @@
                                     </p:animEffect>
                                     <p:set>
                                       <p:cBhvr>
-                                        <p:cTn id="132" dur="1" fill="hold">
+                                        <p:cTn id="129" dur="1" fill="hold">
                                           <p:stCondLst>
                                             <p:cond delay="299"/>
                                           </p:stCondLst>
@@ -31583,14 +30981,14 @@
                                 </p:cTn>
                               </p:par>
                               <p:par>
-                                <p:cTn id="133" presetID="6" presetClass="emph" presetSubtype="0" fill="hold" grpId="1" nodeType="withEffect" repeatCount="2000">
+                                <p:cTn id="130" presetID="6" presetClass="emph" presetSubtype="0" fill="hold" grpId="1" nodeType="withEffect" repeatCount="2000">
                                   <p:stCondLst>
                                     <p:cond delay="1800"/>
                                   </p:stCondLst>
                                   <p:childTnLst>
                                     <p:animScale>
                                       <p:cBhvr>
-                                        <p:cTn id="134" dur="500" autoRev="1" fill="hold"/>
+                                        <p:cTn id="131" dur="500" autoRev="1" fill="hold"/>
                                         <p:tgtEl>
                                           <p:spTgt spid="11"/>
                                         </p:tgtEl>
@@ -31600,16 +30998,16 @@
                                   </p:childTnLst>
                                   <p:subTnLst>
                                     <p:audio>
-                                      <p:cMediaNode vol="80000" showWhenStopped="0">
-                                        <p:cTn id="135" display="0" masterRel="sameClick">
+                                      <p:cMediaNode vol="50000" showWhenStopped="0">
+                                        <p:cTn id="132" display="0" masterRel="sameClick">
                                           <p:stCondLst>
                                             <p:cond evt="onBegin" delay="0">
-                                              <p:tn val="133"/>
+                                              <p:tn val="130"/>
                                             </p:cond>
                                           </p:stCondLst>
                                         </p:cTn>
                                         <p:tgtEl>
-                                          <p:sndTgt r:embed="rId16" name="chime.wav"/>
+                                          <p:sndTgt r:embed="rId14" name="chime.wav"/>
                                         </p:tgtEl>
                                       </p:cMediaNode>
                                     </p:audio>
@@ -31617,14 +31015,14 @@
                                 </p:cTn>
                               </p:par>
                               <p:par>
-                                <p:cTn id="136" presetID="10" presetClass="entr" presetSubtype="0" fill="hold" grpId="0" nodeType="withEffect">
+                                <p:cTn id="133" presetID="10" presetClass="entr" presetSubtype="0" fill="hold" grpId="0" nodeType="withEffect">
                                   <p:stCondLst>
                                     <p:cond delay="1800"/>
                                   </p:stCondLst>
                                   <p:childTnLst>
                                     <p:set>
                                       <p:cBhvr>
-                                        <p:cTn id="137" dur="1" fill="hold">
+                                        <p:cTn id="134" dur="1" fill="hold">
                                           <p:stCondLst>
                                             <p:cond delay="0"/>
                                           </p:stCondLst>
@@ -31642,7 +31040,7 @@
                                     </p:set>
                                     <p:animEffect transition="in" filter="fade">
                                       <p:cBhvr>
-                                        <p:cTn id="138" dur="400"/>
+                                        <p:cTn id="135" dur="400"/>
                                         <p:tgtEl>
                                           <p:spTgt spid="24"/>
                                         </p:tgtEl>
@@ -32416,11 +31814,6 @@
   </p:clrMapOvr>
   <p:transition spd="med">
     <p:push/>
-    <p:sndAc>
-      <p:stSnd>
-        <p:snd r:embed="rId6" name="whoosh.wav"/>
-      </p:stSnd>
-    </p:sndAc>
   </p:transition>
   <p:timing>
     <p:tnLst>
@@ -32560,7 +31953,7 @@
                                   </p:childTnLst>
                                   <p:subTnLst>
                                     <p:audio>
-                                      <p:cMediaNode vol="80000" showWhenStopped="0">
+                                      <p:cMediaNode vol="50000" showWhenStopped="0">
                                         <p:cTn id="14" display="0" masterRel="sameClick">
                                           <p:stCondLst>
                                             <p:cond evt="onBegin" delay="0">
@@ -32569,7 +31962,7 @@
                                           </p:stCondLst>
                                         </p:cTn>
                                         <p:tgtEl>
-                                          <p:sndTgt r:embed="rId7" name="chime.wav"/>
+                                          <p:sndTgt r:embed="rId6" name="chime.wav"/>
                                         </p:tgtEl>
                                       </p:cMediaNode>
                                     </p:audio>
@@ -32652,7 +32045,7 @@
                                   </p:childTnLst>
                                   <p:subTnLst>
                                     <p:audio>
-                                      <p:cMediaNode vol="80000" showWhenStopped="0">
+                                      <p:cMediaNode vol="50000" showWhenStopped="0">
                                         <p:cTn id="21" display="0" masterRel="sameClick">
                                           <p:stCondLst>
                                             <p:cond evt="onBegin" delay="0">
@@ -32661,7 +32054,7 @@
                                           </p:stCondLst>
                                         </p:cTn>
                                         <p:tgtEl>
-                                          <p:sndTgt r:embed="rId7" name="chime.wav"/>
+                                          <p:sndTgt r:embed="rId6" name="chime.wav"/>
                                         </p:tgtEl>
                                       </p:cMediaNode>
                                     </p:audio>
@@ -32744,7 +32137,7 @@
                                   </p:childTnLst>
                                   <p:subTnLst>
                                     <p:audio>
-                                      <p:cMediaNode vol="80000" showWhenStopped="0">
+                                      <p:cMediaNode vol="50000" showWhenStopped="0">
                                         <p:cTn id="28" display="0" masterRel="sameClick">
                                           <p:stCondLst>
                                             <p:cond evt="onBegin" delay="0">
@@ -32753,7 +32146,7 @@
                                           </p:stCondLst>
                                         </p:cTn>
                                         <p:tgtEl>
-                                          <p:sndTgt r:embed="rId7" name="chime.wav"/>
+                                          <p:sndTgt r:embed="rId6" name="chime.wav"/>
                                         </p:tgtEl>
                                       </p:cMediaNode>
                                     </p:audio>
@@ -33739,7 +33132,7 @@
                                   </p:childTnLst>
                                   <p:subTnLst>
                                     <p:audio>
-                                      <p:cMediaNode vol="80000" showWhenStopped="0">
+                                      <p:cMediaNode vol="50000" showWhenStopped="0">
                                         <p:cTn id="8" display="0" masterRel="sameClick">
                                           <p:stCondLst>
                                             <p:cond evt="onBegin" delay="0">
@@ -33831,7 +33224,7 @@
                                   </p:childTnLst>
                                   <p:subTnLst>
                                     <p:audio>
-                                      <p:cMediaNode vol="80000" showWhenStopped="0">
+                                      <p:cMediaNode vol="50000" showWhenStopped="0">
                                         <p:cTn id="15" display="0" masterRel="sameClick">
                                           <p:stCondLst>
                                             <p:cond evt="onBegin" delay="0">
@@ -33923,7 +33316,7 @@
                                   </p:childTnLst>
                                   <p:subTnLst>
                                     <p:audio>
-                                      <p:cMediaNode vol="80000" showWhenStopped="0">
+                                      <p:cMediaNode vol="50000" showWhenStopped="0">
                                         <p:cTn id="22" display="0" masterRel="sameClick">
                                           <p:stCondLst>
                                             <p:cond evt="onBegin" delay="0">
@@ -34015,7 +33408,7 @@
                                   </p:childTnLst>
                                   <p:subTnLst>
                                     <p:audio>
-                                      <p:cMediaNode vol="80000" showWhenStopped="0">
+                                      <p:cMediaNode vol="50000" showWhenStopped="0">
                                         <p:cTn id="29" display="0" masterRel="sameClick">
                                           <p:stCondLst>
                                             <p:cond evt="onBegin" delay="0">
@@ -34879,7 +34272,7 @@
                                   </p:childTnLst>
                                   <p:subTnLst>
                                     <p:audio>
-                                      <p:cMediaNode vol="80000" showWhenStopped="0">
+                                      <p:cMediaNode vol="50000" showWhenStopped="0">
                                         <p:cTn id="9" display="0" masterRel="sameClick">
                                           <p:stCondLst>
                                             <p:cond evt="onBegin" delay="0">
@@ -34985,7 +34378,7 @@
                                   </p:childTnLst>
                                   <p:subTnLst>
                                     <p:audio>
-                                      <p:cMediaNode vol="80000" showWhenStopped="0">
+                                      <p:cMediaNode vol="50000" showWhenStopped="0">
                                         <p:cTn id="16" display="0" masterRel="sameClick">
                                           <p:stCondLst>
                                             <p:cond evt="onBegin" delay="0">
@@ -35337,22 +34730,6 @@
                                       </p:cBhvr>
                                     </p:animEffect>
                                   </p:childTnLst>
-                                  <p:subTnLst>
-                                    <p:audio>
-                                      <p:cMediaNode vol="80000" showWhenStopped="0">
-                                        <p:cTn id="47" display="0" masterRel="sameClick">
-                                          <p:stCondLst>
-                                            <p:cond evt="onBegin" delay="0">
-                                              <p:tn val="44"/>
-                                            </p:cond>
-                                          </p:stCondLst>
-                                        </p:cTn>
-                                        <p:tgtEl>
-                                          <p:sndTgt r:embed="rId8" name="pop.wav"/>
-                                        </p:tgtEl>
-                                      </p:cMediaNode>
-                                    </p:audio>
-                                  </p:subTnLst>
                                 </p:cTn>
                               </p:par>
                             </p:childTnLst>
@@ -35362,26 +34739,26 @@
                     </p:cTn>
                   </p:par>
                   <p:par>
-                    <p:cTn id="48" fill="hold">
+                    <p:cTn id="47" fill="hold">
                       <p:stCondLst>
                         <p:cond delay="indefinite"/>
                       </p:stCondLst>
                       <p:childTnLst>
                         <p:par>
-                          <p:cTn id="49" fill="hold">
+                          <p:cTn id="48" fill="hold">
                             <p:stCondLst>
                               <p:cond delay="0"/>
                             </p:stCondLst>
                             <p:childTnLst>
                               <p:par>
-                                <p:cTn id="50" presetID="10" presetClass="entr" presetSubtype="0" fill="hold" grpId="0" nodeType="clickEffect">
+                                <p:cTn id="49" presetID="10" presetClass="entr" presetSubtype="0" fill="hold" grpId="0" nodeType="clickEffect">
                                   <p:stCondLst>
                                     <p:cond delay="0"/>
                                   </p:stCondLst>
                                   <p:childTnLst>
                                     <p:set>
                                       <p:cBhvr>
-                                        <p:cTn id="51" dur="1" fill="hold">
+                                        <p:cTn id="50" dur="1" fill="hold">
                                           <p:stCondLst>
                                             <p:cond delay="0"/>
                                           </p:stCondLst>
@@ -35399,29 +34776,13 @@
                                     </p:set>
                                     <p:animEffect transition="in" filter="fade">
                                       <p:cBhvr>
-                                        <p:cTn id="52" dur="500"/>
+                                        <p:cTn id="51" dur="500"/>
                                         <p:tgtEl>
                                           <p:spTgt spid="13"/>
                                         </p:tgtEl>
                                       </p:cBhvr>
                                     </p:animEffect>
                                   </p:childTnLst>
-                                  <p:subTnLst>
-                                    <p:audio>
-                                      <p:cMediaNode vol="80000" showWhenStopped="0">
-                                        <p:cTn id="53" display="0" masterRel="sameClick">
-                                          <p:stCondLst>
-                                            <p:cond evt="onBegin" delay="0">
-                                              <p:tn val="50"/>
-                                            </p:cond>
-                                          </p:stCondLst>
-                                        </p:cTn>
-                                        <p:tgtEl>
-                                          <p:sndTgt r:embed="rId8" name="pop.wav"/>
-                                        </p:tgtEl>
-                                      </p:cMediaNode>
-                                    </p:audio>
-                                  </p:subTnLst>
                                 </p:cTn>
                               </p:par>
                             </p:childTnLst>
@@ -35431,26 +34792,26 @@
                     </p:cTn>
                   </p:par>
                   <p:par>
-                    <p:cTn id="54" fill="hold">
+                    <p:cTn id="52" fill="hold">
                       <p:stCondLst>
                         <p:cond delay="indefinite"/>
                       </p:stCondLst>
                       <p:childTnLst>
                         <p:par>
-                          <p:cTn id="55" fill="hold">
+                          <p:cTn id="53" fill="hold">
                             <p:stCondLst>
                               <p:cond delay="0"/>
                             </p:stCondLst>
                             <p:childTnLst>
                               <p:par>
-                                <p:cTn id="56" presetID="10" presetClass="entr" presetSubtype="0" fill="hold" grpId="0" nodeType="clickEffect">
+                                <p:cTn id="54" presetID="10" presetClass="entr" presetSubtype="0" fill="hold" grpId="0" nodeType="clickEffect">
                                   <p:stCondLst>
                                     <p:cond delay="0"/>
                                   </p:stCondLst>
                                   <p:childTnLst>
                                     <p:set>
                                       <p:cBhvr>
-                                        <p:cTn id="57" dur="1" fill="hold">
+                                        <p:cTn id="55" dur="1" fill="hold">
                                           <p:stCondLst>
                                             <p:cond delay="0"/>
                                           </p:stCondLst>
@@ -35468,29 +34829,13 @@
                                     </p:set>
                                     <p:animEffect transition="in" filter="fade">
                                       <p:cBhvr>
-                                        <p:cTn id="58" dur="500"/>
+                                        <p:cTn id="56" dur="500"/>
                                         <p:tgtEl>
                                           <p:spTgt spid="14"/>
                                         </p:tgtEl>
                                       </p:cBhvr>
                                     </p:animEffect>
                                   </p:childTnLst>
-                                  <p:subTnLst>
-                                    <p:audio>
-                                      <p:cMediaNode vol="80000" showWhenStopped="0">
-                                        <p:cTn id="59" display="0" masterRel="sameClick">
-                                          <p:stCondLst>
-                                            <p:cond evt="onBegin" delay="0">
-                                              <p:tn val="56"/>
-                                            </p:cond>
-                                          </p:stCondLst>
-                                        </p:cTn>
-                                        <p:tgtEl>
-                                          <p:sndTgt r:embed="rId8" name="pop.wav"/>
-                                        </p:tgtEl>
-                                      </p:cMediaNode>
-                                    </p:audio>
-                                  </p:subTnLst>
                                 </p:cTn>
                               </p:par>
                             </p:childTnLst>
@@ -35500,26 +34845,26 @@
                     </p:cTn>
                   </p:par>
                   <p:par>
-                    <p:cTn id="60" fill="hold">
+                    <p:cTn id="57" fill="hold">
                       <p:stCondLst>
                         <p:cond delay="indefinite"/>
                       </p:stCondLst>
                       <p:childTnLst>
                         <p:par>
-                          <p:cTn id="61" fill="hold">
+                          <p:cTn id="58" fill="hold">
                             <p:stCondLst>
                               <p:cond delay="0"/>
                             </p:stCondLst>
                             <p:childTnLst>
                               <p:par>
-                                <p:cTn id="62" presetID="10" presetClass="entr" presetSubtype="0" fill="hold" grpId="0" nodeType="clickEffect">
+                                <p:cTn id="59" presetID="10" presetClass="entr" presetSubtype="0" fill="hold" grpId="0" nodeType="clickEffect">
                                   <p:stCondLst>
                                     <p:cond delay="0"/>
                                   </p:stCondLst>
                                   <p:childTnLst>
                                     <p:set>
                                       <p:cBhvr>
-                                        <p:cTn id="63" dur="1" fill="hold">
+                                        <p:cTn id="60" dur="1" fill="hold">
                                           <p:stCondLst>
                                             <p:cond delay="0"/>
                                           </p:stCondLst>
@@ -35537,7 +34882,7 @@
                                     </p:set>
                                     <p:animEffect transition="in" filter="fade">
                                       <p:cBhvr>
-                                        <p:cTn id="64" dur="500"/>
+                                        <p:cTn id="61" dur="500"/>
                                         <p:tgtEl>
                                           <p:spTgt spid="15"/>
                                         </p:tgtEl>
@@ -35546,11 +34891,11 @@
                                   </p:childTnLst>
                                   <p:subTnLst>
                                     <p:audio>
-                                      <p:cMediaNode vol="80000" showWhenStopped="0">
-                                        <p:cTn id="65" display="0" masterRel="sameClick">
+                                      <p:cMediaNode vol="50000" showWhenStopped="0">
+                                        <p:cTn id="62" display="0" masterRel="sameClick">
                                           <p:stCondLst>
                                             <p:cond evt="onBegin" delay="0">
-                                              <p:tn val="62"/>
+                                              <p:tn val="59"/>
                                             </p:cond>
                                           </p:stCondLst>
                                         </p:cTn>
@@ -36326,7 +35671,7 @@
                                   </p:childTnLst>
                                   <p:subTnLst>
                                     <p:audio>
-                                      <p:cMediaNode vol="80000" showWhenStopped="0">
+                                      <p:cMediaNode vol="50000" showWhenStopped="0">
                                         <p:cTn id="8" display="0" masterRel="sameClick">
                                           <p:stCondLst>
                                             <p:cond evt="onBegin" delay="0">
@@ -36395,7 +35740,7 @@
                                   </p:childTnLst>
                                   <p:subTnLst>
                                     <p:audio>
-                                      <p:cMediaNode vol="80000" showWhenStopped="0">
+                                      <p:cMediaNode vol="50000" showWhenStopped="0">
                                         <p:cTn id="14" display="0" masterRel="sameClick">
                                           <p:stCondLst>
                                             <p:cond evt="onBegin" delay="0">
@@ -36464,7 +35809,7 @@
                                   </p:childTnLst>
                                   <p:subTnLst>
                                     <p:audio>
-                                      <p:cMediaNode vol="80000" showWhenStopped="0">
+                                      <p:cMediaNode vol="50000" showWhenStopped="0">
                                         <p:cTn id="20" display="0" masterRel="sameClick">
                                           <p:stCondLst>
                                             <p:cond evt="onBegin" delay="0">
@@ -37033,22 +36378,6 @@
                                       </p:cBhvr>
                                     </p:animEffect>
                                   </p:childTnLst>
-                                  <p:subTnLst>
-                                    <p:audio>
-                                      <p:cMediaNode vol="80000" showWhenStopped="0">
-                                        <p:cTn id="8" display="0" masterRel="sameClick">
-                                          <p:stCondLst>
-                                            <p:cond evt="onBegin" delay="0">
-                                              <p:tn val="5"/>
-                                            </p:cond>
-                                          </p:stCondLst>
-                                        </p:cTn>
-                                        <p:tgtEl>
-                                          <p:sndTgt r:embed="rId6" name="pop.wav"/>
-                                        </p:tgtEl>
-                                      </p:cMediaNode>
-                                    </p:audio>
-                                  </p:subTnLst>
                                 </p:cTn>
                               </p:par>
                             </p:childTnLst>
@@ -37058,26 +36387,26 @@
                     </p:cTn>
                   </p:par>
                   <p:par>
-                    <p:cTn id="9" fill="hold">
+                    <p:cTn id="8" fill="hold">
                       <p:stCondLst>
                         <p:cond delay="indefinite"/>
                       </p:stCondLst>
                       <p:childTnLst>
                         <p:par>
-                          <p:cTn id="10" fill="hold">
+                          <p:cTn id="9" fill="hold">
                             <p:stCondLst>
                               <p:cond delay="0"/>
                             </p:stCondLst>
                             <p:childTnLst>
                               <p:par>
-                                <p:cTn id="11" presetID="10" presetClass="entr" presetSubtype="0" fill="hold" grpId="0" nodeType="clickEffect">
+                                <p:cTn id="10" presetID="10" presetClass="entr" presetSubtype="0" fill="hold" grpId="0" nodeType="clickEffect">
                                   <p:stCondLst>
                                     <p:cond delay="0"/>
                                   </p:stCondLst>
                                   <p:childTnLst>
                                     <p:set>
                                       <p:cBhvr>
-                                        <p:cTn id="12" dur="1" fill="hold">
+                                        <p:cTn id="11" dur="1" fill="hold">
                                           <p:stCondLst>
                                             <p:cond delay="0"/>
                                           </p:stCondLst>
@@ -37095,29 +36424,13 @@
                                     </p:set>
                                     <p:animEffect transition="in" filter="fade">
                                       <p:cBhvr>
-                                        <p:cTn id="13" dur="500"/>
+                                        <p:cTn id="12" dur="500"/>
                                         <p:tgtEl>
                                           <p:spTgt spid="5"/>
                                         </p:tgtEl>
                                       </p:cBhvr>
                                     </p:animEffect>
                                   </p:childTnLst>
-                                  <p:subTnLst>
-                                    <p:audio>
-                                      <p:cMediaNode vol="80000" showWhenStopped="0">
-                                        <p:cTn id="14" display="0" masterRel="sameClick">
-                                          <p:stCondLst>
-                                            <p:cond evt="onBegin" delay="0">
-                                              <p:tn val="11"/>
-                                            </p:cond>
-                                          </p:stCondLst>
-                                        </p:cTn>
-                                        <p:tgtEl>
-                                          <p:sndTgt r:embed="rId6" name="pop.wav"/>
-                                        </p:tgtEl>
-                                      </p:cMediaNode>
-                                    </p:audio>
-                                  </p:subTnLst>
                                 </p:cTn>
                               </p:par>
                             </p:childTnLst>
@@ -37127,26 +36440,26 @@
                     </p:cTn>
                   </p:par>
                   <p:par>
-                    <p:cTn id="15" fill="hold">
+                    <p:cTn id="13" fill="hold">
                       <p:stCondLst>
                         <p:cond delay="indefinite"/>
                       </p:stCondLst>
                       <p:childTnLst>
                         <p:par>
-                          <p:cTn id="16" fill="hold">
+                          <p:cTn id="14" fill="hold">
                             <p:stCondLst>
                               <p:cond delay="0"/>
                             </p:stCondLst>
                             <p:childTnLst>
                               <p:par>
-                                <p:cTn id="17" presetID="10" presetClass="entr" presetSubtype="0" fill="hold" grpId="0" nodeType="clickEffect">
+                                <p:cTn id="15" presetID="10" presetClass="entr" presetSubtype="0" fill="hold" grpId="0" nodeType="clickEffect">
                                   <p:stCondLst>
                                     <p:cond delay="0"/>
                                   </p:stCondLst>
                                   <p:childTnLst>
                                     <p:set>
                                       <p:cBhvr>
-                                        <p:cTn id="18" dur="1" fill="hold">
+                                        <p:cTn id="16" dur="1" fill="hold">
                                           <p:stCondLst>
                                             <p:cond delay="0"/>
                                           </p:stCondLst>
@@ -37164,29 +36477,13 @@
                                     </p:set>
                                     <p:animEffect transition="in" filter="fade">
                                       <p:cBhvr>
-                                        <p:cTn id="19" dur="500"/>
+                                        <p:cTn id="17" dur="500"/>
                                         <p:tgtEl>
                                           <p:spTgt spid="6"/>
                                         </p:tgtEl>
                                       </p:cBhvr>
                                     </p:animEffect>
                                   </p:childTnLst>
-                                  <p:subTnLst>
-                                    <p:audio>
-                                      <p:cMediaNode vol="80000" showWhenStopped="0">
-                                        <p:cTn id="20" display="0" masterRel="sameClick">
-                                          <p:stCondLst>
-                                            <p:cond evt="onBegin" delay="0">
-                                              <p:tn val="17"/>
-                                            </p:cond>
-                                          </p:stCondLst>
-                                        </p:cTn>
-                                        <p:tgtEl>
-                                          <p:sndTgt r:embed="rId6" name="pop.wav"/>
-                                        </p:tgtEl>
-                                      </p:cMediaNode>
-                                    </p:audio>
-                                  </p:subTnLst>
                                 </p:cTn>
                               </p:par>
                             </p:childTnLst>
@@ -37196,26 +36493,26 @@
                     </p:cTn>
                   </p:par>
                   <p:par>
-                    <p:cTn id="21" fill="hold">
+                    <p:cTn id="18" fill="hold">
                       <p:stCondLst>
                         <p:cond delay="indefinite"/>
                       </p:stCondLst>
                       <p:childTnLst>
                         <p:par>
-                          <p:cTn id="22" fill="hold">
+                          <p:cTn id="19" fill="hold">
                             <p:stCondLst>
                               <p:cond delay="0"/>
                             </p:stCondLst>
                             <p:childTnLst>
                               <p:par>
-                                <p:cTn id="23" presetID="10" presetClass="entr" presetSubtype="0" fill="hold" grpId="0" nodeType="clickEffect">
+                                <p:cTn id="20" presetID="10" presetClass="entr" presetSubtype="0" fill="hold" grpId="0" nodeType="clickEffect">
                                   <p:stCondLst>
                                     <p:cond delay="0"/>
                                   </p:stCondLst>
                                   <p:childTnLst>
                                     <p:set>
                                       <p:cBhvr>
-                                        <p:cTn id="24" dur="1" fill="hold">
+                                        <p:cTn id="21" dur="1" fill="hold">
                                           <p:stCondLst>
                                             <p:cond delay="0"/>
                                           </p:stCondLst>
@@ -37233,7 +36530,7 @@
                                     </p:set>
                                     <p:animEffect transition="in" filter="fade">
                                       <p:cBhvr>
-                                        <p:cTn id="25" dur="500"/>
+                                        <p:cTn id="22" dur="500"/>
                                         <p:tgtEl>
                                           <p:spTgt spid="7"/>
                                         </p:tgtEl>
@@ -37970,7 +37267,7 @@
                                   </p:childTnLst>
                                   <p:subTnLst>
                                     <p:audio>
-                                      <p:cMediaNode vol="80000" showWhenStopped="0">
+                                      <p:cMediaNode vol="50000" showWhenStopped="0">
                                         <p:cTn id="21" display="0" masterRel="sameClick">
                                           <p:stCondLst>
                                             <p:cond evt="onBegin" delay="0">
@@ -38581,7 +37878,7 @@
                                   </p:childTnLst>
                                   <p:subTnLst>
                                     <p:audio>
-                                      <p:cMediaNode vol="80000" showWhenStopped="0">
+                                      <p:cMediaNode vol="50000" showWhenStopped="0">
                                         <p:cTn id="8" display="0" masterRel="sameClick">
                                           <p:stCondLst>
                                             <p:cond evt="onBegin" delay="0">
@@ -38650,7 +37947,7 @@
                                   </p:childTnLst>
                                   <p:subTnLst>
                                     <p:audio>
-                                      <p:cMediaNode vol="80000" showWhenStopped="0">
+                                      <p:cMediaNode vol="50000" showWhenStopped="0">
                                         <p:cTn id="14" display="0" masterRel="sameClick">
                                           <p:stCondLst>
                                             <p:cond evt="onBegin" delay="0">
@@ -38717,33 +38014,17 @@
                                       </p:cBhvr>
                                     </p:animEffect>
                                   </p:childTnLst>
-                                  <p:subTnLst>
-                                    <p:audio>
-                                      <p:cMediaNode vol="80000" showWhenStopped="0">
-                                        <p:cTn id="20" display="0" masterRel="sameClick">
-                                          <p:stCondLst>
-                                            <p:cond evt="onBegin" delay="0">
-                                              <p:tn val="17"/>
-                                            </p:cond>
-                                          </p:stCondLst>
-                                        </p:cTn>
-                                        <p:tgtEl>
-                                          <p:sndTgt r:embed="rId7" name="sparkle.wav"/>
-                                        </p:tgtEl>
-                                      </p:cMediaNode>
-                                    </p:audio>
-                                  </p:subTnLst>
                                 </p:cTn>
                               </p:par>
                               <p:par>
-                                <p:cTn id="21" presetID="10" presetClass="entr" presetSubtype="0" fill="hold" grpId="0" nodeType="withEffect">
+                                <p:cTn id="20" presetID="10" presetClass="entr" presetSubtype="0" fill="hold" grpId="0" nodeType="withEffect">
                                   <p:stCondLst>
                                     <p:cond delay="0"/>
                                   </p:stCondLst>
                                   <p:childTnLst>
                                     <p:set>
                                       <p:cBhvr>
-                                        <p:cTn id="22" dur="1" fill="hold">
+                                        <p:cTn id="21" dur="1" fill="hold">
                                           <p:stCondLst>
                                             <p:cond delay="0"/>
                                           </p:stCondLst>
@@ -38761,7 +38042,7 @@
                                     </p:set>
                                     <p:animEffect transition="in" filter="fade">
                                       <p:cBhvr>
-                                        <p:cTn id="23" dur="500"/>
+                                        <p:cTn id="22" dur="500"/>
                                         <p:tgtEl>
                                           <p:spTgt spid="9"/>
                                         </p:tgtEl>
@@ -39677,7 +38958,7 @@
                                   </p:childTnLst>
                                   <p:subTnLst>
                                     <p:audio>
-                                      <p:cMediaNode vol="80000" showWhenStopped="0">
+                                      <p:cMediaNode vol="50000" showWhenStopped="0">
                                         <p:cTn id="8" display="0" masterRel="sameClick">
                                           <p:stCondLst>
                                             <p:cond evt="onBegin" delay="0">
@@ -39746,7 +39027,7 @@
                                   </p:childTnLst>
                                   <p:subTnLst>
                                     <p:audio>
-                                      <p:cMediaNode vol="80000" showWhenStopped="0">
+                                      <p:cMediaNode vol="50000" showWhenStopped="0">
                                         <p:cTn id="14" display="0" masterRel="sameClick">
                                           <p:stCondLst>
                                             <p:cond evt="onBegin" delay="0">
@@ -39815,7 +39096,7 @@
                                   </p:childTnLst>
                                   <p:subTnLst>
                                     <p:audio>
-                                      <p:cMediaNode vol="80000" showWhenStopped="0">
+                                      <p:cMediaNode vol="50000" showWhenStopped="0">
                                         <p:cTn id="20" display="0" masterRel="sameClick">
                                           <p:stCondLst>
                                             <p:cond evt="onBegin" delay="0">
@@ -39884,7 +39165,7 @@
                                   </p:childTnLst>
                                   <p:subTnLst>
                                     <p:audio>
-                                      <p:cMediaNode vol="80000" showWhenStopped="0">
+                                      <p:cMediaNode vol="50000" showWhenStopped="0">
                                         <p:cTn id="26" display="0" masterRel="sameClick">
                                           <p:stCondLst>
                                             <p:cond evt="onBegin" delay="0">
@@ -41292,22 +40573,6 @@
                                       </p:cBhvr>
                                     </p:animEffect>
                                   </p:childTnLst>
-                                  <p:subTnLst>
-                                    <p:audio>
-                                      <p:cMediaNode vol="80000" showWhenStopped="0">
-                                        <p:cTn id="8" display="0" masterRel="sameClick">
-                                          <p:stCondLst>
-                                            <p:cond evt="onBegin" delay="0">
-                                              <p:tn val="5"/>
-                                            </p:cond>
-                                          </p:stCondLst>
-                                        </p:cTn>
-                                        <p:tgtEl>
-                                          <p:sndTgt r:embed="rId5" name="pop.wav"/>
-                                        </p:tgtEl>
-                                      </p:cMediaNode>
-                                    </p:audio>
-                                  </p:subTnLst>
                                 </p:cTn>
                               </p:par>
                             </p:childTnLst>
@@ -41317,26 +40582,26 @@
                     </p:cTn>
                   </p:par>
                   <p:par>
-                    <p:cTn id="9" fill="hold">
+                    <p:cTn id="8" fill="hold">
                       <p:stCondLst>
                         <p:cond delay="indefinite"/>
                       </p:stCondLst>
                       <p:childTnLst>
                         <p:par>
-                          <p:cTn id="10" fill="hold">
+                          <p:cTn id="9" fill="hold">
                             <p:stCondLst>
                               <p:cond delay="0"/>
                             </p:stCondLst>
                             <p:childTnLst>
                               <p:par>
-                                <p:cTn id="11" presetID="10" presetClass="entr" presetSubtype="0" fill="hold" grpId="0" nodeType="clickEffect">
+                                <p:cTn id="10" presetID="10" presetClass="entr" presetSubtype="0" fill="hold" grpId="0" nodeType="clickEffect">
                                   <p:stCondLst>
                                     <p:cond delay="0"/>
                                   </p:stCondLst>
                                   <p:childTnLst>
                                     <p:set>
                                       <p:cBhvr>
-                                        <p:cTn id="12" dur="1" fill="hold">
+                                        <p:cTn id="11" dur="1" fill="hold">
                                           <p:stCondLst>
                                             <p:cond delay="0"/>
                                           </p:stCondLst>
@@ -41354,40 +40619,24 @@
                                     </p:set>
                                     <p:animEffect transition="in" filter="fade">
                                       <p:cBhvr>
-                                        <p:cTn id="13" dur="500"/>
+                                        <p:cTn id="12" dur="500"/>
                                         <p:tgtEl>
                                           <p:spTgt spid="10"/>
                                         </p:tgtEl>
                                       </p:cBhvr>
                                     </p:animEffect>
                                   </p:childTnLst>
-                                  <p:subTnLst>
-                                    <p:audio>
-                                      <p:cMediaNode vol="80000" showWhenStopped="0">
-                                        <p:cTn id="14" display="0" masterRel="sameClick">
-                                          <p:stCondLst>
-                                            <p:cond evt="onBegin" delay="0">
-                                              <p:tn val="11"/>
-                                            </p:cond>
-                                          </p:stCondLst>
-                                        </p:cTn>
-                                        <p:tgtEl>
-                                          <p:sndTgt r:embed="rId5" name="pop.wav"/>
-                                        </p:tgtEl>
-                                      </p:cMediaNode>
-                                    </p:audio>
-                                  </p:subTnLst>
                                 </p:cTn>
                               </p:par>
                               <p:par>
-                                <p:cTn id="15" presetID="10" presetClass="entr" presetSubtype="0" fill="hold" grpId="0" nodeType="withEffect">
+                                <p:cTn id="13" presetID="10" presetClass="entr" presetSubtype="0" fill="hold" grpId="0" nodeType="withEffect">
                                   <p:stCondLst>
                                     <p:cond delay="0"/>
                                   </p:stCondLst>
                                   <p:childTnLst>
                                     <p:set>
                                       <p:cBhvr>
-                                        <p:cTn id="16" dur="1" fill="hold">
+                                        <p:cTn id="14" dur="1" fill="hold">
                                           <p:stCondLst>
                                             <p:cond delay="0"/>
                                           </p:stCondLst>
@@ -41405,7 +40654,7 @@
                                     </p:set>
                                     <p:animEffect transition="in" filter="fade">
                                       <p:cBhvr>
-                                        <p:cTn id="17" dur="500"/>
+                                        <p:cTn id="15" dur="500"/>
                                         <p:tgtEl>
                                           <p:spTgt spid="13"/>
                                         </p:tgtEl>
@@ -41421,26 +40670,26 @@
                     </p:cTn>
                   </p:par>
                   <p:par>
-                    <p:cTn id="18" fill="hold">
+                    <p:cTn id="16" fill="hold">
                       <p:stCondLst>
                         <p:cond delay="indefinite"/>
                       </p:stCondLst>
                       <p:childTnLst>
                         <p:par>
-                          <p:cTn id="19" fill="hold">
+                          <p:cTn id="17" fill="hold">
                             <p:stCondLst>
                               <p:cond delay="0"/>
                             </p:stCondLst>
                             <p:childTnLst>
                               <p:par>
-                                <p:cTn id="20" presetID="10" presetClass="entr" presetSubtype="0" fill="hold" grpId="0" nodeType="clickEffect">
+                                <p:cTn id="18" presetID="10" presetClass="entr" presetSubtype="0" fill="hold" grpId="0" nodeType="clickEffect">
                                   <p:stCondLst>
                                     <p:cond delay="0"/>
                                   </p:stCondLst>
                                   <p:childTnLst>
                                     <p:set>
                                       <p:cBhvr>
-                                        <p:cTn id="21" dur="1" fill="hold">
+                                        <p:cTn id="19" dur="1" fill="hold">
                                           <p:stCondLst>
                                             <p:cond delay="0"/>
                                           </p:stCondLst>
@@ -41458,40 +40707,24 @@
                                     </p:set>
                                     <p:animEffect transition="in" filter="fade">
                                       <p:cBhvr>
-                                        <p:cTn id="22" dur="500"/>
+                                        <p:cTn id="20" dur="500"/>
                                         <p:tgtEl>
                                           <p:spTgt spid="12"/>
                                         </p:tgtEl>
                                       </p:cBhvr>
                                     </p:animEffect>
                                   </p:childTnLst>
-                                  <p:subTnLst>
-                                    <p:audio>
-                                      <p:cMediaNode vol="80000" showWhenStopped="0">
-                                        <p:cTn id="23" display="0" masterRel="sameClick">
-                                          <p:stCondLst>
-                                            <p:cond evt="onBegin" delay="0">
-                                              <p:tn val="20"/>
-                                            </p:cond>
-                                          </p:stCondLst>
-                                        </p:cTn>
-                                        <p:tgtEl>
-                                          <p:sndTgt r:embed="rId5" name="pop.wav"/>
-                                        </p:tgtEl>
-                                      </p:cMediaNode>
-                                    </p:audio>
-                                  </p:subTnLst>
                                 </p:cTn>
                               </p:par>
                               <p:par>
-                                <p:cTn id="24" presetID="10" presetClass="entr" presetSubtype="0" fill="hold" grpId="0" nodeType="withEffect">
+                                <p:cTn id="21" presetID="10" presetClass="entr" presetSubtype="0" fill="hold" grpId="0" nodeType="withEffect">
                                   <p:stCondLst>
                                     <p:cond delay="0"/>
                                   </p:stCondLst>
                                   <p:childTnLst>
                                     <p:set>
                                       <p:cBhvr>
-                                        <p:cTn id="25" dur="1" fill="hold">
+                                        <p:cTn id="22" dur="1" fill="hold">
                                           <p:stCondLst>
                                             <p:cond delay="0"/>
                                           </p:stCondLst>
@@ -41509,7 +40742,7 @@
                                     </p:set>
                                     <p:animEffect transition="in" filter="fade">
                                       <p:cBhvr>
-                                        <p:cTn id="26" dur="500"/>
+                                        <p:cTn id="23" dur="500"/>
                                         <p:tgtEl>
                                           <p:spTgt spid="14"/>
                                         </p:tgtEl>
@@ -41525,32 +40758,67 @@
                     </p:cTn>
                   </p:par>
                   <p:par>
-                    <p:cTn id="27" fill="hold">
+                    <p:cTn id="24" fill="hold">
                       <p:stCondLst>
                         <p:cond delay="indefinite"/>
                       </p:stCondLst>
                       <p:childTnLst>
                         <p:par>
-                          <p:cTn id="28" fill="hold">
+                          <p:cTn id="25" fill="hold">
                             <p:stCondLst>
                               <p:cond delay="0"/>
                             </p:stCondLst>
                             <p:childTnLst>
                               <p:par>
-                                <p:cTn id="29" presetID="10" presetClass="entr" presetSubtype="0" fill="hold" grpId="0" nodeType="clickEffect">
+                                <p:cTn id="26" presetID="10" presetClass="entr" presetSubtype="0" fill="hold" grpId="0" nodeType="clickEffect">
                                   <p:stCondLst>
                                     <p:cond delay="0"/>
                                   </p:stCondLst>
                                   <p:childTnLst>
                                     <p:set>
                                       <p:cBhvr>
+                                        <p:cTn id="27" dur="1" fill="hold">
+                                          <p:stCondLst>
+                                            <p:cond delay="0"/>
+                                          </p:stCondLst>
+                                        </p:cTn>
+                                        <p:tgtEl>
+                                          <p:spTgt spid="17"/>
+                                        </p:tgtEl>
+                                        <p:attrNameLst>
+                                          <p:attrName>style.visibility</p:attrName>
+                                        </p:attrNameLst>
+                                      </p:cBhvr>
+                                      <p:to>
+                                        <p:strVal val="visible"/>
+                                      </p:to>
+                                    </p:set>
+                                    <p:animEffect transition="in" filter="fade">
+                                      <p:cBhvr>
+                                        <p:cTn id="28" dur="500"/>
+                                        <p:tgtEl>
+                                          <p:spTgt spid="17"/>
+                                        </p:tgtEl>
+                                      </p:cBhvr>
+                                    </p:animEffect>
+                                  </p:childTnLst>
+                                </p:cTn>
+                              </p:par>
+                              <p:par>
+                                <p:cTn id="29" presetID="10" presetClass="entr" presetSubtype="0" fill="hold" grpId="0" nodeType="withEffect">
+                                  <p:stCondLst>
+                                    <p:cond delay="0"/>
+                                  </p:stCondLst>
+                                  <p:childTnLst>
+                                    <p:set>
+                                      <p:cBhvr>
                                         <p:cTn id="30" dur="1" fill="hold">
                                           <p:stCondLst>
                                             <p:cond delay="0"/>
                                           </p:stCondLst>
                                         </p:cTn>
                                         <p:tgtEl>
-                                          <p:spTgt spid="17"/>
+                                          <p:spTgt spid="19"/>
                                         </p:tgtEl>
                                         <p:attrNameLst>
                                           <p:attrName>style.visibility</p:attrName>
@@ -41564,44 +40832,46 @@
                                       <p:cBhvr>
                                         <p:cTn id="31" dur="500"/>
                                         <p:tgtEl>
-                                          <p:spTgt spid="17"/>
+                                          <p:spTgt spid="19"/>
                                         </p:tgtEl>
                                       </p:cBhvr>
                                     </p:animEffect>
                                   </p:childTnLst>
-                                  <p:subTnLst>
-                                    <p:audio>
-                                      <p:cMediaNode vol="80000" showWhenStopped="0">
-                                        <p:cTn id="32" display="0" masterRel="sameClick">
-                                          <p:stCondLst>
-                                            <p:cond evt="onBegin" delay="0">
-                                              <p:tn val="29"/>
-                                            </p:cond>
-                                          </p:stCondLst>
-                                        </p:cTn>
-                                        <p:tgtEl>
-                                          <p:sndTgt r:embed="rId5" name="pop.wav"/>
-                                        </p:tgtEl>
-                                      </p:cMediaNode>
-                                    </p:audio>
-                                  </p:subTnLst>
                                 </p:cTn>
                               </p:par>
+                            </p:childTnLst>
+                          </p:cTn>
+                        </p:par>
+                      </p:childTnLst>
+                    </p:cTn>
+                  </p:par>
+                  <p:par>
+                    <p:cTn id="32" fill="hold">
+                      <p:stCondLst>
+                        <p:cond delay="indefinite"/>
+                      </p:stCondLst>
+                      <p:childTnLst>
+                        <p:par>
+                          <p:cTn id="33" fill="hold">
+                            <p:stCondLst>
+                              <p:cond delay="0"/>
+                            </p:stCondLst>
+                            <p:childTnLst>
                               <p:par>
-                                <p:cTn id="33" presetID="10" presetClass="entr" presetSubtype="0" fill="hold" grpId="0" nodeType="withEffect">
+                                <p:cTn id="34" presetID="10" presetClass="entr" presetSubtype="0" fill="hold" grpId="0" nodeType="clickEffect">
                                   <p:stCondLst>
                                     <p:cond delay="0"/>
                                   </p:stCondLst>
                                   <p:childTnLst>
                                     <p:set>
                                       <p:cBhvr>
-                                        <p:cTn id="34" dur="1" fill="hold">
+                                        <p:cTn id="35" dur="1" fill="hold">
                                           <p:stCondLst>
                                             <p:cond delay="0"/>
                                           </p:stCondLst>
                                         </p:cTn>
                                         <p:tgtEl>
-                                          <p:spTgt spid="19"/>
+                                          <p:spTgt spid="23"/>
                                         </p:tgtEl>
                                         <p:attrNameLst>
                                           <p:attrName>style.visibility</p:attrName>
@@ -41613,29 +40883,13 @@
                                     </p:set>
                                     <p:animEffect transition="in" filter="fade">
                                       <p:cBhvr>
-                                        <p:cTn id="35" dur="500"/>
-                                        <p:tgtEl>
-                                          <p:spTgt spid="19"/>
+                                        <p:cTn id="36" dur="500"/>
+                                        <p:tgtEl>
+                                          <p:spTgt spid="23"/>
                                         </p:tgtEl>
                                       </p:cBhvr>
                                     </p:animEffect>
                                   </p:childTnLst>
-                                  <p:subTnLst>
-                                    <p:audio>
-                                      <p:cMediaNode vol="80000" showWhenStopped="0">
-                                        <p:cTn id="36" display="0" masterRel="sameClick">
-                                          <p:stCondLst>
-                                            <p:cond evt="onBegin" delay="0">
-                                              <p:tn val="33"/>
-                                            </p:cond>
-                                          </p:stCondLst>
-                                        </p:cTn>
-                                        <p:tgtEl>
-                                          <p:sndTgt r:embed="rId5" name="pop.wav"/>
-                                        </p:tgtEl>
-                                      </p:cMediaNode>
-                                    </p:audio>
-                                  </p:subTnLst>
                                 </p:cTn>
                               </p:par>
                             </p:childTnLst>
@@ -41670,7 +40924,7 @@
                                           </p:stCondLst>
                                         </p:cTn>
                                         <p:tgtEl>
-                                          <p:spTgt spid="23"/>
+                                          <p:spTgt spid="26"/>
                                         </p:tgtEl>
                                         <p:attrNameLst>
                                           <p:attrName>style.visibility</p:attrName>
@@ -41684,27 +40938,11 @@
                                       <p:cBhvr>
                                         <p:cTn id="41" dur="500"/>
                                         <p:tgtEl>
-                                          <p:spTgt spid="23"/>
+                                          <p:spTgt spid="26"/>
                                         </p:tgtEl>
                                       </p:cBhvr>
                                     </p:animEffect>
                                   </p:childTnLst>
-                                  <p:subTnLst>
-                                    <p:audio>
-                                      <p:cMediaNode vol="80000" showWhenStopped="0">
-                                        <p:cTn id="42" display="0" masterRel="sameClick">
-                                          <p:stCondLst>
-                                            <p:cond evt="onBegin" delay="0">
-                                              <p:tn val="39"/>
-                                            </p:cond>
-                                          </p:stCondLst>
-                                        </p:cTn>
-                                        <p:tgtEl>
-                                          <p:sndTgt r:embed="rId5" name="pop.wav"/>
-                                        </p:tgtEl>
-                                      </p:cMediaNode>
-                                    </p:audio>
-                                  </p:subTnLst>
                                 </p:cTn>
                               </p:par>
                             </p:childTnLst>
@@ -41714,32 +40952,32 @@
                     </p:cTn>
                   </p:par>
                   <p:par>
-                    <p:cTn id="43" fill="hold">
+                    <p:cTn id="42" fill="hold">
                       <p:stCondLst>
                         <p:cond delay="indefinite"/>
                       </p:stCondLst>
                       <p:childTnLst>
                         <p:par>
-                          <p:cTn id="44" fill="hold">
+                          <p:cTn id="43" fill="hold">
                             <p:stCondLst>
                               <p:cond delay="0"/>
                             </p:stCondLst>
                             <p:childTnLst>
                               <p:par>
-                                <p:cTn id="45" presetID="10" presetClass="entr" presetSubtype="0" fill="hold" grpId="0" nodeType="clickEffect">
+                                <p:cTn id="44" presetID="10" presetClass="entr" presetSubtype="0" fill="hold" grpId="0" nodeType="clickEffect">
                                   <p:stCondLst>
                                     <p:cond delay="0"/>
                                   </p:stCondLst>
                                   <p:childTnLst>
                                     <p:set>
                                       <p:cBhvr>
-                                        <p:cTn id="46" dur="1" fill="hold">
+                                        <p:cTn id="45" dur="1" fill="hold">
                                           <p:stCondLst>
                                             <p:cond delay="0"/>
                                           </p:stCondLst>
                                         </p:cTn>
                                         <p:tgtEl>
-                                          <p:spTgt spid="26"/>
+                                          <p:spTgt spid="29"/>
                                         </p:tgtEl>
                                         <p:attrNameLst>
                                           <p:attrName>style.visibility</p:attrName>
@@ -41751,98 +40989,13 @@
                                     </p:set>
                                     <p:animEffect transition="in" filter="fade">
                                       <p:cBhvr>
-                                        <p:cTn id="47" dur="500"/>
-                                        <p:tgtEl>
-                                          <p:spTgt spid="26"/>
+                                        <p:cTn id="46" dur="500"/>
+                                        <p:tgtEl>
+                                          <p:spTgt spid="29"/>
                                         </p:tgtEl>
                                       </p:cBhvr>
                                     </p:animEffect>
                                   </p:childTnLst>
-                                  <p:subTnLst>
-                                    <p:audio>
-                                      <p:cMediaNode vol="80000" showWhenStopped="0">
-                                        <p:cTn id="48" display="0" masterRel="sameClick">
-                                          <p:stCondLst>
-                                            <p:cond evt="onBegin" delay="0">
-                                              <p:tn val="45"/>
-                                            </p:cond>
-                                          </p:stCondLst>
-                                        </p:cTn>
-                                        <p:tgtEl>
-                                          <p:sndTgt r:embed="rId5" name="pop.wav"/>
-                                        </p:tgtEl>
-                                      </p:cMediaNode>
-                                    </p:audio>
-                                  </p:subTnLst>
-                                </p:cTn>
-                              </p:par>
-                            </p:childTnLst>
-                          </p:cTn>
-                        </p:par>
-                      </p:childTnLst>
-                    </p:cTn>
-                  </p:par>
-                  <p:par>
-                    <p:cTn id="49" fill="hold">
-                      <p:stCondLst>
-                        <p:cond delay="indefinite"/>
-                      </p:stCondLst>
-                      <p:childTnLst>
-                        <p:par>
-                          <p:cTn id="50" fill="hold">
-                            <p:stCondLst>
-                              <p:cond delay="0"/>
-                            </p:stCondLst>
-                            <p:childTnLst>
-                              <p:par>
-                                <p:cTn id="51" presetID="10" presetClass="entr" presetSubtype="0" fill="hold" grpId="0" nodeType="clickEffect">
-                                  <p:stCondLst>
-                                    <p:cond delay="0"/>
-                                  </p:stCondLst>
-                                  <p:childTnLst>
-                                    <p:set>
-                                      <p:cBhvr>
-                                        <p:cTn id="52" dur="1" fill="hold">
-                                          <p:stCondLst>
-                                            <p:cond delay="0"/>
-                                          </p:stCondLst>
-                                        </p:cTn>
-                                        <p:tgtEl>
-                                          <p:spTgt spid="29"/>
-                                        </p:tgtEl>
-                                        <p:attrNameLst>
-                                          <p:attrName>style.visibility</p:attrName>
-                                        </p:attrNameLst>
-                                      </p:cBhvr>
-                                      <p:to>
-                                        <p:strVal val="visible"/>
-                                      </p:to>
-                                    </p:set>
-                                    <p:animEffect transition="in" filter="fade">
-                                      <p:cBhvr>
-                                        <p:cTn id="53" dur="500"/>
-                                        <p:tgtEl>
-                                          <p:spTgt spid="29"/>
-                                        </p:tgtEl>
-                                      </p:cBhvr>
-                                    </p:animEffect>
-                                  </p:childTnLst>
-                                  <p:subTnLst>
-                                    <p:audio>
-                                      <p:cMediaNode vol="80000" showWhenStopped="0">
-                                        <p:cTn id="54" display="0" masterRel="sameClick">
-                                          <p:stCondLst>
-                                            <p:cond evt="onBegin" delay="0">
-                                              <p:tn val="51"/>
-                                            </p:cond>
-                                          </p:stCondLst>
-                                        </p:cTn>
-                                        <p:tgtEl>
-                                          <p:sndTgt r:embed="rId5" name="pop.wav"/>
-                                        </p:tgtEl>
-                                      </p:cMediaNode>
-                                    </p:audio>
-                                  </p:subTnLst>
                                 </p:cTn>
                               </p:par>
                             </p:childTnLst>
@@ -42406,22 +41559,6 @@
                                       </p:cBhvr>
                                     </p:animEffect>
                                   </p:childTnLst>
-                                  <p:subTnLst>
-                                    <p:audio>
-                                      <p:cMediaNode vol="80000" showWhenStopped="0">
-                                        <p:cTn id="8" display="0" masterRel="sameClick">
-                                          <p:stCondLst>
-                                            <p:cond evt="onBegin" delay="0">
-                                              <p:tn val="5"/>
-                                            </p:cond>
-                                          </p:stCondLst>
-                                        </p:cTn>
-                                        <p:tgtEl>
-                                          <p:sndTgt r:embed="rId6" name="sparkle.wav"/>
-                                        </p:tgtEl>
-                                      </p:cMediaNode>
-                                    </p:audio>
-                                  </p:subTnLst>
                                 </p:cTn>
                               </p:par>
                             </p:childTnLst>
@@ -42431,26 +41568,26 @@
                     </p:cTn>
                   </p:par>
                   <p:par>
-                    <p:cTn id="9" fill="hold">
+                    <p:cTn id="8" fill="hold">
                       <p:stCondLst>
                         <p:cond delay="indefinite"/>
                       </p:stCondLst>
                       <p:childTnLst>
                         <p:par>
-                          <p:cTn id="10" fill="hold">
+                          <p:cTn id="9" fill="hold">
                             <p:stCondLst>
                               <p:cond delay="0"/>
                             </p:stCondLst>
                             <p:childTnLst>
                               <p:par>
-                                <p:cTn id="11" presetID="10" presetClass="entr" presetSubtype="0" fill="hold" grpId="0" nodeType="clickEffect">
+                                <p:cTn id="10" presetID="10" presetClass="entr" presetSubtype="0" fill="hold" grpId="0" nodeType="clickEffect">
                                   <p:stCondLst>
                                     <p:cond delay="0"/>
                                   </p:stCondLst>
                                   <p:childTnLst>
                                     <p:set>
                                       <p:cBhvr>
-                                        <p:cTn id="12" dur="1" fill="hold">
+                                        <p:cTn id="11" dur="1" fill="hold">
                                           <p:stCondLst>
                                             <p:cond delay="0"/>
                                           </p:stCondLst>
@@ -42468,7 +41605,7 @@
                                     </p:set>
                                     <p:animEffect transition="in" filter="fade">
                                       <p:cBhvr>
-                                        <p:cTn id="13" dur="500"/>
+                                        <p:cTn id="12" dur="500"/>
                                         <p:tgtEl>
                                           <p:spTgt spid="6"/>
                                         </p:tgtEl>
@@ -42484,26 +41621,26 @@
                     </p:cTn>
                   </p:par>
                   <p:par>
-                    <p:cTn id="14" fill="hold">
+                    <p:cTn id="13" fill="hold">
                       <p:stCondLst>
                         <p:cond delay="indefinite"/>
                       </p:stCondLst>
                       <p:childTnLst>
                         <p:par>
-                          <p:cTn id="15" fill="hold">
+                          <p:cTn id="14" fill="hold">
                             <p:stCondLst>
                               <p:cond delay="0"/>
                             </p:stCondLst>
                             <p:childTnLst>
                               <p:par>
-                                <p:cTn id="16" presetID="10" presetClass="entr" presetSubtype="0" fill="hold" grpId="0" nodeType="clickEffect">
+                                <p:cTn id="15" presetID="10" presetClass="entr" presetSubtype="0" fill="hold" grpId="0" nodeType="clickEffect">
                                   <p:stCondLst>
                                     <p:cond delay="0"/>
                                   </p:stCondLst>
                                   <p:childTnLst>
                                     <p:set>
                                       <p:cBhvr>
-                                        <p:cTn id="17" dur="1" fill="hold">
+                                        <p:cTn id="16" dur="1" fill="hold">
                                           <p:stCondLst>
                                             <p:cond delay="0"/>
                                           </p:stCondLst>
@@ -42521,7 +41658,7 @@
                                     </p:set>
                                     <p:animEffect transition="in" filter="fade">
                                       <p:cBhvr>
-                                        <p:cTn id="18" dur="500"/>
+                                        <p:cTn id="17" dur="500"/>
                                         <p:tgtEl>
                                           <p:spTgt spid="7"/>
                                         </p:tgtEl>
@@ -42939,33 +42076,17 @@
                                       </p:cBhvr>
                                     </p:animEffect>
                                   </p:childTnLst>
-                                  <p:subTnLst>
-                                    <p:audio>
-                                      <p:cMediaNode vol="80000" showWhenStopped="0">
-                                        <p:cTn id="8" display="0" masterRel="sameClick">
-                                          <p:stCondLst>
-                                            <p:cond evt="onBegin" delay="0">
-                                              <p:tn val="5"/>
-                                            </p:cond>
-                                          </p:stCondLst>
-                                        </p:cTn>
-                                        <p:tgtEl>
-                                          <p:sndTgt r:embed="rId8" name="sparkle.wav"/>
-                                        </p:tgtEl>
-                                      </p:cMediaNode>
-                                    </p:audio>
-                                  </p:subTnLst>
                                 </p:cTn>
                               </p:par>
                               <p:par>
-                                <p:cTn id="9" presetID="10" presetClass="entr" presetSubtype="0" fill="hold" grpId="0" nodeType="withEffect">
+                                <p:cTn id="8" presetID="10" presetClass="entr" presetSubtype="0" fill="hold" grpId="0" nodeType="withEffect">
                                   <p:stCondLst>
                                     <p:cond delay="0"/>
                                   </p:stCondLst>
                                   <p:childTnLst>
                                     <p:set>
                                       <p:cBhvr>
-                                        <p:cTn id="10" dur="1" fill="hold">
+                                        <p:cTn id="9" dur="1" fill="hold">
                                           <p:stCondLst>
                                             <p:cond delay="0"/>
                                           </p:stCondLst>
@@ -42983,7 +42104,7 @@
                                     </p:set>
                                     <p:animEffect transition="in" filter="fade">
                                       <p:cBhvr>
-                                        <p:cTn id="11" dur="500"/>
+                                        <p:cTn id="10" dur="500"/>
                                         <p:tgtEl>
                                           <p:spTgt spid="7"/>
                                         </p:tgtEl>
@@ -42993,14 +42114,14 @@
                                 </p:cTn>
                               </p:par>
                               <p:par>
-                                <p:cTn id="12" presetID="10" presetClass="entr" presetSubtype="0" fill="hold" grpId="0" nodeType="withEffect">
+                                <p:cTn id="11" presetID="10" presetClass="entr" presetSubtype="0" fill="hold" grpId="0" nodeType="withEffect">
                                   <p:stCondLst>
                                     <p:cond delay="0"/>
                                   </p:stCondLst>
                                   <p:childTnLst>
                                     <p:set>
                                       <p:cBhvr>
-                                        <p:cTn id="13" dur="1" fill="hold">
+                                        <p:cTn id="12" dur="1" fill="hold">
                                           <p:stCondLst>
                                             <p:cond delay="0"/>
                                           </p:stCondLst>
@@ -43018,7 +42139,7 @@
                                     </p:set>
                                     <p:animEffect transition="in" filter="fade">
                                       <p:cBhvr>
-                                        <p:cTn id="14" dur="500"/>
+                                        <p:cTn id="13" dur="500"/>
                                         <p:tgtEl>
                                           <p:spTgt spid="8"/>
                                         </p:tgtEl>
@@ -43031,20 +42152,20 @@
                           </p:cTn>
                         </p:par>
                         <p:par>
-                          <p:cTn id="15" fill="hold">
+                          <p:cTn id="14" fill="hold">
                             <p:stCondLst>
                               <p:cond delay="500"/>
                             </p:stCondLst>
                             <p:childTnLst>
                               <p:par>
-                                <p:cTn id="16" presetID="10" presetClass="entr" presetSubtype="0" fill="hold" grpId="0" nodeType="afterEffect">
+                                <p:cTn id="15" presetID="10" presetClass="entr" presetSubtype="0" fill="hold" grpId="0" nodeType="afterEffect">
                                   <p:stCondLst>
                                     <p:cond delay="0"/>
                                   </p:stCondLst>
                                   <p:childTnLst>
                                     <p:set>
                                       <p:cBhvr>
-                                        <p:cTn id="17" dur="1" fill="hold">
+                                        <p:cTn id="16" dur="1" fill="hold">
                                           <p:stCondLst>
                                             <p:cond delay="0"/>
                                           </p:stCondLst>
@@ -43062,7 +42183,7 @@
                                     </p:set>
                                     <p:animEffect transition="in" filter="fade">
                                       <p:cBhvr>
-                                        <p:cTn id="18" dur="500"/>
+                                        <p:cTn id="17" dur="500"/>
                                         <p:tgtEl>
                                           <p:spTgt spid="4"/>
                                         </p:tgtEl>
@@ -43072,14 +42193,14 @@
                                 </p:cTn>
                               </p:par>
                               <p:par>
-                                <p:cTn id="19" presetID="10" presetClass="entr" presetSubtype="0" fill="hold" grpId="0" nodeType="withEffect">
+                                <p:cTn id="18" presetID="10" presetClass="entr" presetSubtype="0" fill="hold" grpId="0" nodeType="withEffect">
                                   <p:stCondLst>
                                     <p:cond delay="0"/>
                                   </p:stCondLst>
                                   <p:childTnLst>
                                     <p:set>
                                       <p:cBhvr>
-                                        <p:cTn id="20" dur="1" fill="hold">
+                                        <p:cTn id="19" dur="1" fill="hold">
                                           <p:stCondLst>
                                             <p:cond delay="0"/>
                                           </p:stCondLst>
@@ -43097,7 +42218,7 @@
                                     </p:set>
                                     <p:animEffect transition="in" filter="fade">
                                       <p:cBhvr>
-                                        <p:cTn id="21" dur="500"/>
+                                        <p:cTn id="20" dur="500"/>
                                         <p:tgtEl>
                                           <p:spTgt spid="5"/>
                                         </p:tgtEl>
@@ -43110,20 +42231,20 @@
                           </p:cTn>
                         </p:par>
                         <p:par>
-                          <p:cTn id="22" fill="hold">
+                          <p:cTn id="21" fill="hold">
                             <p:stCondLst>
                               <p:cond delay="1000"/>
                             </p:stCondLst>
                             <p:childTnLst>
                               <p:par>
-                                <p:cTn id="23" presetID="10" presetClass="entr" presetSubtype="0" fill="hold" grpId="0" nodeType="afterEffect">
+                                <p:cTn id="22" presetID="10" presetClass="entr" presetSubtype="0" fill="hold" grpId="0" nodeType="afterEffect">
                                   <p:stCondLst>
                                     <p:cond delay="0"/>
                                   </p:stCondLst>
                                   <p:childTnLst>
                                     <p:set>
                                       <p:cBhvr>
-                                        <p:cTn id="24" dur="1" fill="hold">
+                                        <p:cTn id="23" dur="1" fill="hold">
                                           <p:stCondLst>
                                             <p:cond delay="0"/>
                                           </p:stCondLst>
@@ -43141,7 +42262,7 @@
                                     </p:set>
                                     <p:animEffect transition="in" filter="fade">
                                       <p:cBhvr>
-                                        <p:cTn id="25" dur="500"/>
+                                        <p:cTn id="24" dur="500"/>
                                         <p:tgtEl>
                                           <p:spTgt spid="6"/>
                                         </p:tgtEl>
@@ -43157,26 +42278,26 @@
                     </p:cTn>
                   </p:par>
                   <p:par>
-                    <p:cTn id="26" fill="hold">
+                    <p:cTn id="25" fill="hold">
                       <p:stCondLst>
                         <p:cond delay="indefinite"/>
                       </p:stCondLst>
                       <p:childTnLst>
                         <p:par>
-                          <p:cTn id="27" fill="hold">
+                          <p:cTn id="26" fill="hold">
                             <p:stCondLst>
                               <p:cond delay="0"/>
                             </p:stCondLst>
                             <p:childTnLst>
                               <p:par>
-                                <p:cTn id="28" presetID="0" presetClass="path" presetSubtype="0" fill="hold" grpId="0" nodeType="clickEffect">
+                                <p:cTn id="27" presetID="0" presetClass="path" presetSubtype="0" fill="hold" grpId="0" nodeType="clickEffect">
                                   <p:stCondLst>
                                     <p:cond delay="0"/>
                                   </p:stCondLst>
                                   <p:childTnLst>
                                     <p:animMotion origin="layout" path="M 0 0 L -0.85 0 E" pathEditMode="relative" ptsTypes="">
                                       <p:cBhvr>
-                                        <p:cTn id="29" dur="2600" fill="hold" accel="40000" decel="40000"/>
+                                        <p:cTn id="28" dur="2600" fill="hold" accel="40000" decel="40000"/>
                                         <p:tgtEl>
                                           <p:spTgt spid="9"/>
                                         </p:tgtEl>
@@ -43190,16 +42311,16 @@
                                   </p:childTnLst>
                                   <p:subTnLst>
                                     <p:audio>
-                                      <p:cMediaNode vol="80000" showWhenStopped="0">
-                                        <p:cTn id="30" display="0" masterRel="sameClick">
+                                      <p:cMediaNode vol="50000" showWhenStopped="0">
+                                        <p:cTn id="29" display="0" masterRel="sameClick">
                                           <p:stCondLst>
                                             <p:cond evt="onBegin" delay="0">
-                                              <p:tn val="28"/>
+                                              <p:tn val="27"/>
                                             </p:cond>
                                           </p:stCondLst>
                                         </p:cTn>
                                         <p:tgtEl>
-                                          <p:sndTgt r:embed="rId9" name="train.wav"/>
+                                          <p:sndTgt r:embed="rId8" name="train.wav"/>
                                         </p:tgtEl>
                                       </p:cMediaNode>
                                     </p:audio>
@@ -44189,22 +43310,6 @@
                                       </p:cBhvr>
                                     </p:animEffect>
                                   </p:childTnLst>
-                                  <p:subTnLst>
-                                    <p:audio>
-                                      <p:cMediaNode vol="80000" showWhenStopped="0">
-                                        <p:cTn id="8" display="0" masterRel="sameClick">
-                                          <p:stCondLst>
-                                            <p:cond evt="onBegin" delay="0">
-                                              <p:tn val="5"/>
-                                            </p:cond>
-                                          </p:stCondLst>
-                                        </p:cTn>
-                                        <p:tgtEl>
-                                          <p:sndTgt r:embed="rId5" name="pop.wav"/>
-                                        </p:tgtEl>
-                                      </p:cMediaNode>
-                                    </p:audio>
-                                  </p:subTnLst>
                                 </p:cTn>
                               </p:par>
                             </p:childTnLst>
@@ -44224,7 +43329,7 @@
               </p:nextCondLst>
             </p:seq>
             <p:seq concurrent="1" nextAc="seek">
-              <p:cTn id="9" restart="whenNotActive" fill="hold" evtFilter="cancelBubble" nodeType="interactiveSeq">
+              <p:cTn id="8" restart="whenNotActive" fill="hold" evtFilter="cancelBubble" nodeType="interactiveSeq">
                 <p:stCondLst>
                   <p:cond evt="onClick" delay="0">
                     <p:tgtEl>
@@ -44237,26 +43342,26 @@
                 </p:endSync>
                 <p:childTnLst>
                   <p:par>
-                    <p:cTn id="10" fill="hold">
+                    <p:cTn id="9" fill="hold">
                       <p:stCondLst>
                         <p:cond delay="0"/>
                       </p:stCondLst>
                       <p:childTnLst>
                         <p:par>
-                          <p:cTn id="11" fill="hold">
+                          <p:cTn id="10" fill="hold">
                             <p:stCondLst>
                               <p:cond delay="0"/>
                             </p:stCondLst>
                             <p:childTnLst>
                               <p:par>
-                                <p:cTn id="12" presetID="10" presetClass="entr" presetSubtype="0" fill="hold" grpId="0" nodeType="clickEffect">
+                                <p:cTn id="11" presetID="10" presetClass="entr" presetSubtype="0" fill="hold" grpId="0" nodeType="clickEffect">
                                   <p:stCondLst>
                                     <p:cond delay="0"/>
                                   </p:stCondLst>
                                   <p:childTnLst>
                                     <p:set>
                                       <p:cBhvr>
-                                        <p:cTn id="13" dur="1" fill="hold">
+                                        <p:cTn id="12" dur="1" fill="hold">
                                           <p:stCondLst>
                                             <p:cond delay="0"/>
                                           </p:stCondLst>
@@ -44274,29 +43379,13 @@
                                     </p:set>
                                     <p:animEffect transition="in" filter="fade">
                                       <p:cBhvr>
-                                        <p:cTn id="14" dur="500"/>
+                                        <p:cTn id="13" dur="500"/>
                                         <p:tgtEl>
                                           <p:spTgt spid="8"/>
                                         </p:tgtEl>
                                       </p:cBhvr>
                                     </p:animEffect>
                                   </p:childTnLst>
-                                  <p:subTnLst>
-                                    <p:audio>
-                                      <p:cMediaNode vol="80000" showWhenStopped="0">
-                                        <p:cTn id="15" display="0" masterRel="sameClick">
-                                          <p:stCondLst>
-                                            <p:cond evt="onBegin" delay="0">
-                                              <p:tn val="12"/>
-                                            </p:cond>
-                                          </p:stCondLst>
-                                        </p:cTn>
-                                        <p:tgtEl>
-                                          <p:sndTgt r:embed="rId5" name="pop.wav"/>
-                                        </p:tgtEl>
-                                      </p:cMediaNode>
-                                    </p:audio>
-                                  </p:subTnLst>
                                 </p:cTn>
                               </p:par>
                             </p:childTnLst>
@@ -44316,7 +43405,7 @@
               </p:nextCondLst>
             </p:seq>
             <p:seq concurrent="1" nextAc="seek">
-              <p:cTn id="16" restart="whenNotActive" fill="hold" evtFilter="cancelBubble" nodeType="interactiveSeq">
+              <p:cTn id="14" restart="whenNotActive" fill="hold" evtFilter="cancelBubble" nodeType="interactiveSeq">
                 <p:stCondLst>
                   <p:cond evt="onClick" delay="0">
                     <p:tgtEl>
@@ -44329,26 +43418,26 @@
                 </p:endSync>
                 <p:childTnLst>
                   <p:par>
-                    <p:cTn id="17" fill="hold">
+                    <p:cTn id="15" fill="hold">
                       <p:stCondLst>
                         <p:cond delay="0"/>
                       </p:stCondLst>
                       <p:childTnLst>
                         <p:par>
-                          <p:cTn id="18" fill="hold">
+                          <p:cTn id="16" fill="hold">
                             <p:stCondLst>
                               <p:cond delay="0"/>
                             </p:stCondLst>
                             <p:childTnLst>
                               <p:par>
-                                <p:cTn id="19" presetID="10" presetClass="entr" presetSubtype="0" fill="hold" grpId="0" nodeType="clickEffect">
+                                <p:cTn id="17" presetID="10" presetClass="entr" presetSubtype="0" fill="hold" grpId="0" nodeType="clickEffect">
                                   <p:stCondLst>
                                     <p:cond delay="0"/>
                                   </p:stCondLst>
                                   <p:childTnLst>
                                     <p:set>
                                       <p:cBhvr>
-                                        <p:cTn id="20" dur="1" fill="hold">
+                                        <p:cTn id="18" dur="1" fill="hold">
                                           <p:stCondLst>
                                             <p:cond delay="0"/>
                                           </p:stCondLst>
@@ -44366,29 +43455,13 @@
                                     </p:set>
                                     <p:animEffect transition="in" filter="fade">
                                       <p:cBhvr>
-                                        <p:cTn id="21" dur="500"/>
+                                        <p:cTn id="19" dur="500"/>
                                         <p:tgtEl>
                                           <p:spTgt spid="10"/>
                                         </p:tgtEl>
                                       </p:cBhvr>
                                     </p:animEffect>
                                   </p:childTnLst>
-                                  <p:subTnLst>
-                                    <p:audio>
-                                      <p:cMediaNode vol="80000" showWhenStopped="0">
-                                        <p:cTn id="22" display="0" masterRel="sameClick">
-                                          <p:stCondLst>
-                                            <p:cond evt="onBegin" delay="0">
-                                              <p:tn val="19"/>
-                                            </p:cond>
-                                          </p:stCondLst>
-                                        </p:cTn>
-                                        <p:tgtEl>
-                                          <p:sndTgt r:embed="rId5" name="pop.wav"/>
-                                        </p:tgtEl>
-                                      </p:cMediaNode>
-                                    </p:audio>
-                                  </p:subTnLst>
                                 </p:cTn>
                               </p:par>
                             </p:childTnLst>
@@ -44408,7 +43481,7 @@
               </p:nextCondLst>
             </p:seq>
             <p:seq concurrent="1" nextAc="seek">
-              <p:cTn id="23" restart="whenNotActive" fill="hold" evtFilter="cancelBubble" nodeType="interactiveSeq">
+              <p:cTn id="20" restart="whenNotActive" fill="hold" evtFilter="cancelBubble" nodeType="interactiveSeq">
                 <p:stCondLst>
                   <p:cond evt="onClick" delay="0">
                     <p:tgtEl>
@@ -44421,26 +43494,26 @@
                 </p:endSync>
                 <p:childTnLst>
                   <p:par>
-                    <p:cTn id="24" fill="hold">
+                    <p:cTn id="21" fill="hold">
                       <p:stCondLst>
                         <p:cond delay="0"/>
                       </p:stCondLst>
                       <p:childTnLst>
                         <p:par>
-                          <p:cTn id="25" fill="hold">
+                          <p:cTn id="22" fill="hold">
                             <p:stCondLst>
                               <p:cond delay="0"/>
                             </p:stCondLst>
                             <p:childTnLst>
                               <p:par>
-                                <p:cTn id="26" presetID="10" presetClass="entr" presetSubtype="0" fill="hold" grpId="0" nodeType="clickEffect">
+                                <p:cTn id="23" presetID="10" presetClass="entr" presetSubtype="0" fill="hold" grpId="0" nodeType="clickEffect">
                                   <p:stCondLst>
                                     <p:cond delay="0"/>
                                   </p:stCondLst>
                                   <p:childTnLst>
                                     <p:set>
                                       <p:cBhvr>
-                                        <p:cTn id="27" dur="1" fill="hold">
+                                        <p:cTn id="24" dur="1" fill="hold">
                                           <p:stCondLst>
                                             <p:cond delay="0"/>
                                           </p:stCondLst>
@@ -44458,29 +43531,13 @@
                                     </p:set>
                                     <p:animEffect transition="in" filter="fade">
                                       <p:cBhvr>
-                                        <p:cTn id="28" dur="500"/>
+                                        <p:cTn id="25" dur="500"/>
                                         <p:tgtEl>
                                           <p:spTgt spid="12"/>
                                         </p:tgtEl>
                                       </p:cBhvr>
                                     </p:animEffect>
                                   </p:childTnLst>
-                                  <p:subTnLst>
-                                    <p:audio>
-                                      <p:cMediaNode vol="80000" showWhenStopped="0">
-                                        <p:cTn id="29" display="0" masterRel="sameClick">
-                                          <p:stCondLst>
-                                            <p:cond evt="onBegin" delay="0">
-                                              <p:tn val="26"/>
-                                            </p:cond>
-                                          </p:stCondLst>
-                                        </p:cTn>
-                                        <p:tgtEl>
-                                          <p:sndTgt r:embed="rId5" name="pop.wav"/>
-                                        </p:tgtEl>
-                                      </p:cMediaNode>
-                                    </p:audio>
-                                  </p:subTnLst>
                                 </p:cTn>
                               </p:par>
                             </p:childTnLst>
@@ -44500,7 +43557,7 @@
               </p:nextCondLst>
             </p:seq>
             <p:seq concurrent="1" nextAc="seek">
-              <p:cTn id="30" restart="whenNotActive" fill="hold" evtFilter="cancelBubble" nodeType="interactiveSeq">
+              <p:cTn id="26" restart="whenNotActive" fill="hold" evtFilter="cancelBubble" nodeType="interactiveSeq">
                 <p:stCondLst>
                   <p:cond evt="onClick" delay="0">
                     <p:tgtEl>
@@ -44513,26 +43570,26 @@
                 </p:endSync>
                 <p:childTnLst>
                   <p:par>
-                    <p:cTn id="31" fill="hold">
+                    <p:cTn id="27" fill="hold">
                       <p:stCondLst>
                         <p:cond delay="0"/>
                       </p:stCondLst>
                       <p:childTnLst>
                         <p:par>
-                          <p:cTn id="32" fill="hold">
+                          <p:cTn id="28" fill="hold">
                             <p:stCondLst>
                               <p:cond delay="0"/>
                             </p:stCondLst>
                             <p:childTnLst>
                               <p:par>
-                                <p:cTn id="33" presetID="10" presetClass="entr" presetSubtype="0" fill="hold" grpId="0" nodeType="clickEffect">
+                                <p:cTn id="29" presetID="10" presetClass="entr" presetSubtype="0" fill="hold" grpId="0" nodeType="clickEffect">
                                   <p:stCondLst>
                                     <p:cond delay="0"/>
                                   </p:stCondLst>
                                   <p:childTnLst>
                                     <p:set>
                                       <p:cBhvr>
-                                        <p:cTn id="34" dur="1" fill="hold">
+                                        <p:cTn id="30" dur="1" fill="hold">
                                           <p:stCondLst>
                                             <p:cond delay="0"/>
                                           </p:stCondLst>
@@ -44550,29 +43607,13 @@
                                     </p:set>
                                     <p:animEffect transition="in" filter="fade">
                                       <p:cBhvr>
-                                        <p:cTn id="35" dur="500"/>
+                                        <p:cTn id="31" dur="500"/>
                                         <p:tgtEl>
                                           <p:spTgt spid="14"/>
                                         </p:tgtEl>
                                       </p:cBhvr>
                                     </p:animEffect>
                                   </p:childTnLst>
-                                  <p:subTnLst>
-                                    <p:audio>
-                                      <p:cMediaNode vol="80000" showWhenStopped="0">
-                                        <p:cTn id="36" display="0" masterRel="sameClick">
-                                          <p:stCondLst>
-                                            <p:cond evt="onBegin" delay="0">
-                                              <p:tn val="33"/>
-                                            </p:cond>
-                                          </p:stCondLst>
-                                        </p:cTn>
-                                        <p:tgtEl>
-                                          <p:sndTgt r:embed="rId5" name="pop.wav"/>
-                                        </p:tgtEl>
-                                      </p:cMediaNode>
-                                    </p:audio>
-                                  </p:subTnLst>
                                 </p:cTn>
                               </p:par>
                             </p:childTnLst>
@@ -44592,7 +43633,7 @@
               </p:nextCondLst>
             </p:seq>
             <p:seq concurrent="1" nextAc="seek">
-              <p:cTn id="37" restart="whenNotActive" fill="hold" evtFilter="cancelBubble" nodeType="interactiveSeq">
+              <p:cTn id="32" restart="whenNotActive" fill="hold" evtFilter="cancelBubble" nodeType="interactiveSeq">
                 <p:stCondLst>
                   <p:cond evt="onClick" delay="0">
                     <p:tgtEl>
@@ -44605,26 +43646,26 @@
                 </p:endSync>
                 <p:childTnLst>
                   <p:par>
-                    <p:cTn id="38" fill="hold">
+                    <p:cTn id="33" fill="hold">
                       <p:stCondLst>
                         <p:cond delay="0"/>
                       </p:stCondLst>
                       <p:childTnLst>
                         <p:par>
-                          <p:cTn id="39" fill="hold">
+                          <p:cTn id="34" fill="hold">
                             <p:stCondLst>
                               <p:cond delay="0"/>
                             </p:stCondLst>
                             <p:childTnLst>
                               <p:par>
-                                <p:cTn id="40" presetID="10" presetClass="entr" presetSubtype="0" fill="hold" grpId="0" nodeType="clickEffect">
+                                <p:cTn id="35" presetID="10" presetClass="entr" presetSubtype="0" fill="hold" grpId="0" nodeType="clickEffect">
                                   <p:stCondLst>
                                     <p:cond delay="0"/>
                                   </p:stCondLst>
                                   <p:childTnLst>
                                     <p:set>
                                       <p:cBhvr>
-                                        <p:cTn id="41" dur="1" fill="hold">
+                                        <p:cTn id="36" dur="1" fill="hold">
                                           <p:stCondLst>
                                             <p:cond delay="0"/>
                                           </p:stCondLst>
@@ -44642,29 +43683,13 @@
                                     </p:set>
                                     <p:animEffect transition="in" filter="fade">
                                       <p:cBhvr>
-                                        <p:cTn id="42" dur="500"/>
+                                        <p:cTn id="37" dur="500"/>
                                         <p:tgtEl>
                                           <p:spTgt spid="16"/>
                                         </p:tgtEl>
                                       </p:cBhvr>
                                     </p:animEffect>
                                   </p:childTnLst>
-                                  <p:subTnLst>
-                                    <p:audio>
-                                      <p:cMediaNode vol="80000" showWhenStopped="0">
-                                        <p:cTn id="43" display="0" masterRel="sameClick">
-                                          <p:stCondLst>
-                                            <p:cond evt="onBegin" delay="0">
-                                              <p:tn val="40"/>
-                                            </p:cond>
-                                          </p:stCondLst>
-                                        </p:cTn>
-                                        <p:tgtEl>
-                                          <p:sndTgt r:embed="rId5" name="pop.wav"/>
-                                        </p:tgtEl>
-                                      </p:cMediaNode>
-                                    </p:audio>
-                                  </p:subTnLst>
                                 </p:cTn>
                               </p:par>
                             </p:childTnLst>
@@ -45375,22 +44400,6 @@
                                       </p:cBhvr>
                                     </p:animEffect>
                                   </p:childTnLst>
-                                  <p:subTnLst>
-                                    <p:audio>
-                                      <p:cMediaNode vol="80000" showWhenStopped="0">
-                                        <p:cTn id="8" display="0" masterRel="sameClick">
-                                          <p:stCondLst>
-                                            <p:cond evt="onBegin" delay="0">
-                                              <p:tn val="5"/>
-                                            </p:cond>
-                                          </p:stCondLst>
-                                        </p:cTn>
-                                        <p:tgtEl>
-                                          <p:sndTgt r:embed="rId9" name="pop.wav"/>
-                                        </p:tgtEl>
-                                      </p:cMediaNode>
-                                    </p:audio>
-                                  </p:subTnLst>
                                 </p:cTn>
                               </p:par>
                             </p:childTnLst>
@@ -48009,7 +47018,7 @@
                                   </p:childTnLst>
                                   <p:subTnLst>
                                     <p:audio>
-                                      <p:cMediaNode vol="80000" showWhenStopped="0">
+                                      <p:cMediaNode vol="50000" showWhenStopped="0">
                                         <p:cTn id="7" display="0" masterRel="sameClick">
                                           <p:stCondLst>
                                             <p:cond evt="onBegin" delay="0">
@@ -48065,7 +47074,7 @@
                                   </p:childTnLst>
                                   <p:subTnLst>
                                     <p:audio>
-                                      <p:cMediaNode vol="80000" showWhenStopped="0">
+                                      <p:cMediaNode vol="50000" showWhenStopped="0">
                                         <p:cTn id="12" display="0" masterRel="sameClick">
                                           <p:stCondLst>
                                             <p:cond evt="onBegin" delay="0">
@@ -48139,7 +47148,7 @@
                                   </p:childTnLst>
                                   <p:subTnLst>
                                     <p:audio>
-                                      <p:cMediaNode vol="80000" showWhenStopped="0">
+                                      <p:cMediaNode vol="50000" showWhenStopped="0">
                                         <p:cTn id="19" display="0" masterRel="sameClick">
                                           <p:stCondLst>
                                             <p:cond evt="onBegin" delay="0">
@@ -48213,7 +47222,7 @@
                                   </p:childTnLst>
                                   <p:subTnLst>
                                     <p:audio>
-                                      <p:cMediaNode vol="80000" showWhenStopped="0">
+                                      <p:cMediaNode vol="50000" showWhenStopped="0">
                                         <p:cTn id="26" display="0" masterRel="sameClick">
                                           <p:stCondLst>
                                             <p:cond evt="onBegin" delay="0">
@@ -48287,7 +47296,7 @@
                                   </p:childTnLst>
                                   <p:subTnLst>
                                     <p:audio>
-                                      <p:cMediaNode vol="80000" showWhenStopped="0">
+                                      <p:cMediaNode vol="50000" showWhenStopped="0">
                                         <p:cTn id="33" display="0" masterRel="sameClick">
                                           <p:stCondLst>
                                             <p:cond evt="onBegin" delay="0">
@@ -48372,33 +47381,17 @@
                                       </p:cBhvr>
                                     </p:animEffect>
                                   </p:childTnLst>
-                                  <p:subTnLst>
-                                    <p:audio>
-                                      <p:cMediaNode vol="80000" showWhenStopped="0">
-                                        <p:cTn id="41" display="0" masterRel="sameClick">
-                                          <p:stCondLst>
-                                            <p:cond evt="onBegin" delay="0">
-                                              <p:tn val="38"/>
-                                            </p:cond>
-                                          </p:stCondLst>
-                                        </p:cTn>
-                                        <p:tgtEl>
-                                          <p:sndTgt r:embed="rId15" name="sparkle.wav"/>
-                                        </p:tgtEl>
-                                      </p:cMediaNode>
-                                    </p:audio>
-                                  </p:subTnLst>
                                 </p:cTn>
                               </p:par>
                               <p:par>
-                                <p:cTn id="42" presetID="10" presetClass="entr" presetSubtype="0" fill="hold" grpId="0" nodeType="withEffect">
+                                <p:cTn id="41" presetID="10" presetClass="entr" presetSubtype="0" fill="hold" grpId="0" nodeType="withEffect">
                                   <p:stCondLst>
                                     <p:cond delay="0"/>
                                   </p:stCondLst>
                                   <p:childTnLst>
                                     <p:set>
                                       <p:cBhvr>
-                                        <p:cTn id="43" dur="1" fill="hold">
+                                        <p:cTn id="42" dur="1" fill="hold">
                                           <p:stCondLst>
                                             <p:cond delay="0"/>
                                           </p:stCondLst>
@@ -48416,7 +47409,7 @@
                                     </p:set>
                                     <p:animEffect transition="in" filter="fade">
                                       <p:cBhvr>
-                                        <p:cTn id="44" dur="500"/>
+                                        <p:cTn id="43" dur="500"/>
                                         <p:tgtEl>
                                           <p:spTgt spid="22"/>
                                         </p:tgtEl>
@@ -48426,14 +47419,14 @@
                                 </p:cTn>
                               </p:par>
                               <p:par>
-                                <p:cTn id="45" presetID="10" presetClass="entr" presetSubtype="0" fill="hold" grpId="0" nodeType="withEffect">
+                                <p:cTn id="44" presetID="10" presetClass="entr" presetSubtype="0" fill="hold" grpId="0" nodeType="withEffect">
                                   <p:stCondLst>
                                     <p:cond delay="0"/>
                                   </p:stCondLst>
                                   <p:childTnLst>
                                     <p:set>
                                       <p:cBhvr>
-                                        <p:cTn id="46" dur="1" fill="hold">
+                                        <p:cTn id="45" dur="1" fill="hold">
                                           <p:stCondLst>
                                             <p:cond delay="0"/>
                                           </p:stCondLst>
@@ -48451,7 +47444,7 @@
                                     </p:set>
                                     <p:animEffect transition="in" filter="fade">
                                       <p:cBhvr>
-                                        <p:cTn id="47" dur="500"/>
+                                        <p:cTn id="46" dur="500"/>
                                         <p:tgtEl>
                                           <p:spTgt spid="23"/>
                                         </p:tgtEl>
@@ -49149,7 +48142,7 @@
                                   </p:childTnLst>
                                   <p:subTnLst>
                                     <p:audio>
-                                      <p:cMediaNode vol="80000" showWhenStopped="0">
+                                      <p:cMediaNode vol="50000" showWhenStopped="0">
                                         <p:cTn id="9" display="0" masterRel="sameClick">
                                           <p:stCondLst>
                                             <p:cond evt="onBegin" delay="0">
@@ -49255,7 +48248,7 @@
                                   </p:childTnLst>
                                   <p:subTnLst>
                                     <p:audio>
-                                      <p:cMediaNode vol="80000" showWhenStopped="0">
+                                      <p:cMediaNode vol="50000" showWhenStopped="0">
                                         <p:cTn id="16" display="0" masterRel="sameClick">
                                           <p:stCondLst>
                                             <p:cond evt="onBegin" delay="0">
@@ -49609,7 +48602,7 @@
                                   </p:childTnLst>
                                   <p:subTnLst>
                                     <p:audio>
-                                      <p:cMediaNode vol="80000" showWhenStopped="0">
+                                      <p:cMediaNode vol="50000" showWhenStopped="0">
                                         <p:cTn id="47" display="0" masterRel="sameClick">
                                           <p:stCondLst>
                                             <p:cond evt="onBegin" delay="0">
@@ -50629,7 +49622,7 @@
                                   </p:childTnLst>
                                   <p:subTnLst>
                                     <p:audio>
-                                      <p:cMediaNode vol="80000" showWhenStopped="0">
+                                      <p:cMediaNode vol="50000" showWhenStopped="0">
                                         <p:cTn id="8" display="0" masterRel="sameClick">
                                           <p:stCondLst>
                                             <p:cond evt="onBegin" delay="0">
@@ -50756,7 +49749,7 @@
                                   </p:childTnLst>
                                   <p:subTnLst>
                                     <p:audio>
-                                      <p:cMediaNode vol="80000" showWhenStopped="0">
+                                      <p:cMediaNode vol="50000" showWhenStopped="0">
                                         <p:cTn id="18" display="0" masterRel="sameClick">
                                           <p:stCondLst>
                                             <p:cond evt="onBegin" delay="0">
@@ -50883,7 +49876,7 @@
                                   </p:childTnLst>
                                   <p:subTnLst>
                                     <p:audio>
-                                      <p:cMediaNode vol="80000" showWhenStopped="0">
+                                      <p:cMediaNode vol="50000" showWhenStopped="0">
                                         <p:cTn id="28" display="0" masterRel="sameClick">
                                           <p:stCondLst>
                                             <p:cond evt="onBegin" delay="0">
@@ -51010,7 +50003,7 @@
                                   </p:childTnLst>
                                   <p:subTnLst>
                                     <p:audio>
-                                      <p:cMediaNode vol="80000" showWhenStopped="0">
+                                      <p:cMediaNode vol="50000" showWhenStopped="0">
                                         <p:cTn id="38" display="0" masterRel="sameClick">
                                           <p:stCondLst>
                                             <p:cond evt="onBegin" delay="0">

--- a/الصف-الرابع/رحلة-المستكشفة-السلسلة-والشبكة-الغذائية.pptx
+++ b/الصف-الرابع/رحلة-المستكشفة-السلسلة-والشبكة-الغذائية.pptx
@@ -8297,7 +8297,7 @@
                 <a:ea typeface="Tahoma" pitchFamily="34" charset="-122"/>
                 <a:cs typeface="Tahoma" pitchFamily="34" charset="-120"/>
               </a:rPr>
-              <a:t>لا تجد غذاءً، فلا تصل إليها الطاقة.</a:t>
+              <a:t>لا تجد غذاءً.</a:t>
             </a:r>
             <a:endParaRPr lang="ar-SA" sz="1500" dirty="0"/>
           </a:p>
@@ -9327,7 +9327,7 @@
                 <a:ea typeface="Tahoma" pitchFamily="34" charset="-122"/>
                 <a:cs typeface="Tahoma" pitchFamily="34" charset="-120"/>
               </a:rPr>
-              <a:t>مفترس لليرقة، وفريسة للسحلية.</a:t>
+              <a:t>الاثنين: يصطاد اليرقة، وتصطاده السحلية.</a:t>
             </a:r>
             <a:endParaRPr lang="ar-SA" sz="1500" dirty="0"/>
           </a:p>
@@ -10381,7 +10381,7 @@
                 <a:ea typeface="Tahoma" pitchFamily="34" charset="-122"/>
                 <a:cs typeface="Tahoma" pitchFamily="34" charset="-120"/>
               </a:rPr>
-              <a:t>صغُرت؛ لأن كل مخلوق يستخدم معظم الطاقة التي يحصل عليها.</a:t>
+              <a:t>صغُرت؛ الطاقة تقلّ في كل حلقة.</a:t>
             </a:r>
             <a:endParaRPr lang="ar-SA" sz="1500" dirty="0"/>
           </a:p>
@@ -11459,7 +11459,7 @@
                 <a:ea typeface="Tahoma" pitchFamily="34" charset="-122"/>
                 <a:cs typeface="Tahoma" pitchFamily="34" charset="-120"/>
               </a:rPr>
-              <a:t>لا؛ وصلتها الطاقة عبر السلسلة كلها من الشمس.</a:t>
+              <a:t>لا؛ من السحلية التي أكلتها.</a:t>
             </a:r>
             <a:endParaRPr lang="ar-SA" sz="1500" dirty="0"/>
           </a:p>
@@ -13626,7 +13626,7 @@
                 <a:ea typeface="Tahoma" pitchFamily="34" charset="-122"/>
                 <a:cs typeface="Tahoma" pitchFamily="34" charset="-120"/>
               </a:rPr>
-              <a:t>✔ نبات الشوك؛ لأنه يصنع غذاءه بنفسه مستخدمًا طاقة الشمس.</a:t>
+              <a:t>✔ نبات الشوك؛ يصنع غذاءه بنفسه.</a:t>
             </a:r>
             <a:endParaRPr lang="ar-SA" sz="1550" dirty="0"/>
           </a:p>
@@ -14552,7 +14552,7 @@
                 <a:ea typeface="Tahoma" pitchFamily="34" charset="-122"/>
                 <a:cs typeface="Tahoma" pitchFamily="34" charset="-120"/>
               </a:rPr>
-              <a:t>السهم يشير إلى المستهلك التالي؛ أي اتجاه انتقال الطاقة من الغذاء إلى آكله.</a:t>
+              <a:t>السهم يشير إلى من يأكل؛ أي اتجاه انتقال الطاقة.</a:t>
             </a:r>
             <a:endParaRPr lang="ar-SA" sz="1500" dirty="0"/>
           </a:p>
@@ -14726,7 +14726,7 @@
                 <a:ea typeface="Tahoma" pitchFamily="34" charset="-122"/>
                 <a:cs typeface="Tahoma" pitchFamily="34" charset="-120"/>
               </a:rPr>
-              <a:t>تبدأ بمنتِج يصنع غذاءه بطاقة الشمس، مثل نبات الشوك.</a:t>
+              <a:t>تبدأ بمنتِج مثل نبات الشوك.</a:t>
             </a:r>
             <a:endParaRPr lang="ar-SA" sz="1500" dirty="0"/>
           </a:p>
@@ -14900,7 +14900,7 @@
                 <a:ea typeface="Tahoma" pitchFamily="34" charset="-122"/>
                 <a:cs typeface="Tahoma" pitchFamily="34" charset="-120"/>
               </a:rPr>
-              <a:t>لا يستطيع؛ تحصل البومة على الطاقة من السحلية التي تأكلها.</a:t>
+              <a:t>البومة تأخذ طاقتها من السحلية التي تأكلها.</a:t>
             </a:r>
             <a:endParaRPr lang="ar-SA" sz="1500" dirty="0"/>
           </a:p>
@@ -17048,7 +17048,7 @@
                 <a:ea typeface="Tahoma" pitchFamily="34" charset="-122"/>
                 <a:cs typeface="Tahoma" pitchFamily="34" charset="-120"/>
               </a:rPr>
-              <a:t>نعم، تتشابهان؛ فالسلسلة في البركة تبدأ أيضًا بمخلوقات تلتقط طاقة الشمس، مثل الطحالب 🌿</a:t>
+              <a:t>نعم؛ تبدأ أيضًا بمنتِج يأخذ طاقة الشمس: الطحالب 🌿</a:t>
             </a:r>
             <a:endParaRPr lang="ar-SA" sz="1650" dirty="0"/>
           </a:p>
@@ -18171,7 +18171,7 @@
                 <a:ea typeface="Tahoma" pitchFamily="34" charset="-122"/>
                 <a:cs typeface="Tahoma" pitchFamily="34" charset="-120"/>
               </a:rPr>
-              <a:t>بالطحالب والنباتات الخضراء التي تلتقط طاقة الشمس.</a:t>
+              <a:t>بالطحالب والنباتات الخضراء.</a:t>
             </a:r>
             <a:endParaRPr lang="ar-SA" sz="1400" dirty="0"/>
           </a:p>
@@ -18328,7 +18328,7 @@
                 <a:ea typeface="Tahoma" pitchFamily="34" charset="-122"/>
                 <a:cs typeface="Tahoma" pitchFamily="34" charset="-120"/>
               </a:rPr>
-              <a:t>في الخلايا، على شكل سكر.</a:t>
+              <a:t>في خلاياها، على شكل سكر.</a:t>
             </a:r>
             <a:endParaRPr lang="ar-SA" sz="1400" dirty="0"/>
           </a:p>
@@ -18485,7 +18485,7 @@
                 <a:ea typeface="Tahoma" pitchFamily="34" charset="-122"/>
                 <a:cs typeface="Tahoma" pitchFamily="34" charset="-120"/>
               </a:rPr>
-              <a:t>لإطلاق الطاقة المخزونة في الطحالب؛ للقيام بوظائف الحياة كالحركة.</a:t>
+              <a:t>لتُخرج الطاقة من الطحالب وتتحرك.</a:t>
             </a:r>
             <a:endParaRPr lang="ar-SA" sz="1400" dirty="0"/>
           </a:p>
@@ -18642,7 +18642,7 @@
                 <a:ea typeface="Tahoma" pitchFamily="34" charset="-122"/>
                 <a:cs typeface="Tahoma" pitchFamily="34" charset="-120"/>
               </a:rPr>
-              <a:t>مالك الحزين؛ أخذ طاقته من سمكة الشمس التي اصطادها.</a:t>
+              <a:t>مالك الحزين؛ من سمكة الشمس.</a:t>
             </a:r>
             <a:endParaRPr lang="ar-SA" sz="1400" dirty="0"/>
           </a:p>
@@ -23712,7 +23712,7 @@
                 <a:ea typeface="Tahoma" pitchFamily="34" charset="-122"/>
                 <a:cs typeface="Tahoma" pitchFamily="34" charset="-120"/>
               </a:rPr>
-              <a:t>بالطحالب والنباتات الخضراء.</a:t>
+              <a:t>بالطحالب.</a:t>
             </a:r>
             <a:r>
               <a:rPr lang="ar-SA" altLang="en-US" sz="1450" b="1" dirty="0">
@@ -23942,7 +23942,7 @@
                 <a:ea typeface="Tahoma" pitchFamily="34" charset="-122"/>
                 <a:cs typeface="Tahoma" pitchFamily="34" charset="-120"/>
               </a:rPr>
-              <a:t>لإطلاق الطاقة المخزونة في الطحالب التي أكلتها؛ لتقوم بوظائف الحياة كالحركة.</a:t>
+              <a:t>لتُخرج الطاقة من الطحالب وتتحرك.</a:t>
             </a:r>
             <a:r>
               <a:rPr lang="ar-SA" altLang="en-US" sz="1450" b="1" dirty="0">
@@ -24172,7 +24172,7 @@
                 <a:ea typeface="Tahoma" pitchFamily="34" charset="-122"/>
                 <a:cs typeface="Tahoma" pitchFamily="34" charset="-120"/>
               </a:rPr>
-              <a:t>يقلّ الذباب المائي ثم سمك الشمس، فلا يجد مالك الحزين غذاءً كافيًا؛ لأن كل حلقة تعتمد على ما قبلها.</a:t>
+              <a:t>لا يجد مالك الحزين غذاءً كافيًا.</a:t>
             </a:r>
             <a:r>
               <a:rPr lang="ar-SA" altLang="en-US" sz="1450" b="1" dirty="0">
@@ -24914,7 +24914,7 @@
                 <a:ea typeface="Tahoma" pitchFamily="34" charset="-122"/>
                 <a:cs typeface="Tahoma" pitchFamily="34" charset="-120"/>
               </a:rPr>
-              <a:t>لأن المخلوقات الحية ترتبط بعضها ببعض كحلقات السلسلة؛ فكل حلقة تحصل على الطاقة من الحلقة التي قبلها، وإذا انقطعت حلقة تأثرت الحلقات التي بعدها.</a:t>
+              <a:t>لأن المخلوقات مرتبطة مثل حلقات السلسلة؛ كل حلقة تأخذ طاقتها من التي قبلها.</a:t>
             </a:r>
             <a:endParaRPr lang="ar-SA" sz="1550" dirty="0"/>
           </a:p>
@@ -25803,7 +25803,7 @@
                 <a:ea typeface="Tahoma" pitchFamily="34" charset="-122"/>
                 <a:cs typeface="Tahoma" pitchFamily="34" charset="-120"/>
               </a:rPr>
-              <a:t>لا تكفي سلسلة واحدة؛ نحتاج إلى نموذج يجمع عدة سلاسل متداخلة… إنها </a:t>
+              <a:t>لا تكفي؛ نحتاج عدة سلاسل متداخلة… إنها </a:t>
             </a:r>
             <a:r>
               <a:rPr lang="ar-SA" altLang="en-US" sz="1700" b="1" dirty="0">
@@ -26528,7 +26528,7 @@
                 <a:ea typeface="Tahoma" pitchFamily="34" charset="-122"/>
                 <a:cs typeface="Tahoma" pitchFamily="34" charset="-120"/>
               </a:rPr>
-              <a:t>لأنها تبيّن مسارًا واحدًا لنقل الطاقة، ومعظم الأنظمة البيئية لها سلاسل متداخلة.</a:t>
+              <a:t>لأنها تبيّن طريقًا واحدًا للطاقة فقط.</a:t>
             </a:r>
             <a:endParaRPr lang="ar-SA" sz="1400" dirty="0"/>
           </a:p>
@@ -26685,7 +26685,7 @@
                 <a:ea typeface="Tahoma" pitchFamily="34" charset="-122"/>
                 <a:cs typeface="Tahoma" pitchFamily="34" charset="-120"/>
               </a:rPr>
-              <a:t>الشبكة الغذائية: سلاسل غذائية متداخلة توضّح ترابط سلاسل الغذاء في النظام البيئي.</a:t>
+              <a:t>الشبكة الغذائية: سلاسل غذائية متداخلة.</a:t>
             </a:r>
             <a:endParaRPr lang="ar-SA" sz="1400" dirty="0"/>
           </a:p>
@@ -26842,7 +26842,7 @@
                 <a:ea typeface="Tahoma" pitchFamily="34" charset="-122"/>
                 <a:cs typeface="Tahoma" pitchFamily="34" charset="-120"/>
               </a:rPr>
-              <a:t>المفترس آكل اللحوم الذي يصطاد ليحصل على طعامه، والفريسة المخلوق الذي تم اصطياده.</a:t>
+              <a:t>المفترس يصطاد، والفريسة تُصطاد.</a:t>
             </a:r>
             <a:endParaRPr lang="ar-SA" sz="1400" dirty="0"/>
           </a:p>
@@ -26999,7 +26999,7 @@
                 <a:ea typeface="Tahoma" pitchFamily="34" charset="-122"/>
                 <a:cs typeface="Tahoma" pitchFamily="34" charset="-120"/>
               </a:rPr>
-              <a:t>الحوت القاتل؛ تتجه إليه ثلاثة أسهم (التونة، والدلفين، والنورس).</a:t>
+              <a:t>الحوت القاتل؛ تصل إليه ٣ أسهم.</a:t>
             </a:r>
             <a:endParaRPr lang="ar-SA" sz="1400" dirty="0"/>
           </a:p>
@@ -31378,7 +31378,7 @@
                 <a:ea typeface="Tahoma" pitchFamily="34" charset="-122"/>
                 <a:cs typeface="Tahoma" pitchFamily="34" charset="-120"/>
               </a:rPr>
-              <a:t>مخلوقات حيّة تحلّل المواد الميتة لتحصل على الطاقة، وتعيد المواد إلى النظام البيئي موادَّ مغذية.</a:t>
+              <a:t>مخلوقات تحلّل المواد الميتة وتعيدها غذاءً للتربة.</a:t>
             </a:r>
             <a:endParaRPr lang="ar-SA" sz="1500" dirty="0"/>
           </a:p>
@@ -31511,7 +31511,7 @@
                 <a:ea typeface="Tahoma" pitchFamily="34" charset="-122"/>
                 <a:cs typeface="Tahoma" pitchFamily="34" charset="-120"/>
               </a:rPr>
-              <a:t>الديدان، والبكتيريا، والفطريات.</a:t>
+              <a:t>الديدان، البكتيريا، الفطريات.</a:t>
             </a:r>
             <a:endParaRPr lang="ar-SA" sz="1500" dirty="0"/>
           </a:p>
@@ -31644,7 +31644,7 @@
                 <a:ea typeface="Tahoma" pitchFamily="34" charset="-122"/>
                 <a:cs typeface="Tahoma" pitchFamily="34" charset="-120"/>
               </a:rPr>
-              <a:t>تتراكم بقايا المخلوقات الميتة، ولا تعود المواد المغذية إلى التربة.</a:t>
+              <a:t>تتراكم المخلوقات الميتة، ولا تتغذى التربة.</a:t>
             </a:r>
             <a:endParaRPr lang="ar-SA" sz="1500" dirty="0"/>
           </a:p>
@@ -35212,7 +35212,7 @@
                 <a:ea typeface="Tahoma" pitchFamily="34" charset="-122"/>
                 <a:cs typeface="Tahoma" pitchFamily="34" charset="-120"/>
               </a:rPr>
-              <a:t>التونة والدلفين وطائر النورس؛ لأنها تتغذى عليها، ثم يتأثر الحوت القاتل. وقد تزداد العوالق لقلّة من يأكلها.</a:t>
+              <a:t>التونة والدلفين والنورس؛ لأنها تأكل السردين.</a:t>
             </a:r>
             <a:endParaRPr lang="ar-SA" sz="1450" dirty="0"/>
           </a:p>
@@ -35364,7 +35364,7 @@
                 <a:ea typeface="Tahoma" pitchFamily="34" charset="-122"/>
                 <a:cs typeface="Tahoma" pitchFamily="34" charset="-120"/>
               </a:rPr>
-              <a:t>السلسلة المنفردة؛ لأن لها مسارًا واحدًا، أما في الشبكة فقد يجد المفترس غذاءً بديلًا.</a:t>
+              <a:t>السلسلة؛ لأن الشبكة فيها غذاء بديل.</a:t>
             </a:r>
             <a:endParaRPr lang="ar-SA" sz="1450" dirty="0"/>
           </a:p>
@@ -35516,7 +35516,7 @@
                 <a:ea typeface="Tahoma" pitchFamily="34" charset="-122"/>
                 <a:cs typeface="Tahoma" pitchFamily="34" charset="-120"/>
               </a:rPr>
-              <a:t>مثال: العشب ← الجرادة ← الضب ← الثعبان ← الصقر، والعشب ← الضب، والضب ← الصقر.</a:t>
+              <a:t>مثال: العشب ← الجرادة ← الضب ← الصقر، والضب ← الثعبان ← الصقر.</a:t>
             </a:r>
             <a:endParaRPr lang="ar-SA" sz="1450" dirty="0"/>
           </a:p>
@@ -36947,7 +36947,7 @@
                 <a:ea typeface="Tahoma" pitchFamily="34" charset="-122"/>
                 <a:cs typeface="Tahoma" pitchFamily="34" charset="-120"/>
               </a:rPr>
-              <a:t>✔ لأن اختفاء مخلوق من الشبكة الغذائية يؤثر في بقية المخلوقات.</a:t>
+              <a:t>✔ لأن اختفاء مخلوق يضرّ الشبكة كلها.</a:t>
             </a:r>
             <a:endParaRPr lang="ar-SA" sz="1600" dirty="0"/>
           </a:p>
@@ -37534,7 +37534,7 @@
                 <a:ea typeface="Tahoma" pitchFamily="34" charset="-122"/>
                 <a:cs typeface="Tahoma" pitchFamily="34" charset="-120"/>
               </a:rPr>
-              <a:t>✔ ٥ حلقات، و٤ أسهم (عدد الأسهم = عدد الحلقات − ١).</a:t>
+              <a:t>✔ ٥ حلقات، و٤ أسهم.</a:t>
             </a:r>
             <a:endParaRPr lang="ar-SA" sz="1500" dirty="0"/>
           </a:p>
@@ -37640,7 +37640,7 @@
                 <a:ea typeface="Tahoma" pitchFamily="34" charset="-122"/>
                 <a:cs typeface="Tahoma" pitchFamily="34" charset="-120"/>
               </a:rPr>
-              <a:t>✔ سلاسل غذائية متداخلة توضّح ترابط سلاسل الغذاء في النظام البيئي.</a:t>
+              <a:t>✔ سلاسل غذائية متداخلة.</a:t>
             </a:r>
             <a:endParaRPr lang="ar-SA" sz="1450" dirty="0"/>
           </a:p>
@@ -38651,7 +38651,7 @@
                 <a:ea typeface="Tahoma" pitchFamily="34" charset="-122"/>
                 <a:cs typeface="Tahoma" pitchFamily="34" charset="-120"/>
               </a:rPr>
-              <a:t>سمكة السردين (أو التونة، أو الدلفين، أو طائر النورس).</a:t>
+              <a:t>سمكة السردين.</a:t>
             </a:r>
             <a:endParaRPr lang="ar-SA" sz="1500" dirty="0"/>
           </a:p>
@@ -41266,7 +41266,7 @@
                 <a:ea typeface="Tahoma" pitchFamily="34" charset="-122"/>
                 <a:cs typeface="Tahoma" pitchFamily="34" charset="-120"/>
               </a:rPr>
-              <a:t>لأنها في آخر السلسلة؛ وكل مخلوق يستخدم معظم الطاقة التي يحصل عليها، فلا ينتقل إلى المخلوق التالي إلا جزء صغير (تذكّرن كيف صغُرت كرة الطاقة في جولة الواقع الافتراضي!).</a:t>
+              <a:t>لأنها آخر السلسلة، والطاقة تقلّ في كل حلقة (مثل كرة الطاقة ⚡).</a:t>
             </a:r>
             <a:endParaRPr lang="ar-SA" sz="1550" dirty="0"/>
           </a:p>
@@ -47968,7 +47968,7 @@
                 <a:ea typeface="Tahoma" pitchFamily="34" charset="-122"/>
                 <a:cs typeface="Tahoma" pitchFamily="34" charset="-120"/>
               </a:rPr>
-              <a:t>لا تأخذ البومة طاقتها من الشمس مباشرة، بل من غذائها… وغذاؤها حصل على الطاقة من مخلوق قبله! هيا نقرأ ونكتشف 📖</a:t>
+              <a:t>لا؛ البومة تأخذ طاقتها من غذائها. هيا نكتشف 📖</a:t>
             </a:r>
             <a:endParaRPr lang="ar-SA" sz="1650" dirty="0"/>
           </a:p>
@@ -48957,7 +48957,7 @@
                 <a:ea typeface="Tahoma" pitchFamily="34" charset="-122"/>
                 <a:cs typeface="Tahoma" pitchFamily="34" charset="-120"/>
               </a:rPr>
-              <a:t>الشمس.</a:t>
+              <a:t>الشمس ☀️</a:t>
             </a:r>
             <a:endParaRPr lang="ar-SA" sz="1400" dirty="0"/>
           </a:p>
@@ -49114,7 +49114,7 @@
                 <a:ea typeface="Tahoma" pitchFamily="34" charset="-122"/>
                 <a:cs typeface="Tahoma" pitchFamily="34" charset="-120"/>
               </a:rPr>
-              <a:t>لأن الطاقة تُختزَن في المنتجات، ثم تنتقل منها إلى المستهلكات عن طريق الغذاء.</a:t>
+              <a:t>لأنه يأخذ الطاقة من الغذاء الذي يأكله.</a:t>
             </a:r>
             <a:endParaRPr lang="ar-SA" sz="1400" dirty="0"/>
           </a:p>
@@ -49271,7 +49271,7 @@
                 <a:ea typeface="Tahoma" pitchFamily="34" charset="-122"/>
                 <a:cs typeface="Tahoma" pitchFamily="34" charset="-120"/>
               </a:rPr>
-              <a:t>السلسلة الغذائية: انتقال الطاقة من مخلوق حي إلى آخر عن طريق الغذاء.</a:t>
+              <a:t>السلسلة الغذائية: انتقال الطاقة من مخلوق إلى آخر بالغذاء.</a:t>
             </a:r>
             <a:endParaRPr lang="ar-SA" sz="1400" dirty="0"/>
           </a:p>
@@ -49428,7 +49428,7 @@
                 <a:ea typeface="Tahoma" pitchFamily="34" charset="-122"/>
                 <a:cs typeface="Tahoma" pitchFamily="34" charset="-120"/>
               </a:rPr>
-              <a:t>من نبات الشوك (منتِج) إلى اليرقة ثم السرعوف ثم السحلية ثم البومة.</a:t>
+              <a:t>نبات الشوك ← اليرقة ← السرعوف ← السحلية ← البومة</a:t>
             </a:r>
             <a:endParaRPr lang="ar-SA" sz="1400" dirty="0"/>
           </a:p>

--- a/الصف-الرابع/رحلة-المستكشفة-السلسلة-والشبكة-الغذائية.pptx
+++ b/الصف-الرابع/رحلة-المستكشفة-السلسلة-والشبكة-الغذائية.pptx
@@ -5170,33 +5170,17 @@
                                       </p:cBhvr>
                                     </p:animEffect>
                                   </p:childTnLst>
-                                  <p:subTnLst>
-                                    <p:audio>
-                                      <p:cMediaNode vol="50000" showWhenStopped="0">
-                                        <p:cTn id="37" display="0" masterRel="sameClick">
-                                          <p:stCondLst>
-                                            <p:cond evt="onBegin" delay="0">
-                                              <p:tn val="34"/>
-                                            </p:cond>
-                                          </p:stCondLst>
-                                        </p:cTn>
-                                        <p:tgtEl>
-                                          <p:sndTgt r:embed="rId9" name="chime.wav"/>
-                                        </p:tgtEl>
-                                      </p:cMediaNode>
-                                    </p:audio>
-                                  </p:subTnLst>
                                 </p:cTn>
                               </p:par>
                               <p:par>
-                                <p:cTn id="38" presetID="10" presetClass="entr" presetSubtype="0" fill="hold" grpId="0" nodeType="withEffect">
+                                <p:cTn id="37" presetID="10" presetClass="entr" presetSubtype="0" fill="hold" grpId="0" nodeType="withEffect">
                                   <p:stCondLst>
                                     <p:cond delay="0"/>
                                   </p:stCondLst>
                                   <p:childTnLst>
                                     <p:set>
                                       <p:cBhvr>
-                                        <p:cTn id="39" dur="1" fill="hold">
+                                        <p:cTn id="38" dur="1" fill="hold">
                                           <p:stCondLst>
                                             <p:cond delay="0"/>
                                           </p:stCondLst>
@@ -5214,7 +5198,7 @@
                                     </p:set>
                                     <p:animEffect transition="in" filter="fade">
                                       <p:cBhvr>
-                                        <p:cTn id="40" dur="500"/>
+                                        <p:cTn id="39" dur="500"/>
                                         <p:tgtEl>
                                           <p:spTgt spid="13"/>
                                         </p:tgtEl>
@@ -7512,22 +7496,6 @@
                                       </p:cBhvr>
                                     </p:animEffect>
                                   </p:childTnLst>
-                                  <p:subTnLst>
-                                    <p:audio>
-                                      <p:cMediaNode vol="50000" showWhenStopped="0">
-                                        <p:cTn id="14" display="0" masterRel="sameClick">
-                                          <p:stCondLst>
-                                            <p:cond evt="onBegin" delay="0">
-                                              <p:tn val="11"/>
-                                            </p:cond>
-                                          </p:stCondLst>
-                                        </p:cTn>
-                                        <p:tgtEl>
-                                          <p:sndTgt r:embed="rId12" name="chime.wav"/>
-                                        </p:tgtEl>
-                                      </p:cMediaNode>
-                                    </p:audio>
-                                  </p:subTnLst>
                                 </p:cTn>
                               </p:par>
                             </p:childTnLst>
@@ -8518,22 +8486,6 @@
                                       </p:cBhvr>
                                     </p:animEffect>
                                   </p:childTnLst>
-                                  <p:subTnLst>
-                                    <p:audio>
-                                      <p:cMediaNode vol="50000" showWhenStopped="0">
-                                        <p:cTn id="14" display="0" masterRel="sameClick">
-                                          <p:stCondLst>
-                                            <p:cond evt="onBegin" delay="0">
-                                              <p:tn val="11"/>
-                                            </p:cond>
-                                          </p:stCondLst>
-                                        </p:cTn>
-                                        <p:tgtEl>
-                                          <p:sndTgt r:embed="rId12" name="chime.wav"/>
-                                        </p:tgtEl>
-                                      </p:cMediaNode>
-                                    </p:audio>
-                                  </p:subTnLst>
                                 </p:cTn>
                               </p:par>
                             </p:childTnLst>
@@ -9548,22 +9500,6 @@
                                       </p:cBhvr>
                                     </p:animEffect>
                                   </p:childTnLst>
-                                  <p:subTnLst>
-                                    <p:audio>
-                                      <p:cMediaNode vol="50000" showWhenStopped="0">
-                                        <p:cTn id="14" display="0" masterRel="sameClick">
-                                          <p:stCondLst>
-                                            <p:cond evt="onBegin" delay="0">
-                                              <p:tn val="11"/>
-                                            </p:cond>
-                                          </p:stCondLst>
-                                        </p:cTn>
-                                        <p:tgtEl>
-                                          <p:sndTgt r:embed="rId12" name="chime.wav"/>
-                                        </p:tgtEl>
-                                      </p:cMediaNode>
-                                    </p:audio>
-                                  </p:subTnLst>
                                 </p:cTn>
                               </p:par>
                             </p:childTnLst>
@@ -10602,22 +10538,6 @@
                                       </p:cBhvr>
                                     </p:animEffect>
                                   </p:childTnLst>
-                                  <p:subTnLst>
-                                    <p:audio>
-                                      <p:cMediaNode vol="50000" showWhenStopped="0">
-                                        <p:cTn id="14" display="0" masterRel="sameClick">
-                                          <p:stCondLst>
-                                            <p:cond evt="onBegin" delay="0">
-                                              <p:tn val="11"/>
-                                            </p:cond>
-                                          </p:stCondLst>
-                                        </p:cTn>
-                                        <p:tgtEl>
-                                          <p:sndTgt r:embed="rId12" name="chime.wav"/>
-                                        </p:tgtEl>
-                                      </p:cMediaNode>
-                                    </p:audio>
-                                  </p:subTnLst>
                                 </p:cTn>
                               </p:par>
                             </p:childTnLst>
@@ -11680,22 +11600,6 @@
                                       </p:cBhvr>
                                     </p:animEffect>
                                   </p:childTnLst>
-                                  <p:subTnLst>
-                                    <p:audio>
-                                      <p:cMediaNode vol="50000" showWhenStopped="0">
-                                        <p:cTn id="14" display="0" masterRel="sameClick">
-                                          <p:stCondLst>
-                                            <p:cond evt="onBegin" delay="0">
-                                              <p:tn val="11"/>
-                                            </p:cond>
-                                          </p:stCondLst>
-                                        </p:cTn>
-                                        <p:tgtEl>
-                                          <p:sndTgt r:embed="rId12" name="chime.wav"/>
-                                        </p:tgtEl>
-                                      </p:cMediaNode>
-                                    </p:audio>
-                                  </p:subTnLst>
                                 </p:cTn>
                               </p:par>
                             </p:childTnLst>
@@ -12666,22 +12570,6 @@
                                       </p:cBhvr>
                                     </p:animEffect>
                                   </p:childTnLst>
-                                  <p:subTnLst>
-                                    <p:audio>
-                                      <p:cMediaNode vol="50000" showWhenStopped="0">
-                                        <p:cTn id="8" display="0" masterRel="sameClick">
-                                          <p:stCondLst>
-                                            <p:cond evt="onBegin" delay="0">
-                                              <p:tn val="5"/>
-                                            </p:cond>
-                                          </p:stCondLst>
-                                        </p:cTn>
-                                        <p:tgtEl>
-                                          <p:sndTgt r:embed="rId13" name="chime.wav"/>
-                                        </p:tgtEl>
-                                      </p:cMediaNode>
-                                    </p:audio>
-                                  </p:subTnLst>
                                 </p:cTn>
                               </p:par>
                             </p:childTnLst>
@@ -12691,26 +12579,26 @@
                     </p:cTn>
                   </p:par>
                   <p:par>
-                    <p:cTn id="9" fill="hold">
+                    <p:cTn id="8" fill="hold">
                       <p:stCondLst>
                         <p:cond delay="indefinite"/>
                       </p:stCondLst>
                       <p:childTnLst>
                         <p:par>
-                          <p:cTn id="10" fill="hold">
+                          <p:cTn id="9" fill="hold">
                             <p:stCondLst>
                               <p:cond delay="0"/>
                             </p:stCondLst>
                             <p:childTnLst>
                               <p:par>
-                                <p:cTn id="11" presetID="10" presetClass="entr" presetSubtype="0" fill="hold" grpId="0" nodeType="clickEffect">
+                                <p:cTn id="10" presetID="10" presetClass="entr" presetSubtype="0" fill="hold" grpId="0" nodeType="clickEffect">
                                   <p:stCondLst>
                                     <p:cond delay="0"/>
                                   </p:stCondLst>
                                   <p:childTnLst>
                                     <p:set>
                                       <p:cBhvr>
-                                        <p:cTn id="12" dur="1" fill="hold">
+                                        <p:cTn id="11" dur="1" fill="hold">
                                           <p:stCondLst>
                                             <p:cond delay="0"/>
                                           </p:stCondLst>
@@ -12728,7 +12616,7 @@
                                     </p:set>
                                     <p:animEffect transition="in" filter="fade">
                                       <p:cBhvr>
-                                        <p:cTn id="13" dur="500"/>
+                                        <p:cTn id="12" dur="500"/>
                                         <p:tgtEl>
                                           <p:spTgt spid="24"/>
                                         </p:tgtEl>
@@ -13832,22 +13720,6 @@
                                       </p:cBhvr>
                                     </p:animEffect>
                                   </p:childTnLst>
-                                  <p:subTnLst>
-                                    <p:audio>
-                                      <p:cMediaNode vol="50000" showWhenStopped="0">
-                                        <p:cTn id="13" display="0" masterRel="sameClick">
-                                          <p:stCondLst>
-                                            <p:cond evt="onBegin" delay="0">
-                                              <p:tn val="10"/>
-                                            </p:cond>
-                                          </p:stCondLst>
-                                        </p:cTn>
-                                        <p:tgtEl>
-                                          <p:sndTgt r:embed="rId10" name="chime.wav"/>
-                                        </p:tgtEl>
-                                      </p:cMediaNode>
-                                    </p:audio>
-                                  </p:subTnLst>
                                 </p:cTn>
                               </p:par>
                             </p:childTnLst>
@@ -13874,7 +13746,7 @@
               </p:nextCondLst>
             </p:seq>
             <p:seq concurrent="1" nextAc="seek">
-              <p:cTn id="14" restart="whenNotActive" fill="hold" evtFilter="cancelBubble" nodeType="interactiveSeq">
+              <p:cTn id="13" restart="whenNotActive" fill="hold" evtFilter="cancelBubble" nodeType="interactiveSeq">
                 <p:stCondLst>
                   <p:cond evt="onClick" delay="0">
                     <p:tgtEl>
@@ -13887,26 +13759,26 @@
                 </p:endSync>
                 <p:childTnLst>
                   <p:par>
-                    <p:cTn id="15" fill="hold">
+                    <p:cTn id="14" fill="hold">
                       <p:stCondLst>
                         <p:cond delay="0"/>
                       </p:stCondLst>
                       <p:childTnLst>
                         <p:par>
-                          <p:cTn id="16" fill="hold">
+                          <p:cTn id="15" fill="hold">
                             <p:stCondLst>
                               <p:cond delay="0"/>
                             </p:stCondLst>
                             <p:childTnLst>
                               <p:par>
-                                <p:cTn id="17" presetID="10" presetClass="entr" presetSubtype="0" fill="hold" grpId="0" nodeType="clickEffect">
+                                <p:cTn id="16" presetID="10" presetClass="entr" presetSubtype="0" fill="hold" grpId="0" nodeType="clickEffect">
                                   <p:stCondLst>
                                     <p:cond delay="0"/>
                                   </p:stCondLst>
                                   <p:childTnLst>
                                     <p:set>
                                       <p:cBhvr>
-                                        <p:cTn id="18" dur="1" fill="hold">
+                                        <p:cTn id="17" dur="1" fill="hold">
                                           <p:stCondLst>
                                             <p:cond delay="0"/>
                                           </p:stCondLst>
@@ -13924,7 +13796,7 @@
                                     </p:set>
                                     <p:animEffect transition="in" filter="fade">
                                       <p:cBhvr>
-                                        <p:cTn id="19" dur="500"/>
+                                        <p:cTn id="18" dur="500"/>
                                         <p:tgtEl>
                                           <p:spTgt spid="7"/>
                                         </p:tgtEl>
@@ -13950,7 +13822,7 @@
               </p:nextCondLst>
             </p:seq>
             <p:seq concurrent="1" nextAc="seek">
-              <p:cTn id="20" restart="whenNotActive" fill="hold" evtFilter="cancelBubble" nodeType="interactiveSeq">
+              <p:cTn id="19" restart="whenNotActive" fill="hold" evtFilter="cancelBubble" nodeType="interactiveSeq">
                 <p:stCondLst>
                   <p:cond evt="onClick" delay="0">
                     <p:tgtEl>
@@ -13963,26 +13835,26 @@
                 </p:endSync>
                 <p:childTnLst>
                   <p:par>
-                    <p:cTn id="21" fill="hold">
+                    <p:cTn id="20" fill="hold">
                       <p:stCondLst>
                         <p:cond delay="0"/>
                       </p:stCondLst>
                       <p:childTnLst>
                         <p:par>
-                          <p:cTn id="22" fill="hold">
+                          <p:cTn id="21" fill="hold">
                             <p:stCondLst>
                               <p:cond delay="0"/>
                             </p:stCondLst>
                             <p:childTnLst>
                               <p:par>
-                                <p:cTn id="23" presetID="10" presetClass="entr" presetSubtype="0" fill="hold" grpId="0" nodeType="clickEffect">
+                                <p:cTn id="22" presetID="10" presetClass="entr" presetSubtype="0" fill="hold" grpId="0" nodeType="clickEffect">
                                   <p:stCondLst>
                                     <p:cond delay="0"/>
                                   </p:stCondLst>
                                   <p:childTnLst>
                                     <p:set>
                                       <p:cBhvr>
-                                        <p:cTn id="24" dur="1" fill="hold">
+                                        <p:cTn id="23" dur="1" fill="hold">
                                           <p:stCondLst>
                                             <p:cond delay="0"/>
                                           </p:stCondLst>
@@ -14000,7 +13872,7 @@
                                     </p:set>
                                     <p:animEffect transition="in" filter="fade">
                                       <p:cBhvr>
-                                        <p:cTn id="25" dur="500"/>
+                                        <p:cTn id="24" dur="500"/>
                                         <p:tgtEl>
                                           <p:spTgt spid="10"/>
                                         </p:tgtEl>
@@ -14026,7 +13898,7 @@
               </p:nextCondLst>
             </p:seq>
             <p:seq concurrent="1" nextAc="seek">
-              <p:cTn id="26" restart="whenNotActive" fill="hold" evtFilter="cancelBubble" nodeType="interactiveSeq">
+              <p:cTn id="25" restart="whenNotActive" fill="hold" evtFilter="cancelBubble" nodeType="interactiveSeq">
                 <p:stCondLst>
                   <p:cond evt="onClick" delay="0">
                     <p:tgtEl>
@@ -14039,26 +13911,26 @@
                 </p:endSync>
                 <p:childTnLst>
                   <p:par>
-                    <p:cTn id="27" fill="hold">
+                    <p:cTn id="26" fill="hold">
                       <p:stCondLst>
                         <p:cond delay="0"/>
                       </p:stCondLst>
                       <p:childTnLst>
                         <p:par>
-                          <p:cTn id="28" fill="hold">
+                          <p:cTn id="27" fill="hold">
                             <p:stCondLst>
                               <p:cond delay="0"/>
                             </p:stCondLst>
                             <p:childTnLst>
                               <p:par>
-                                <p:cTn id="29" presetID="10" presetClass="entr" presetSubtype="0" fill="hold" grpId="0" nodeType="clickEffect">
+                                <p:cTn id="28" presetID="10" presetClass="entr" presetSubtype="0" fill="hold" grpId="0" nodeType="clickEffect">
                                   <p:stCondLst>
                                     <p:cond delay="0"/>
                                   </p:stCondLst>
                                   <p:childTnLst>
                                     <p:set>
                                       <p:cBhvr>
-                                        <p:cTn id="30" dur="1" fill="hold">
+                                        <p:cTn id="29" dur="1" fill="hold">
                                           <p:stCondLst>
                                             <p:cond delay="0"/>
                                           </p:stCondLst>
@@ -14076,7 +13948,7 @@
                                     </p:set>
                                     <p:animEffect transition="in" filter="fade">
                                       <p:cBhvr>
-                                        <p:cTn id="31" dur="500"/>
+                                        <p:cTn id="30" dur="500"/>
                                         <p:tgtEl>
                                           <p:spTgt spid="13"/>
                                         </p:tgtEl>
@@ -14102,7 +13974,7 @@
               </p:nextCondLst>
             </p:seq>
             <p:seq concurrent="1" nextAc="seek">
-              <p:cTn id="32" restart="whenNotActive" fill="hold" evtFilter="cancelBubble" nodeType="interactiveSeq">
+              <p:cTn id="31" restart="whenNotActive" fill="hold" evtFilter="cancelBubble" nodeType="interactiveSeq">
                 <p:stCondLst>
                   <p:cond evt="onClick" delay="0">
                     <p:tgtEl>
@@ -14115,26 +13987,26 @@
                 </p:endSync>
                 <p:childTnLst>
                   <p:par>
-                    <p:cTn id="33" fill="hold">
+                    <p:cTn id="32" fill="hold">
                       <p:stCondLst>
                         <p:cond delay="0"/>
                       </p:stCondLst>
                       <p:childTnLst>
                         <p:par>
-                          <p:cTn id="34" fill="hold">
+                          <p:cTn id="33" fill="hold">
                             <p:stCondLst>
                               <p:cond delay="0"/>
                             </p:stCondLst>
                             <p:childTnLst>
                               <p:par>
-                                <p:cTn id="35" presetID="10" presetClass="entr" presetSubtype="0" fill="hold" grpId="0" nodeType="clickEffect">
+                                <p:cTn id="34" presetID="10" presetClass="entr" presetSubtype="0" fill="hold" grpId="0" nodeType="clickEffect">
                                   <p:stCondLst>
                                     <p:cond delay="0"/>
                                   </p:stCondLst>
                                   <p:childTnLst>
                                     <p:set>
                                       <p:cBhvr>
-                                        <p:cTn id="36" dur="1" fill="hold">
+                                        <p:cTn id="35" dur="1" fill="hold">
                                           <p:stCondLst>
                                             <p:cond delay="0"/>
                                           </p:stCondLst>
@@ -14152,7 +14024,7 @@
                                     </p:set>
                                     <p:animEffect transition="in" filter="fade">
                                       <p:cBhvr>
-                                        <p:cTn id="37" dur="500"/>
+                                        <p:cTn id="36" dur="500"/>
                                         <p:tgtEl>
                                           <p:spTgt spid="16"/>
                                         </p:tgtEl>
@@ -14178,7 +14050,7 @@
               </p:nextCondLst>
             </p:seq>
             <p:seq concurrent="1" nextAc="seek">
-              <p:cTn id="38" restart="whenNotActive" fill="hold" evtFilter="cancelBubble" nodeType="interactiveSeq">
+              <p:cTn id="37" restart="whenNotActive" fill="hold" evtFilter="cancelBubble" nodeType="interactiveSeq">
                 <p:stCondLst>
                   <p:cond evt="onClick" delay="0">
                     <p:tgtEl>
@@ -14191,26 +14063,26 @@
                 </p:endSync>
                 <p:childTnLst>
                   <p:par>
-                    <p:cTn id="39" fill="hold">
+                    <p:cTn id="38" fill="hold">
                       <p:stCondLst>
                         <p:cond delay="0"/>
                       </p:stCondLst>
                       <p:childTnLst>
                         <p:par>
-                          <p:cTn id="40" fill="hold">
+                          <p:cTn id="39" fill="hold">
                             <p:stCondLst>
                               <p:cond delay="0"/>
                             </p:stCondLst>
                             <p:childTnLst>
                               <p:par>
-                                <p:cTn id="41" presetID="10" presetClass="entr" presetSubtype="0" fill="hold" grpId="0" nodeType="clickEffect">
+                                <p:cTn id="40" presetID="10" presetClass="entr" presetSubtype="0" fill="hold" grpId="0" nodeType="clickEffect">
                                   <p:stCondLst>
                                     <p:cond delay="0"/>
                                   </p:stCondLst>
                                   <p:childTnLst>
                                     <p:set>
                                       <p:cBhvr>
-                                        <p:cTn id="42" dur="1" fill="hold">
+                                        <p:cTn id="41" dur="1" fill="hold">
                                           <p:stCondLst>
                                             <p:cond delay="0"/>
                                           </p:stCondLst>
@@ -14228,7 +14100,7 @@
                                     </p:set>
                                     <p:animEffect transition="in" filter="fade">
                                       <p:cBhvr>
-                                        <p:cTn id="43" dur="500"/>
+                                        <p:cTn id="42" dur="500"/>
                                         <p:tgtEl>
                                           <p:spTgt spid="19"/>
                                         </p:tgtEl>
@@ -15159,22 +15031,6 @@
                                       </p:cBhvr>
                                     </p:animEffect>
                                   </p:childTnLst>
-                                  <p:subTnLst>
-                                    <p:audio>
-                                      <p:cMediaNode vol="50000" showWhenStopped="0">
-                                        <p:cTn id="18" display="0" masterRel="sameClick">
-                                          <p:stCondLst>
-                                            <p:cond evt="onBegin" delay="0">
-                                              <p:tn val="15"/>
-                                            </p:cond>
-                                          </p:stCondLst>
-                                        </p:cTn>
-                                        <p:tgtEl>
-                                          <p:sndTgt r:embed="rId5" name="chime.wav"/>
-                                        </p:tgtEl>
-                                      </p:cMediaNode>
-                                    </p:audio>
-                                  </p:subTnLst>
                                 </p:cTn>
                               </p:par>
                             </p:childTnLst>
@@ -15184,26 +15040,26 @@
                     </p:cTn>
                   </p:par>
                   <p:par>
-                    <p:cTn id="19" fill="hold">
+                    <p:cTn id="18" fill="hold">
                       <p:stCondLst>
                         <p:cond delay="indefinite"/>
                       </p:stCondLst>
                       <p:childTnLst>
                         <p:par>
-                          <p:cTn id="20" fill="hold">
+                          <p:cTn id="19" fill="hold">
                             <p:stCondLst>
                               <p:cond delay="0"/>
                             </p:stCondLst>
                             <p:childTnLst>
                               <p:par>
-                                <p:cTn id="21" presetID="10" presetClass="entr" presetSubtype="0" fill="hold" grpId="0" nodeType="clickEffect">
+                                <p:cTn id="20" presetID="10" presetClass="entr" presetSubtype="0" fill="hold" grpId="0" nodeType="clickEffect">
                                   <p:stCondLst>
                                     <p:cond delay="0"/>
                                   </p:stCondLst>
                                   <p:childTnLst>
                                     <p:set>
                                       <p:cBhvr>
-                                        <p:cTn id="22" dur="1" fill="hold">
+                                        <p:cTn id="21" dur="1" fill="hold">
                                           <p:stCondLst>
                                             <p:cond delay="0"/>
                                           </p:stCondLst>
@@ -15221,7 +15077,7 @@
                                     </p:set>
                                     <p:animEffect transition="in" filter="fade">
                                       <p:cBhvr>
-                                        <p:cTn id="23" dur="500"/>
+                                        <p:cTn id="22" dur="500"/>
                                         <p:tgtEl>
                                           <p:spTgt spid="7"/>
                                         </p:tgtEl>
@@ -15237,26 +15093,26 @@
                     </p:cTn>
                   </p:par>
                   <p:par>
-                    <p:cTn id="24" fill="hold">
+                    <p:cTn id="23" fill="hold">
                       <p:stCondLst>
                         <p:cond delay="indefinite"/>
                       </p:stCondLst>
                       <p:childTnLst>
                         <p:par>
-                          <p:cTn id="25" fill="hold">
+                          <p:cTn id="24" fill="hold">
                             <p:stCondLst>
                               <p:cond delay="0"/>
                             </p:stCondLst>
                             <p:childTnLst>
                               <p:par>
-                                <p:cTn id="26" presetID="10" presetClass="entr" presetSubtype="0" fill="hold" grpId="0" nodeType="clickEffect">
+                                <p:cTn id="25" presetID="10" presetClass="entr" presetSubtype="0" fill="hold" grpId="0" nodeType="clickEffect">
                                   <p:stCondLst>
                                     <p:cond delay="0"/>
                                   </p:stCondLst>
                                   <p:childTnLst>
                                     <p:set>
                                       <p:cBhvr>
-                                        <p:cTn id="27" dur="1" fill="hold">
+                                        <p:cTn id="26" dur="1" fill="hold">
                                           <p:stCondLst>
                                             <p:cond delay="0"/>
                                           </p:stCondLst>
@@ -15274,7 +15130,7 @@
                                     </p:set>
                                     <p:animEffect transition="in" filter="fade">
                                       <p:cBhvr>
-                                        <p:cTn id="28" dur="500"/>
+                                        <p:cTn id="27" dur="500"/>
                                         <p:tgtEl>
                                           <p:spTgt spid="8"/>
                                         </p:tgtEl>
@@ -15290,26 +15146,26 @@
                     </p:cTn>
                   </p:par>
                   <p:par>
-                    <p:cTn id="29" fill="hold">
+                    <p:cTn id="28" fill="hold">
                       <p:stCondLst>
                         <p:cond delay="indefinite"/>
                       </p:stCondLst>
                       <p:childTnLst>
                         <p:par>
-                          <p:cTn id="30" fill="hold">
+                          <p:cTn id="29" fill="hold">
                             <p:stCondLst>
                               <p:cond delay="0"/>
                             </p:stCondLst>
                             <p:childTnLst>
                               <p:par>
-                                <p:cTn id="31" presetID="10" presetClass="entr" presetSubtype="0" fill="hold" grpId="0" nodeType="clickEffect">
+                                <p:cTn id="30" presetID="10" presetClass="entr" presetSubtype="0" fill="hold" grpId="0" nodeType="clickEffect">
                                   <p:stCondLst>
                                     <p:cond delay="0"/>
                                   </p:stCondLst>
                                   <p:childTnLst>
                                     <p:set>
                                       <p:cBhvr>
-                                        <p:cTn id="32" dur="1" fill="hold">
+                                        <p:cTn id="31" dur="1" fill="hold">
                                           <p:stCondLst>
                                             <p:cond delay="0"/>
                                           </p:stCondLst>
@@ -15327,78 +15183,9 @@
                                     </p:set>
                                     <p:animEffect transition="in" filter="fade">
                                       <p:cBhvr>
-                                        <p:cTn id="33" dur="500"/>
+                                        <p:cTn id="32" dur="500"/>
                                         <p:tgtEl>
                                           <p:spTgt spid="9"/>
-                                        </p:tgtEl>
-                                      </p:cBhvr>
-                                    </p:animEffect>
-                                  </p:childTnLst>
-                                  <p:subTnLst>
-                                    <p:audio>
-                                      <p:cMediaNode vol="50000" showWhenStopped="0">
-                                        <p:cTn id="34" display="0" masterRel="sameClick">
-                                          <p:stCondLst>
-                                            <p:cond evt="onBegin" delay="0">
-                                              <p:tn val="31"/>
-                                            </p:cond>
-                                          </p:stCondLst>
-                                        </p:cTn>
-                                        <p:tgtEl>
-                                          <p:sndTgt r:embed="rId5" name="chime.wav"/>
-                                        </p:tgtEl>
-                                      </p:cMediaNode>
-                                    </p:audio>
-                                  </p:subTnLst>
-                                </p:cTn>
-                              </p:par>
-                            </p:childTnLst>
-                          </p:cTn>
-                        </p:par>
-                      </p:childTnLst>
-                    </p:cTn>
-                  </p:par>
-                  <p:par>
-                    <p:cTn id="35" fill="hold">
-                      <p:stCondLst>
-                        <p:cond delay="indefinite"/>
-                      </p:stCondLst>
-                      <p:childTnLst>
-                        <p:par>
-                          <p:cTn id="36" fill="hold">
-                            <p:stCondLst>
-                              <p:cond delay="0"/>
-                            </p:stCondLst>
-                            <p:childTnLst>
-                              <p:par>
-                                <p:cTn id="37" presetID="10" presetClass="entr" presetSubtype="0" fill="hold" grpId="0" nodeType="clickEffect">
-                                  <p:stCondLst>
-                                    <p:cond delay="0"/>
-                                  </p:stCondLst>
-                                  <p:childTnLst>
-                                    <p:set>
-                                      <p:cBhvr>
-                                        <p:cTn id="38" dur="1" fill="hold">
-                                          <p:stCondLst>
-                                            <p:cond delay="0"/>
-                                          </p:stCondLst>
-                                        </p:cTn>
-                                        <p:tgtEl>
-                                          <p:spTgt spid="10"/>
-                                        </p:tgtEl>
-                                        <p:attrNameLst>
-                                          <p:attrName>style.visibility</p:attrName>
-                                        </p:attrNameLst>
-                                      </p:cBhvr>
-                                      <p:to>
-                                        <p:strVal val="visible"/>
-                                      </p:to>
-                                    </p:set>
-                                    <p:animEffect transition="in" filter="fade">
-                                      <p:cBhvr>
-                                        <p:cTn id="39" dur="500"/>
-                                        <p:tgtEl>
-                                          <p:spTgt spid="10"/>
                                         </p:tgtEl>
                                       </p:cBhvr>
                                     </p:animEffect>
@@ -15412,32 +15199,32 @@
                     </p:cTn>
                   </p:par>
                   <p:par>
-                    <p:cTn id="40" fill="hold">
+                    <p:cTn id="33" fill="hold">
                       <p:stCondLst>
                         <p:cond delay="indefinite"/>
                       </p:stCondLst>
                       <p:childTnLst>
                         <p:par>
-                          <p:cTn id="41" fill="hold">
+                          <p:cTn id="34" fill="hold">
                             <p:stCondLst>
                               <p:cond delay="0"/>
                             </p:stCondLst>
                             <p:childTnLst>
                               <p:par>
-                                <p:cTn id="42" presetID="10" presetClass="entr" presetSubtype="0" fill="hold" grpId="0" nodeType="clickEffect">
+                                <p:cTn id="35" presetID="10" presetClass="entr" presetSubtype="0" fill="hold" grpId="0" nodeType="clickEffect">
                                   <p:stCondLst>
                                     <p:cond delay="0"/>
                                   </p:stCondLst>
                                   <p:childTnLst>
                                     <p:set>
                                       <p:cBhvr>
-                                        <p:cTn id="43" dur="1" fill="hold">
+                                        <p:cTn id="36" dur="1" fill="hold">
                                           <p:stCondLst>
                                             <p:cond delay="0"/>
                                           </p:stCondLst>
                                         </p:cTn>
                                         <p:tgtEl>
-                                          <p:spTgt spid="11"/>
+                                          <p:spTgt spid="10"/>
                                         </p:tgtEl>
                                         <p:attrNameLst>
                                           <p:attrName>style.visibility</p:attrName>
@@ -15449,9 +15236,9 @@
                                     </p:set>
                                     <p:animEffect transition="in" filter="fade">
                                       <p:cBhvr>
-                                        <p:cTn id="44" dur="500"/>
-                                        <p:tgtEl>
-                                          <p:spTgt spid="11"/>
+                                        <p:cTn id="37" dur="500"/>
+                                        <p:tgtEl>
+                                          <p:spTgt spid="10"/>
                                         </p:tgtEl>
                                       </p:cBhvr>
                                     </p:animEffect>
@@ -15465,32 +15252,32 @@
                     </p:cTn>
                   </p:par>
                   <p:par>
-                    <p:cTn id="45" fill="hold">
+                    <p:cTn id="38" fill="hold">
                       <p:stCondLst>
                         <p:cond delay="indefinite"/>
                       </p:stCondLst>
                       <p:childTnLst>
                         <p:par>
-                          <p:cTn id="46" fill="hold">
+                          <p:cTn id="39" fill="hold">
                             <p:stCondLst>
                               <p:cond delay="0"/>
                             </p:stCondLst>
                             <p:childTnLst>
                               <p:par>
-                                <p:cTn id="47" presetID="10" presetClass="entr" presetSubtype="0" fill="hold" grpId="0" nodeType="clickEffect">
+                                <p:cTn id="40" presetID="10" presetClass="entr" presetSubtype="0" fill="hold" grpId="0" nodeType="clickEffect">
                                   <p:stCondLst>
                                     <p:cond delay="0"/>
                                   </p:stCondLst>
                                   <p:childTnLst>
                                     <p:set>
                                       <p:cBhvr>
-                                        <p:cTn id="48" dur="1" fill="hold">
+                                        <p:cTn id="41" dur="1" fill="hold">
                                           <p:stCondLst>
                                             <p:cond delay="0"/>
                                           </p:stCondLst>
                                         </p:cTn>
                                         <p:tgtEl>
-                                          <p:spTgt spid="12"/>
+                                          <p:spTgt spid="11"/>
                                         </p:tgtEl>
                                         <p:attrNameLst>
                                           <p:attrName>style.visibility</p:attrName>
@@ -15502,29 +15289,66 @@
                                     </p:set>
                                     <p:animEffect transition="in" filter="fade">
                                       <p:cBhvr>
-                                        <p:cTn id="49" dur="500"/>
-                                        <p:tgtEl>
-                                          <p:spTgt spid="12"/>
+                                        <p:cTn id="42" dur="500"/>
+                                        <p:tgtEl>
+                                          <p:spTgt spid="11"/>
                                         </p:tgtEl>
                                       </p:cBhvr>
                                     </p:animEffect>
                                   </p:childTnLst>
-                                  <p:subTnLst>
-                                    <p:audio>
-                                      <p:cMediaNode vol="50000" showWhenStopped="0">
-                                        <p:cTn id="50" display="0" masterRel="sameClick">
+                                </p:cTn>
+                              </p:par>
+                            </p:childTnLst>
+                          </p:cTn>
+                        </p:par>
+                      </p:childTnLst>
+                    </p:cTn>
+                  </p:par>
+                  <p:par>
+                    <p:cTn id="43" fill="hold">
+                      <p:stCondLst>
+                        <p:cond delay="indefinite"/>
+                      </p:stCondLst>
+                      <p:childTnLst>
+                        <p:par>
+                          <p:cTn id="44" fill="hold">
+                            <p:stCondLst>
+                              <p:cond delay="0"/>
+                            </p:stCondLst>
+                            <p:childTnLst>
+                              <p:par>
+                                <p:cTn id="45" presetID="10" presetClass="entr" presetSubtype="0" fill="hold" grpId="0" nodeType="clickEffect">
+                                  <p:stCondLst>
+                                    <p:cond delay="0"/>
+                                  </p:stCondLst>
+                                  <p:childTnLst>
+                                    <p:set>
+                                      <p:cBhvr>
+                                        <p:cTn id="46" dur="1" fill="hold">
                                           <p:stCondLst>
-                                            <p:cond evt="onBegin" delay="0">
-                                              <p:tn val="47"/>
-                                            </p:cond>
+                                            <p:cond delay="0"/>
                                           </p:stCondLst>
                                         </p:cTn>
                                         <p:tgtEl>
-                                          <p:sndTgt r:embed="rId5" name="chime.wav"/>
-                                        </p:tgtEl>
-                                      </p:cMediaNode>
-                                    </p:audio>
-                                  </p:subTnLst>
+                                          <p:spTgt spid="12"/>
+                                        </p:tgtEl>
+                                        <p:attrNameLst>
+                                          <p:attrName>style.visibility</p:attrName>
+                                        </p:attrNameLst>
+                                      </p:cBhvr>
+                                      <p:to>
+                                        <p:strVal val="visible"/>
+                                      </p:to>
+                                    </p:set>
+                                    <p:animEffect transition="in" filter="fade">
+                                      <p:cBhvr>
+                                        <p:cTn id="47" dur="500"/>
+                                        <p:tgtEl>
+                                          <p:spTgt spid="12"/>
+                                        </p:tgtEl>
+                                      </p:cBhvr>
+                                    </p:animEffect>
+                                  </p:childTnLst>
                                 </p:cTn>
                               </p:par>
                             </p:childTnLst>
@@ -17326,42 +17150,26 @@
                                       </p:cBhvr>
                                     </p:animEffect>
                                   </p:childTnLst>
-                                  <p:subTnLst>
-                                    <p:audio>
-                                      <p:cMediaNode vol="50000" showWhenStopped="0">
-                                        <p:cTn id="16" display="0" masterRel="sameClick">
-                                          <p:stCondLst>
-                                            <p:cond evt="onBegin" delay="0">
-                                              <p:tn val="11"/>
-                                            </p:cond>
-                                          </p:stCondLst>
-                                        </p:cTn>
-                                        <p:tgtEl>
-                                          <p:sndTgt r:embed="rId10" name="chime.wav"/>
-                                        </p:tgtEl>
-                                      </p:cMediaNode>
-                                    </p:audio>
-                                  </p:subTnLst>
                                 </p:cTn>
                               </p:par>
                             </p:childTnLst>
                           </p:cTn>
                         </p:par>
                         <p:par>
-                          <p:cTn id="17" fill="hold">
+                          <p:cTn id="16" fill="hold">
                             <p:stCondLst>
                               <p:cond delay="2700"/>
                             </p:stCondLst>
                             <p:childTnLst>
                               <p:par>
-                                <p:cTn id="18" presetID="0" presetClass="path" presetSubtype="0" fill="hold" grpId="2" nodeType="afterEffect">
+                                <p:cTn id="17" presetID="0" presetClass="path" presetSubtype="0" fill="hold" grpId="2" nodeType="afterEffect">
                                   <p:stCondLst>
                                     <p:cond delay="400"/>
                                   </p:stCondLst>
                                   <p:childTnLst>
                                     <p:animMotion origin="layout" path="M 0 0 L -0.8 0 E" pathEditMode="relative" ptsTypes="">
                                       <p:cBhvr>
-                                        <p:cTn id="19" dur="1600" fill="hold"/>
+                                        <p:cTn id="18" dur="1600" fill="hold"/>
                                         <p:tgtEl>
                                           <p:spTgt spid="4"/>
                                         </p:tgtEl>
@@ -17376,14 +17184,14 @@
                                 </p:cTn>
                               </p:par>
                               <p:par>
-                                <p:cTn id="20" presetID="10" presetClass="exit" presetSubtype="0" fill="hold" grpId="1" nodeType="withEffect">
+                                <p:cTn id="19" presetID="10" presetClass="exit" presetSubtype="0" fill="hold" grpId="1" nodeType="withEffect">
                                   <p:stCondLst>
                                     <p:cond delay="1300"/>
                                   </p:stCondLst>
                                   <p:childTnLst>
                                     <p:animEffect transition="out" filter="fade">
                                       <p:cBhvr>
-                                        <p:cTn id="21" dur="500"/>
+                                        <p:cTn id="20" dur="500"/>
                                         <p:tgtEl>
                                           <p:spTgt spid="5"/>
                                         </p:tgtEl>
@@ -17391,7 +17199,7 @@
                                     </p:animEffect>
                                     <p:set>
                                       <p:cBhvr>
-                                        <p:cTn id="22" dur="1" fill="hold">
+                                        <p:cTn id="21" dur="1" fill="hold">
                                           <p:stCondLst>
                                             <p:cond delay="499"/>
                                           </p:stCondLst>
@@ -17414,20 +17222,20 @@
                           </p:cTn>
                         </p:par>
                         <p:par>
-                          <p:cTn id="23" fill="hold">
+                          <p:cTn id="22" fill="hold">
                             <p:stCondLst>
                               <p:cond delay="4700"/>
                             </p:stCondLst>
                             <p:childTnLst>
                               <p:par>
-                                <p:cTn id="24" presetID="10" presetClass="entr" presetSubtype="0" fill="hold" grpId="0" nodeType="afterEffect">
+                                <p:cTn id="23" presetID="10" presetClass="entr" presetSubtype="0" fill="hold" grpId="0" nodeType="afterEffect">
                                   <p:stCondLst>
                                     <p:cond delay="0"/>
                                   </p:stCondLst>
                                   <p:childTnLst>
                                     <p:set>
                                       <p:cBhvr>
-                                        <p:cTn id="25" dur="1" fill="hold">
+                                        <p:cTn id="24" dur="1" fill="hold">
                                           <p:stCondLst>
                                             <p:cond delay="0"/>
                                           </p:stCondLst>
@@ -17445,7 +17253,7 @@
                                     </p:set>
                                     <p:animEffect transition="in" filter="fade">
                                       <p:cBhvr>
-                                        <p:cTn id="26" dur="500"/>
+                                        <p:cTn id="25" dur="500"/>
                                         <p:tgtEl>
                                           <p:spTgt spid="6"/>
                                         </p:tgtEl>
@@ -17455,14 +17263,14 @@
                                 </p:cTn>
                               </p:par>
                               <p:par>
-                                <p:cTn id="27" presetID="10" presetClass="entr" presetSubtype="0" fill="hold" grpId="0" nodeType="withEffect">
+                                <p:cTn id="26" presetID="10" presetClass="entr" presetSubtype="0" fill="hold" grpId="0" nodeType="withEffect">
                                   <p:stCondLst>
                                     <p:cond delay="0"/>
                                   </p:stCondLst>
                                   <p:childTnLst>
                                     <p:set>
                                       <p:cBhvr>
-                                        <p:cTn id="28" dur="1" fill="hold">
+                                        <p:cTn id="27" dur="1" fill="hold">
                                           <p:stCondLst>
                                             <p:cond delay="0"/>
                                           </p:stCondLst>
@@ -17480,7 +17288,7 @@
                                     </p:set>
                                     <p:animEffect transition="in" filter="fade">
                                       <p:cBhvr>
-                                        <p:cTn id="29" dur="500"/>
+                                        <p:cTn id="28" dur="500"/>
                                         <p:tgtEl>
                                           <p:spTgt spid="8"/>
                                         </p:tgtEl>
@@ -17490,14 +17298,14 @@
                                 </p:cTn>
                               </p:par>
                               <p:par>
-                                <p:cTn id="30" presetID="10" presetClass="entr" presetSubtype="0" fill="hold" grpId="0" nodeType="withEffect">
+                                <p:cTn id="29" presetID="10" presetClass="entr" presetSubtype="0" fill="hold" grpId="0" nodeType="withEffect">
                                   <p:stCondLst>
                                     <p:cond delay="0"/>
                                   </p:stCondLst>
                                   <p:childTnLst>
                                     <p:set>
                                       <p:cBhvr>
-                                        <p:cTn id="31" dur="1" fill="hold">
+                                        <p:cTn id="30" dur="1" fill="hold">
                                           <p:stCondLst>
                                             <p:cond delay="0"/>
                                           </p:stCondLst>
@@ -17515,7 +17323,7 @@
                                     </p:set>
                                     <p:animEffect transition="in" filter="fade">
                                       <p:cBhvr>
-                                        <p:cTn id="32" dur="500"/>
+                                        <p:cTn id="31" dur="500"/>
                                         <p:tgtEl>
                                           <p:spTgt spid="9"/>
                                         </p:tgtEl>
@@ -17525,14 +17333,14 @@
                                 </p:cTn>
                               </p:par>
                               <p:par>
-                                <p:cTn id="33" presetID="10" presetClass="entr" presetSubtype="0" fill="hold" grpId="0" nodeType="withEffect">
+                                <p:cTn id="32" presetID="10" presetClass="entr" presetSubtype="0" fill="hold" grpId="0" nodeType="withEffect">
                                   <p:stCondLst>
                                     <p:cond delay="0"/>
                                   </p:stCondLst>
                                   <p:childTnLst>
                                     <p:set>
                                       <p:cBhvr>
-                                        <p:cTn id="34" dur="1" fill="hold">
+                                        <p:cTn id="33" dur="1" fill="hold">
                                           <p:stCondLst>
                                             <p:cond delay="0"/>
                                           </p:stCondLst>
@@ -17550,7 +17358,7 @@
                                     </p:set>
                                     <p:animEffect transition="in" filter="fade">
                                       <p:cBhvr>
-                                        <p:cTn id="35" dur="500"/>
+                                        <p:cTn id="34" dur="500"/>
                                         <p:tgtEl>
                                           <p:spTgt spid="10"/>
                                         </p:tgtEl>
@@ -17560,14 +17368,14 @@
                                 </p:cTn>
                               </p:par>
                               <p:par>
-                                <p:cTn id="36" presetID="10" presetClass="entr" presetSubtype="0" fill="hold" grpId="0" nodeType="withEffect">
+                                <p:cTn id="35" presetID="10" presetClass="entr" presetSubtype="0" fill="hold" grpId="0" nodeType="withEffect">
                                   <p:stCondLst>
                                     <p:cond delay="0"/>
                                   </p:stCondLst>
                                   <p:childTnLst>
                                     <p:set>
                                       <p:cBhvr>
-                                        <p:cTn id="37" dur="1" fill="hold">
+                                        <p:cTn id="36" dur="1" fill="hold">
                                           <p:stCondLst>
                                             <p:cond delay="0"/>
                                           </p:stCondLst>
@@ -17585,7 +17393,7 @@
                                     </p:set>
                                     <p:animEffect transition="in" filter="fade">
                                       <p:cBhvr>
-                                        <p:cTn id="38" dur="500"/>
+                                        <p:cTn id="37" dur="500"/>
                                         <p:tgtEl>
                                           <p:spTgt spid="11"/>
                                         </p:tgtEl>
@@ -17595,14 +17403,14 @@
                                 </p:cTn>
                               </p:par>
                               <p:par>
-                                <p:cTn id="39" presetID="10" presetClass="entr" presetSubtype="0" fill="hold" grpId="0" nodeType="withEffect">
+                                <p:cTn id="38" presetID="10" presetClass="entr" presetSubtype="0" fill="hold" grpId="0" nodeType="withEffect">
                                   <p:stCondLst>
                                     <p:cond delay="0"/>
                                   </p:stCondLst>
                                   <p:childTnLst>
                                     <p:set>
                                       <p:cBhvr>
-                                        <p:cTn id="40" dur="1" fill="hold">
+                                        <p:cTn id="39" dur="1" fill="hold">
                                           <p:stCondLst>
                                             <p:cond delay="0"/>
                                           </p:stCondLst>
@@ -17620,7 +17428,7 @@
                                     </p:set>
                                     <p:animEffect transition="in" filter="fade">
                                       <p:cBhvr>
-                                        <p:cTn id="41" dur="500"/>
+                                        <p:cTn id="40" dur="500"/>
                                         <p:tgtEl>
                                           <p:spTgt spid="12"/>
                                         </p:tgtEl>
@@ -17636,26 +17444,26 @@
                     </p:cTn>
                   </p:par>
                   <p:par>
-                    <p:cTn id="42" fill="hold">
+                    <p:cTn id="41" fill="hold">
                       <p:stCondLst>
                         <p:cond delay="indefinite"/>
                       </p:stCondLst>
                       <p:childTnLst>
                         <p:par>
-                          <p:cTn id="43" fill="hold">
+                          <p:cTn id="42" fill="hold">
                             <p:stCondLst>
                               <p:cond delay="0"/>
                             </p:stCondLst>
                             <p:childTnLst>
                               <p:par>
-                                <p:cTn id="44" presetID="10" presetClass="exit" presetSubtype="0" fill="hold" grpId="1" nodeType="clickEffect">
+                                <p:cTn id="43" presetID="10" presetClass="exit" presetSubtype="0" fill="hold" grpId="1" nodeType="clickEffect">
                                   <p:stCondLst>
                                     <p:cond delay="0"/>
                                   </p:stCondLst>
                                   <p:childTnLst>
                                     <p:animEffect transition="out" filter="fade">
                                       <p:cBhvr>
-                                        <p:cTn id="45" dur="500"/>
+                                        <p:cTn id="44" dur="500"/>
                                         <p:tgtEl>
                                           <p:spTgt spid="6"/>
                                         </p:tgtEl>
@@ -17663,7 +17471,7 @@
                                     </p:animEffect>
                                     <p:set>
                                       <p:cBhvr>
-                                        <p:cTn id="46" dur="1" fill="hold">
+                                        <p:cTn id="45" dur="1" fill="hold">
                                           <p:stCondLst>
                                             <p:cond delay="499"/>
                                           </p:stCondLst>
@@ -17683,14 +17491,14 @@
                                 </p:cTn>
                               </p:par>
                               <p:par>
-                                <p:cTn id="47" presetID="53" presetClass="entr" presetSubtype="16" fill="hold" grpId="0" nodeType="withEffect">
+                                <p:cTn id="46" presetID="53" presetClass="entr" presetSubtype="16" fill="hold" grpId="0" nodeType="withEffect">
                                   <p:stCondLst>
                                     <p:cond delay="300"/>
                                   </p:stCondLst>
                                   <p:childTnLst>
                                     <p:set>
                                       <p:cBhvr>
-                                        <p:cTn id="48" dur="1" fill="hold">
+                                        <p:cTn id="47" dur="1" fill="hold">
                                           <p:stCondLst>
                                             <p:cond delay="0"/>
                                           </p:stCondLst>
@@ -17708,7 +17516,7 @@
                                     </p:set>
                                     <p:anim calcmode="lin" valueType="num">
                                       <p:cBhvr additive="base">
-                                        <p:cTn id="49" dur="700" fill="hold"/>
+                                        <p:cTn id="48" dur="700" fill="hold"/>
                                         <p:tgtEl>
                                           <p:spTgt spid="7"/>
                                         </p:tgtEl>
@@ -17731,7 +17539,7 @@
                                     </p:anim>
                                     <p:anim calcmode="lin" valueType="num">
                                       <p:cBhvr additive="base">
-                                        <p:cTn id="50" dur="700" fill="hold"/>
+                                        <p:cTn id="49" dur="700" fill="hold"/>
                                         <p:tgtEl>
                                           <p:spTgt spid="7"/>
                                         </p:tgtEl>
@@ -17754,7 +17562,7 @@
                                     </p:anim>
                                     <p:animEffect transition="in" filter="fade">
                                       <p:cBhvr>
-                                        <p:cTn id="51" dur="700"/>
+                                        <p:cTn id="50" dur="700"/>
                                         <p:tgtEl>
                                           <p:spTgt spid="7"/>
                                         </p:tgtEl>
@@ -17770,26 +17578,26 @@
                     </p:cTn>
                   </p:par>
                   <p:par>
-                    <p:cTn id="52" fill="hold">
+                    <p:cTn id="51" fill="hold">
                       <p:stCondLst>
                         <p:cond delay="indefinite"/>
                       </p:stCondLst>
                       <p:childTnLst>
                         <p:par>
-                          <p:cTn id="53" fill="hold">
+                          <p:cTn id="52" fill="hold">
                             <p:stCondLst>
                               <p:cond delay="0"/>
                             </p:stCondLst>
                             <p:childTnLst>
                               <p:par>
-                                <p:cTn id="54" presetID="10" presetClass="entr" presetSubtype="0" fill="hold" grpId="0" nodeType="clickEffect">
+                                <p:cTn id="53" presetID="10" presetClass="entr" presetSubtype="0" fill="hold" grpId="0" nodeType="clickEffect">
                                   <p:stCondLst>
                                     <p:cond delay="0"/>
                                   </p:stCondLst>
                                   <p:childTnLst>
                                     <p:set>
                                       <p:cBhvr>
-                                        <p:cTn id="55" dur="1" fill="hold">
+                                        <p:cTn id="54" dur="1" fill="hold">
                                           <p:stCondLst>
                                             <p:cond delay="0"/>
                                           </p:stCondLst>
@@ -17807,29 +17615,13 @@
                                     </p:set>
                                     <p:animEffect transition="in" filter="fade">
                                       <p:cBhvr>
-                                        <p:cTn id="56" dur="500"/>
+                                        <p:cTn id="55" dur="500"/>
                                         <p:tgtEl>
                                           <p:spTgt spid="13"/>
                                         </p:tgtEl>
                                       </p:cBhvr>
                                     </p:animEffect>
                                   </p:childTnLst>
-                                  <p:subTnLst>
-                                    <p:audio>
-                                      <p:cMediaNode vol="50000" showWhenStopped="0">
-                                        <p:cTn id="57" display="0" masterRel="sameClick">
-                                          <p:stCondLst>
-                                            <p:cond evt="onBegin" delay="0">
-                                              <p:tn val="54"/>
-                                            </p:cond>
-                                          </p:stCondLst>
-                                        </p:cTn>
-                                        <p:tgtEl>
-                                          <p:sndTgt r:embed="rId10" name="chime.wav"/>
-                                        </p:tgtEl>
-                                      </p:cMediaNode>
-                                    </p:audio>
-                                  </p:subTnLst>
                                 </p:cTn>
                               </p:par>
                             </p:childTnLst>
@@ -18863,33 +18655,17 @@
                                       </p:cBhvr>
                                     </p:animEffect>
                                   </p:childTnLst>
-                                  <p:subTnLst>
-                                    <p:audio>
-                                      <p:cMediaNode vol="50000" showWhenStopped="0">
-                                        <p:cTn id="8" display="0" masterRel="sameClick">
-                                          <p:stCondLst>
-                                            <p:cond evt="onBegin" delay="0">
-                                              <p:tn val="5"/>
-                                            </p:cond>
-                                          </p:stCondLst>
-                                        </p:cTn>
-                                        <p:tgtEl>
-                                          <p:sndTgt r:embed="rId6" name="chime.wav"/>
-                                        </p:tgtEl>
-                                      </p:cMediaNode>
-                                    </p:audio>
-                                  </p:subTnLst>
                                 </p:cTn>
                               </p:par>
                               <p:par>
-                                <p:cTn id="9" presetID="10" presetClass="entr" presetSubtype="0" fill="hold" grpId="0" nodeType="withEffect">
+                                <p:cTn id="8" presetID="10" presetClass="entr" presetSubtype="0" fill="hold" grpId="0" nodeType="withEffect">
                                   <p:stCondLst>
                                     <p:cond delay="0"/>
                                   </p:stCondLst>
                                   <p:childTnLst>
                                     <p:set>
                                       <p:cBhvr>
-                                        <p:cTn id="10" dur="1" fill="hold">
+                                        <p:cTn id="9" dur="1" fill="hold">
                                           <p:stCondLst>
                                             <p:cond delay="0"/>
                                           </p:stCondLst>
@@ -18907,7 +18683,7 @@
                                     </p:set>
                                     <p:animEffect transition="in" filter="fade">
                                       <p:cBhvr>
-                                        <p:cTn id="11" dur="500"/>
+                                        <p:cTn id="10" dur="500"/>
                                         <p:tgtEl>
                                           <p:spTgt spid="8"/>
                                         </p:tgtEl>
@@ -18933,7 +18709,7 @@
               </p:nextCondLst>
             </p:seq>
             <p:seq concurrent="1" nextAc="seek">
-              <p:cTn id="12" restart="whenNotActive" fill="hold" evtFilter="cancelBubble" nodeType="interactiveSeq">
+              <p:cTn id="11" restart="whenNotActive" fill="hold" evtFilter="cancelBubble" nodeType="interactiveSeq">
                 <p:stCondLst>
                   <p:cond evt="onClick" delay="0">
                     <p:tgtEl>
@@ -18946,26 +18722,26 @@
                 </p:endSync>
                 <p:childTnLst>
                   <p:par>
-                    <p:cTn id="13" fill="hold">
+                    <p:cTn id="12" fill="hold">
                       <p:stCondLst>
                         <p:cond delay="0"/>
                       </p:stCondLst>
                       <p:childTnLst>
                         <p:par>
-                          <p:cTn id="14" fill="hold">
+                          <p:cTn id="13" fill="hold">
                             <p:stCondLst>
                               <p:cond delay="0"/>
                             </p:stCondLst>
                             <p:childTnLst>
                               <p:par>
-                                <p:cTn id="15" presetID="10" presetClass="entr" presetSubtype="0" fill="hold" grpId="0" nodeType="clickEffect">
+                                <p:cTn id="14" presetID="10" presetClass="entr" presetSubtype="0" fill="hold" grpId="0" nodeType="clickEffect">
                                   <p:stCondLst>
                                     <p:cond delay="0"/>
                                   </p:stCondLst>
                                   <p:childTnLst>
                                     <p:set>
                                       <p:cBhvr>
-                                        <p:cTn id="16" dur="1" fill="hold">
+                                        <p:cTn id="15" dur="1" fill="hold">
                                           <p:stCondLst>
                                             <p:cond delay="0"/>
                                           </p:stCondLst>
@@ -18983,40 +18759,24 @@
                                     </p:set>
                                     <p:animEffect transition="in" filter="fade">
                                       <p:cBhvr>
-                                        <p:cTn id="17" dur="500"/>
+                                        <p:cTn id="16" dur="500"/>
                                         <p:tgtEl>
                                           <p:spTgt spid="10"/>
                                         </p:tgtEl>
                                       </p:cBhvr>
                                     </p:animEffect>
                                   </p:childTnLst>
-                                  <p:subTnLst>
-                                    <p:audio>
-                                      <p:cMediaNode vol="50000" showWhenStopped="0">
-                                        <p:cTn id="18" display="0" masterRel="sameClick">
-                                          <p:stCondLst>
-                                            <p:cond evt="onBegin" delay="0">
-                                              <p:tn val="15"/>
-                                            </p:cond>
-                                          </p:stCondLst>
-                                        </p:cTn>
-                                        <p:tgtEl>
-                                          <p:sndTgt r:embed="rId6" name="chime.wav"/>
-                                        </p:tgtEl>
-                                      </p:cMediaNode>
-                                    </p:audio>
-                                  </p:subTnLst>
                                 </p:cTn>
                               </p:par>
                               <p:par>
-                                <p:cTn id="19" presetID="10" presetClass="entr" presetSubtype="0" fill="hold" grpId="0" nodeType="withEffect">
+                                <p:cTn id="17" presetID="10" presetClass="entr" presetSubtype="0" fill="hold" grpId="0" nodeType="withEffect">
                                   <p:stCondLst>
                                     <p:cond delay="0"/>
                                   </p:stCondLst>
                                   <p:childTnLst>
                                     <p:set>
                                       <p:cBhvr>
-                                        <p:cTn id="20" dur="1" fill="hold">
+                                        <p:cTn id="18" dur="1" fill="hold">
                                           <p:stCondLst>
                                             <p:cond delay="0"/>
                                           </p:stCondLst>
@@ -19034,7 +18794,7 @@
                                     </p:set>
                                     <p:animEffect transition="in" filter="fade">
                                       <p:cBhvr>
-                                        <p:cTn id="21" dur="500"/>
+                                        <p:cTn id="19" dur="500"/>
                                         <p:tgtEl>
                                           <p:spTgt spid="11"/>
                                         </p:tgtEl>
@@ -19060,7 +18820,7 @@
               </p:nextCondLst>
             </p:seq>
             <p:seq concurrent="1" nextAc="seek">
-              <p:cTn id="22" restart="whenNotActive" fill="hold" evtFilter="cancelBubble" nodeType="interactiveSeq">
+              <p:cTn id="20" restart="whenNotActive" fill="hold" evtFilter="cancelBubble" nodeType="interactiveSeq">
                 <p:stCondLst>
                   <p:cond evt="onClick" delay="0">
                     <p:tgtEl>
@@ -19073,26 +18833,26 @@
                 </p:endSync>
                 <p:childTnLst>
                   <p:par>
-                    <p:cTn id="23" fill="hold">
+                    <p:cTn id="21" fill="hold">
                       <p:stCondLst>
                         <p:cond delay="0"/>
                       </p:stCondLst>
                       <p:childTnLst>
                         <p:par>
-                          <p:cTn id="24" fill="hold">
+                          <p:cTn id="22" fill="hold">
                             <p:stCondLst>
                               <p:cond delay="0"/>
                             </p:stCondLst>
                             <p:childTnLst>
                               <p:par>
-                                <p:cTn id="25" presetID="10" presetClass="entr" presetSubtype="0" fill="hold" grpId="0" nodeType="clickEffect">
+                                <p:cTn id="23" presetID="10" presetClass="entr" presetSubtype="0" fill="hold" grpId="0" nodeType="clickEffect">
                                   <p:stCondLst>
                                     <p:cond delay="0"/>
                                   </p:stCondLst>
                                   <p:childTnLst>
                                     <p:set>
                                       <p:cBhvr>
-                                        <p:cTn id="26" dur="1" fill="hold">
+                                        <p:cTn id="24" dur="1" fill="hold">
                                           <p:stCondLst>
                                             <p:cond delay="0"/>
                                           </p:stCondLst>
@@ -19110,40 +18870,24 @@
                                     </p:set>
                                     <p:animEffect transition="in" filter="fade">
                                       <p:cBhvr>
-                                        <p:cTn id="27" dur="500"/>
+                                        <p:cTn id="25" dur="500"/>
                                         <p:tgtEl>
                                           <p:spTgt spid="13"/>
                                         </p:tgtEl>
                                       </p:cBhvr>
                                     </p:animEffect>
                                   </p:childTnLst>
-                                  <p:subTnLst>
-                                    <p:audio>
-                                      <p:cMediaNode vol="50000" showWhenStopped="0">
-                                        <p:cTn id="28" display="0" masterRel="sameClick">
-                                          <p:stCondLst>
-                                            <p:cond evt="onBegin" delay="0">
-                                              <p:tn val="25"/>
-                                            </p:cond>
-                                          </p:stCondLst>
-                                        </p:cTn>
-                                        <p:tgtEl>
-                                          <p:sndTgt r:embed="rId6" name="chime.wav"/>
-                                        </p:tgtEl>
-                                      </p:cMediaNode>
-                                    </p:audio>
-                                  </p:subTnLst>
                                 </p:cTn>
                               </p:par>
                               <p:par>
-                                <p:cTn id="29" presetID="10" presetClass="entr" presetSubtype="0" fill="hold" grpId="0" nodeType="withEffect">
+                                <p:cTn id="26" presetID="10" presetClass="entr" presetSubtype="0" fill="hold" grpId="0" nodeType="withEffect">
                                   <p:stCondLst>
                                     <p:cond delay="0"/>
                                   </p:stCondLst>
                                   <p:childTnLst>
                                     <p:set>
                                       <p:cBhvr>
-                                        <p:cTn id="30" dur="1" fill="hold">
+                                        <p:cTn id="27" dur="1" fill="hold">
                                           <p:stCondLst>
                                             <p:cond delay="0"/>
                                           </p:stCondLst>
@@ -19161,7 +18905,7 @@
                                     </p:set>
                                     <p:animEffect transition="in" filter="fade">
                                       <p:cBhvr>
-                                        <p:cTn id="31" dur="500"/>
+                                        <p:cTn id="28" dur="500"/>
                                         <p:tgtEl>
                                           <p:spTgt spid="14"/>
                                         </p:tgtEl>
@@ -19187,7 +18931,7 @@
               </p:nextCondLst>
             </p:seq>
             <p:seq concurrent="1" nextAc="seek">
-              <p:cTn id="32" restart="whenNotActive" fill="hold" evtFilter="cancelBubble" nodeType="interactiveSeq">
+              <p:cTn id="29" restart="whenNotActive" fill="hold" evtFilter="cancelBubble" nodeType="interactiveSeq">
                 <p:stCondLst>
                   <p:cond evt="onClick" delay="0">
                     <p:tgtEl>
@@ -19200,32 +18944,67 @@
                 </p:endSync>
                 <p:childTnLst>
                   <p:par>
-                    <p:cTn id="33" fill="hold">
+                    <p:cTn id="30" fill="hold">
                       <p:stCondLst>
                         <p:cond delay="0"/>
                       </p:stCondLst>
                       <p:childTnLst>
                         <p:par>
-                          <p:cTn id="34" fill="hold">
+                          <p:cTn id="31" fill="hold">
                             <p:stCondLst>
                               <p:cond delay="0"/>
                             </p:stCondLst>
                             <p:childTnLst>
                               <p:par>
-                                <p:cTn id="35" presetID="10" presetClass="entr" presetSubtype="0" fill="hold" grpId="0" nodeType="clickEffect">
+                                <p:cTn id="32" presetID="10" presetClass="entr" presetSubtype="0" fill="hold" grpId="0" nodeType="clickEffect">
                                   <p:stCondLst>
                                     <p:cond delay="0"/>
                                   </p:stCondLst>
                                   <p:childTnLst>
                                     <p:set>
                                       <p:cBhvr>
+                                        <p:cTn id="33" dur="1" fill="hold">
+                                          <p:stCondLst>
+                                            <p:cond delay="0"/>
+                                          </p:stCondLst>
+                                        </p:cTn>
+                                        <p:tgtEl>
+                                          <p:spTgt spid="16"/>
+                                        </p:tgtEl>
+                                        <p:attrNameLst>
+                                          <p:attrName>style.visibility</p:attrName>
+                                        </p:attrNameLst>
+                                      </p:cBhvr>
+                                      <p:to>
+                                        <p:strVal val="visible"/>
+                                      </p:to>
+                                    </p:set>
+                                    <p:animEffect transition="in" filter="fade">
+                                      <p:cBhvr>
+                                        <p:cTn id="34" dur="500"/>
+                                        <p:tgtEl>
+                                          <p:spTgt spid="16"/>
+                                        </p:tgtEl>
+                                      </p:cBhvr>
+                                    </p:animEffect>
+                                  </p:childTnLst>
+                                </p:cTn>
+                              </p:par>
+                              <p:par>
+                                <p:cTn id="35" presetID="10" presetClass="entr" presetSubtype="0" fill="hold" grpId="0" nodeType="withEffect">
+                                  <p:stCondLst>
+                                    <p:cond delay="0"/>
+                                  </p:stCondLst>
+                                  <p:childTnLst>
+                                    <p:set>
+                                      <p:cBhvr>
                                         <p:cTn id="36" dur="1" fill="hold">
                                           <p:stCondLst>
                                             <p:cond delay="0"/>
                                           </p:stCondLst>
                                         </p:cTn>
                                         <p:tgtEl>
-                                          <p:spTgt spid="16"/>
+                                          <p:spTgt spid="17"/>
                                         </p:tgtEl>
                                         <p:attrNameLst>
                                           <p:attrName>style.visibility</p:attrName>
@@ -19239,44 +19018,28 @@
                                       <p:cBhvr>
                                         <p:cTn id="37" dur="500"/>
                                         <p:tgtEl>
-                                          <p:spTgt spid="16"/>
+                                          <p:spTgt spid="17"/>
                                         </p:tgtEl>
                                       </p:cBhvr>
                                     </p:animEffect>
                                   </p:childTnLst>
-                                  <p:subTnLst>
-                                    <p:audio>
-                                      <p:cMediaNode vol="50000" showWhenStopped="0">
-                                        <p:cTn id="38" display="0" masterRel="sameClick">
-                                          <p:stCondLst>
-                                            <p:cond evt="onBegin" delay="0">
-                                              <p:tn val="35"/>
-                                            </p:cond>
-                                          </p:stCondLst>
-                                        </p:cTn>
-                                        <p:tgtEl>
-                                          <p:sndTgt r:embed="rId6" name="chime.wav"/>
-                                        </p:tgtEl>
-                                      </p:cMediaNode>
-                                    </p:audio>
-                                  </p:subTnLst>
                                 </p:cTn>
                               </p:par>
                               <p:par>
-                                <p:cTn id="39" presetID="10" presetClass="entr" presetSubtype="0" fill="hold" grpId="0" nodeType="withEffect">
+                                <p:cTn id="38" presetID="10" presetClass="entr" presetSubtype="0" fill="hold" grpId="0" nodeType="withEffect">
                                   <p:stCondLst>
                                     <p:cond delay="0"/>
                                   </p:stCondLst>
                                   <p:childTnLst>
                                     <p:set>
                                       <p:cBhvr>
-                                        <p:cTn id="40" dur="1" fill="hold">
+                                        <p:cTn id="39" dur="1" fill="hold">
                                           <p:stCondLst>
                                             <p:cond delay="0"/>
                                           </p:stCondLst>
                                         </p:cTn>
                                         <p:tgtEl>
-                                          <p:spTgt spid="17"/>
+                                          <p:spTgt spid="18"/>
                                         </p:tgtEl>
                                         <p:attrNameLst>
                                           <p:attrName>style.visibility</p:attrName>
@@ -19288,42 +19051,7 @@
                                     </p:set>
                                     <p:animEffect transition="in" filter="fade">
                                       <p:cBhvr>
-                                        <p:cTn id="41" dur="500"/>
-                                        <p:tgtEl>
-                                          <p:spTgt spid="17"/>
-                                        </p:tgtEl>
-                                      </p:cBhvr>
-                                    </p:animEffect>
-                                  </p:childTnLst>
-                                </p:cTn>
-                              </p:par>
-                              <p:par>
-                                <p:cTn id="42" presetID="10" presetClass="entr" presetSubtype="0" fill="hold" grpId="0" nodeType="withEffect">
-                                  <p:stCondLst>
-                                    <p:cond delay="0"/>
-                                  </p:stCondLst>
-                                  <p:childTnLst>
-                                    <p:set>
-                                      <p:cBhvr>
-                                        <p:cTn id="43" dur="1" fill="hold">
-                                          <p:stCondLst>
-                                            <p:cond delay="0"/>
-                                          </p:stCondLst>
-                                        </p:cTn>
-                                        <p:tgtEl>
-                                          <p:spTgt spid="18"/>
-                                        </p:tgtEl>
-                                        <p:attrNameLst>
-                                          <p:attrName>style.visibility</p:attrName>
-                                        </p:attrNameLst>
-                                      </p:cBhvr>
-                                      <p:to>
-                                        <p:strVal val="visible"/>
-                                      </p:to>
-                                    </p:set>
-                                    <p:animEffect transition="in" filter="fade">
-                                      <p:cBhvr>
-                                        <p:cTn id="44" dur="500"/>
+                                        <p:cTn id="40" dur="500"/>
                                         <p:tgtEl>
                                           <p:spTgt spid="18"/>
                                         </p:tgtEl>
@@ -20603,22 +20331,6 @@
                                       <p:by x="118000" y="118000"/>
                                     </p:animScale>
                                   </p:childTnLst>
-                                  <p:subTnLst>
-                                    <p:audio>
-                                      <p:cMediaNode vol="50000" showWhenStopped="0">
-                                        <p:cTn id="19" display="0" masterRel="sameClick">
-                                          <p:stCondLst>
-                                            <p:cond evt="onBegin" delay="0">
-                                              <p:tn val="17"/>
-                                            </p:cond>
-                                          </p:stCondLst>
-                                        </p:cTn>
-                                        <p:tgtEl>
-                                          <p:sndTgt r:embed="rId20" name="bubbles.wav"/>
-                                        </p:tgtEl>
-                                      </p:cMediaNode>
-                                    </p:audio>
-                                  </p:subTnLst>
                                 </p:cTn>
                               </p:par>
                             </p:childTnLst>
@@ -20628,26 +20340,26 @@
                     </p:cTn>
                   </p:par>
                   <p:par>
-                    <p:cTn id="20" fill="hold">
+                    <p:cTn id="19" fill="hold">
                       <p:stCondLst>
                         <p:cond delay="indefinite"/>
                       </p:stCondLst>
                       <p:childTnLst>
                         <p:par>
-                          <p:cTn id="21" fill="hold">
+                          <p:cTn id="20" fill="hold">
                             <p:stCondLst>
                               <p:cond delay="0"/>
                             </p:stCondLst>
                             <p:childTnLst>
                               <p:par>
-                                <p:cTn id="22" presetID="53" presetClass="entr" presetSubtype="16" fill="hold" grpId="0" nodeType="clickEffect">
+                                <p:cTn id="21" presetID="53" presetClass="entr" presetSubtype="16" fill="hold" grpId="0" nodeType="clickEffect">
                                   <p:stCondLst>
                                     <p:cond delay="0"/>
                                   </p:stCondLst>
                                   <p:childTnLst>
                                     <p:set>
                                       <p:cBhvr>
-                                        <p:cTn id="23" dur="1" fill="hold">
+                                        <p:cTn id="22" dur="1" fill="hold">
                                           <p:stCondLst>
                                             <p:cond delay="0"/>
                                           </p:stCondLst>
@@ -20665,7 +20377,7 @@
                                     </p:set>
                                     <p:anim calcmode="lin" valueType="num">
                                       <p:cBhvr additive="base">
-                                        <p:cTn id="24" dur="350" fill="hold"/>
+                                        <p:cTn id="23" dur="350" fill="hold"/>
                                         <p:tgtEl>
                                           <p:spTgt spid="16"/>
                                         </p:tgtEl>
@@ -20688,7 +20400,7 @@
                                     </p:anim>
                                     <p:anim calcmode="lin" valueType="num">
                                       <p:cBhvr additive="base">
-                                        <p:cTn id="25" dur="350" fill="hold"/>
+                                        <p:cTn id="24" dur="350" fill="hold"/>
                                         <p:tgtEl>
                                           <p:spTgt spid="16"/>
                                         </p:tgtEl>
@@ -20711,7 +20423,7 @@
                                     </p:anim>
                                     <p:animEffect transition="in" filter="fade">
                                       <p:cBhvr>
-                                        <p:cTn id="26" dur="350"/>
+                                        <p:cTn id="25" dur="350"/>
                                         <p:tgtEl>
                                           <p:spTgt spid="16"/>
                                         </p:tgtEl>
@@ -20721,14 +20433,14 @@
                                 </p:cTn>
                               </p:par>
                               <p:par>
-                                <p:cTn id="27" presetID="0" presetClass="path" presetSubtype="0" fill="hold" grpId="1" nodeType="withEffect">
+                                <p:cTn id="26" presetID="0" presetClass="path" presetSubtype="0" fill="hold" grpId="1" nodeType="withEffect">
                                   <p:stCondLst>
                                     <p:cond delay="350"/>
                                   </p:stCondLst>
                                   <p:childTnLst>
                                     <p:animMotion origin="layout" path="M 0 0 L -0.0578 0.3760 E" pathEditMode="relative" ptsTypes="">
                                       <p:cBhvr>
-                                        <p:cTn id="28" dur="1500" fill="hold" accel="40000" decel="40000"/>
+                                        <p:cTn id="27" dur="1500" fill="hold" accel="40000" decel="40000"/>
                                         <p:tgtEl>
                                           <p:spTgt spid="16"/>
                                         </p:tgtEl>
@@ -20743,14 +20455,14 @@
                                 </p:cTn>
                               </p:par>
                               <p:par>
-                                <p:cTn id="29" presetID="6" presetClass="emph" presetSubtype="0" fill="hold" grpId="0" nodeType="withEffect">
+                                <p:cTn id="28" presetID="6" presetClass="emph" presetSubtype="0" fill="hold" grpId="0" nodeType="withEffect">
                                   <p:stCondLst>
                                     <p:cond delay="1850"/>
                                   </p:stCondLst>
                                   <p:childTnLst>
                                     <p:animScale>
                                       <p:cBhvr>
-                                        <p:cTn id="30" dur="400" autoRev="1" fill="hold"/>
+                                        <p:cTn id="29" dur="400" autoRev="1" fill="hold"/>
                                         <p:tgtEl>
                                           <p:spTgt spid="5"/>
                                         </p:tgtEl>
@@ -20761,14 +20473,14 @@
                                 </p:cTn>
                               </p:par>
                               <p:par>
-                                <p:cTn id="31" presetID="10" presetClass="exit" presetSubtype="0" fill="hold" grpId="2" nodeType="withEffect">
+                                <p:cTn id="30" presetID="10" presetClass="exit" presetSubtype="0" fill="hold" grpId="2" nodeType="withEffect">
                                   <p:stCondLst>
                                     <p:cond delay="2350"/>
                                   </p:stCondLst>
                                   <p:childTnLst>
                                     <p:animEffect transition="out" filter="fade">
                                       <p:cBhvr>
-                                        <p:cTn id="32" dur="400"/>
+                                        <p:cTn id="31" dur="400"/>
                                         <p:tgtEl>
                                           <p:spTgt spid="16"/>
                                         </p:tgtEl>
@@ -20776,7 +20488,7 @@
                                     </p:animEffect>
                                     <p:set>
                                       <p:cBhvr>
-                                        <p:cTn id="33" dur="1" fill="hold">
+                                        <p:cTn id="32" dur="1" fill="hold">
                                           <p:stCondLst>
                                             <p:cond delay="399"/>
                                           </p:stCondLst>
@@ -20796,14 +20508,14 @@
                                 </p:cTn>
                               </p:par>
                               <p:par>
-                                <p:cTn id="34" presetID="10" presetClass="entr" presetSubtype="0" fill="hold" grpId="0" nodeType="withEffect">
+                                <p:cTn id="33" presetID="10" presetClass="entr" presetSubtype="0" fill="hold" grpId="0" nodeType="withEffect">
                                   <p:stCondLst>
                                     <p:cond delay="1850"/>
                                   </p:stCondLst>
                                   <p:childTnLst>
                                     <p:set>
                                       <p:cBhvr>
-                                        <p:cTn id="35" dur="1" fill="hold">
+                                        <p:cTn id="34" dur="1" fill="hold">
                                           <p:stCondLst>
                                             <p:cond delay="0"/>
                                           </p:stCondLst>
@@ -20821,7 +20533,7 @@
                                     </p:set>
                                     <p:animEffect transition="in" filter="fade">
                                       <p:cBhvr>
-                                        <p:cTn id="36" dur="400"/>
+                                        <p:cTn id="35" dur="400"/>
                                         <p:tgtEl>
                                           <p:spTgt spid="17"/>
                                         </p:tgtEl>
@@ -20837,26 +20549,26 @@
                     </p:cTn>
                   </p:par>
                   <p:par>
-                    <p:cTn id="37" fill="hold">
+                    <p:cTn id="36" fill="hold">
                       <p:stCondLst>
                         <p:cond delay="indefinite"/>
                       </p:stCondLst>
                       <p:childTnLst>
                         <p:par>
-                          <p:cTn id="38" fill="hold">
+                          <p:cTn id="37" fill="hold">
                             <p:stCondLst>
                               <p:cond delay="0"/>
                             </p:stCondLst>
                             <p:childTnLst>
                               <p:par>
-                                <p:cTn id="39" presetID="53" presetClass="entr" presetSubtype="16" fill="hold" grpId="0" nodeType="clickEffect">
+                                <p:cTn id="38" presetID="53" presetClass="entr" presetSubtype="16" fill="hold" grpId="0" nodeType="clickEffect">
                                   <p:stCondLst>
                                     <p:cond delay="0"/>
                                   </p:stCondLst>
                                   <p:childTnLst>
                                     <p:set>
                                       <p:cBhvr>
-                                        <p:cTn id="40" dur="1" fill="hold">
+                                        <p:cTn id="39" dur="1" fill="hold">
                                           <p:stCondLst>
                                             <p:cond delay="0"/>
                                           </p:stCondLst>
@@ -20874,7 +20586,7 @@
                                     </p:set>
                                     <p:anim calcmode="lin" valueType="num">
                                       <p:cBhvr additive="base">
-                                        <p:cTn id="41" dur="350" fill="hold"/>
+                                        <p:cTn id="40" dur="350" fill="hold"/>
                                         <p:tgtEl>
                                           <p:spTgt spid="18"/>
                                         </p:tgtEl>
@@ -20897,7 +20609,7 @@
                                     </p:anim>
                                     <p:anim calcmode="lin" valueType="num">
                                       <p:cBhvr additive="base">
-                                        <p:cTn id="42" dur="350" fill="hold"/>
+                                        <p:cTn id="41" dur="350" fill="hold"/>
                                         <p:tgtEl>
                                           <p:spTgt spid="18"/>
                                         </p:tgtEl>
@@ -20920,7 +20632,7 @@
                                     </p:anim>
                                     <p:animEffect transition="in" filter="fade">
                                       <p:cBhvr>
-                                        <p:cTn id="43" dur="350"/>
+                                        <p:cTn id="42" dur="350"/>
                                         <p:tgtEl>
                                           <p:spTgt spid="18"/>
                                         </p:tgtEl>
@@ -20930,14 +20642,14 @@
                                 </p:cTn>
                               </p:par>
                               <p:par>
-                                <p:cTn id="44" presetID="0" presetClass="path" presetSubtype="0" fill="hold" grpId="1" nodeType="withEffect">
+                                <p:cTn id="43" presetID="0" presetClass="path" presetSubtype="0" fill="hold" grpId="1" nodeType="withEffect">
                                   <p:stCondLst>
                                     <p:cond delay="350"/>
                                   </p:stCondLst>
                                   <p:childTnLst>
                                     <p:animMotion origin="layout" path="M 0 0 L -0.2138 -0.1533 E" pathEditMode="relative" ptsTypes="">
                                       <p:cBhvr>
-                                        <p:cTn id="45" dur="1500" fill="hold" accel="40000" decel="40000"/>
+                                        <p:cTn id="44" dur="1500" fill="hold" accel="40000" decel="40000"/>
                                         <p:tgtEl>
                                           <p:spTgt spid="18"/>
                                         </p:tgtEl>
@@ -20952,14 +20664,14 @@
                                 </p:cTn>
                               </p:par>
                               <p:par>
-                                <p:cTn id="46" presetID="22" presetClass="entr" presetSubtype="2" fill="hold" grpId="0" nodeType="withEffect">
+                                <p:cTn id="45" presetID="22" presetClass="entr" presetSubtype="2" fill="hold" grpId="0" nodeType="withEffect">
                                   <p:stCondLst>
                                     <p:cond delay="400"/>
                                   </p:stCondLst>
                                   <p:childTnLst>
                                     <p:set>
                                       <p:cBhvr>
-                                        <p:cTn id="47" dur="1" fill="hold">
+                                        <p:cTn id="46" dur="1" fill="hold">
                                           <p:stCondLst>
                                             <p:cond delay="0"/>
                                           </p:stCondLst>
@@ -20977,7 +20689,7 @@
                                     </p:set>
                                     <p:animEffect transition="in" filter="wipe(right)">
                                       <p:cBhvr>
-                                        <p:cTn id="48" dur="900"/>
+                                        <p:cTn id="47" dur="900"/>
                                         <p:tgtEl>
                                           <p:spTgt spid="13"/>
                                         </p:tgtEl>
@@ -20987,14 +20699,14 @@
                                 </p:cTn>
                               </p:par>
                               <p:par>
-                                <p:cTn id="49" presetID="6" presetClass="emph" presetSubtype="0" fill="hold" grpId="0" nodeType="withEffect">
+                                <p:cTn id="48" presetID="6" presetClass="emph" presetSubtype="0" fill="hold" grpId="0" nodeType="withEffect">
                                   <p:stCondLst>
                                     <p:cond delay="1850"/>
                                   </p:stCondLst>
                                   <p:childTnLst>
                                     <p:animScale>
                                       <p:cBhvr>
-                                        <p:cTn id="50" dur="400" autoRev="1" fill="hold"/>
+                                        <p:cTn id="49" dur="400" autoRev="1" fill="hold"/>
                                         <p:tgtEl>
                                           <p:spTgt spid="7"/>
                                         </p:tgtEl>
@@ -21005,14 +20717,14 @@
                                 </p:cTn>
                               </p:par>
                               <p:par>
-                                <p:cTn id="51" presetID="10" presetClass="exit" presetSubtype="0" fill="hold" grpId="2" nodeType="withEffect">
+                                <p:cTn id="50" presetID="10" presetClass="exit" presetSubtype="0" fill="hold" grpId="2" nodeType="withEffect">
                                   <p:stCondLst>
                                     <p:cond delay="2350"/>
                                   </p:stCondLst>
                                   <p:childTnLst>
                                     <p:animEffect transition="out" filter="fade">
                                       <p:cBhvr>
-                                        <p:cTn id="52" dur="400"/>
+                                        <p:cTn id="51" dur="400"/>
                                         <p:tgtEl>
                                           <p:spTgt spid="18"/>
                                         </p:tgtEl>
@@ -21020,7 +20732,7 @@
                                     </p:animEffect>
                                     <p:set>
                                       <p:cBhvr>
-                                        <p:cTn id="53" dur="1" fill="hold">
+                                        <p:cTn id="52" dur="1" fill="hold">
                                           <p:stCondLst>
                                             <p:cond delay="399"/>
                                           </p:stCondLst>
@@ -21040,14 +20752,14 @@
                                 </p:cTn>
                               </p:par>
                               <p:par>
-                                <p:cTn id="54" presetID="10" presetClass="entr" presetSubtype="0" fill="hold" grpId="0" nodeType="withEffect">
+                                <p:cTn id="53" presetID="10" presetClass="entr" presetSubtype="0" fill="hold" grpId="0" nodeType="withEffect">
                                   <p:stCondLst>
                                     <p:cond delay="1850"/>
                                   </p:stCondLst>
                                   <p:childTnLst>
                                     <p:set>
                                       <p:cBhvr>
-                                        <p:cTn id="55" dur="1" fill="hold">
+                                        <p:cTn id="54" dur="1" fill="hold">
                                           <p:stCondLst>
                                             <p:cond delay="0"/>
                                           </p:stCondLst>
@@ -21065,7 +20777,7 @@
                                     </p:set>
                                     <p:animEffect transition="in" filter="fade">
                                       <p:cBhvr>
-                                        <p:cTn id="56" dur="400"/>
+                                        <p:cTn id="55" dur="400"/>
                                         <p:tgtEl>
                                           <p:spTgt spid="19"/>
                                         </p:tgtEl>
@@ -21081,26 +20793,26 @@
                     </p:cTn>
                   </p:par>
                   <p:par>
-                    <p:cTn id="57" fill="hold">
+                    <p:cTn id="56" fill="hold">
                       <p:stCondLst>
                         <p:cond delay="indefinite"/>
                       </p:stCondLst>
                       <p:childTnLst>
                         <p:par>
-                          <p:cTn id="58" fill="hold">
+                          <p:cTn id="57" fill="hold">
                             <p:stCondLst>
                               <p:cond delay="0"/>
                             </p:stCondLst>
                             <p:childTnLst>
                               <p:par>
-                                <p:cTn id="59" presetID="53" presetClass="entr" presetSubtype="16" fill="hold" grpId="0" nodeType="clickEffect">
+                                <p:cTn id="58" presetID="53" presetClass="entr" presetSubtype="16" fill="hold" grpId="0" nodeType="clickEffect">
                                   <p:stCondLst>
                                     <p:cond delay="0"/>
                                   </p:stCondLst>
                                   <p:childTnLst>
                                     <p:set>
                                       <p:cBhvr>
-                                        <p:cTn id="60" dur="1" fill="hold">
+                                        <p:cTn id="59" dur="1" fill="hold">
                                           <p:stCondLst>
                                             <p:cond delay="0"/>
                                           </p:stCondLst>
@@ -21118,7 +20830,7 @@
                                     </p:set>
                                     <p:anim calcmode="lin" valueType="num">
                                       <p:cBhvr additive="base">
-                                        <p:cTn id="61" dur="350" fill="hold"/>
+                                        <p:cTn id="60" dur="350" fill="hold"/>
                                         <p:tgtEl>
                                           <p:spTgt spid="20"/>
                                         </p:tgtEl>
@@ -21141,7 +20853,7 @@
                                     </p:anim>
                                     <p:anim calcmode="lin" valueType="num">
                                       <p:cBhvr additive="base">
-                                        <p:cTn id="62" dur="350" fill="hold"/>
+                                        <p:cTn id="61" dur="350" fill="hold"/>
                                         <p:tgtEl>
                                           <p:spTgt spid="20"/>
                                         </p:tgtEl>
@@ -21164,7 +20876,7 @@
                                     </p:anim>
                                     <p:animEffect transition="in" filter="fade">
                                       <p:cBhvr>
-                                        <p:cTn id="63" dur="350"/>
+                                        <p:cTn id="62" dur="350"/>
                                         <p:tgtEl>
                                           <p:spTgt spid="20"/>
                                         </p:tgtEl>
@@ -21174,14 +20886,14 @@
                                 </p:cTn>
                               </p:par>
                               <p:par>
-                                <p:cTn id="64" presetID="0" presetClass="path" presetSubtype="0" fill="hold" grpId="1" nodeType="withEffect">
+                                <p:cTn id="63" presetID="0" presetClass="path" presetSubtype="0" fill="hold" grpId="1" nodeType="withEffect">
                                   <p:stCondLst>
                                     <p:cond delay="350"/>
                                   </p:stCondLst>
                                   <p:childTnLst>
                                     <p:animMotion origin="layout" path="M 0 0 L -0.2100 0.1333 E" pathEditMode="relative" ptsTypes="">
                                       <p:cBhvr>
-                                        <p:cTn id="65" dur="1500" fill="hold" accel="40000" decel="40000"/>
+                                        <p:cTn id="64" dur="1500" fill="hold" accel="40000" decel="40000"/>
                                         <p:tgtEl>
                                           <p:spTgt spid="20"/>
                                         </p:tgtEl>
@@ -21196,14 +20908,14 @@
                                 </p:cTn>
                               </p:par>
                               <p:par>
-                                <p:cTn id="66" presetID="22" presetClass="entr" presetSubtype="2" fill="hold" grpId="0" nodeType="withEffect">
+                                <p:cTn id="65" presetID="22" presetClass="entr" presetSubtype="2" fill="hold" grpId="0" nodeType="withEffect">
                                   <p:stCondLst>
                                     <p:cond delay="400"/>
                                   </p:stCondLst>
                                   <p:childTnLst>
                                     <p:set>
                                       <p:cBhvr>
-                                        <p:cTn id="67" dur="1" fill="hold">
+                                        <p:cTn id="66" dur="1" fill="hold">
                                           <p:stCondLst>
                                             <p:cond delay="0"/>
                                           </p:stCondLst>
@@ -21221,7 +20933,7 @@
                                     </p:set>
                                     <p:animEffect transition="in" filter="wipe(right)">
                                       <p:cBhvr>
-                                        <p:cTn id="68" dur="900"/>
+                                        <p:cTn id="67" dur="900"/>
                                         <p:tgtEl>
                                           <p:spTgt spid="14"/>
                                         </p:tgtEl>
@@ -21231,14 +20943,14 @@
                                 </p:cTn>
                               </p:par>
                               <p:par>
-                                <p:cTn id="69" presetID="6" presetClass="emph" presetSubtype="0" fill="hold" grpId="0" nodeType="withEffect">
+                                <p:cTn id="68" presetID="6" presetClass="emph" presetSubtype="0" fill="hold" grpId="0" nodeType="withEffect">
                                   <p:stCondLst>
                                     <p:cond delay="1850"/>
                                   </p:stCondLst>
                                   <p:childTnLst>
                                     <p:animScale>
                                       <p:cBhvr>
-                                        <p:cTn id="70" dur="400" autoRev="1" fill="hold"/>
+                                        <p:cTn id="69" dur="400" autoRev="1" fill="hold"/>
                                         <p:tgtEl>
                                           <p:spTgt spid="9"/>
                                         </p:tgtEl>
@@ -21249,14 +20961,14 @@
                                 </p:cTn>
                               </p:par>
                               <p:par>
-                                <p:cTn id="71" presetID="10" presetClass="exit" presetSubtype="0" fill="hold" grpId="2" nodeType="withEffect">
+                                <p:cTn id="70" presetID="10" presetClass="exit" presetSubtype="0" fill="hold" grpId="2" nodeType="withEffect">
                                   <p:stCondLst>
                                     <p:cond delay="2350"/>
                                   </p:stCondLst>
                                   <p:childTnLst>
                                     <p:animEffect transition="out" filter="fade">
                                       <p:cBhvr>
-                                        <p:cTn id="72" dur="400"/>
+                                        <p:cTn id="71" dur="400"/>
                                         <p:tgtEl>
                                           <p:spTgt spid="20"/>
                                         </p:tgtEl>
@@ -21264,7 +20976,7 @@
                                     </p:animEffect>
                                     <p:set>
                                       <p:cBhvr>
-                                        <p:cTn id="73" dur="1" fill="hold">
+                                        <p:cTn id="72" dur="1" fill="hold">
                                           <p:stCondLst>
                                             <p:cond delay="399"/>
                                           </p:stCondLst>
@@ -21284,14 +20996,14 @@
                                 </p:cTn>
                               </p:par>
                               <p:par>
-                                <p:cTn id="74" presetID="10" presetClass="entr" presetSubtype="0" fill="hold" grpId="0" nodeType="withEffect">
+                                <p:cTn id="73" presetID="10" presetClass="entr" presetSubtype="0" fill="hold" grpId="0" nodeType="withEffect">
                                   <p:stCondLst>
                                     <p:cond delay="1850"/>
                                   </p:stCondLst>
                                   <p:childTnLst>
                                     <p:set>
                                       <p:cBhvr>
-                                        <p:cTn id="75" dur="1" fill="hold">
+                                        <p:cTn id="74" dur="1" fill="hold">
                                           <p:stCondLst>
                                             <p:cond delay="0"/>
                                           </p:stCondLst>
@@ -21309,7 +21021,7 @@
                                     </p:set>
                                     <p:animEffect transition="in" filter="fade">
                                       <p:cBhvr>
-                                        <p:cTn id="76" dur="400"/>
+                                        <p:cTn id="75" dur="400"/>
                                         <p:tgtEl>
                                           <p:spTgt spid="21"/>
                                         </p:tgtEl>
@@ -21325,26 +21037,26 @@
                     </p:cTn>
                   </p:par>
                   <p:par>
-                    <p:cTn id="77" fill="hold">
+                    <p:cTn id="76" fill="hold">
                       <p:stCondLst>
                         <p:cond delay="indefinite"/>
                       </p:stCondLst>
                       <p:childTnLst>
                         <p:par>
-                          <p:cTn id="78" fill="hold">
+                          <p:cTn id="77" fill="hold">
                             <p:stCondLst>
                               <p:cond delay="0"/>
                             </p:stCondLst>
                             <p:childTnLst>
                               <p:par>
-                                <p:cTn id="79" presetID="53" presetClass="entr" presetSubtype="16" fill="hold" grpId="0" nodeType="clickEffect">
+                                <p:cTn id="78" presetID="53" presetClass="entr" presetSubtype="16" fill="hold" grpId="0" nodeType="clickEffect">
                                   <p:stCondLst>
                                     <p:cond delay="0"/>
                                   </p:stCondLst>
                                   <p:childTnLst>
                                     <p:set>
                                       <p:cBhvr>
-                                        <p:cTn id="80" dur="1" fill="hold">
+                                        <p:cTn id="79" dur="1" fill="hold">
                                           <p:stCondLst>
                                             <p:cond delay="0"/>
                                           </p:stCondLst>
@@ -21362,7 +21074,7 @@
                                     </p:set>
                                     <p:anim calcmode="lin" valueType="num">
                                       <p:cBhvr additive="base">
-                                        <p:cTn id="81" dur="350" fill="hold"/>
+                                        <p:cTn id="80" dur="350" fill="hold"/>
                                         <p:tgtEl>
                                           <p:spTgt spid="22"/>
                                         </p:tgtEl>
@@ -21385,7 +21097,7 @@
                                     </p:anim>
                                     <p:anim calcmode="lin" valueType="num">
                                       <p:cBhvr additive="base">
-                                        <p:cTn id="82" dur="350" fill="hold"/>
+                                        <p:cTn id="81" dur="350" fill="hold"/>
                                         <p:tgtEl>
                                           <p:spTgt spid="22"/>
                                         </p:tgtEl>
@@ -21408,7 +21120,7 @@
                                     </p:anim>
                                     <p:animEffect transition="in" filter="fade">
                                       <p:cBhvr>
-                                        <p:cTn id="83" dur="350"/>
+                                        <p:cTn id="82" dur="350"/>
                                         <p:tgtEl>
                                           <p:spTgt spid="22"/>
                                         </p:tgtEl>
@@ -21418,14 +21130,14 @@
                                 </p:cTn>
                               </p:par>
                               <p:par>
-                                <p:cTn id="84" presetID="0" presetClass="path" presetSubtype="0" fill="hold" grpId="1" nodeType="withEffect">
+                                <p:cTn id="83" presetID="0" presetClass="path" presetSubtype="0" fill="hold" grpId="1" nodeType="withEffect">
                                   <p:stCondLst>
                                     <p:cond delay="350"/>
                                   </p:stCondLst>
                                   <p:childTnLst>
                                     <p:animMotion origin="layout" path="M 0 0 L -0.2063 -0.3733 E" pathEditMode="relative" ptsTypes="">
                                       <p:cBhvr>
-                                        <p:cTn id="85" dur="1500" fill="hold" accel="40000" decel="40000"/>
+                                        <p:cTn id="84" dur="1500" fill="hold" accel="40000" decel="40000"/>
                                         <p:tgtEl>
                                           <p:spTgt spid="22"/>
                                         </p:tgtEl>
@@ -21440,14 +21152,14 @@
                                 </p:cTn>
                               </p:par>
                               <p:par>
-                                <p:cTn id="86" presetID="22" presetClass="entr" presetSubtype="2" fill="hold" grpId="0" nodeType="withEffect">
+                                <p:cTn id="85" presetID="22" presetClass="entr" presetSubtype="2" fill="hold" grpId="0" nodeType="withEffect">
                                   <p:stCondLst>
                                     <p:cond delay="400"/>
                                   </p:stCondLst>
                                   <p:childTnLst>
                                     <p:set>
                                       <p:cBhvr>
-                                        <p:cTn id="87" dur="1" fill="hold">
+                                        <p:cTn id="86" dur="1" fill="hold">
                                           <p:stCondLst>
                                             <p:cond delay="0"/>
                                           </p:stCondLst>
@@ -21465,7 +21177,7 @@
                                     </p:set>
                                     <p:animEffect transition="in" filter="wipe(right)">
                                       <p:cBhvr>
-                                        <p:cTn id="88" dur="900"/>
+                                        <p:cTn id="87" dur="900"/>
                                         <p:tgtEl>
                                           <p:spTgt spid="15"/>
                                         </p:tgtEl>
@@ -21475,14 +21187,14 @@
                                 </p:cTn>
                               </p:par>
                               <p:par>
-                                <p:cTn id="89" presetID="6" presetClass="emph" presetSubtype="0" fill="hold" grpId="0" nodeType="withEffect">
+                                <p:cTn id="88" presetID="6" presetClass="emph" presetSubtype="0" fill="hold" grpId="0" nodeType="withEffect">
                                   <p:stCondLst>
                                     <p:cond delay="1850"/>
                                   </p:stCondLst>
                                   <p:childTnLst>
                                     <p:animScale>
                                       <p:cBhvr>
-                                        <p:cTn id="90" dur="400" autoRev="1" fill="hold"/>
+                                        <p:cTn id="89" dur="400" autoRev="1" fill="hold"/>
                                         <p:tgtEl>
                                           <p:spTgt spid="11"/>
                                         </p:tgtEl>
@@ -21493,14 +21205,14 @@
                                 </p:cTn>
                               </p:par>
                               <p:par>
-                                <p:cTn id="91" presetID="10" presetClass="exit" presetSubtype="0" fill="hold" grpId="2" nodeType="withEffect">
+                                <p:cTn id="90" presetID="10" presetClass="exit" presetSubtype="0" fill="hold" grpId="2" nodeType="withEffect">
                                   <p:stCondLst>
                                     <p:cond delay="2350"/>
                                   </p:stCondLst>
                                   <p:childTnLst>
                                     <p:animEffect transition="out" filter="fade">
                                       <p:cBhvr>
-                                        <p:cTn id="92" dur="400"/>
+                                        <p:cTn id="91" dur="400"/>
                                         <p:tgtEl>
                                           <p:spTgt spid="22"/>
                                         </p:tgtEl>
@@ -21508,7 +21220,7 @@
                                     </p:animEffect>
                                     <p:set>
                                       <p:cBhvr>
-                                        <p:cTn id="93" dur="1" fill="hold">
+                                        <p:cTn id="92" dur="1" fill="hold">
                                           <p:stCondLst>
                                             <p:cond delay="399"/>
                                           </p:stCondLst>
@@ -21528,14 +21240,14 @@
                                 </p:cTn>
                               </p:par>
                               <p:par>
-                                <p:cTn id="94" presetID="10" presetClass="entr" presetSubtype="0" fill="hold" grpId="0" nodeType="withEffect">
+                                <p:cTn id="93" presetID="10" presetClass="entr" presetSubtype="0" fill="hold" grpId="0" nodeType="withEffect">
                                   <p:stCondLst>
                                     <p:cond delay="1850"/>
                                   </p:stCondLst>
                                   <p:childTnLst>
                                     <p:set>
                                       <p:cBhvr>
-                                        <p:cTn id="95" dur="1" fill="hold">
+                                        <p:cTn id="94" dur="1" fill="hold">
                                           <p:stCondLst>
                                             <p:cond delay="0"/>
                                           </p:stCondLst>
@@ -21553,7 +21265,7 @@
                                     </p:set>
                                     <p:animEffect transition="in" filter="fade">
                                       <p:cBhvr>
-                                        <p:cTn id="96" dur="400"/>
+                                        <p:cTn id="95" dur="400"/>
                                         <p:tgtEl>
                                           <p:spTgt spid="23"/>
                                         </p:tgtEl>
@@ -21569,26 +21281,26 @@
                     </p:cTn>
                   </p:par>
                   <p:par>
-                    <p:cTn id="97" fill="hold">
+                    <p:cTn id="96" fill="hold">
                       <p:stCondLst>
                         <p:cond delay="indefinite"/>
                       </p:stCondLst>
                       <p:childTnLst>
                         <p:par>
-                          <p:cTn id="98" fill="hold">
+                          <p:cTn id="97" fill="hold">
                             <p:stCondLst>
                               <p:cond delay="0"/>
                             </p:stCondLst>
                             <p:childTnLst>
                               <p:par>
-                                <p:cTn id="99" presetID="53" presetClass="entr" presetSubtype="16" fill="hold" grpId="0" nodeType="clickEffect">
+                                <p:cTn id="98" presetID="53" presetClass="entr" presetSubtype="16" fill="hold" grpId="0" nodeType="clickEffect">
                                   <p:stCondLst>
                                     <p:cond delay="0"/>
                                   </p:stCondLst>
                                   <p:childTnLst>
                                     <p:set>
                                       <p:cBhvr>
-                                        <p:cTn id="100" dur="1" fill="hold">
+                                        <p:cTn id="99" dur="1" fill="hold">
                                           <p:stCondLst>
                                             <p:cond delay="0"/>
                                           </p:stCondLst>
@@ -21606,7 +21318,7 @@
                                     </p:set>
                                     <p:anim calcmode="lin" valueType="num">
                                       <p:cBhvr additive="base">
-                                        <p:cTn id="101" dur="500" fill="hold"/>
+                                        <p:cTn id="100" dur="500" fill="hold"/>
                                         <p:tgtEl>
                                           <p:spTgt spid="24"/>
                                         </p:tgtEl>
@@ -21629,7 +21341,7 @@
                                     </p:anim>
                                     <p:anim calcmode="lin" valueType="num">
                                       <p:cBhvr additive="base">
-                                        <p:cTn id="102" dur="500" fill="hold"/>
+                                        <p:cTn id="101" dur="500" fill="hold"/>
                                         <p:tgtEl>
                                           <p:spTgt spid="24"/>
                                         </p:tgtEl>
@@ -21652,29 +21364,13 @@
                                     </p:anim>
                                     <p:animEffect transition="in" filter="fade">
                                       <p:cBhvr>
-                                        <p:cTn id="103" dur="500"/>
+                                        <p:cTn id="102" dur="500"/>
                                         <p:tgtEl>
                                           <p:spTgt spid="24"/>
                                         </p:tgtEl>
                                       </p:cBhvr>
                                     </p:animEffect>
                                   </p:childTnLst>
-                                  <p:subTnLst>
-                                    <p:audio>
-                                      <p:cMediaNode vol="50000" showWhenStopped="0">
-                                        <p:cTn id="104" display="0" masterRel="sameClick">
-                                          <p:stCondLst>
-                                            <p:cond evt="onBegin" delay="0">
-                                              <p:tn val="99"/>
-                                            </p:cond>
-                                          </p:stCondLst>
-                                        </p:cTn>
-                                        <p:tgtEl>
-                                          <p:sndTgt r:embed="rId21" name="chime.wav"/>
-                                        </p:tgtEl>
-                                      </p:cMediaNode>
-                                    </p:audio>
-                                  </p:subTnLst>
                                 </p:cTn>
                               </p:par>
                             </p:childTnLst>
@@ -23323,22 +23019,6 @@
                                       </p:cBhvr>
                                     </p:animEffect>
                                   </p:childTnLst>
-                                  <p:subTnLst>
-                                    <p:audio>
-                                      <p:cMediaNode vol="50000" showWhenStopped="0">
-                                        <p:cTn id="48" display="0" masterRel="sameClick">
-                                          <p:stCondLst>
-                                            <p:cond evt="onBegin" delay="0">
-                                              <p:tn val="45"/>
-                                            </p:cond>
-                                          </p:stCondLst>
-                                        </p:cTn>
-                                        <p:tgtEl>
-                                          <p:sndTgt r:embed="rId5" name="chime.wav"/>
-                                        </p:tgtEl>
-                                      </p:cMediaNode>
-                                    </p:audio>
-                                  </p:subTnLst>
                                 </p:cTn>
                               </p:par>
                             </p:childTnLst>
@@ -24389,22 +24069,6 @@
                                       </p:cBhvr>
                                     </p:animEffect>
                                   </p:childTnLst>
-                                  <p:subTnLst>
-                                    <p:audio>
-                                      <p:cMediaNode vol="50000" showWhenStopped="0">
-                                        <p:cTn id="13" display="0" masterRel="sameClick">
-                                          <p:stCondLst>
-                                            <p:cond evt="onBegin" delay="0">
-                                              <p:tn val="10"/>
-                                            </p:cond>
-                                          </p:stCondLst>
-                                        </p:cTn>
-                                        <p:tgtEl>
-                                          <p:sndTgt r:embed="rId5" name="chime.wav"/>
-                                        </p:tgtEl>
-                                      </p:cMediaNode>
-                                    </p:audio>
-                                  </p:subTnLst>
                                 </p:cTn>
                               </p:par>
                             </p:childTnLst>
@@ -24414,26 +24078,26 @@
                     </p:cTn>
                   </p:par>
                   <p:par>
-                    <p:cTn id="14" fill="hold">
+                    <p:cTn id="13" fill="hold">
                       <p:stCondLst>
                         <p:cond delay="indefinite"/>
                       </p:stCondLst>
                       <p:childTnLst>
                         <p:par>
-                          <p:cTn id="15" fill="hold">
+                          <p:cTn id="14" fill="hold">
                             <p:stCondLst>
                               <p:cond delay="0"/>
                             </p:stCondLst>
                             <p:childTnLst>
                               <p:par>
-                                <p:cTn id="16" presetID="10" presetClass="entr" presetSubtype="0" fill="hold" grpId="0" nodeType="clickEffect">
+                                <p:cTn id="15" presetID="10" presetClass="entr" presetSubtype="0" fill="hold" grpId="0" nodeType="clickEffect">
                                   <p:stCondLst>
                                     <p:cond delay="0"/>
                                   </p:stCondLst>
                                   <p:childTnLst>
                                     <p:set>
                                       <p:cBhvr>
-                                        <p:cTn id="17" dur="1" fill="hold">
+                                        <p:cTn id="16" dur="1" fill="hold">
                                           <p:stCondLst>
                                             <p:cond delay="0"/>
                                           </p:stCondLst>
@@ -24451,7 +24115,7 @@
                                     </p:set>
                                     <p:animEffect transition="in" filter="fade">
                                       <p:cBhvr>
-                                        <p:cTn id="18" dur="500"/>
+                                        <p:cTn id="17" dur="500"/>
                                         <p:tgtEl>
                                           <p:spTgt spid="12"/>
                                         </p:tgtEl>
@@ -24467,26 +24131,26 @@
                     </p:cTn>
                   </p:par>
                   <p:par>
-                    <p:cTn id="19" fill="hold">
+                    <p:cTn id="18" fill="hold">
                       <p:stCondLst>
                         <p:cond delay="indefinite"/>
                       </p:stCondLst>
                       <p:childTnLst>
                         <p:par>
-                          <p:cTn id="20" fill="hold">
+                          <p:cTn id="19" fill="hold">
                             <p:stCondLst>
                               <p:cond delay="0"/>
                             </p:stCondLst>
                             <p:childTnLst>
                               <p:par>
-                                <p:cTn id="21" presetID="10" presetClass="entr" presetSubtype="0" fill="hold" grpId="0" nodeType="clickEffect">
+                                <p:cTn id="20" presetID="10" presetClass="entr" presetSubtype="0" fill="hold" grpId="0" nodeType="clickEffect">
                                   <p:stCondLst>
                                     <p:cond delay="0"/>
                                   </p:stCondLst>
                                   <p:childTnLst>
                                     <p:set>
                                       <p:cBhvr>
-                                        <p:cTn id="22" dur="1" fill="hold">
+                                        <p:cTn id="21" dur="1" fill="hold">
                                           <p:stCondLst>
                                             <p:cond delay="0"/>
                                           </p:stCondLst>
@@ -24504,78 +24168,9 @@
                                     </p:set>
                                     <p:animEffect transition="in" filter="fade">
                                       <p:cBhvr>
-                                        <p:cTn id="23" dur="500"/>
+                                        <p:cTn id="22" dur="500"/>
                                         <p:tgtEl>
                                           <p:spTgt spid="13"/>
-                                        </p:tgtEl>
-                                      </p:cBhvr>
-                                    </p:animEffect>
-                                  </p:childTnLst>
-                                  <p:subTnLst>
-                                    <p:audio>
-                                      <p:cMediaNode vol="50000" showWhenStopped="0">
-                                        <p:cTn id="24" display="0" masterRel="sameClick">
-                                          <p:stCondLst>
-                                            <p:cond evt="onBegin" delay="0">
-                                              <p:tn val="21"/>
-                                            </p:cond>
-                                          </p:stCondLst>
-                                        </p:cTn>
-                                        <p:tgtEl>
-                                          <p:sndTgt r:embed="rId5" name="chime.wav"/>
-                                        </p:tgtEl>
-                                      </p:cMediaNode>
-                                    </p:audio>
-                                  </p:subTnLst>
-                                </p:cTn>
-                              </p:par>
-                            </p:childTnLst>
-                          </p:cTn>
-                        </p:par>
-                      </p:childTnLst>
-                    </p:cTn>
-                  </p:par>
-                  <p:par>
-                    <p:cTn id="25" fill="hold">
-                      <p:stCondLst>
-                        <p:cond delay="indefinite"/>
-                      </p:stCondLst>
-                      <p:childTnLst>
-                        <p:par>
-                          <p:cTn id="26" fill="hold">
-                            <p:stCondLst>
-                              <p:cond delay="0"/>
-                            </p:stCondLst>
-                            <p:childTnLst>
-                              <p:par>
-                                <p:cTn id="27" presetID="10" presetClass="entr" presetSubtype="0" fill="hold" grpId="0" nodeType="clickEffect">
-                                  <p:stCondLst>
-                                    <p:cond delay="0"/>
-                                  </p:stCondLst>
-                                  <p:childTnLst>
-                                    <p:set>
-                                      <p:cBhvr>
-                                        <p:cTn id="28" dur="1" fill="hold">
-                                          <p:stCondLst>
-                                            <p:cond delay="0"/>
-                                          </p:stCondLst>
-                                        </p:cTn>
-                                        <p:tgtEl>
-                                          <p:spTgt spid="17"/>
-                                        </p:tgtEl>
-                                        <p:attrNameLst>
-                                          <p:attrName>style.visibility</p:attrName>
-                                        </p:attrNameLst>
-                                      </p:cBhvr>
-                                      <p:to>
-                                        <p:strVal val="visible"/>
-                                      </p:to>
-                                    </p:set>
-                                    <p:animEffect transition="in" filter="fade">
-                                      <p:cBhvr>
-                                        <p:cTn id="29" dur="500"/>
-                                        <p:tgtEl>
-                                          <p:spTgt spid="17"/>
                                         </p:tgtEl>
                                       </p:cBhvr>
                                     </p:animEffect>
@@ -24589,32 +24184,32 @@
                     </p:cTn>
                   </p:par>
                   <p:par>
-                    <p:cTn id="30" fill="hold">
+                    <p:cTn id="23" fill="hold">
                       <p:stCondLst>
                         <p:cond delay="indefinite"/>
                       </p:stCondLst>
                       <p:childTnLst>
                         <p:par>
-                          <p:cTn id="31" fill="hold">
+                          <p:cTn id="24" fill="hold">
                             <p:stCondLst>
                               <p:cond delay="0"/>
                             </p:stCondLst>
                             <p:childTnLst>
                               <p:par>
-                                <p:cTn id="32" presetID="10" presetClass="entr" presetSubtype="0" fill="hold" grpId="0" nodeType="clickEffect">
+                                <p:cTn id="25" presetID="10" presetClass="entr" presetSubtype="0" fill="hold" grpId="0" nodeType="clickEffect">
                                   <p:stCondLst>
                                     <p:cond delay="0"/>
                                   </p:stCondLst>
                                   <p:childTnLst>
                                     <p:set>
                                       <p:cBhvr>
-                                        <p:cTn id="33" dur="1" fill="hold">
+                                        <p:cTn id="26" dur="1" fill="hold">
                                           <p:stCondLst>
                                             <p:cond delay="0"/>
                                           </p:stCondLst>
                                         </p:cTn>
                                         <p:tgtEl>
-                                          <p:spTgt spid="18"/>
+                                          <p:spTgt spid="17"/>
                                         </p:tgtEl>
                                         <p:attrNameLst>
                                           <p:attrName>style.visibility</p:attrName>
@@ -24626,29 +24221,66 @@
                                     </p:set>
                                     <p:animEffect transition="in" filter="fade">
                                       <p:cBhvr>
-                                        <p:cTn id="34" dur="500"/>
-                                        <p:tgtEl>
-                                          <p:spTgt spid="18"/>
+                                        <p:cTn id="27" dur="500"/>
+                                        <p:tgtEl>
+                                          <p:spTgt spid="17"/>
                                         </p:tgtEl>
                                       </p:cBhvr>
                                     </p:animEffect>
                                   </p:childTnLst>
-                                  <p:subTnLst>
-                                    <p:audio>
-                                      <p:cMediaNode vol="50000" showWhenStopped="0">
-                                        <p:cTn id="35" display="0" masterRel="sameClick">
+                                </p:cTn>
+                              </p:par>
+                            </p:childTnLst>
+                          </p:cTn>
+                        </p:par>
+                      </p:childTnLst>
+                    </p:cTn>
+                  </p:par>
+                  <p:par>
+                    <p:cTn id="28" fill="hold">
+                      <p:stCondLst>
+                        <p:cond delay="indefinite"/>
+                      </p:stCondLst>
+                      <p:childTnLst>
+                        <p:par>
+                          <p:cTn id="29" fill="hold">
+                            <p:stCondLst>
+                              <p:cond delay="0"/>
+                            </p:stCondLst>
+                            <p:childTnLst>
+                              <p:par>
+                                <p:cTn id="30" presetID="10" presetClass="entr" presetSubtype="0" fill="hold" grpId="0" nodeType="clickEffect">
+                                  <p:stCondLst>
+                                    <p:cond delay="0"/>
+                                  </p:stCondLst>
+                                  <p:childTnLst>
+                                    <p:set>
+                                      <p:cBhvr>
+                                        <p:cTn id="31" dur="1" fill="hold">
                                           <p:stCondLst>
-                                            <p:cond evt="onBegin" delay="0">
-                                              <p:tn val="32"/>
-                                            </p:cond>
+                                            <p:cond delay="0"/>
                                           </p:stCondLst>
                                         </p:cTn>
                                         <p:tgtEl>
-                                          <p:sndTgt r:embed="rId5" name="chime.wav"/>
-                                        </p:tgtEl>
-                                      </p:cMediaNode>
-                                    </p:audio>
-                                  </p:subTnLst>
+                                          <p:spTgt spid="18"/>
+                                        </p:tgtEl>
+                                        <p:attrNameLst>
+                                          <p:attrName>style.visibility</p:attrName>
+                                        </p:attrNameLst>
+                                      </p:cBhvr>
+                                      <p:to>
+                                        <p:strVal val="visible"/>
+                                      </p:to>
+                                    </p:set>
+                                    <p:animEffect transition="in" filter="fade">
+                                      <p:cBhvr>
+                                        <p:cTn id="32" dur="500"/>
+                                        <p:tgtEl>
+                                          <p:spTgt spid="18"/>
+                                        </p:tgtEl>
+                                      </p:cBhvr>
+                                    </p:animEffect>
+                                  </p:childTnLst>
                                 </p:cTn>
                               </p:par>
                             </p:childTnLst>
@@ -25301,22 +24933,6 @@
                                       </p:cBhvr>
                                     </p:animEffect>
                                   </p:childTnLst>
-                                  <p:subTnLst>
-                                    <p:audio>
-                                      <p:cMediaNode vol="50000" showWhenStopped="0">
-                                        <p:cTn id="8" display="0" masterRel="sameClick">
-                                          <p:stCondLst>
-                                            <p:cond evt="onBegin" delay="0">
-                                              <p:tn val="5"/>
-                                            </p:cond>
-                                          </p:stCondLst>
-                                        </p:cTn>
-                                        <p:tgtEl>
-                                          <p:sndTgt r:embed="rId6" name="chime.wav"/>
-                                        </p:tgtEl>
-                                      </p:cMediaNode>
-                                    </p:audio>
-                                  </p:subTnLst>
                                 </p:cTn>
                               </p:par>
                             </p:childTnLst>
@@ -25326,26 +24942,26 @@
                     </p:cTn>
                   </p:par>
                   <p:par>
-                    <p:cTn id="9" fill="hold">
+                    <p:cTn id="8" fill="hold">
                       <p:stCondLst>
                         <p:cond delay="indefinite"/>
                       </p:stCondLst>
                       <p:childTnLst>
                         <p:par>
-                          <p:cTn id="10" fill="hold">
+                          <p:cTn id="9" fill="hold">
                             <p:stCondLst>
                               <p:cond delay="0"/>
                             </p:stCondLst>
                             <p:childTnLst>
                               <p:par>
-                                <p:cTn id="11" presetID="10" presetClass="entr" presetSubtype="0" fill="hold" grpId="0" nodeType="clickEffect">
+                                <p:cTn id="10" presetID="10" presetClass="entr" presetSubtype="0" fill="hold" grpId="0" nodeType="clickEffect">
                                   <p:stCondLst>
                                     <p:cond delay="0"/>
                                   </p:stCondLst>
                                   <p:childTnLst>
                                     <p:set>
                                       <p:cBhvr>
-                                        <p:cTn id="12" dur="1" fill="hold">
+                                        <p:cTn id="11" dur="1" fill="hold">
                                           <p:stCondLst>
                                             <p:cond delay="0"/>
                                           </p:stCondLst>
@@ -25363,7 +24979,7 @@
                                     </p:set>
                                     <p:animEffect transition="in" filter="fade">
                                       <p:cBhvr>
-                                        <p:cTn id="13" dur="500"/>
+                                        <p:cTn id="12" dur="500"/>
                                         <p:tgtEl>
                                           <p:spTgt spid="8"/>
                                         </p:tgtEl>
@@ -25379,26 +24995,26 @@
                     </p:cTn>
                   </p:par>
                   <p:par>
-                    <p:cTn id="14" fill="hold">
+                    <p:cTn id="13" fill="hold">
                       <p:stCondLst>
                         <p:cond delay="indefinite"/>
                       </p:stCondLst>
                       <p:childTnLst>
                         <p:par>
-                          <p:cTn id="15" fill="hold">
+                          <p:cTn id="14" fill="hold">
                             <p:stCondLst>
                               <p:cond delay="0"/>
                             </p:stCondLst>
                             <p:childTnLst>
                               <p:par>
-                                <p:cTn id="16" presetID="10" presetClass="entr" presetSubtype="0" fill="hold" grpId="0" nodeType="clickEffect">
+                                <p:cTn id="15" presetID="10" presetClass="entr" presetSubtype="0" fill="hold" grpId="0" nodeType="clickEffect">
                                   <p:stCondLst>
                                     <p:cond delay="0"/>
                                   </p:stCondLst>
                                   <p:childTnLst>
                                     <p:set>
                                       <p:cBhvr>
-                                        <p:cTn id="17" dur="1" fill="hold">
+                                        <p:cTn id="16" dur="1" fill="hold">
                                           <p:stCondLst>
                                             <p:cond delay="0"/>
                                           </p:stCondLst>
@@ -25416,7 +25032,7 @@
                                     </p:set>
                                     <p:animEffect transition="in" filter="fade">
                                       <p:cBhvr>
-                                        <p:cTn id="18" dur="500"/>
+                                        <p:cTn id="17" dur="500"/>
                                         <p:tgtEl>
                                           <p:spTgt spid="9"/>
                                         </p:tgtEl>
@@ -25991,42 +25607,26 @@
                                       <p:rCtr x="0" y="0"/>
                                     </p:animMotion>
                                   </p:childTnLst>
-                                  <p:subTnLst>
-                                    <p:audio>
-                                      <p:cMediaNode vol="50000" showWhenStopped="0">
-                                        <p:cTn id="9" display="0" masterRel="sameClick">
-                                          <p:stCondLst>
-                                            <p:cond evt="onBegin" delay="0">
-                                              <p:tn val="7"/>
-                                            </p:cond>
-                                          </p:stCondLst>
-                                        </p:cTn>
-                                        <p:tgtEl>
-                                          <p:sndTgt r:embed="rId7" name="bubbles.wav"/>
-                                        </p:tgtEl>
-                                      </p:cMediaNode>
-                                    </p:audio>
-                                  </p:subTnLst>
                                 </p:cTn>
                               </p:par>
                             </p:childTnLst>
                           </p:cTn>
                         </p:par>
                         <p:par>
-                          <p:cTn id="10" fill="hold">
+                          <p:cTn id="9" fill="hold">
                             <p:stCondLst>
                               <p:cond delay="1800"/>
                             </p:stCondLst>
                             <p:childTnLst>
                               <p:par>
-                                <p:cTn id="11" presetID="10" presetClass="entr" presetSubtype="0" fill="hold" grpId="0" nodeType="afterEffect">
+                                <p:cTn id="10" presetID="10" presetClass="entr" presetSubtype="0" fill="hold" grpId="0" nodeType="afterEffect">
                                   <p:stCondLst>
                                     <p:cond delay="0"/>
                                   </p:stCondLst>
                                   <p:childTnLst>
                                     <p:set>
                                       <p:cBhvr>
-                                        <p:cTn id="12" dur="1" fill="hold">
+                                        <p:cTn id="11" dur="1" fill="hold">
                                           <p:stCondLst>
                                             <p:cond delay="0"/>
                                           </p:stCondLst>
@@ -26044,40 +25644,24 @@
                                     </p:set>
                                     <p:animEffect transition="in" filter="fade">
                                       <p:cBhvr>
-                                        <p:cTn id="13" dur="500"/>
+                                        <p:cTn id="12" dur="500"/>
                                         <p:tgtEl>
                                           <p:spTgt spid="5"/>
                                         </p:tgtEl>
                                       </p:cBhvr>
                                     </p:animEffect>
                                   </p:childTnLst>
-                                  <p:subTnLst>
-                                    <p:audio>
-                                      <p:cMediaNode vol="50000" showWhenStopped="0">
-                                        <p:cTn id="14" display="0" masterRel="sameClick">
-                                          <p:stCondLst>
-                                            <p:cond evt="onBegin" delay="0">
-                                              <p:tn val="11"/>
-                                            </p:cond>
-                                          </p:stCondLst>
-                                        </p:cTn>
-                                        <p:tgtEl>
-                                          <p:sndTgt r:embed="rId8" name="chime.wav"/>
-                                        </p:tgtEl>
-                                      </p:cMediaNode>
-                                    </p:audio>
-                                  </p:subTnLst>
                                 </p:cTn>
                               </p:par>
                               <p:par>
-                                <p:cTn id="15" presetID="10" presetClass="entr" presetSubtype="0" fill="hold" grpId="0" nodeType="withEffect">
+                                <p:cTn id="13" presetID="10" presetClass="entr" presetSubtype="0" fill="hold" grpId="0" nodeType="withEffect">
                                   <p:stCondLst>
                                     <p:cond delay="0"/>
                                   </p:stCondLst>
                                   <p:childTnLst>
                                     <p:set>
                                       <p:cBhvr>
-                                        <p:cTn id="16" dur="1" fill="hold">
+                                        <p:cTn id="14" dur="1" fill="hold">
                                           <p:stCondLst>
                                             <p:cond delay="0"/>
                                           </p:stCondLst>
@@ -26095,7 +25679,7 @@
                                     </p:set>
                                     <p:animEffect transition="in" filter="fade">
                                       <p:cBhvr>
-                                        <p:cTn id="17" dur="500"/>
+                                        <p:cTn id="15" dur="500"/>
                                         <p:tgtEl>
                                           <p:spTgt spid="6"/>
                                         </p:tgtEl>
@@ -26105,14 +25689,14 @@
                                 </p:cTn>
                               </p:par>
                               <p:par>
-                                <p:cTn id="18" presetID="10" presetClass="entr" presetSubtype="0" fill="hold" grpId="0" nodeType="withEffect">
+                                <p:cTn id="16" presetID="10" presetClass="entr" presetSubtype="0" fill="hold" grpId="0" nodeType="withEffect">
                                   <p:stCondLst>
                                     <p:cond delay="0"/>
                                   </p:stCondLst>
                                   <p:childTnLst>
                                     <p:set>
                                       <p:cBhvr>
-                                        <p:cTn id="19" dur="1" fill="hold">
+                                        <p:cTn id="17" dur="1" fill="hold">
                                           <p:stCondLst>
                                             <p:cond delay="0"/>
                                           </p:stCondLst>
@@ -26130,7 +25714,7 @@
                                     </p:set>
                                     <p:animEffect transition="in" filter="fade">
                                       <p:cBhvr>
-                                        <p:cTn id="20" dur="500"/>
+                                        <p:cTn id="18" dur="500"/>
                                         <p:tgtEl>
                                           <p:spTgt spid="7"/>
                                         </p:tgtEl>
@@ -26146,26 +25730,26 @@
                     </p:cTn>
                   </p:par>
                   <p:par>
-                    <p:cTn id="21" fill="hold">
+                    <p:cTn id="19" fill="hold">
                       <p:stCondLst>
                         <p:cond delay="indefinite"/>
                       </p:stCondLst>
                       <p:childTnLst>
                         <p:par>
-                          <p:cTn id="22" fill="hold">
+                          <p:cTn id="20" fill="hold">
                             <p:stCondLst>
                               <p:cond delay="0"/>
                             </p:stCondLst>
                             <p:childTnLst>
                               <p:par>
-                                <p:cTn id="23" presetID="10" presetClass="entr" presetSubtype="0" fill="hold" grpId="0" nodeType="clickEffect">
+                                <p:cTn id="21" presetID="10" presetClass="entr" presetSubtype="0" fill="hold" grpId="0" nodeType="clickEffect">
                                   <p:stCondLst>
                                     <p:cond delay="0"/>
                                   </p:stCondLst>
                                   <p:childTnLst>
                                     <p:set>
                                       <p:cBhvr>
-                                        <p:cTn id="24" dur="1" fill="hold">
+                                        <p:cTn id="22" dur="1" fill="hold">
                                           <p:stCondLst>
                                             <p:cond delay="0"/>
                                           </p:stCondLst>
@@ -26183,7 +25767,7 @@
                                     </p:set>
                                     <p:animEffect transition="in" filter="fade">
                                       <p:cBhvr>
-                                        <p:cTn id="25" dur="500"/>
+                                        <p:cTn id="23" dur="500"/>
                                         <p:tgtEl>
                                           <p:spTgt spid="8"/>
                                         </p:tgtEl>
@@ -27191,33 +26775,17 @@
                                       </p:cBhvr>
                                     </p:animEffect>
                                   </p:childTnLst>
-                                  <p:subTnLst>
-                                    <p:audio>
-                                      <p:cMediaNode vol="50000" showWhenStopped="0">
-                                        <p:cTn id="8" display="0" masterRel="sameClick">
-                                          <p:stCondLst>
-                                            <p:cond evt="onBegin" delay="0">
-                                              <p:tn val="5"/>
-                                            </p:cond>
-                                          </p:stCondLst>
-                                        </p:cTn>
-                                        <p:tgtEl>
-                                          <p:sndTgt r:embed="rId6" name="chime.wav"/>
-                                        </p:tgtEl>
-                                      </p:cMediaNode>
-                                    </p:audio>
-                                  </p:subTnLst>
                                 </p:cTn>
                               </p:par>
                               <p:par>
-                                <p:cTn id="9" presetID="10" presetClass="entr" presetSubtype="0" fill="hold" grpId="0" nodeType="withEffect">
+                                <p:cTn id="8" presetID="10" presetClass="entr" presetSubtype="0" fill="hold" grpId="0" nodeType="withEffect">
                                   <p:stCondLst>
                                     <p:cond delay="0"/>
                                   </p:stCondLst>
                                   <p:childTnLst>
                                     <p:set>
                                       <p:cBhvr>
-                                        <p:cTn id="10" dur="1" fill="hold">
+                                        <p:cTn id="9" dur="1" fill="hold">
                                           <p:stCondLst>
                                             <p:cond delay="0"/>
                                           </p:stCondLst>
@@ -27235,7 +26803,7 @@
                                     </p:set>
                                     <p:animEffect transition="in" filter="fade">
                                       <p:cBhvr>
-                                        <p:cTn id="11" dur="500"/>
+                                        <p:cTn id="10" dur="500"/>
                                         <p:tgtEl>
                                           <p:spTgt spid="8"/>
                                         </p:tgtEl>
@@ -27261,7 +26829,7 @@
               </p:nextCondLst>
             </p:seq>
             <p:seq concurrent="1" nextAc="seek">
-              <p:cTn id="12" restart="whenNotActive" fill="hold" evtFilter="cancelBubble" nodeType="interactiveSeq">
+              <p:cTn id="11" restart="whenNotActive" fill="hold" evtFilter="cancelBubble" nodeType="interactiveSeq">
                 <p:stCondLst>
                   <p:cond evt="onClick" delay="0">
                     <p:tgtEl>
@@ -27274,26 +26842,26 @@
                 </p:endSync>
                 <p:childTnLst>
                   <p:par>
-                    <p:cTn id="13" fill="hold">
+                    <p:cTn id="12" fill="hold">
                       <p:stCondLst>
                         <p:cond delay="0"/>
                       </p:stCondLst>
                       <p:childTnLst>
                         <p:par>
-                          <p:cTn id="14" fill="hold">
+                          <p:cTn id="13" fill="hold">
                             <p:stCondLst>
                               <p:cond delay="0"/>
                             </p:stCondLst>
                             <p:childTnLst>
                               <p:par>
-                                <p:cTn id="15" presetID="10" presetClass="entr" presetSubtype="0" fill="hold" grpId="0" nodeType="clickEffect">
+                                <p:cTn id="14" presetID="10" presetClass="entr" presetSubtype="0" fill="hold" grpId="0" nodeType="clickEffect">
                                   <p:stCondLst>
                                     <p:cond delay="0"/>
                                   </p:stCondLst>
                                   <p:childTnLst>
                                     <p:set>
                                       <p:cBhvr>
-                                        <p:cTn id="16" dur="1" fill="hold">
+                                        <p:cTn id="15" dur="1" fill="hold">
                                           <p:stCondLst>
                                             <p:cond delay="0"/>
                                           </p:stCondLst>
@@ -27311,40 +26879,24 @@
                                     </p:set>
                                     <p:animEffect transition="in" filter="fade">
                                       <p:cBhvr>
-                                        <p:cTn id="17" dur="500"/>
+                                        <p:cTn id="16" dur="500"/>
                                         <p:tgtEl>
                                           <p:spTgt spid="10"/>
                                         </p:tgtEl>
                                       </p:cBhvr>
                                     </p:animEffect>
                                   </p:childTnLst>
-                                  <p:subTnLst>
-                                    <p:audio>
-                                      <p:cMediaNode vol="50000" showWhenStopped="0">
-                                        <p:cTn id="18" display="0" masterRel="sameClick">
-                                          <p:stCondLst>
-                                            <p:cond evt="onBegin" delay="0">
-                                              <p:tn val="15"/>
-                                            </p:cond>
-                                          </p:stCondLst>
-                                        </p:cTn>
-                                        <p:tgtEl>
-                                          <p:sndTgt r:embed="rId6" name="chime.wav"/>
-                                        </p:tgtEl>
-                                      </p:cMediaNode>
-                                    </p:audio>
-                                  </p:subTnLst>
                                 </p:cTn>
                               </p:par>
                               <p:par>
-                                <p:cTn id="19" presetID="10" presetClass="entr" presetSubtype="0" fill="hold" grpId="0" nodeType="withEffect">
+                                <p:cTn id="17" presetID="10" presetClass="entr" presetSubtype="0" fill="hold" grpId="0" nodeType="withEffect">
                                   <p:stCondLst>
                                     <p:cond delay="0"/>
                                   </p:stCondLst>
                                   <p:childTnLst>
                                     <p:set>
                                       <p:cBhvr>
-                                        <p:cTn id="20" dur="1" fill="hold">
+                                        <p:cTn id="18" dur="1" fill="hold">
                                           <p:stCondLst>
                                             <p:cond delay="0"/>
                                           </p:stCondLst>
@@ -27362,7 +26914,7 @@
                                     </p:set>
                                     <p:animEffect transition="in" filter="fade">
                                       <p:cBhvr>
-                                        <p:cTn id="21" dur="500"/>
+                                        <p:cTn id="19" dur="500"/>
                                         <p:tgtEl>
                                           <p:spTgt spid="11"/>
                                         </p:tgtEl>
@@ -27388,7 +26940,7 @@
               </p:nextCondLst>
             </p:seq>
             <p:seq concurrent="1" nextAc="seek">
-              <p:cTn id="22" restart="whenNotActive" fill="hold" evtFilter="cancelBubble" nodeType="interactiveSeq">
+              <p:cTn id="20" restart="whenNotActive" fill="hold" evtFilter="cancelBubble" nodeType="interactiveSeq">
                 <p:stCondLst>
                   <p:cond evt="onClick" delay="0">
                     <p:tgtEl>
@@ -27401,26 +26953,26 @@
                 </p:endSync>
                 <p:childTnLst>
                   <p:par>
-                    <p:cTn id="23" fill="hold">
+                    <p:cTn id="21" fill="hold">
                       <p:stCondLst>
                         <p:cond delay="0"/>
                       </p:stCondLst>
                       <p:childTnLst>
                         <p:par>
-                          <p:cTn id="24" fill="hold">
+                          <p:cTn id="22" fill="hold">
                             <p:stCondLst>
                               <p:cond delay="0"/>
                             </p:stCondLst>
                             <p:childTnLst>
                               <p:par>
-                                <p:cTn id="25" presetID="10" presetClass="entr" presetSubtype="0" fill="hold" grpId="0" nodeType="clickEffect">
+                                <p:cTn id="23" presetID="10" presetClass="entr" presetSubtype="0" fill="hold" grpId="0" nodeType="clickEffect">
                                   <p:stCondLst>
                                     <p:cond delay="0"/>
                                   </p:stCondLst>
                                   <p:childTnLst>
                                     <p:set>
                                       <p:cBhvr>
-                                        <p:cTn id="26" dur="1" fill="hold">
+                                        <p:cTn id="24" dur="1" fill="hold">
                                           <p:stCondLst>
                                             <p:cond delay="0"/>
                                           </p:stCondLst>
@@ -27438,40 +26990,24 @@
                                     </p:set>
                                     <p:animEffect transition="in" filter="fade">
                                       <p:cBhvr>
-                                        <p:cTn id="27" dur="500"/>
+                                        <p:cTn id="25" dur="500"/>
                                         <p:tgtEl>
                                           <p:spTgt spid="13"/>
                                         </p:tgtEl>
                                       </p:cBhvr>
                                     </p:animEffect>
                                   </p:childTnLst>
-                                  <p:subTnLst>
-                                    <p:audio>
-                                      <p:cMediaNode vol="50000" showWhenStopped="0">
-                                        <p:cTn id="28" display="0" masterRel="sameClick">
-                                          <p:stCondLst>
-                                            <p:cond evt="onBegin" delay="0">
-                                              <p:tn val="25"/>
-                                            </p:cond>
-                                          </p:stCondLst>
-                                        </p:cTn>
-                                        <p:tgtEl>
-                                          <p:sndTgt r:embed="rId6" name="chime.wav"/>
-                                        </p:tgtEl>
-                                      </p:cMediaNode>
-                                    </p:audio>
-                                  </p:subTnLst>
                                 </p:cTn>
                               </p:par>
                               <p:par>
-                                <p:cTn id="29" presetID="10" presetClass="entr" presetSubtype="0" fill="hold" grpId="0" nodeType="withEffect">
+                                <p:cTn id="26" presetID="10" presetClass="entr" presetSubtype="0" fill="hold" grpId="0" nodeType="withEffect">
                                   <p:stCondLst>
                                     <p:cond delay="0"/>
                                   </p:stCondLst>
                                   <p:childTnLst>
                                     <p:set>
                                       <p:cBhvr>
-                                        <p:cTn id="30" dur="1" fill="hold">
+                                        <p:cTn id="27" dur="1" fill="hold">
                                           <p:stCondLst>
                                             <p:cond delay="0"/>
                                           </p:stCondLst>
@@ -27489,7 +27025,7 @@
                                     </p:set>
                                     <p:animEffect transition="in" filter="fade">
                                       <p:cBhvr>
-                                        <p:cTn id="31" dur="500"/>
+                                        <p:cTn id="28" dur="500"/>
                                         <p:tgtEl>
                                           <p:spTgt spid="14"/>
                                         </p:tgtEl>
@@ -27515,7 +27051,7 @@
               </p:nextCondLst>
             </p:seq>
             <p:seq concurrent="1" nextAc="seek">
-              <p:cTn id="32" restart="whenNotActive" fill="hold" evtFilter="cancelBubble" nodeType="interactiveSeq">
+              <p:cTn id="29" restart="whenNotActive" fill="hold" evtFilter="cancelBubble" nodeType="interactiveSeq">
                 <p:stCondLst>
                   <p:cond evt="onClick" delay="0">
                     <p:tgtEl>
@@ -27528,32 +27064,67 @@
                 </p:endSync>
                 <p:childTnLst>
                   <p:par>
-                    <p:cTn id="33" fill="hold">
+                    <p:cTn id="30" fill="hold">
                       <p:stCondLst>
                         <p:cond delay="0"/>
                       </p:stCondLst>
                       <p:childTnLst>
                         <p:par>
-                          <p:cTn id="34" fill="hold">
+                          <p:cTn id="31" fill="hold">
                             <p:stCondLst>
                               <p:cond delay="0"/>
                             </p:stCondLst>
                             <p:childTnLst>
                               <p:par>
-                                <p:cTn id="35" presetID="10" presetClass="entr" presetSubtype="0" fill="hold" grpId="0" nodeType="clickEffect">
+                                <p:cTn id="32" presetID="10" presetClass="entr" presetSubtype="0" fill="hold" grpId="0" nodeType="clickEffect">
                                   <p:stCondLst>
                                     <p:cond delay="0"/>
                                   </p:stCondLst>
                                   <p:childTnLst>
                                     <p:set>
                                       <p:cBhvr>
+                                        <p:cTn id="33" dur="1" fill="hold">
+                                          <p:stCondLst>
+                                            <p:cond delay="0"/>
+                                          </p:stCondLst>
+                                        </p:cTn>
+                                        <p:tgtEl>
+                                          <p:spTgt spid="16"/>
+                                        </p:tgtEl>
+                                        <p:attrNameLst>
+                                          <p:attrName>style.visibility</p:attrName>
+                                        </p:attrNameLst>
+                                      </p:cBhvr>
+                                      <p:to>
+                                        <p:strVal val="visible"/>
+                                      </p:to>
+                                    </p:set>
+                                    <p:animEffect transition="in" filter="fade">
+                                      <p:cBhvr>
+                                        <p:cTn id="34" dur="500"/>
+                                        <p:tgtEl>
+                                          <p:spTgt spid="16"/>
+                                        </p:tgtEl>
+                                      </p:cBhvr>
+                                    </p:animEffect>
+                                  </p:childTnLst>
+                                </p:cTn>
+                              </p:par>
+                              <p:par>
+                                <p:cTn id="35" presetID="10" presetClass="entr" presetSubtype="0" fill="hold" grpId="0" nodeType="withEffect">
+                                  <p:stCondLst>
+                                    <p:cond delay="0"/>
+                                  </p:stCondLst>
+                                  <p:childTnLst>
+                                    <p:set>
+                                      <p:cBhvr>
                                         <p:cTn id="36" dur="1" fill="hold">
                                           <p:stCondLst>
                                             <p:cond delay="0"/>
                                           </p:stCondLst>
                                         </p:cTn>
                                         <p:tgtEl>
-                                          <p:spTgt spid="16"/>
+                                          <p:spTgt spid="17"/>
                                         </p:tgtEl>
                                         <p:attrNameLst>
                                           <p:attrName>style.visibility</p:attrName>
@@ -27566,57 +27137,6 @@
                                     <p:animEffect transition="in" filter="fade">
                                       <p:cBhvr>
                                         <p:cTn id="37" dur="500"/>
-                                        <p:tgtEl>
-                                          <p:spTgt spid="16"/>
-                                        </p:tgtEl>
-                                      </p:cBhvr>
-                                    </p:animEffect>
-                                  </p:childTnLst>
-                                  <p:subTnLst>
-                                    <p:audio>
-                                      <p:cMediaNode vol="50000" showWhenStopped="0">
-                                        <p:cTn id="38" display="0" masterRel="sameClick">
-                                          <p:stCondLst>
-                                            <p:cond evt="onBegin" delay="0">
-                                              <p:tn val="35"/>
-                                            </p:cond>
-                                          </p:stCondLst>
-                                        </p:cTn>
-                                        <p:tgtEl>
-                                          <p:sndTgt r:embed="rId6" name="chime.wav"/>
-                                        </p:tgtEl>
-                                      </p:cMediaNode>
-                                    </p:audio>
-                                  </p:subTnLst>
-                                </p:cTn>
-                              </p:par>
-                              <p:par>
-                                <p:cTn id="39" presetID="10" presetClass="entr" presetSubtype="0" fill="hold" grpId="0" nodeType="withEffect">
-                                  <p:stCondLst>
-                                    <p:cond delay="0"/>
-                                  </p:stCondLst>
-                                  <p:childTnLst>
-                                    <p:set>
-                                      <p:cBhvr>
-                                        <p:cTn id="40" dur="1" fill="hold">
-                                          <p:stCondLst>
-                                            <p:cond delay="0"/>
-                                          </p:stCondLst>
-                                        </p:cTn>
-                                        <p:tgtEl>
-                                          <p:spTgt spid="17"/>
-                                        </p:tgtEl>
-                                        <p:attrNameLst>
-                                          <p:attrName>style.visibility</p:attrName>
-                                        </p:attrNameLst>
-                                      </p:cBhvr>
-                                      <p:to>
-                                        <p:strVal val="visible"/>
-                                      </p:to>
-                                    </p:set>
-                                    <p:animEffect transition="in" filter="fade">
-                                      <p:cBhvr>
-                                        <p:cTn id="41" dur="500"/>
                                         <p:tgtEl>
                                           <p:spTgt spid="17"/>
                                         </p:tgtEl>
@@ -28364,22 +27884,6 @@
                                       </p:cBhvr>
                                     </p:animEffect>
                                   </p:childTnLst>
-                                  <p:subTnLst>
-                                    <p:audio>
-                                      <p:cMediaNode vol="50000" showWhenStopped="0">
-                                        <p:cTn id="14" display="0" masterRel="sameClick">
-                                          <p:stCondLst>
-                                            <p:cond evt="onBegin" delay="0">
-                                              <p:tn val="11"/>
-                                            </p:cond>
-                                          </p:stCondLst>
-                                        </p:cTn>
-                                        <p:tgtEl>
-                                          <p:sndTgt r:embed="rId5" name="chime.wav"/>
-                                        </p:tgtEl>
-                                      </p:cMediaNode>
-                                    </p:audio>
-                                  </p:subTnLst>
                                 </p:cTn>
                               </p:par>
                             </p:childTnLst>
@@ -28399,7 +27903,7 @@
               </p:nextCondLst>
             </p:seq>
             <p:seq concurrent="1" nextAc="seek">
-              <p:cTn id="15" restart="whenNotActive" fill="hold" evtFilter="cancelBubble" nodeType="interactiveSeq">
+              <p:cTn id="14" restart="whenNotActive" fill="hold" evtFilter="cancelBubble" nodeType="interactiveSeq">
                 <p:stCondLst>
                   <p:cond evt="onClick" delay="0">
                     <p:tgtEl>
@@ -28412,26 +27916,26 @@
                 </p:endSync>
                 <p:childTnLst>
                   <p:par>
-                    <p:cTn id="16" fill="hold">
+                    <p:cTn id="15" fill="hold">
                       <p:stCondLst>
                         <p:cond delay="0"/>
                       </p:stCondLst>
                       <p:childTnLst>
                         <p:par>
-                          <p:cTn id="17" fill="hold">
+                          <p:cTn id="16" fill="hold">
                             <p:stCondLst>
                               <p:cond delay="0"/>
                             </p:stCondLst>
                             <p:childTnLst>
                               <p:par>
-                                <p:cTn id="18" presetID="10" presetClass="entr" presetSubtype="0" fill="hold" grpId="0" nodeType="clickEffect">
+                                <p:cTn id="17" presetID="10" presetClass="entr" presetSubtype="0" fill="hold" grpId="0" nodeType="clickEffect">
                                   <p:stCondLst>
                                     <p:cond delay="0"/>
                                   </p:stCondLst>
                                   <p:childTnLst>
                                     <p:set>
                                       <p:cBhvr>
-                                        <p:cTn id="19" dur="1" fill="hold">
+                                        <p:cTn id="18" dur="1" fill="hold">
                                           <p:stCondLst>
                                             <p:cond delay="0"/>
                                           </p:stCondLst>
@@ -28449,29 +27953,13 @@
                                     </p:set>
                                     <p:animEffect transition="in" filter="fade">
                                       <p:cBhvr>
-                                        <p:cTn id="20" dur="500"/>
+                                        <p:cTn id="19" dur="500"/>
                                         <p:tgtEl>
                                           <p:spTgt spid="8"/>
                                         </p:tgtEl>
                                       </p:cBhvr>
                                     </p:animEffect>
                                   </p:childTnLst>
-                                  <p:subTnLst>
-                                    <p:audio>
-                                      <p:cMediaNode vol="50000" showWhenStopped="0">
-                                        <p:cTn id="21" display="0" masterRel="sameClick">
-                                          <p:stCondLst>
-                                            <p:cond evt="onBegin" delay="0">
-                                              <p:tn val="18"/>
-                                            </p:cond>
-                                          </p:stCondLst>
-                                        </p:cTn>
-                                        <p:tgtEl>
-                                          <p:sndTgt r:embed="rId5" name="chime.wav"/>
-                                        </p:tgtEl>
-                                      </p:cMediaNode>
-                                    </p:audio>
-                                  </p:subTnLst>
                                 </p:cTn>
                               </p:par>
                             </p:childTnLst>
@@ -30996,33 +30484,17 @@
                                       <p:by x="118000" y="118000"/>
                                     </p:animScale>
                                   </p:childTnLst>
-                                  <p:subTnLst>
-                                    <p:audio>
-                                      <p:cMediaNode vol="50000" showWhenStopped="0">
-                                        <p:cTn id="132" display="0" masterRel="sameClick">
-                                          <p:stCondLst>
-                                            <p:cond evt="onBegin" delay="0">
-                                              <p:tn val="130"/>
-                                            </p:cond>
-                                          </p:stCondLst>
-                                        </p:cTn>
-                                        <p:tgtEl>
-                                          <p:sndTgt r:embed="rId14" name="chime.wav"/>
-                                        </p:tgtEl>
-                                      </p:cMediaNode>
-                                    </p:audio>
-                                  </p:subTnLst>
                                 </p:cTn>
                               </p:par>
                               <p:par>
-                                <p:cTn id="133" presetID="10" presetClass="entr" presetSubtype="0" fill="hold" grpId="0" nodeType="withEffect">
+                                <p:cTn id="132" presetID="10" presetClass="entr" presetSubtype="0" fill="hold" grpId="0" nodeType="withEffect">
                                   <p:stCondLst>
                                     <p:cond delay="1800"/>
                                   </p:stCondLst>
                                   <p:childTnLst>
                                     <p:set>
                                       <p:cBhvr>
-                                        <p:cTn id="134" dur="1" fill="hold">
+                                        <p:cTn id="133" dur="1" fill="hold">
                                           <p:stCondLst>
                                             <p:cond delay="0"/>
                                           </p:stCondLst>
@@ -31040,7 +30512,7 @@
                                     </p:set>
                                     <p:animEffect transition="in" filter="fade">
                                       <p:cBhvr>
-                                        <p:cTn id="135" dur="400"/>
+                                        <p:cTn id="134" dur="400"/>
                                         <p:tgtEl>
                                           <p:spTgt spid="24"/>
                                         </p:tgtEl>
@@ -31951,22 +31423,6 @@
                                       </p:cBhvr>
                                     </p:animEffect>
                                   </p:childTnLst>
-                                  <p:subTnLst>
-                                    <p:audio>
-                                      <p:cMediaNode vol="50000" showWhenStopped="0">
-                                        <p:cTn id="14" display="0" masterRel="sameClick">
-                                          <p:stCondLst>
-                                            <p:cond evt="onBegin" delay="0">
-                                              <p:tn val="11"/>
-                                            </p:cond>
-                                          </p:stCondLst>
-                                        </p:cTn>
-                                        <p:tgtEl>
-                                          <p:sndTgt r:embed="rId6" name="chime.wav"/>
-                                        </p:tgtEl>
-                                      </p:cMediaNode>
-                                    </p:audio>
-                                  </p:subTnLst>
                                 </p:cTn>
                               </p:par>
                             </p:childTnLst>
@@ -31986,7 +31442,7 @@
               </p:nextCondLst>
             </p:seq>
             <p:seq concurrent="1" nextAc="seek">
-              <p:cTn id="15" restart="whenNotActive" fill="hold" evtFilter="cancelBubble" nodeType="interactiveSeq">
+              <p:cTn id="14" restart="whenNotActive" fill="hold" evtFilter="cancelBubble" nodeType="interactiveSeq">
                 <p:stCondLst>
                   <p:cond evt="onClick" delay="0">
                     <p:tgtEl>
@@ -31999,26 +31455,26 @@
                 </p:endSync>
                 <p:childTnLst>
                   <p:par>
-                    <p:cTn id="16" fill="hold">
+                    <p:cTn id="15" fill="hold">
                       <p:stCondLst>
                         <p:cond delay="0"/>
                       </p:stCondLst>
                       <p:childTnLst>
                         <p:par>
-                          <p:cTn id="17" fill="hold">
+                          <p:cTn id="16" fill="hold">
                             <p:stCondLst>
                               <p:cond delay="0"/>
                             </p:stCondLst>
                             <p:childTnLst>
                               <p:par>
-                                <p:cTn id="18" presetID="10" presetClass="entr" presetSubtype="0" fill="hold" grpId="0" nodeType="clickEffect">
+                                <p:cTn id="17" presetID="10" presetClass="entr" presetSubtype="0" fill="hold" grpId="0" nodeType="clickEffect">
                                   <p:stCondLst>
                                     <p:cond delay="0"/>
                                   </p:stCondLst>
                                   <p:childTnLst>
                                     <p:set>
                                       <p:cBhvr>
-                                        <p:cTn id="19" dur="1" fill="hold">
+                                        <p:cTn id="18" dur="1" fill="hold">
                                           <p:stCondLst>
                                             <p:cond delay="0"/>
                                           </p:stCondLst>
@@ -32036,29 +31492,13 @@
                                     </p:set>
                                     <p:animEffect transition="in" filter="fade">
                                       <p:cBhvr>
-                                        <p:cTn id="20" dur="500"/>
+                                        <p:cTn id="19" dur="500"/>
                                         <p:tgtEl>
                                           <p:spTgt spid="8"/>
                                         </p:tgtEl>
                                       </p:cBhvr>
                                     </p:animEffect>
                                   </p:childTnLst>
-                                  <p:subTnLst>
-                                    <p:audio>
-                                      <p:cMediaNode vol="50000" showWhenStopped="0">
-                                        <p:cTn id="21" display="0" masterRel="sameClick">
-                                          <p:stCondLst>
-                                            <p:cond evt="onBegin" delay="0">
-                                              <p:tn val="18"/>
-                                            </p:cond>
-                                          </p:stCondLst>
-                                        </p:cTn>
-                                        <p:tgtEl>
-                                          <p:sndTgt r:embed="rId6" name="chime.wav"/>
-                                        </p:tgtEl>
-                                      </p:cMediaNode>
-                                    </p:audio>
-                                  </p:subTnLst>
                                 </p:cTn>
                               </p:par>
                             </p:childTnLst>
@@ -32078,7 +31518,7 @@
               </p:nextCondLst>
             </p:seq>
             <p:seq concurrent="1" nextAc="seek">
-              <p:cTn id="22" restart="whenNotActive" fill="hold" evtFilter="cancelBubble" nodeType="interactiveSeq">
+              <p:cTn id="20" restart="whenNotActive" fill="hold" evtFilter="cancelBubble" nodeType="interactiveSeq">
                 <p:stCondLst>
                   <p:cond evt="onClick" delay="0">
                     <p:tgtEl>
@@ -32091,26 +31531,26 @@
                 </p:endSync>
                 <p:childTnLst>
                   <p:par>
-                    <p:cTn id="23" fill="hold">
+                    <p:cTn id="21" fill="hold">
                       <p:stCondLst>
                         <p:cond delay="0"/>
                       </p:stCondLst>
                       <p:childTnLst>
                         <p:par>
-                          <p:cTn id="24" fill="hold">
+                          <p:cTn id="22" fill="hold">
                             <p:stCondLst>
                               <p:cond delay="0"/>
                             </p:stCondLst>
                             <p:childTnLst>
                               <p:par>
-                                <p:cTn id="25" presetID="10" presetClass="entr" presetSubtype="0" fill="hold" grpId="0" nodeType="clickEffect">
+                                <p:cTn id="23" presetID="10" presetClass="entr" presetSubtype="0" fill="hold" grpId="0" nodeType="clickEffect">
                                   <p:stCondLst>
                                     <p:cond delay="0"/>
                                   </p:stCondLst>
                                   <p:childTnLst>
                                     <p:set>
                                       <p:cBhvr>
-                                        <p:cTn id="26" dur="1" fill="hold">
+                                        <p:cTn id="24" dur="1" fill="hold">
                                           <p:stCondLst>
                                             <p:cond delay="0"/>
                                           </p:stCondLst>
@@ -32128,29 +31568,13 @@
                                     </p:set>
                                     <p:animEffect transition="in" filter="fade">
                                       <p:cBhvr>
-                                        <p:cTn id="27" dur="500"/>
+                                        <p:cTn id="25" dur="500"/>
                                         <p:tgtEl>
                                           <p:spTgt spid="10"/>
                                         </p:tgtEl>
                                       </p:cBhvr>
                                     </p:animEffect>
                                   </p:childTnLst>
-                                  <p:subTnLst>
-                                    <p:audio>
-                                      <p:cMediaNode vol="50000" showWhenStopped="0">
-                                        <p:cTn id="28" display="0" masterRel="sameClick">
-                                          <p:stCondLst>
-                                            <p:cond evt="onBegin" delay="0">
-                                              <p:tn val="25"/>
-                                            </p:cond>
-                                          </p:stCondLst>
-                                        </p:cTn>
-                                        <p:tgtEl>
-                                          <p:sndTgt r:embed="rId6" name="chime.wav"/>
-                                        </p:tgtEl>
-                                      </p:cMediaNode>
-                                    </p:audio>
-                                  </p:subTnLst>
                                 </p:cTn>
                               </p:par>
                             </p:childTnLst>
@@ -33130,22 +32554,6 @@
                                       </p:cBhvr>
                                     </p:animEffect>
                                   </p:childTnLst>
-                                  <p:subTnLst>
-                                    <p:audio>
-                                      <p:cMediaNode vol="50000" showWhenStopped="0">
-                                        <p:cTn id="8" display="0" masterRel="sameClick">
-                                          <p:stCondLst>
-                                            <p:cond evt="onBegin" delay="0">
-                                              <p:tn val="5"/>
-                                            </p:cond>
-                                          </p:stCondLst>
-                                        </p:cTn>
-                                        <p:tgtEl>
-                                          <p:sndTgt r:embed="rId6" name="chime.wav"/>
-                                        </p:tgtEl>
-                                      </p:cMediaNode>
-                                    </p:audio>
-                                  </p:subTnLst>
                                 </p:cTn>
                               </p:par>
                             </p:childTnLst>
@@ -33165,7 +32573,7 @@
               </p:nextCondLst>
             </p:seq>
             <p:seq concurrent="1" nextAc="seek">
-              <p:cTn id="9" restart="whenNotActive" fill="hold" evtFilter="cancelBubble" nodeType="interactiveSeq">
+              <p:cTn id="8" restart="whenNotActive" fill="hold" evtFilter="cancelBubble" nodeType="interactiveSeq">
                 <p:stCondLst>
                   <p:cond evt="onClick" delay="0">
                     <p:tgtEl>
@@ -33178,26 +32586,26 @@
                 </p:endSync>
                 <p:childTnLst>
                   <p:par>
-                    <p:cTn id="10" fill="hold">
+                    <p:cTn id="9" fill="hold">
                       <p:stCondLst>
                         <p:cond delay="0"/>
                       </p:stCondLst>
                       <p:childTnLst>
                         <p:par>
-                          <p:cTn id="11" fill="hold">
+                          <p:cTn id="10" fill="hold">
                             <p:stCondLst>
                               <p:cond delay="0"/>
                             </p:stCondLst>
                             <p:childTnLst>
                               <p:par>
-                                <p:cTn id="12" presetID="10" presetClass="entr" presetSubtype="0" fill="hold" grpId="0" nodeType="clickEffect">
+                                <p:cTn id="11" presetID="10" presetClass="entr" presetSubtype="0" fill="hold" grpId="0" nodeType="clickEffect">
                                   <p:stCondLst>
                                     <p:cond delay="0"/>
                                   </p:stCondLst>
                                   <p:childTnLst>
                                     <p:set>
                                       <p:cBhvr>
-                                        <p:cTn id="13" dur="1" fill="hold">
+                                        <p:cTn id="12" dur="1" fill="hold">
                                           <p:stCondLst>
                                             <p:cond delay="0"/>
                                           </p:stCondLst>
@@ -33215,29 +32623,13 @@
                                     </p:set>
                                     <p:animEffect transition="in" filter="fade">
                                       <p:cBhvr>
-                                        <p:cTn id="14" dur="500"/>
+                                        <p:cTn id="13" dur="500"/>
                                         <p:tgtEl>
                                           <p:spTgt spid="9"/>
                                         </p:tgtEl>
                                       </p:cBhvr>
                                     </p:animEffect>
                                   </p:childTnLst>
-                                  <p:subTnLst>
-                                    <p:audio>
-                                      <p:cMediaNode vol="50000" showWhenStopped="0">
-                                        <p:cTn id="15" display="0" masterRel="sameClick">
-                                          <p:stCondLst>
-                                            <p:cond evt="onBegin" delay="0">
-                                              <p:tn val="12"/>
-                                            </p:cond>
-                                          </p:stCondLst>
-                                        </p:cTn>
-                                        <p:tgtEl>
-                                          <p:sndTgt r:embed="rId6" name="chime.wav"/>
-                                        </p:tgtEl>
-                                      </p:cMediaNode>
-                                    </p:audio>
-                                  </p:subTnLst>
                                 </p:cTn>
                               </p:par>
                             </p:childTnLst>
@@ -33257,7 +32649,7 @@
               </p:nextCondLst>
             </p:seq>
             <p:seq concurrent="1" nextAc="seek">
-              <p:cTn id="16" restart="whenNotActive" fill="hold" evtFilter="cancelBubble" nodeType="interactiveSeq">
+              <p:cTn id="14" restart="whenNotActive" fill="hold" evtFilter="cancelBubble" nodeType="interactiveSeq">
                 <p:stCondLst>
                   <p:cond evt="onClick" delay="0">
                     <p:tgtEl>
@@ -33270,26 +32662,26 @@
                 </p:endSync>
                 <p:childTnLst>
                   <p:par>
-                    <p:cTn id="17" fill="hold">
+                    <p:cTn id="15" fill="hold">
                       <p:stCondLst>
                         <p:cond delay="0"/>
                       </p:stCondLst>
                       <p:childTnLst>
                         <p:par>
-                          <p:cTn id="18" fill="hold">
+                          <p:cTn id="16" fill="hold">
                             <p:stCondLst>
                               <p:cond delay="0"/>
                             </p:stCondLst>
                             <p:childTnLst>
                               <p:par>
-                                <p:cTn id="19" presetID="10" presetClass="entr" presetSubtype="0" fill="hold" grpId="0" nodeType="clickEffect">
+                                <p:cTn id="17" presetID="10" presetClass="entr" presetSubtype="0" fill="hold" grpId="0" nodeType="clickEffect">
                                   <p:stCondLst>
                                     <p:cond delay="0"/>
                                   </p:stCondLst>
                                   <p:childTnLst>
                                     <p:set>
                                       <p:cBhvr>
-                                        <p:cTn id="20" dur="1" fill="hold">
+                                        <p:cTn id="18" dur="1" fill="hold">
                                           <p:stCondLst>
                                             <p:cond delay="0"/>
                                           </p:stCondLst>
@@ -33307,29 +32699,13 @@
                                     </p:set>
                                     <p:animEffect transition="in" filter="fade">
                                       <p:cBhvr>
-                                        <p:cTn id="21" dur="500"/>
+                                        <p:cTn id="19" dur="500"/>
                                         <p:tgtEl>
                                           <p:spTgt spid="12"/>
                                         </p:tgtEl>
                                       </p:cBhvr>
                                     </p:animEffect>
                                   </p:childTnLst>
-                                  <p:subTnLst>
-                                    <p:audio>
-                                      <p:cMediaNode vol="50000" showWhenStopped="0">
-                                        <p:cTn id="22" display="0" masterRel="sameClick">
-                                          <p:stCondLst>
-                                            <p:cond evt="onBegin" delay="0">
-                                              <p:tn val="19"/>
-                                            </p:cond>
-                                          </p:stCondLst>
-                                        </p:cTn>
-                                        <p:tgtEl>
-                                          <p:sndTgt r:embed="rId6" name="chime.wav"/>
-                                        </p:tgtEl>
-                                      </p:cMediaNode>
-                                    </p:audio>
-                                  </p:subTnLst>
                                 </p:cTn>
                               </p:par>
                             </p:childTnLst>
@@ -33349,7 +32725,7 @@
               </p:nextCondLst>
             </p:seq>
             <p:seq concurrent="1" nextAc="seek">
-              <p:cTn id="23" restart="whenNotActive" fill="hold" evtFilter="cancelBubble" nodeType="interactiveSeq">
+              <p:cTn id="20" restart="whenNotActive" fill="hold" evtFilter="cancelBubble" nodeType="interactiveSeq">
                 <p:stCondLst>
                   <p:cond evt="onClick" delay="0">
                     <p:tgtEl>
@@ -33362,26 +32738,26 @@
                 </p:endSync>
                 <p:childTnLst>
                   <p:par>
-                    <p:cTn id="24" fill="hold">
+                    <p:cTn id="21" fill="hold">
                       <p:stCondLst>
                         <p:cond delay="0"/>
                       </p:stCondLst>
                       <p:childTnLst>
                         <p:par>
-                          <p:cTn id="25" fill="hold">
+                          <p:cTn id="22" fill="hold">
                             <p:stCondLst>
                               <p:cond delay="0"/>
                             </p:stCondLst>
                             <p:childTnLst>
                               <p:par>
-                                <p:cTn id="26" presetID="10" presetClass="entr" presetSubtype="0" fill="hold" grpId="0" nodeType="clickEffect">
+                                <p:cTn id="23" presetID="10" presetClass="entr" presetSubtype="0" fill="hold" grpId="0" nodeType="clickEffect">
                                   <p:stCondLst>
                                     <p:cond delay="0"/>
                                   </p:stCondLst>
                                   <p:childTnLst>
                                     <p:set>
                                       <p:cBhvr>
-                                        <p:cTn id="27" dur="1" fill="hold">
+                                        <p:cTn id="24" dur="1" fill="hold">
                                           <p:stCondLst>
                                             <p:cond delay="0"/>
                                           </p:stCondLst>
@@ -33399,29 +32775,13 @@
                                     </p:set>
                                     <p:animEffect transition="in" filter="fade">
                                       <p:cBhvr>
-                                        <p:cTn id="28" dur="500"/>
+                                        <p:cTn id="25" dur="500"/>
                                         <p:tgtEl>
                                           <p:spTgt spid="15"/>
                                         </p:tgtEl>
                                       </p:cBhvr>
                                     </p:animEffect>
                                   </p:childTnLst>
-                                  <p:subTnLst>
-                                    <p:audio>
-                                      <p:cMediaNode vol="50000" showWhenStopped="0">
-                                        <p:cTn id="29" display="0" masterRel="sameClick">
-                                          <p:stCondLst>
-                                            <p:cond evt="onBegin" delay="0">
-                                              <p:tn val="26"/>
-                                            </p:cond>
-                                          </p:stCondLst>
-                                        </p:cTn>
-                                        <p:tgtEl>
-                                          <p:sndTgt r:embed="rId6" name="chime.wav"/>
-                                        </p:tgtEl>
-                                      </p:cMediaNode>
-                                    </p:audio>
-                                  </p:subTnLst>
                                 </p:cTn>
                               </p:par>
                             </p:childTnLst>
@@ -34376,42 +33736,26 @@
                                       </p:cBhvr>
                                     </p:animEffect>
                                   </p:childTnLst>
-                                  <p:subTnLst>
-                                    <p:audio>
-                                      <p:cMediaNode vol="50000" showWhenStopped="0">
-                                        <p:cTn id="16" display="0" masterRel="sameClick">
-                                          <p:stCondLst>
-                                            <p:cond evt="onBegin" delay="0">
-                                              <p:tn val="11"/>
-                                            </p:cond>
-                                          </p:stCondLst>
-                                        </p:cTn>
-                                        <p:tgtEl>
-                                          <p:sndTgt r:embed="rId7" name="chime.wav"/>
-                                        </p:tgtEl>
-                                      </p:cMediaNode>
-                                    </p:audio>
-                                  </p:subTnLst>
                                 </p:cTn>
                               </p:par>
                             </p:childTnLst>
                           </p:cTn>
                         </p:par>
                         <p:par>
-                          <p:cTn id="17" fill="hold">
+                          <p:cTn id="16" fill="hold">
                             <p:stCondLst>
                               <p:cond delay="2700"/>
                             </p:stCondLst>
                             <p:childTnLst>
                               <p:par>
-                                <p:cTn id="18" presetID="0" presetClass="path" presetSubtype="0" fill="hold" grpId="2" nodeType="afterEffect">
+                                <p:cTn id="17" presetID="0" presetClass="path" presetSubtype="0" fill="hold" grpId="2" nodeType="afterEffect">
                                   <p:stCondLst>
                                     <p:cond delay="400"/>
                                   </p:stCondLst>
                                   <p:childTnLst>
                                     <p:animMotion origin="layout" path="M 0 0 L -0.8 0 E" pathEditMode="relative" ptsTypes="">
                                       <p:cBhvr>
-                                        <p:cTn id="19" dur="1600" fill="hold"/>
+                                        <p:cTn id="18" dur="1600" fill="hold"/>
                                         <p:tgtEl>
                                           <p:spTgt spid="4"/>
                                         </p:tgtEl>
@@ -34426,14 +33770,14 @@
                                 </p:cTn>
                               </p:par>
                               <p:par>
-                                <p:cTn id="20" presetID="10" presetClass="exit" presetSubtype="0" fill="hold" grpId="1" nodeType="withEffect">
+                                <p:cTn id="19" presetID="10" presetClass="exit" presetSubtype="0" fill="hold" grpId="1" nodeType="withEffect">
                                   <p:stCondLst>
                                     <p:cond delay="1300"/>
                                   </p:stCondLst>
                                   <p:childTnLst>
                                     <p:animEffect transition="out" filter="fade">
                                       <p:cBhvr>
-                                        <p:cTn id="21" dur="500"/>
+                                        <p:cTn id="20" dur="500"/>
                                         <p:tgtEl>
                                           <p:spTgt spid="5"/>
                                         </p:tgtEl>
@@ -34441,7 +33785,7 @@
                                     </p:animEffect>
                                     <p:set>
                                       <p:cBhvr>
-                                        <p:cTn id="22" dur="1" fill="hold">
+                                        <p:cTn id="21" dur="1" fill="hold">
                                           <p:stCondLst>
                                             <p:cond delay="499"/>
                                           </p:stCondLst>
@@ -34464,20 +33808,20 @@
                           </p:cTn>
                         </p:par>
                         <p:par>
-                          <p:cTn id="23" fill="hold">
+                          <p:cTn id="22" fill="hold">
                             <p:stCondLst>
                               <p:cond delay="4700"/>
                             </p:stCondLst>
                             <p:childTnLst>
                               <p:par>
-                                <p:cTn id="24" presetID="10" presetClass="entr" presetSubtype="0" fill="hold" grpId="0" nodeType="afterEffect">
+                                <p:cTn id="23" presetID="10" presetClass="entr" presetSubtype="0" fill="hold" grpId="0" nodeType="afterEffect">
                                   <p:stCondLst>
                                     <p:cond delay="0"/>
                                   </p:stCondLst>
                                   <p:childTnLst>
                                     <p:set>
                                       <p:cBhvr>
-                                        <p:cTn id="25" dur="1" fill="hold">
+                                        <p:cTn id="24" dur="1" fill="hold">
                                           <p:stCondLst>
                                             <p:cond delay="0"/>
                                           </p:stCondLst>
@@ -34495,7 +33839,7 @@
                                     </p:set>
                                     <p:animEffect transition="in" filter="fade">
                                       <p:cBhvr>
-                                        <p:cTn id="26" dur="500"/>
+                                        <p:cTn id="25" dur="500"/>
                                         <p:tgtEl>
                                           <p:spTgt spid="6"/>
                                         </p:tgtEl>
@@ -34505,14 +33849,14 @@
                                 </p:cTn>
                               </p:par>
                               <p:par>
-                                <p:cTn id="27" presetID="10" presetClass="entr" presetSubtype="0" fill="hold" grpId="0" nodeType="withEffect">
+                                <p:cTn id="26" presetID="10" presetClass="entr" presetSubtype="0" fill="hold" grpId="0" nodeType="withEffect">
                                   <p:stCondLst>
                                     <p:cond delay="0"/>
                                   </p:stCondLst>
                                   <p:childTnLst>
                                     <p:set>
                                       <p:cBhvr>
-                                        <p:cTn id="28" dur="1" fill="hold">
+                                        <p:cTn id="27" dur="1" fill="hold">
                                           <p:stCondLst>
                                             <p:cond delay="0"/>
                                           </p:stCondLst>
@@ -34530,7 +33874,7 @@
                                     </p:set>
                                     <p:animEffect transition="in" filter="fade">
                                       <p:cBhvr>
-                                        <p:cTn id="29" dur="500"/>
+                                        <p:cTn id="28" dur="500"/>
                                         <p:tgtEl>
                                           <p:spTgt spid="7"/>
                                         </p:tgtEl>
@@ -34540,14 +33884,14 @@
                                 </p:cTn>
                               </p:par>
                               <p:par>
-                                <p:cTn id="30" presetID="10" presetClass="entr" presetSubtype="0" fill="hold" grpId="0" nodeType="withEffect">
+                                <p:cTn id="29" presetID="10" presetClass="entr" presetSubtype="0" fill="hold" grpId="0" nodeType="withEffect">
                                   <p:stCondLst>
                                     <p:cond delay="0"/>
                                   </p:stCondLst>
                                   <p:childTnLst>
                                     <p:set>
                                       <p:cBhvr>
-                                        <p:cTn id="31" dur="1" fill="hold">
+                                        <p:cTn id="30" dur="1" fill="hold">
                                           <p:stCondLst>
                                             <p:cond delay="0"/>
                                           </p:stCondLst>
@@ -34565,7 +33909,7 @@
                                     </p:set>
                                     <p:animEffect transition="in" filter="fade">
                                       <p:cBhvr>
-                                        <p:cTn id="32" dur="500"/>
+                                        <p:cTn id="31" dur="500"/>
                                         <p:tgtEl>
                                           <p:spTgt spid="8"/>
                                         </p:tgtEl>
@@ -34575,14 +33919,14 @@
                                 </p:cTn>
                               </p:par>
                               <p:par>
-                                <p:cTn id="33" presetID="10" presetClass="entr" presetSubtype="0" fill="hold" grpId="0" nodeType="withEffect">
+                                <p:cTn id="32" presetID="10" presetClass="entr" presetSubtype="0" fill="hold" grpId="0" nodeType="withEffect">
                                   <p:stCondLst>
                                     <p:cond delay="0"/>
                                   </p:stCondLst>
                                   <p:childTnLst>
                                     <p:set>
                                       <p:cBhvr>
-                                        <p:cTn id="34" dur="1" fill="hold">
+                                        <p:cTn id="33" dur="1" fill="hold">
                                           <p:stCondLst>
                                             <p:cond delay="0"/>
                                           </p:stCondLst>
@@ -34600,7 +33944,7 @@
                                     </p:set>
                                     <p:animEffect transition="in" filter="fade">
                                       <p:cBhvr>
-                                        <p:cTn id="35" dur="500"/>
+                                        <p:cTn id="34" dur="500"/>
                                         <p:tgtEl>
                                           <p:spTgt spid="9"/>
                                         </p:tgtEl>
@@ -34610,14 +33954,14 @@
                                 </p:cTn>
                               </p:par>
                               <p:par>
-                                <p:cTn id="36" presetID="10" presetClass="entr" presetSubtype="0" fill="hold" grpId="0" nodeType="withEffect">
+                                <p:cTn id="35" presetID="10" presetClass="entr" presetSubtype="0" fill="hold" grpId="0" nodeType="withEffect">
                                   <p:stCondLst>
                                     <p:cond delay="0"/>
                                   </p:stCondLst>
                                   <p:childTnLst>
                                     <p:set>
                                       <p:cBhvr>
-                                        <p:cTn id="37" dur="1" fill="hold">
+                                        <p:cTn id="36" dur="1" fill="hold">
                                           <p:stCondLst>
                                             <p:cond delay="0"/>
                                           </p:stCondLst>
@@ -34635,7 +33979,7 @@
                                     </p:set>
                                     <p:animEffect transition="in" filter="fade">
                                       <p:cBhvr>
-                                        <p:cTn id="38" dur="500"/>
+                                        <p:cTn id="37" dur="500"/>
                                         <p:tgtEl>
                                           <p:spTgt spid="10"/>
                                         </p:tgtEl>
@@ -34645,14 +33989,14 @@
                                 </p:cTn>
                               </p:par>
                               <p:par>
-                                <p:cTn id="39" presetID="10" presetClass="entr" presetSubtype="0" fill="hold" grpId="0" nodeType="withEffect">
+                                <p:cTn id="38" presetID="10" presetClass="entr" presetSubtype="0" fill="hold" grpId="0" nodeType="withEffect">
                                   <p:stCondLst>
                                     <p:cond delay="0"/>
                                   </p:stCondLst>
                                   <p:childTnLst>
                                     <p:set>
                                       <p:cBhvr>
-                                        <p:cTn id="40" dur="1" fill="hold">
+                                        <p:cTn id="39" dur="1" fill="hold">
                                           <p:stCondLst>
                                             <p:cond delay="0"/>
                                           </p:stCondLst>
@@ -34670,7 +34014,7 @@
                                     </p:set>
                                     <p:animEffect transition="in" filter="fade">
                                       <p:cBhvr>
-                                        <p:cTn id="41" dur="500"/>
+                                        <p:cTn id="40" dur="500"/>
                                         <p:tgtEl>
                                           <p:spTgt spid="11"/>
                                         </p:tgtEl>
@@ -34686,26 +34030,26 @@
                     </p:cTn>
                   </p:par>
                   <p:par>
-                    <p:cTn id="42" fill="hold">
+                    <p:cTn id="41" fill="hold">
                       <p:stCondLst>
                         <p:cond delay="indefinite"/>
                       </p:stCondLst>
                       <p:childTnLst>
                         <p:par>
-                          <p:cTn id="43" fill="hold">
+                          <p:cTn id="42" fill="hold">
                             <p:stCondLst>
                               <p:cond delay="0"/>
                             </p:stCondLst>
                             <p:childTnLst>
                               <p:par>
-                                <p:cTn id="44" presetID="10" presetClass="entr" presetSubtype="0" fill="hold" grpId="0" nodeType="clickEffect">
+                                <p:cTn id="43" presetID="10" presetClass="entr" presetSubtype="0" fill="hold" grpId="0" nodeType="clickEffect">
                                   <p:stCondLst>
                                     <p:cond delay="0"/>
                                   </p:stCondLst>
                                   <p:childTnLst>
                                     <p:set>
                                       <p:cBhvr>
-                                        <p:cTn id="45" dur="1" fill="hold">
+                                        <p:cTn id="44" dur="1" fill="hold">
                                           <p:stCondLst>
                                             <p:cond delay="0"/>
                                           </p:stCondLst>
@@ -34723,7 +34067,7 @@
                                     </p:set>
                                     <p:animEffect transition="in" filter="fade">
                                       <p:cBhvr>
-                                        <p:cTn id="46" dur="500"/>
+                                        <p:cTn id="45" dur="500"/>
                                         <p:tgtEl>
                                           <p:spTgt spid="12"/>
                                         </p:tgtEl>
@@ -34739,26 +34083,26 @@
                     </p:cTn>
                   </p:par>
                   <p:par>
-                    <p:cTn id="47" fill="hold">
+                    <p:cTn id="46" fill="hold">
                       <p:stCondLst>
                         <p:cond delay="indefinite"/>
                       </p:stCondLst>
                       <p:childTnLst>
                         <p:par>
-                          <p:cTn id="48" fill="hold">
+                          <p:cTn id="47" fill="hold">
                             <p:stCondLst>
                               <p:cond delay="0"/>
                             </p:stCondLst>
                             <p:childTnLst>
                               <p:par>
-                                <p:cTn id="49" presetID="10" presetClass="entr" presetSubtype="0" fill="hold" grpId="0" nodeType="clickEffect">
+                                <p:cTn id="48" presetID="10" presetClass="entr" presetSubtype="0" fill="hold" grpId="0" nodeType="clickEffect">
                                   <p:stCondLst>
                                     <p:cond delay="0"/>
                                   </p:stCondLst>
                                   <p:childTnLst>
                                     <p:set>
                                       <p:cBhvr>
-                                        <p:cTn id="50" dur="1" fill="hold">
+                                        <p:cTn id="49" dur="1" fill="hold">
                                           <p:stCondLst>
                                             <p:cond delay="0"/>
                                           </p:stCondLst>
@@ -34776,7 +34120,7 @@
                                     </p:set>
                                     <p:animEffect transition="in" filter="fade">
                                       <p:cBhvr>
-                                        <p:cTn id="51" dur="500"/>
+                                        <p:cTn id="50" dur="500"/>
                                         <p:tgtEl>
                                           <p:spTgt spid="13"/>
                                         </p:tgtEl>
@@ -34792,26 +34136,26 @@
                     </p:cTn>
                   </p:par>
                   <p:par>
-                    <p:cTn id="52" fill="hold">
+                    <p:cTn id="51" fill="hold">
                       <p:stCondLst>
                         <p:cond delay="indefinite"/>
                       </p:stCondLst>
                       <p:childTnLst>
                         <p:par>
-                          <p:cTn id="53" fill="hold">
+                          <p:cTn id="52" fill="hold">
                             <p:stCondLst>
                               <p:cond delay="0"/>
                             </p:stCondLst>
                             <p:childTnLst>
                               <p:par>
-                                <p:cTn id="54" presetID="10" presetClass="entr" presetSubtype="0" fill="hold" grpId="0" nodeType="clickEffect">
+                                <p:cTn id="53" presetID="10" presetClass="entr" presetSubtype="0" fill="hold" grpId="0" nodeType="clickEffect">
                                   <p:stCondLst>
                                     <p:cond delay="0"/>
                                   </p:stCondLst>
                                   <p:childTnLst>
                                     <p:set>
                                       <p:cBhvr>
-                                        <p:cTn id="55" dur="1" fill="hold">
+                                        <p:cTn id="54" dur="1" fill="hold">
                                           <p:stCondLst>
                                             <p:cond delay="0"/>
                                           </p:stCondLst>
@@ -34829,7 +34173,7 @@
                                     </p:set>
                                     <p:animEffect transition="in" filter="fade">
                                       <p:cBhvr>
-                                        <p:cTn id="56" dur="500"/>
+                                        <p:cTn id="55" dur="500"/>
                                         <p:tgtEl>
                                           <p:spTgt spid="14"/>
                                         </p:tgtEl>
@@ -34845,26 +34189,26 @@
                     </p:cTn>
                   </p:par>
                   <p:par>
-                    <p:cTn id="57" fill="hold">
+                    <p:cTn id="56" fill="hold">
                       <p:stCondLst>
                         <p:cond delay="indefinite"/>
                       </p:stCondLst>
                       <p:childTnLst>
                         <p:par>
-                          <p:cTn id="58" fill="hold">
+                          <p:cTn id="57" fill="hold">
                             <p:stCondLst>
                               <p:cond delay="0"/>
                             </p:stCondLst>
                             <p:childTnLst>
                               <p:par>
-                                <p:cTn id="59" presetID="10" presetClass="entr" presetSubtype="0" fill="hold" grpId="0" nodeType="clickEffect">
+                                <p:cTn id="58" presetID="10" presetClass="entr" presetSubtype="0" fill="hold" grpId="0" nodeType="clickEffect">
                                   <p:stCondLst>
                                     <p:cond delay="0"/>
                                   </p:stCondLst>
                                   <p:childTnLst>
                                     <p:set>
                                       <p:cBhvr>
-                                        <p:cTn id="60" dur="1" fill="hold">
+                                        <p:cTn id="59" dur="1" fill="hold">
                                           <p:stCondLst>
                                             <p:cond delay="0"/>
                                           </p:stCondLst>
@@ -34882,29 +34226,13 @@
                                     </p:set>
                                     <p:animEffect transition="in" filter="fade">
                                       <p:cBhvr>
-                                        <p:cTn id="61" dur="500"/>
+                                        <p:cTn id="60" dur="500"/>
                                         <p:tgtEl>
                                           <p:spTgt spid="15"/>
                                         </p:tgtEl>
                                       </p:cBhvr>
                                     </p:animEffect>
                                   </p:childTnLst>
-                                  <p:subTnLst>
-                                    <p:audio>
-                                      <p:cMediaNode vol="50000" showWhenStopped="0">
-                                        <p:cTn id="62" display="0" masterRel="sameClick">
-                                          <p:stCondLst>
-                                            <p:cond evt="onBegin" delay="0">
-                                              <p:tn val="59"/>
-                                            </p:cond>
-                                          </p:stCondLst>
-                                        </p:cTn>
-                                        <p:tgtEl>
-                                          <p:sndTgt r:embed="rId7" name="chime.wav"/>
-                                        </p:tgtEl>
-                                      </p:cMediaNode>
-                                    </p:audio>
-                                  </p:subTnLst>
                                 </p:cTn>
                               </p:par>
                             </p:childTnLst>
@@ -35669,22 +34997,6 @@
                                       </p:cBhvr>
                                     </p:animEffect>
                                   </p:childTnLst>
-                                  <p:subTnLst>
-                                    <p:audio>
-                                      <p:cMediaNode vol="50000" showWhenStopped="0">
-                                        <p:cTn id="8" display="0" masterRel="sameClick">
-                                          <p:stCondLst>
-                                            <p:cond evt="onBegin" delay="0">
-                                              <p:tn val="5"/>
-                                            </p:cond>
-                                          </p:stCondLst>
-                                        </p:cTn>
-                                        <p:tgtEl>
-                                          <p:sndTgt r:embed="rId5" name="chime.wav"/>
-                                        </p:tgtEl>
-                                      </p:cMediaNode>
-                                    </p:audio>
-                                  </p:subTnLst>
                                 </p:cTn>
                               </p:par>
                             </p:childTnLst>
@@ -35694,26 +35006,26 @@
                     </p:cTn>
                   </p:par>
                   <p:par>
-                    <p:cTn id="9" fill="hold">
+                    <p:cTn id="8" fill="hold">
                       <p:stCondLst>
                         <p:cond delay="indefinite"/>
                       </p:stCondLst>
                       <p:childTnLst>
                         <p:par>
-                          <p:cTn id="10" fill="hold">
+                          <p:cTn id="9" fill="hold">
                             <p:stCondLst>
                               <p:cond delay="0"/>
                             </p:stCondLst>
                             <p:childTnLst>
                               <p:par>
-                                <p:cTn id="11" presetID="10" presetClass="entr" presetSubtype="0" fill="hold" grpId="0" nodeType="clickEffect">
+                                <p:cTn id="10" presetID="10" presetClass="entr" presetSubtype="0" fill="hold" grpId="0" nodeType="clickEffect">
                                   <p:stCondLst>
                                     <p:cond delay="0"/>
                                   </p:stCondLst>
                                   <p:childTnLst>
                                     <p:set>
                                       <p:cBhvr>
-                                        <p:cTn id="12" dur="1" fill="hold">
+                                        <p:cTn id="11" dur="1" fill="hold">
                                           <p:stCondLst>
                                             <p:cond delay="0"/>
                                           </p:stCondLst>
@@ -35731,29 +35043,13 @@
                                     </p:set>
                                     <p:animEffect transition="in" filter="fade">
                                       <p:cBhvr>
-                                        <p:cTn id="13" dur="500"/>
+                                        <p:cTn id="12" dur="500"/>
                                         <p:tgtEl>
                                           <p:spTgt spid="9"/>
                                         </p:tgtEl>
                                       </p:cBhvr>
                                     </p:animEffect>
                                   </p:childTnLst>
-                                  <p:subTnLst>
-                                    <p:audio>
-                                      <p:cMediaNode vol="50000" showWhenStopped="0">
-                                        <p:cTn id="14" display="0" masterRel="sameClick">
-                                          <p:stCondLst>
-                                            <p:cond evt="onBegin" delay="0">
-                                              <p:tn val="11"/>
-                                            </p:cond>
-                                          </p:stCondLst>
-                                        </p:cTn>
-                                        <p:tgtEl>
-                                          <p:sndTgt r:embed="rId5" name="chime.wav"/>
-                                        </p:tgtEl>
-                                      </p:cMediaNode>
-                                    </p:audio>
-                                  </p:subTnLst>
                                 </p:cTn>
                               </p:par>
                             </p:childTnLst>
@@ -35763,26 +35059,26 @@
                     </p:cTn>
                   </p:par>
                   <p:par>
-                    <p:cTn id="15" fill="hold">
+                    <p:cTn id="13" fill="hold">
                       <p:stCondLst>
                         <p:cond delay="indefinite"/>
                       </p:stCondLst>
                       <p:childTnLst>
                         <p:par>
-                          <p:cTn id="16" fill="hold">
+                          <p:cTn id="14" fill="hold">
                             <p:stCondLst>
                               <p:cond delay="0"/>
                             </p:stCondLst>
                             <p:childTnLst>
                               <p:par>
-                                <p:cTn id="17" presetID="10" presetClass="entr" presetSubtype="0" fill="hold" grpId="0" nodeType="clickEffect">
+                                <p:cTn id="15" presetID="10" presetClass="entr" presetSubtype="0" fill="hold" grpId="0" nodeType="clickEffect">
                                   <p:stCondLst>
                                     <p:cond delay="0"/>
                                   </p:stCondLst>
                                   <p:childTnLst>
                                     <p:set>
                                       <p:cBhvr>
-                                        <p:cTn id="18" dur="1" fill="hold">
+                                        <p:cTn id="16" dur="1" fill="hold">
                                           <p:stCondLst>
                                             <p:cond delay="0"/>
                                           </p:stCondLst>
@@ -35800,29 +35096,13 @@
                                     </p:set>
                                     <p:animEffect transition="in" filter="fade">
                                       <p:cBhvr>
-                                        <p:cTn id="19" dur="500"/>
+                                        <p:cTn id="17" dur="500"/>
                                         <p:tgtEl>
                                           <p:spTgt spid="12"/>
                                         </p:tgtEl>
                                       </p:cBhvr>
                                     </p:animEffect>
                                   </p:childTnLst>
-                                  <p:subTnLst>
-                                    <p:audio>
-                                      <p:cMediaNode vol="50000" showWhenStopped="0">
-                                        <p:cTn id="20" display="0" masterRel="sameClick">
-                                          <p:stCondLst>
-                                            <p:cond evt="onBegin" delay="0">
-                                              <p:tn val="17"/>
-                                            </p:cond>
-                                          </p:stCondLst>
-                                        </p:cTn>
-                                        <p:tgtEl>
-                                          <p:sndTgt r:embed="rId5" name="chime.wav"/>
-                                        </p:tgtEl>
-                                      </p:cMediaNode>
-                                    </p:audio>
-                                  </p:subTnLst>
                                 </p:cTn>
                               </p:par>
                             </p:childTnLst>
@@ -37265,22 +36545,6 @@
                                       </p:cBhvr>
                                     </p:animEffect>
                                   </p:childTnLst>
-                                  <p:subTnLst>
-                                    <p:audio>
-                                      <p:cMediaNode vol="50000" showWhenStopped="0">
-                                        <p:cTn id="21" display="0" masterRel="sameClick">
-                                          <p:stCondLst>
-                                            <p:cond evt="onBegin" delay="0">
-                                              <p:tn val="18"/>
-                                            </p:cond>
-                                          </p:stCondLst>
-                                        </p:cTn>
-                                        <p:tgtEl>
-                                          <p:sndTgt r:embed="rId8" name="chime.wav"/>
-                                        </p:tgtEl>
-                                      </p:cMediaNode>
-                                    </p:audio>
-                                  </p:subTnLst>
                                 </p:cTn>
                               </p:par>
                             </p:childTnLst>
@@ -37876,22 +37140,6 @@
                                       </p:cBhvr>
                                     </p:animEffect>
                                   </p:childTnLst>
-                                  <p:subTnLst>
-                                    <p:audio>
-                                      <p:cMediaNode vol="50000" showWhenStopped="0">
-                                        <p:cTn id="8" display="0" masterRel="sameClick">
-                                          <p:stCondLst>
-                                            <p:cond evt="onBegin" delay="0">
-                                              <p:tn val="5"/>
-                                            </p:cond>
-                                          </p:stCondLst>
-                                        </p:cTn>
-                                        <p:tgtEl>
-                                          <p:sndTgt r:embed="rId6" name="chime.wav"/>
-                                        </p:tgtEl>
-                                      </p:cMediaNode>
-                                    </p:audio>
-                                  </p:subTnLst>
                                 </p:cTn>
                               </p:par>
                             </p:childTnLst>
@@ -37901,26 +37149,26 @@
                     </p:cTn>
                   </p:par>
                   <p:par>
-                    <p:cTn id="9" fill="hold">
+                    <p:cTn id="8" fill="hold">
                       <p:stCondLst>
                         <p:cond delay="indefinite"/>
                       </p:stCondLst>
                       <p:childTnLst>
                         <p:par>
-                          <p:cTn id="10" fill="hold">
+                          <p:cTn id="9" fill="hold">
                             <p:stCondLst>
                               <p:cond delay="0"/>
                             </p:stCondLst>
                             <p:childTnLst>
                               <p:par>
-                                <p:cTn id="11" presetID="10" presetClass="entr" presetSubtype="0" fill="hold" grpId="0" nodeType="clickEffect">
+                                <p:cTn id="10" presetID="10" presetClass="entr" presetSubtype="0" fill="hold" grpId="0" nodeType="clickEffect">
                                   <p:stCondLst>
                                     <p:cond delay="0"/>
                                   </p:stCondLst>
                                   <p:childTnLst>
                                     <p:set>
                                       <p:cBhvr>
-                                        <p:cTn id="12" dur="1" fill="hold">
+                                        <p:cTn id="11" dur="1" fill="hold">
                                           <p:stCondLst>
                                             <p:cond delay="0"/>
                                           </p:stCondLst>
@@ -37938,29 +37186,13 @@
                                     </p:set>
                                     <p:animEffect transition="in" filter="fade">
                                       <p:cBhvr>
-                                        <p:cTn id="13" dur="500"/>
+                                        <p:cTn id="12" dur="500"/>
                                         <p:tgtEl>
                                           <p:spTgt spid="7"/>
                                         </p:tgtEl>
                                       </p:cBhvr>
                                     </p:animEffect>
                                   </p:childTnLst>
-                                  <p:subTnLst>
-                                    <p:audio>
-                                      <p:cMediaNode vol="50000" showWhenStopped="0">
-                                        <p:cTn id="14" display="0" masterRel="sameClick">
-                                          <p:stCondLst>
-                                            <p:cond evt="onBegin" delay="0">
-                                              <p:tn val="11"/>
-                                            </p:cond>
-                                          </p:stCondLst>
-                                        </p:cTn>
-                                        <p:tgtEl>
-                                          <p:sndTgt r:embed="rId6" name="chime.wav"/>
-                                        </p:tgtEl>
-                                      </p:cMediaNode>
-                                    </p:audio>
-                                  </p:subTnLst>
                                 </p:cTn>
                               </p:par>
                             </p:childTnLst>
@@ -37970,26 +37202,26 @@
                     </p:cTn>
                   </p:par>
                   <p:par>
-                    <p:cTn id="15" fill="hold">
+                    <p:cTn id="13" fill="hold">
                       <p:stCondLst>
                         <p:cond delay="indefinite"/>
                       </p:stCondLst>
                       <p:childTnLst>
                         <p:par>
-                          <p:cTn id="16" fill="hold">
+                          <p:cTn id="14" fill="hold">
                             <p:stCondLst>
                               <p:cond delay="0"/>
                             </p:stCondLst>
                             <p:childTnLst>
                               <p:par>
-                                <p:cTn id="17" presetID="10" presetClass="entr" presetSubtype="0" fill="hold" grpId="0" nodeType="clickEffect">
+                                <p:cTn id="15" presetID="10" presetClass="entr" presetSubtype="0" fill="hold" grpId="0" nodeType="clickEffect">
                                   <p:stCondLst>
                                     <p:cond delay="0"/>
                                   </p:stCondLst>
                                   <p:childTnLst>
                                     <p:set>
                                       <p:cBhvr>
-                                        <p:cTn id="18" dur="1" fill="hold">
+                                        <p:cTn id="16" dur="1" fill="hold">
                                           <p:stCondLst>
                                             <p:cond delay="0"/>
                                           </p:stCondLst>
@@ -38007,7 +37239,7 @@
                                     </p:set>
                                     <p:animEffect transition="in" filter="fade">
                                       <p:cBhvr>
-                                        <p:cTn id="19" dur="500"/>
+                                        <p:cTn id="17" dur="500"/>
                                         <p:tgtEl>
                                           <p:spTgt spid="8"/>
                                         </p:tgtEl>
@@ -38017,14 +37249,14 @@
                                 </p:cTn>
                               </p:par>
                               <p:par>
-                                <p:cTn id="20" presetID="10" presetClass="entr" presetSubtype="0" fill="hold" grpId="0" nodeType="withEffect">
+                                <p:cTn id="18" presetID="10" presetClass="entr" presetSubtype="0" fill="hold" grpId="0" nodeType="withEffect">
                                   <p:stCondLst>
                                     <p:cond delay="0"/>
                                   </p:stCondLst>
                                   <p:childTnLst>
                                     <p:set>
                                       <p:cBhvr>
-                                        <p:cTn id="21" dur="1" fill="hold">
+                                        <p:cTn id="19" dur="1" fill="hold">
                                           <p:stCondLst>
                                             <p:cond delay="0"/>
                                           </p:stCondLst>
@@ -38042,7 +37274,7 @@
                                     </p:set>
                                     <p:animEffect transition="in" filter="fade">
                                       <p:cBhvr>
-                                        <p:cTn id="22" dur="500"/>
+                                        <p:cTn id="20" dur="500"/>
                                         <p:tgtEl>
                                           <p:spTgt spid="9"/>
                                         </p:tgtEl>
@@ -38956,22 +38188,6 @@
                                       </p:cBhvr>
                                     </p:animEffect>
                                   </p:childTnLst>
-                                  <p:subTnLst>
-                                    <p:audio>
-                                      <p:cMediaNode vol="50000" showWhenStopped="0">
-                                        <p:cTn id="8" display="0" masterRel="sameClick">
-                                          <p:stCondLst>
-                                            <p:cond evt="onBegin" delay="0">
-                                              <p:tn val="5"/>
-                                            </p:cond>
-                                          </p:stCondLst>
-                                        </p:cTn>
-                                        <p:tgtEl>
-                                          <p:sndTgt r:embed="rId5" name="chime.wav"/>
-                                        </p:tgtEl>
-                                      </p:cMediaNode>
-                                    </p:audio>
-                                  </p:subTnLst>
                                 </p:cTn>
                               </p:par>
                             </p:childTnLst>
@@ -38981,26 +38197,26 @@
                     </p:cTn>
                   </p:par>
                   <p:par>
-                    <p:cTn id="9" fill="hold">
+                    <p:cTn id="8" fill="hold">
                       <p:stCondLst>
                         <p:cond delay="indefinite"/>
                       </p:stCondLst>
                       <p:childTnLst>
                         <p:par>
-                          <p:cTn id="10" fill="hold">
+                          <p:cTn id="9" fill="hold">
                             <p:stCondLst>
                               <p:cond delay="0"/>
                             </p:stCondLst>
                             <p:childTnLst>
                               <p:par>
-                                <p:cTn id="11" presetID="10" presetClass="entr" presetSubtype="0" fill="hold" grpId="0" nodeType="clickEffect">
+                                <p:cTn id="10" presetID="10" presetClass="entr" presetSubtype="0" fill="hold" grpId="0" nodeType="clickEffect">
                                   <p:stCondLst>
                                     <p:cond delay="0"/>
                                   </p:stCondLst>
                                   <p:childTnLst>
                                     <p:set>
                                       <p:cBhvr>
-                                        <p:cTn id="12" dur="1" fill="hold">
+                                        <p:cTn id="11" dur="1" fill="hold">
                                           <p:stCondLst>
                                             <p:cond delay="0"/>
                                           </p:stCondLst>
@@ -39018,29 +38234,13 @@
                                     </p:set>
                                     <p:animEffect transition="in" filter="fade">
                                       <p:cBhvr>
-                                        <p:cTn id="13" dur="500"/>
+                                        <p:cTn id="12" dur="500"/>
                                         <p:tgtEl>
                                           <p:spTgt spid="9"/>
                                         </p:tgtEl>
                                       </p:cBhvr>
                                     </p:animEffect>
                                   </p:childTnLst>
-                                  <p:subTnLst>
-                                    <p:audio>
-                                      <p:cMediaNode vol="50000" showWhenStopped="0">
-                                        <p:cTn id="14" display="0" masterRel="sameClick">
-                                          <p:stCondLst>
-                                            <p:cond evt="onBegin" delay="0">
-                                              <p:tn val="11"/>
-                                            </p:cond>
-                                          </p:stCondLst>
-                                        </p:cTn>
-                                        <p:tgtEl>
-                                          <p:sndTgt r:embed="rId5" name="chime.wav"/>
-                                        </p:tgtEl>
-                                      </p:cMediaNode>
-                                    </p:audio>
-                                  </p:subTnLst>
                                 </p:cTn>
                               </p:par>
                             </p:childTnLst>
@@ -39050,26 +38250,26 @@
                     </p:cTn>
                   </p:par>
                   <p:par>
-                    <p:cTn id="15" fill="hold">
+                    <p:cTn id="13" fill="hold">
                       <p:stCondLst>
                         <p:cond delay="indefinite"/>
                       </p:stCondLst>
                       <p:childTnLst>
                         <p:par>
-                          <p:cTn id="16" fill="hold">
+                          <p:cTn id="14" fill="hold">
                             <p:stCondLst>
                               <p:cond delay="0"/>
                             </p:stCondLst>
                             <p:childTnLst>
                               <p:par>
-                                <p:cTn id="17" presetID="10" presetClass="entr" presetSubtype="0" fill="hold" grpId="0" nodeType="clickEffect">
+                                <p:cTn id="15" presetID="10" presetClass="entr" presetSubtype="0" fill="hold" grpId="0" nodeType="clickEffect">
                                   <p:stCondLst>
                                     <p:cond delay="0"/>
                                   </p:stCondLst>
                                   <p:childTnLst>
                                     <p:set>
                                       <p:cBhvr>
-                                        <p:cTn id="18" dur="1" fill="hold">
+                                        <p:cTn id="16" dur="1" fill="hold">
                                           <p:stCondLst>
                                             <p:cond delay="0"/>
                                           </p:stCondLst>
@@ -39087,29 +38287,13 @@
                                     </p:set>
                                     <p:animEffect transition="in" filter="fade">
                                       <p:cBhvr>
-                                        <p:cTn id="19" dur="500"/>
+                                        <p:cTn id="17" dur="500"/>
                                         <p:tgtEl>
                                           <p:spTgt spid="12"/>
                                         </p:tgtEl>
                                       </p:cBhvr>
                                     </p:animEffect>
                                   </p:childTnLst>
-                                  <p:subTnLst>
-                                    <p:audio>
-                                      <p:cMediaNode vol="50000" showWhenStopped="0">
-                                        <p:cTn id="20" display="0" masterRel="sameClick">
-                                          <p:stCondLst>
-                                            <p:cond evt="onBegin" delay="0">
-                                              <p:tn val="17"/>
-                                            </p:cond>
-                                          </p:stCondLst>
-                                        </p:cTn>
-                                        <p:tgtEl>
-                                          <p:sndTgt r:embed="rId5" name="chime.wav"/>
-                                        </p:tgtEl>
-                                      </p:cMediaNode>
-                                    </p:audio>
-                                  </p:subTnLst>
                                 </p:cTn>
                               </p:par>
                             </p:childTnLst>
@@ -39119,26 +38303,26 @@
                     </p:cTn>
                   </p:par>
                   <p:par>
-                    <p:cTn id="21" fill="hold">
+                    <p:cTn id="18" fill="hold">
                       <p:stCondLst>
                         <p:cond delay="indefinite"/>
                       </p:stCondLst>
                       <p:childTnLst>
                         <p:par>
-                          <p:cTn id="22" fill="hold">
+                          <p:cTn id="19" fill="hold">
                             <p:stCondLst>
                               <p:cond delay="0"/>
                             </p:stCondLst>
                             <p:childTnLst>
                               <p:par>
-                                <p:cTn id="23" presetID="10" presetClass="entr" presetSubtype="0" fill="hold" grpId="0" nodeType="clickEffect">
+                                <p:cTn id="20" presetID="10" presetClass="entr" presetSubtype="0" fill="hold" grpId="0" nodeType="clickEffect">
                                   <p:stCondLst>
                                     <p:cond delay="0"/>
                                   </p:stCondLst>
                                   <p:childTnLst>
                                     <p:set>
                                       <p:cBhvr>
-                                        <p:cTn id="24" dur="1" fill="hold">
+                                        <p:cTn id="21" dur="1" fill="hold">
                                           <p:stCondLst>
                                             <p:cond delay="0"/>
                                           </p:stCondLst>
@@ -39156,29 +38340,13 @@
                                     </p:set>
                                     <p:animEffect transition="in" filter="fade">
                                       <p:cBhvr>
-                                        <p:cTn id="25" dur="500"/>
+                                        <p:cTn id="22" dur="500"/>
                                         <p:tgtEl>
                                           <p:spTgt spid="15"/>
                                         </p:tgtEl>
                                       </p:cBhvr>
                                     </p:animEffect>
                                   </p:childTnLst>
-                                  <p:subTnLst>
-                                    <p:audio>
-                                      <p:cMediaNode vol="50000" showWhenStopped="0">
-                                        <p:cTn id="26" display="0" masterRel="sameClick">
-                                          <p:stCondLst>
-                                            <p:cond evt="onBegin" delay="0">
-                                              <p:tn val="23"/>
-                                            </p:cond>
-                                          </p:stCondLst>
-                                        </p:cTn>
-                                        <p:tgtEl>
-                                          <p:sndTgt r:embed="rId5" name="chime.wav"/>
-                                        </p:tgtEl>
-                                      </p:cMediaNode>
-                                    </p:audio>
-                                  </p:subTnLst>
                                 </p:cTn>
                               </p:par>
                             </p:childTnLst>
@@ -42309,22 +41477,6 @@
                                       <p:rCtr x="0" y="0"/>
                                     </p:animMotion>
                                   </p:childTnLst>
-                                  <p:subTnLst>
-                                    <p:audio>
-                                      <p:cMediaNode vol="50000" showWhenStopped="0">
-                                        <p:cTn id="29" display="0" masterRel="sameClick">
-                                          <p:stCondLst>
-                                            <p:cond evt="onBegin" delay="0">
-                                              <p:tn val="27"/>
-                                            </p:cond>
-                                          </p:stCondLst>
-                                        </p:cTn>
-                                        <p:tgtEl>
-                                          <p:sndTgt r:embed="rId8" name="train.wav"/>
-                                        </p:tgtEl>
-                                      </p:cMediaNode>
-                                    </p:audio>
-                                  </p:subTnLst>
                                 </p:cTn>
                               </p:par>
                             </p:childTnLst>
@@ -47016,22 +46168,6 @@
                                       <p:by x="118000" y="118000"/>
                                     </p:animScale>
                                   </p:childTnLst>
-                                  <p:subTnLst>
-                                    <p:audio>
-                                      <p:cMediaNode vol="50000" showWhenStopped="0">
-                                        <p:cTn id="7" display="0" masterRel="sameClick">
-                                          <p:stCondLst>
-                                            <p:cond evt="onBegin" delay="0">
-                                              <p:tn val="5"/>
-                                            </p:cond>
-                                          </p:stCondLst>
-                                        </p:cTn>
-                                        <p:tgtEl>
-                                          <p:sndTgt r:embed="rId13" name="chime.wav"/>
-                                        </p:tgtEl>
-                                      </p:cMediaNode>
-                                    </p:audio>
-                                  </p:subTnLst>
                                 </p:cTn>
                               </p:par>
                             </p:childTnLst>
@@ -47041,26 +46177,26 @@
                     </p:cTn>
                   </p:par>
                   <p:par>
-                    <p:cTn id="8" fill="hold">
+                    <p:cTn id="7" fill="hold">
                       <p:stCondLst>
                         <p:cond delay="indefinite"/>
                       </p:stCondLst>
                       <p:childTnLst>
                         <p:par>
-                          <p:cTn id="9" fill="hold">
+                          <p:cTn id="8" fill="hold">
                             <p:stCondLst>
                               <p:cond delay="0"/>
                             </p:stCondLst>
                             <p:childTnLst>
                               <p:par>
-                                <p:cTn id="10" presetID="0" presetClass="path" presetSubtype="0" fill="hold" grpId="0" nodeType="clickEffect">
+                                <p:cTn id="9" presetID="0" presetClass="path" presetSubtype="0" fill="hold" grpId="0" nodeType="clickEffect">
                                   <p:stCondLst>
                                     <p:cond delay="0"/>
                                   </p:stCondLst>
                                   <p:childTnLst>
                                     <p:animMotion origin="layout" path="M 0.0000 0 L -0.1838 0 E" pathEditMode="relative" ptsTypes="">
                                       <p:cBhvr>
-                                        <p:cTn id="11" dur="1800" fill="hold" accel="40000" decel="40000"/>
+                                        <p:cTn id="10" dur="1800" fill="hold" accel="40000" decel="40000"/>
                                         <p:tgtEl>
                                           <p:spTgt spid="20"/>
                                         </p:tgtEl>
@@ -47072,33 +46208,17 @@
                                       <p:rCtr x="0" y="0"/>
                                     </p:animMotion>
                                   </p:childTnLst>
-                                  <p:subTnLst>
-                                    <p:audio>
-                                      <p:cMediaNode vol="50000" showWhenStopped="0">
-                                        <p:cTn id="12" display="0" masterRel="sameClick">
-                                          <p:stCondLst>
-                                            <p:cond evt="onBegin" delay="0">
-                                              <p:tn val="10"/>
-                                            </p:cond>
-                                          </p:stCondLst>
-                                        </p:cTn>
-                                        <p:tgtEl>
-                                          <p:sndTgt r:embed="rId14" name="train.wav"/>
-                                        </p:tgtEl>
-                                      </p:cMediaNode>
-                                    </p:audio>
-                                  </p:subTnLst>
                                 </p:cTn>
                               </p:par>
                               <p:par>
-                                <p:cTn id="13" presetID="6" presetClass="emph" presetSubtype="0" fill="hold" grpId="0" nodeType="withEffect">
+                                <p:cTn id="11" presetID="6" presetClass="emph" presetSubtype="0" fill="hold" grpId="0" nodeType="withEffect">
                                   <p:stCondLst>
                                     <p:cond delay="1700"/>
                                   </p:stCondLst>
                                   <p:childTnLst>
                                     <p:animScale>
                                       <p:cBhvr>
-                                        <p:cTn id="14" dur="450" autoRev="1" fill="hold"/>
+                                        <p:cTn id="12" dur="450" autoRev="1" fill="hold"/>
                                         <p:tgtEl>
                                           <p:spTgt spid="8"/>
                                         </p:tgtEl>
@@ -47115,26 +46235,26 @@
                     </p:cTn>
                   </p:par>
                   <p:par>
-                    <p:cTn id="15" fill="hold">
+                    <p:cTn id="13" fill="hold">
                       <p:stCondLst>
                         <p:cond delay="indefinite"/>
                       </p:stCondLst>
                       <p:childTnLst>
                         <p:par>
-                          <p:cTn id="16" fill="hold">
+                          <p:cTn id="14" fill="hold">
                             <p:stCondLst>
                               <p:cond delay="0"/>
                             </p:stCondLst>
                             <p:childTnLst>
                               <p:par>
-                                <p:cTn id="17" presetID="0" presetClass="path" presetSubtype="0" fill="hold" grpId="1" nodeType="clickEffect">
+                                <p:cTn id="15" presetID="0" presetClass="path" presetSubtype="0" fill="hold" grpId="1" nodeType="clickEffect">
                                   <p:stCondLst>
                                     <p:cond delay="0"/>
                                   </p:stCondLst>
                                   <p:childTnLst>
                                     <p:animMotion origin="layout" path="M -0.1838 0 L -0.3675 0 E" pathEditMode="relative" ptsTypes="">
                                       <p:cBhvr>
-                                        <p:cTn id="18" dur="1800" fill="hold" accel="40000" decel="40000"/>
+                                        <p:cTn id="16" dur="1800" fill="hold" accel="40000" decel="40000"/>
                                         <p:tgtEl>
                                           <p:spTgt spid="20"/>
                                         </p:tgtEl>
@@ -47146,33 +46266,17 @@
                                       <p:rCtr x="0" y="0"/>
                                     </p:animMotion>
                                   </p:childTnLst>
-                                  <p:subTnLst>
-                                    <p:audio>
-                                      <p:cMediaNode vol="50000" showWhenStopped="0">
-                                        <p:cTn id="19" display="0" masterRel="sameClick">
-                                          <p:stCondLst>
-                                            <p:cond evt="onBegin" delay="0">
-                                              <p:tn val="17"/>
-                                            </p:cond>
-                                          </p:stCondLst>
-                                        </p:cTn>
-                                        <p:tgtEl>
-                                          <p:sndTgt r:embed="rId14" name="train.wav"/>
-                                        </p:tgtEl>
-                                      </p:cMediaNode>
-                                    </p:audio>
-                                  </p:subTnLst>
                                 </p:cTn>
                               </p:par>
                               <p:par>
-                                <p:cTn id="20" presetID="6" presetClass="emph" presetSubtype="0" fill="hold" grpId="0" nodeType="withEffect">
+                                <p:cTn id="17" presetID="6" presetClass="emph" presetSubtype="0" fill="hold" grpId="0" nodeType="withEffect">
                                   <p:stCondLst>
                                     <p:cond delay="1700"/>
                                   </p:stCondLst>
                                   <p:childTnLst>
                                     <p:animScale>
                                       <p:cBhvr>
-                                        <p:cTn id="21" dur="450" autoRev="1" fill="hold"/>
+                                        <p:cTn id="18" dur="450" autoRev="1" fill="hold"/>
                                         <p:tgtEl>
                                           <p:spTgt spid="11"/>
                                         </p:tgtEl>
@@ -47189,26 +46293,26 @@
                     </p:cTn>
                   </p:par>
                   <p:par>
-                    <p:cTn id="22" fill="hold">
+                    <p:cTn id="19" fill="hold">
                       <p:stCondLst>
                         <p:cond delay="indefinite"/>
                       </p:stCondLst>
                       <p:childTnLst>
                         <p:par>
-                          <p:cTn id="23" fill="hold">
+                          <p:cTn id="20" fill="hold">
                             <p:stCondLst>
                               <p:cond delay="0"/>
                             </p:stCondLst>
                             <p:childTnLst>
                               <p:par>
-                                <p:cTn id="24" presetID="0" presetClass="path" presetSubtype="0" fill="hold" grpId="2" nodeType="clickEffect">
+                                <p:cTn id="21" presetID="0" presetClass="path" presetSubtype="0" fill="hold" grpId="2" nodeType="clickEffect">
                                   <p:stCondLst>
                                     <p:cond delay="0"/>
                                   </p:stCondLst>
                                   <p:childTnLst>
                                     <p:animMotion origin="layout" path="M -0.3675 0 L -0.5513 0 E" pathEditMode="relative" ptsTypes="">
                                       <p:cBhvr>
-                                        <p:cTn id="25" dur="1800" fill="hold" accel="40000" decel="40000"/>
+                                        <p:cTn id="22" dur="1800" fill="hold" accel="40000" decel="40000"/>
                                         <p:tgtEl>
                                           <p:spTgt spid="20"/>
                                         </p:tgtEl>
@@ -47220,33 +46324,17 @@
                                       <p:rCtr x="0" y="0"/>
                                     </p:animMotion>
                                   </p:childTnLst>
-                                  <p:subTnLst>
-                                    <p:audio>
-                                      <p:cMediaNode vol="50000" showWhenStopped="0">
-                                        <p:cTn id="26" display="0" masterRel="sameClick">
-                                          <p:stCondLst>
-                                            <p:cond evt="onBegin" delay="0">
-                                              <p:tn val="24"/>
-                                            </p:cond>
-                                          </p:stCondLst>
-                                        </p:cTn>
-                                        <p:tgtEl>
-                                          <p:sndTgt r:embed="rId14" name="train.wav"/>
-                                        </p:tgtEl>
-                                      </p:cMediaNode>
-                                    </p:audio>
-                                  </p:subTnLst>
                                 </p:cTn>
                               </p:par>
                               <p:par>
-                                <p:cTn id="27" presetID="6" presetClass="emph" presetSubtype="0" fill="hold" grpId="0" nodeType="withEffect">
+                                <p:cTn id="23" presetID="6" presetClass="emph" presetSubtype="0" fill="hold" grpId="0" nodeType="withEffect">
                                   <p:stCondLst>
                                     <p:cond delay="1700"/>
                                   </p:stCondLst>
                                   <p:childTnLst>
                                     <p:animScale>
                                       <p:cBhvr>
-                                        <p:cTn id="28" dur="450" autoRev="1" fill="hold"/>
+                                        <p:cTn id="24" dur="450" autoRev="1" fill="hold"/>
                                         <p:tgtEl>
                                           <p:spTgt spid="14"/>
                                         </p:tgtEl>
@@ -47263,26 +46351,26 @@
                     </p:cTn>
                   </p:par>
                   <p:par>
-                    <p:cTn id="29" fill="hold">
+                    <p:cTn id="25" fill="hold">
                       <p:stCondLst>
                         <p:cond delay="indefinite"/>
                       </p:stCondLst>
                       <p:childTnLst>
                         <p:par>
-                          <p:cTn id="30" fill="hold">
+                          <p:cTn id="26" fill="hold">
                             <p:stCondLst>
                               <p:cond delay="0"/>
                             </p:stCondLst>
                             <p:childTnLst>
                               <p:par>
-                                <p:cTn id="31" presetID="0" presetClass="path" presetSubtype="0" fill="hold" grpId="3" nodeType="clickEffect">
+                                <p:cTn id="27" presetID="0" presetClass="path" presetSubtype="0" fill="hold" grpId="3" nodeType="clickEffect">
                                   <p:stCondLst>
                                     <p:cond delay="0"/>
                                   </p:stCondLst>
                                   <p:childTnLst>
                                     <p:animMotion origin="layout" path="M -0.5513 0 L -0.7350 0 E" pathEditMode="relative" ptsTypes="">
                                       <p:cBhvr>
-                                        <p:cTn id="32" dur="1800" fill="hold" accel="40000" decel="40000"/>
+                                        <p:cTn id="28" dur="1800" fill="hold" accel="40000" decel="40000"/>
                                         <p:tgtEl>
                                           <p:spTgt spid="20"/>
                                         </p:tgtEl>
@@ -47294,33 +46382,17 @@
                                       <p:rCtr x="0" y="0"/>
                                     </p:animMotion>
                                   </p:childTnLst>
-                                  <p:subTnLst>
-                                    <p:audio>
-                                      <p:cMediaNode vol="50000" showWhenStopped="0">
-                                        <p:cTn id="33" display="0" masterRel="sameClick">
-                                          <p:stCondLst>
-                                            <p:cond evt="onBegin" delay="0">
-                                              <p:tn val="31"/>
-                                            </p:cond>
-                                          </p:stCondLst>
-                                        </p:cTn>
-                                        <p:tgtEl>
-                                          <p:sndTgt r:embed="rId14" name="train.wav"/>
-                                        </p:tgtEl>
-                                      </p:cMediaNode>
-                                    </p:audio>
-                                  </p:subTnLst>
                                 </p:cTn>
                               </p:par>
                               <p:par>
-                                <p:cTn id="34" presetID="6" presetClass="emph" presetSubtype="0" fill="hold" grpId="0" nodeType="withEffect">
+                                <p:cTn id="29" presetID="6" presetClass="emph" presetSubtype="0" fill="hold" grpId="0" nodeType="withEffect">
                                   <p:stCondLst>
                                     <p:cond delay="1700"/>
                                   </p:stCondLst>
                                   <p:childTnLst>
                                     <p:animScale>
                                       <p:cBhvr>
-                                        <p:cTn id="35" dur="450" autoRev="1" fill="hold"/>
+                                        <p:cTn id="30" dur="450" autoRev="1" fill="hold"/>
                                         <p:tgtEl>
                                           <p:spTgt spid="17"/>
                                         </p:tgtEl>
@@ -47337,26 +46409,26 @@
                     </p:cTn>
                   </p:par>
                   <p:par>
-                    <p:cTn id="36" fill="hold">
+                    <p:cTn id="31" fill="hold">
                       <p:stCondLst>
                         <p:cond delay="indefinite"/>
                       </p:stCondLst>
                       <p:childTnLst>
                         <p:par>
-                          <p:cTn id="37" fill="hold">
+                          <p:cTn id="32" fill="hold">
                             <p:stCondLst>
                               <p:cond delay="0"/>
                             </p:stCondLst>
                             <p:childTnLst>
                               <p:par>
-                                <p:cTn id="38" presetID="10" presetClass="entr" presetSubtype="0" fill="hold" grpId="0" nodeType="clickEffect">
+                                <p:cTn id="33" presetID="10" presetClass="entr" presetSubtype="0" fill="hold" grpId="0" nodeType="clickEffect">
                                   <p:stCondLst>
                                     <p:cond delay="0"/>
                                   </p:stCondLst>
                                   <p:childTnLst>
                                     <p:set>
                                       <p:cBhvr>
-                                        <p:cTn id="39" dur="1" fill="hold">
+                                        <p:cTn id="34" dur="1" fill="hold">
                                           <p:stCondLst>
                                             <p:cond delay="0"/>
                                           </p:stCondLst>
@@ -47374,7 +46446,7 @@
                                     </p:set>
                                     <p:animEffect transition="in" filter="fade">
                                       <p:cBhvr>
-                                        <p:cTn id="40" dur="500"/>
+                                        <p:cTn id="35" dur="500"/>
                                         <p:tgtEl>
                                           <p:spTgt spid="21"/>
                                         </p:tgtEl>
@@ -47384,14 +46456,14 @@
                                 </p:cTn>
                               </p:par>
                               <p:par>
-                                <p:cTn id="41" presetID="10" presetClass="entr" presetSubtype="0" fill="hold" grpId="0" nodeType="withEffect">
+                                <p:cTn id="36" presetID="10" presetClass="entr" presetSubtype="0" fill="hold" grpId="0" nodeType="withEffect">
                                   <p:stCondLst>
                                     <p:cond delay="0"/>
                                   </p:stCondLst>
                                   <p:childTnLst>
                                     <p:set>
                                       <p:cBhvr>
-                                        <p:cTn id="42" dur="1" fill="hold">
+                                        <p:cTn id="37" dur="1" fill="hold">
                                           <p:stCondLst>
                                             <p:cond delay="0"/>
                                           </p:stCondLst>
@@ -47409,7 +46481,7 @@
                                     </p:set>
                                     <p:animEffect transition="in" filter="fade">
                                       <p:cBhvr>
-                                        <p:cTn id="43" dur="500"/>
+                                        <p:cTn id="38" dur="500"/>
                                         <p:tgtEl>
                                           <p:spTgt spid="22"/>
                                         </p:tgtEl>
@@ -47419,14 +46491,14 @@
                                 </p:cTn>
                               </p:par>
                               <p:par>
-                                <p:cTn id="44" presetID="10" presetClass="entr" presetSubtype="0" fill="hold" grpId="0" nodeType="withEffect">
+                                <p:cTn id="39" presetID="10" presetClass="entr" presetSubtype="0" fill="hold" grpId="0" nodeType="withEffect">
                                   <p:stCondLst>
                                     <p:cond delay="0"/>
                                   </p:stCondLst>
                                   <p:childTnLst>
                                     <p:set>
                                       <p:cBhvr>
-                                        <p:cTn id="45" dur="1" fill="hold">
+                                        <p:cTn id="40" dur="1" fill="hold">
                                           <p:stCondLst>
                                             <p:cond delay="0"/>
                                           </p:stCondLst>
@@ -47444,7 +46516,7 @@
                                     </p:set>
                                     <p:animEffect transition="in" filter="fade">
                                       <p:cBhvr>
-                                        <p:cTn id="46" dur="500"/>
+                                        <p:cTn id="41" dur="500"/>
                                         <p:tgtEl>
                                           <p:spTgt spid="23"/>
                                         </p:tgtEl>
@@ -48246,42 +47318,26 @@
                                       </p:cBhvr>
                                     </p:animEffect>
                                   </p:childTnLst>
-                                  <p:subTnLst>
-                                    <p:audio>
-                                      <p:cMediaNode vol="50000" showWhenStopped="0">
-                                        <p:cTn id="16" display="0" masterRel="sameClick">
-                                          <p:stCondLst>
-                                            <p:cond evt="onBegin" delay="0">
-                                              <p:tn val="11"/>
-                                            </p:cond>
-                                          </p:stCondLst>
-                                        </p:cTn>
-                                        <p:tgtEl>
-                                          <p:sndTgt r:embed="rId9" name="chime.wav"/>
-                                        </p:tgtEl>
-                                      </p:cMediaNode>
-                                    </p:audio>
-                                  </p:subTnLst>
                                 </p:cTn>
                               </p:par>
                             </p:childTnLst>
                           </p:cTn>
                         </p:par>
                         <p:par>
-                          <p:cTn id="17" fill="hold">
+                          <p:cTn id="16" fill="hold">
                             <p:stCondLst>
                               <p:cond delay="2700"/>
                             </p:stCondLst>
                             <p:childTnLst>
                               <p:par>
-                                <p:cTn id="18" presetID="0" presetClass="path" presetSubtype="0" fill="hold" grpId="2" nodeType="afterEffect">
+                                <p:cTn id="17" presetID="0" presetClass="path" presetSubtype="0" fill="hold" grpId="2" nodeType="afterEffect">
                                   <p:stCondLst>
                                     <p:cond delay="400"/>
                                   </p:stCondLst>
                                   <p:childTnLst>
                                     <p:animMotion origin="layout" path="M 0 0 L -0.8 0 E" pathEditMode="relative" ptsTypes="">
                                       <p:cBhvr>
-                                        <p:cTn id="19" dur="1600" fill="hold"/>
+                                        <p:cTn id="18" dur="1600" fill="hold"/>
                                         <p:tgtEl>
                                           <p:spTgt spid="4"/>
                                         </p:tgtEl>
@@ -48296,14 +47352,14 @@
                                 </p:cTn>
                               </p:par>
                               <p:par>
-                                <p:cTn id="20" presetID="10" presetClass="exit" presetSubtype="0" fill="hold" grpId="1" nodeType="withEffect">
+                                <p:cTn id="19" presetID="10" presetClass="exit" presetSubtype="0" fill="hold" grpId="1" nodeType="withEffect">
                                   <p:stCondLst>
                                     <p:cond delay="1300"/>
                                   </p:stCondLst>
                                   <p:childTnLst>
                                     <p:animEffect transition="out" filter="fade">
                                       <p:cBhvr>
-                                        <p:cTn id="21" dur="500"/>
+                                        <p:cTn id="20" dur="500"/>
                                         <p:tgtEl>
                                           <p:spTgt spid="5"/>
                                         </p:tgtEl>
@@ -48311,7 +47367,7 @@
                                     </p:animEffect>
                                     <p:set>
                                       <p:cBhvr>
-                                        <p:cTn id="22" dur="1" fill="hold">
+                                        <p:cTn id="21" dur="1" fill="hold">
                                           <p:stCondLst>
                                             <p:cond delay="499"/>
                                           </p:stCondLst>
@@ -48334,20 +47390,20 @@
                           </p:cTn>
                         </p:par>
                         <p:par>
-                          <p:cTn id="23" fill="hold">
+                          <p:cTn id="22" fill="hold">
                             <p:stCondLst>
                               <p:cond delay="4700"/>
                             </p:stCondLst>
                             <p:childTnLst>
                               <p:par>
-                                <p:cTn id="24" presetID="10" presetClass="entr" presetSubtype="0" fill="hold" grpId="0" nodeType="afterEffect">
+                                <p:cTn id="23" presetID="10" presetClass="entr" presetSubtype="0" fill="hold" grpId="0" nodeType="afterEffect">
                                   <p:stCondLst>
                                     <p:cond delay="0"/>
                                   </p:stCondLst>
                                   <p:childTnLst>
                                     <p:set>
                                       <p:cBhvr>
-                                        <p:cTn id="25" dur="1" fill="hold">
+                                        <p:cTn id="24" dur="1" fill="hold">
                                           <p:stCondLst>
                                             <p:cond delay="0"/>
                                           </p:stCondLst>
@@ -48365,7 +47421,7 @@
                                     </p:set>
                                     <p:animEffect transition="in" filter="fade">
                                       <p:cBhvr>
-                                        <p:cTn id="26" dur="500"/>
+                                        <p:cTn id="25" dur="500"/>
                                         <p:tgtEl>
                                           <p:spTgt spid="6"/>
                                         </p:tgtEl>
@@ -48375,14 +47431,14 @@
                                 </p:cTn>
                               </p:par>
                               <p:par>
-                                <p:cTn id="27" presetID="10" presetClass="entr" presetSubtype="0" fill="hold" grpId="0" nodeType="withEffect">
+                                <p:cTn id="26" presetID="10" presetClass="entr" presetSubtype="0" fill="hold" grpId="0" nodeType="withEffect">
                                   <p:stCondLst>
                                     <p:cond delay="0"/>
                                   </p:stCondLst>
                                   <p:childTnLst>
                                     <p:set>
                                       <p:cBhvr>
-                                        <p:cTn id="28" dur="1" fill="hold">
+                                        <p:cTn id="27" dur="1" fill="hold">
                                           <p:stCondLst>
                                             <p:cond delay="0"/>
                                           </p:stCondLst>
@@ -48400,7 +47456,7 @@
                                     </p:set>
                                     <p:animEffect transition="in" filter="fade">
                                       <p:cBhvr>
-                                        <p:cTn id="29" dur="500"/>
+                                        <p:cTn id="28" dur="500"/>
                                         <p:tgtEl>
                                           <p:spTgt spid="7"/>
                                         </p:tgtEl>
@@ -48410,14 +47466,14 @@
                                 </p:cTn>
                               </p:par>
                               <p:par>
-                                <p:cTn id="30" presetID="10" presetClass="entr" presetSubtype="0" fill="hold" grpId="0" nodeType="withEffect">
+                                <p:cTn id="29" presetID="10" presetClass="entr" presetSubtype="0" fill="hold" grpId="0" nodeType="withEffect">
                                   <p:stCondLst>
                                     <p:cond delay="0"/>
                                   </p:stCondLst>
                                   <p:childTnLst>
                                     <p:set>
                                       <p:cBhvr>
-                                        <p:cTn id="31" dur="1" fill="hold">
+                                        <p:cTn id="30" dur="1" fill="hold">
                                           <p:stCondLst>
                                             <p:cond delay="0"/>
                                           </p:stCondLst>
@@ -48435,7 +47491,7 @@
                                     </p:set>
                                     <p:animEffect transition="in" filter="fade">
                                       <p:cBhvr>
-                                        <p:cTn id="32" dur="500"/>
+                                        <p:cTn id="31" dur="500"/>
                                         <p:tgtEl>
                                           <p:spTgt spid="8"/>
                                         </p:tgtEl>
@@ -48445,14 +47501,14 @@
                                 </p:cTn>
                               </p:par>
                               <p:par>
-                                <p:cTn id="33" presetID="10" presetClass="entr" presetSubtype="0" fill="hold" grpId="0" nodeType="withEffect">
+                                <p:cTn id="32" presetID="10" presetClass="entr" presetSubtype="0" fill="hold" grpId="0" nodeType="withEffect">
                                   <p:stCondLst>
                                     <p:cond delay="0"/>
                                   </p:stCondLst>
                                   <p:childTnLst>
                                     <p:set>
                                       <p:cBhvr>
-                                        <p:cTn id="34" dur="1" fill="hold">
+                                        <p:cTn id="33" dur="1" fill="hold">
                                           <p:stCondLst>
                                             <p:cond delay="0"/>
                                           </p:stCondLst>
@@ -48470,7 +47526,7 @@
                                     </p:set>
                                     <p:animEffect transition="in" filter="fade">
                                       <p:cBhvr>
-                                        <p:cTn id="35" dur="500"/>
+                                        <p:cTn id="34" dur="500"/>
                                         <p:tgtEl>
                                           <p:spTgt spid="9"/>
                                         </p:tgtEl>
@@ -48480,14 +47536,14 @@
                                 </p:cTn>
                               </p:par>
                               <p:par>
-                                <p:cTn id="36" presetID="10" presetClass="entr" presetSubtype="0" fill="hold" grpId="0" nodeType="withEffect">
+                                <p:cTn id="35" presetID="10" presetClass="entr" presetSubtype="0" fill="hold" grpId="0" nodeType="withEffect">
                                   <p:stCondLst>
                                     <p:cond delay="0"/>
                                   </p:stCondLst>
                                   <p:childTnLst>
                                     <p:set>
                                       <p:cBhvr>
-                                        <p:cTn id="37" dur="1" fill="hold">
+                                        <p:cTn id="36" dur="1" fill="hold">
                                           <p:stCondLst>
                                             <p:cond delay="0"/>
                                           </p:stCondLst>
@@ -48505,7 +47561,7 @@
                                     </p:set>
                                     <p:animEffect transition="in" filter="fade">
                                       <p:cBhvr>
-                                        <p:cTn id="38" dur="500"/>
+                                        <p:cTn id="37" dur="500"/>
                                         <p:tgtEl>
                                           <p:spTgt spid="10"/>
                                         </p:tgtEl>
@@ -48515,14 +47571,14 @@
                                 </p:cTn>
                               </p:par>
                               <p:par>
-                                <p:cTn id="39" presetID="10" presetClass="entr" presetSubtype="0" fill="hold" grpId="0" nodeType="withEffect">
+                                <p:cTn id="38" presetID="10" presetClass="entr" presetSubtype="0" fill="hold" grpId="0" nodeType="withEffect">
                                   <p:stCondLst>
                                     <p:cond delay="0"/>
                                   </p:stCondLst>
                                   <p:childTnLst>
                                     <p:set>
                                       <p:cBhvr>
-                                        <p:cTn id="40" dur="1" fill="hold">
+                                        <p:cTn id="39" dur="1" fill="hold">
                                           <p:stCondLst>
                                             <p:cond delay="0"/>
                                           </p:stCondLst>
@@ -48540,7 +47596,7 @@
                                     </p:set>
                                     <p:animEffect transition="in" filter="fade">
                                       <p:cBhvr>
-                                        <p:cTn id="41" dur="500"/>
+                                        <p:cTn id="40" dur="500"/>
                                         <p:tgtEl>
                                           <p:spTgt spid="11"/>
                                         </p:tgtEl>
@@ -48556,26 +47612,26 @@
                     </p:cTn>
                   </p:par>
                   <p:par>
-                    <p:cTn id="42" fill="hold">
+                    <p:cTn id="41" fill="hold">
                       <p:stCondLst>
                         <p:cond delay="indefinite"/>
                       </p:stCondLst>
                       <p:childTnLst>
                         <p:par>
-                          <p:cTn id="43" fill="hold">
+                          <p:cTn id="42" fill="hold">
                             <p:stCondLst>
                               <p:cond delay="0"/>
                             </p:stCondLst>
                             <p:childTnLst>
                               <p:par>
-                                <p:cTn id="44" presetID="10" presetClass="entr" presetSubtype="0" fill="hold" grpId="0" nodeType="clickEffect">
+                                <p:cTn id="43" presetID="10" presetClass="entr" presetSubtype="0" fill="hold" grpId="0" nodeType="clickEffect">
                                   <p:stCondLst>
                                     <p:cond delay="0"/>
                                   </p:stCondLst>
                                   <p:childTnLst>
                                     <p:set>
                                       <p:cBhvr>
-                                        <p:cTn id="45" dur="1" fill="hold">
+                                        <p:cTn id="44" dur="1" fill="hold">
                                           <p:stCondLst>
                                             <p:cond delay="0"/>
                                           </p:stCondLst>
@@ -48593,29 +47649,13 @@
                                     </p:set>
                                     <p:animEffect transition="in" filter="fade">
                                       <p:cBhvr>
-                                        <p:cTn id="46" dur="500"/>
+                                        <p:cTn id="45" dur="500"/>
                                         <p:tgtEl>
                                           <p:spTgt spid="12"/>
                                         </p:tgtEl>
                                       </p:cBhvr>
                                     </p:animEffect>
                                   </p:childTnLst>
-                                  <p:subTnLst>
-                                    <p:audio>
-                                      <p:cMediaNode vol="50000" showWhenStopped="0">
-                                        <p:cTn id="47" display="0" masterRel="sameClick">
-                                          <p:stCondLst>
-                                            <p:cond evt="onBegin" delay="0">
-                                              <p:tn val="44"/>
-                                            </p:cond>
-                                          </p:stCondLst>
-                                        </p:cTn>
-                                        <p:tgtEl>
-                                          <p:sndTgt r:embed="rId9" name="chime.wav"/>
-                                        </p:tgtEl>
-                                      </p:cMediaNode>
-                                    </p:audio>
-                                  </p:subTnLst>
                                 </p:cTn>
                               </p:par>
                             </p:childTnLst>
@@ -49620,33 +48660,17 @@
                                       </p:cBhvr>
                                     </p:animEffect>
                                   </p:childTnLst>
-                                  <p:subTnLst>
-                                    <p:audio>
-                                      <p:cMediaNode vol="50000" showWhenStopped="0">
-                                        <p:cTn id="8" display="0" masterRel="sameClick">
-                                          <p:stCondLst>
-                                            <p:cond evt="onBegin" delay="0">
-                                              <p:tn val="5"/>
-                                            </p:cond>
-                                          </p:stCondLst>
-                                        </p:cTn>
-                                        <p:tgtEl>
-                                          <p:sndTgt r:embed="rId6" name="chime.wav"/>
-                                        </p:tgtEl>
-                                      </p:cMediaNode>
-                                    </p:audio>
-                                  </p:subTnLst>
                                 </p:cTn>
                               </p:par>
                               <p:par>
-                                <p:cTn id="9" presetID="10" presetClass="entr" presetSubtype="0" fill="hold" grpId="0" nodeType="withEffect">
+                                <p:cTn id="8" presetID="10" presetClass="entr" presetSubtype="0" fill="hold" grpId="0" nodeType="withEffect">
                                   <p:stCondLst>
                                     <p:cond delay="0"/>
                                   </p:stCondLst>
                                   <p:childTnLst>
                                     <p:set>
                                       <p:cBhvr>
-                                        <p:cTn id="10" dur="1" fill="hold">
+                                        <p:cTn id="9" dur="1" fill="hold">
                                           <p:stCondLst>
                                             <p:cond delay="0"/>
                                           </p:stCondLst>
@@ -49664,7 +48688,7 @@
                                     </p:set>
                                     <p:animEffect transition="in" filter="fade">
                                       <p:cBhvr>
-                                        <p:cTn id="11" dur="500"/>
+                                        <p:cTn id="10" dur="500"/>
                                         <p:tgtEl>
                                           <p:spTgt spid="8"/>
                                         </p:tgtEl>
@@ -49690,7 +48714,7 @@
               </p:nextCondLst>
             </p:seq>
             <p:seq concurrent="1" nextAc="seek">
-              <p:cTn id="12" restart="whenNotActive" fill="hold" evtFilter="cancelBubble" nodeType="interactiveSeq">
+              <p:cTn id="11" restart="whenNotActive" fill="hold" evtFilter="cancelBubble" nodeType="interactiveSeq">
                 <p:stCondLst>
                   <p:cond evt="onClick" delay="0">
                     <p:tgtEl>
@@ -49703,26 +48727,26 @@
                 </p:endSync>
                 <p:childTnLst>
                   <p:par>
-                    <p:cTn id="13" fill="hold">
+                    <p:cTn id="12" fill="hold">
                       <p:stCondLst>
                         <p:cond delay="0"/>
                       </p:stCondLst>
                       <p:childTnLst>
                         <p:par>
-                          <p:cTn id="14" fill="hold">
+                          <p:cTn id="13" fill="hold">
                             <p:stCondLst>
                               <p:cond delay="0"/>
                             </p:stCondLst>
                             <p:childTnLst>
                               <p:par>
-                                <p:cTn id="15" presetID="10" presetClass="entr" presetSubtype="0" fill="hold" grpId="0" nodeType="clickEffect">
+                                <p:cTn id="14" presetID="10" presetClass="entr" presetSubtype="0" fill="hold" grpId="0" nodeType="clickEffect">
                                   <p:stCondLst>
                                     <p:cond delay="0"/>
                                   </p:stCondLst>
                                   <p:childTnLst>
                                     <p:set>
                                       <p:cBhvr>
-                                        <p:cTn id="16" dur="1" fill="hold">
+                                        <p:cTn id="15" dur="1" fill="hold">
                                           <p:stCondLst>
                                             <p:cond delay="0"/>
                                           </p:stCondLst>
@@ -49740,40 +48764,24 @@
                                     </p:set>
                                     <p:animEffect transition="in" filter="fade">
                                       <p:cBhvr>
-                                        <p:cTn id="17" dur="500"/>
+                                        <p:cTn id="16" dur="500"/>
                                         <p:tgtEl>
                                           <p:spTgt spid="10"/>
                                         </p:tgtEl>
                                       </p:cBhvr>
                                     </p:animEffect>
                                   </p:childTnLst>
-                                  <p:subTnLst>
-                                    <p:audio>
-                                      <p:cMediaNode vol="50000" showWhenStopped="0">
-                                        <p:cTn id="18" display="0" masterRel="sameClick">
-                                          <p:stCondLst>
-                                            <p:cond evt="onBegin" delay="0">
-                                              <p:tn val="15"/>
-                                            </p:cond>
-                                          </p:stCondLst>
-                                        </p:cTn>
-                                        <p:tgtEl>
-                                          <p:sndTgt r:embed="rId6" name="chime.wav"/>
-                                        </p:tgtEl>
-                                      </p:cMediaNode>
-                                    </p:audio>
-                                  </p:subTnLst>
                                 </p:cTn>
                               </p:par>
                               <p:par>
-                                <p:cTn id="19" presetID="10" presetClass="entr" presetSubtype="0" fill="hold" grpId="0" nodeType="withEffect">
+                                <p:cTn id="17" presetID="10" presetClass="entr" presetSubtype="0" fill="hold" grpId="0" nodeType="withEffect">
                                   <p:stCondLst>
                                     <p:cond delay="0"/>
                                   </p:stCondLst>
                                   <p:childTnLst>
                                     <p:set>
                                       <p:cBhvr>
-                                        <p:cTn id="20" dur="1" fill="hold">
+                                        <p:cTn id="18" dur="1" fill="hold">
                                           <p:stCondLst>
                                             <p:cond delay="0"/>
                                           </p:stCondLst>
@@ -49791,7 +48799,7 @@
                                     </p:set>
                                     <p:animEffect transition="in" filter="fade">
                                       <p:cBhvr>
-                                        <p:cTn id="21" dur="500"/>
+                                        <p:cTn id="19" dur="500"/>
                                         <p:tgtEl>
                                           <p:spTgt spid="11"/>
                                         </p:tgtEl>
@@ -49817,7 +48825,7 @@
               </p:nextCondLst>
             </p:seq>
             <p:seq concurrent="1" nextAc="seek">
-              <p:cTn id="22" restart="whenNotActive" fill="hold" evtFilter="cancelBubble" nodeType="interactiveSeq">
+              <p:cTn id="20" restart="whenNotActive" fill="hold" evtFilter="cancelBubble" nodeType="interactiveSeq">
                 <p:stCondLst>
                   <p:cond evt="onClick" delay="0">
                     <p:tgtEl>
@@ -49830,26 +48838,26 @@
                 </p:endSync>
                 <p:childTnLst>
                   <p:par>
-                    <p:cTn id="23" fill="hold">
+                    <p:cTn id="21" fill="hold">
                       <p:stCondLst>
                         <p:cond delay="0"/>
                       </p:stCondLst>
                       <p:childTnLst>
                         <p:par>
-                          <p:cTn id="24" fill="hold">
+                          <p:cTn id="22" fill="hold">
                             <p:stCondLst>
                               <p:cond delay="0"/>
                             </p:stCondLst>
                             <p:childTnLst>
                               <p:par>
-                                <p:cTn id="25" presetID="10" presetClass="entr" presetSubtype="0" fill="hold" grpId="0" nodeType="clickEffect">
+                                <p:cTn id="23" presetID="10" presetClass="entr" presetSubtype="0" fill="hold" grpId="0" nodeType="clickEffect">
                                   <p:stCondLst>
                                     <p:cond delay="0"/>
                                   </p:stCondLst>
                                   <p:childTnLst>
                                     <p:set>
                                       <p:cBhvr>
-                                        <p:cTn id="26" dur="1" fill="hold">
+                                        <p:cTn id="24" dur="1" fill="hold">
                                           <p:stCondLst>
                                             <p:cond delay="0"/>
                                           </p:stCondLst>
@@ -49867,40 +48875,24 @@
                                     </p:set>
                                     <p:animEffect transition="in" filter="fade">
                                       <p:cBhvr>
-                                        <p:cTn id="27" dur="500"/>
+                                        <p:cTn id="25" dur="500"/>
                                         <p:tgtEl>
                                           <p:spTgt spid="13"/>
                                         </p:tgtEl>
                                       </p:cBhvr>
                                     </p:animEffect>
                                   </p:childTnLst>
-                                  <p:subTnLst>
-                                    <p:audio>
-                                      <p:cMediaNode vol="50000" showWhenStopped="0">
-                                        <p:cTn id="28" display="0" masterRel="sameClick">
-                                          <p:stCondLst>
-                                            <p:cond evt="onBegin" delay="0">
-                                              <p:tn val="25"/>
-                                            </p:cond>
-                                          </p:stCondLst>
-                                        </p:cTn>
-                                        <p:tgtEl>
-                                          <p:sndTgt r:embed="rId6" name="chime.wav"/>
-                                        </p:tgtEl>
-                                      </p:cMediaNode>
-                                    </p:audio>
-                                  </p:subTnLst>
                                 </p:cTn>
                               </p:par>
                               <p:par>
-                                <p:cTn id="29" presetID="10" presetClass="entr" presetSubtype="0" fill="hold" grpId="0" nodeType="withEffect">
+                                <p:cTn id="26" presetID="10" presetClass="entr" presetSubtype="0" fill="hold" grpId="0" nodeType="withEffect">
                                   <p:stCondLst>
                                     <p:cond delay="0"/>
                                   </p:stCondLst>
                                   <p:childTnLst>
                                     <p:set>
                                       <p:cBhvr>
-                                        <p:cTn id="30" dur="1" fill="hold">
+                                        <p:cTn id="27" dur="1" fill="hold">
                                           <p:stCondLst>
                                             <p:cond delay="0"/>
                                           </p:stCondLst>
@@ -49918,7 +48910,7 @@
                                     </p:set>
                                     <p:animEffect transition="in" filter="fade">
                                       <p:cBhvr>
-                                        <p:cTn id="31" dur="500"/>
+                                        <p:cTn id="28" dur="500"/>
                                         <p:tgtEl>
                                           <p:spTgt spid="14"/>
                                         </p:tgtEl>
@@ -49944,7 +48936,7 @@
               </p:nextCondLst>
             </p:seq>
             <p:seq concurrent="1" nextAc="seek">
-              <p:cTn id="32" restart="whenNotActive" fill="hold" evtFilter="cancelBubble" nodeType="interactiveSeq">
+              <p:cTn id="29" restart="whenNotActive" fill="hold" evtFilter="cancelBubble" nodeType="interactiveSeq">
                 <p:stCondLst>
                   <p:cond evt="onClick" delay="0">
                     <p:tgtEl>
@@ -49957,32 +48949,67 @@
                 </p:endSync>
                 <p:childTnLst>
                   <p:par>
-                    <p:cTn id="33" fill="hold">
+                    <p:cTn id="30" fill="hold">
                       <p:stCondLst>
                         <p:cond delay="0"/>
                       </p:stCondLst>
                       <p:childTnLst>
                         <p:par>
-                          <p:cTn id="34" fill="hold">
+                          <p:cTn id="31" fill="hold">
                             <p:stCondLst>
                               <p:cond delay="0"/>
                             </p:stCondLst>
                             <p:childTnLst>
                               <p:par>
-                                <p:cTn id="35" presetID="10" presetClass="entr" presetSubtype="0" fill="hold" grpId="0" nodeType="clickEffect">
+                                <p:cTn id="32" presetID="10" presetClass="entr" presetSubtype="0" fill="hold" grpId="0" nodeType="clickEffect">
                                   <p:stCondLst>
                                     <p:cond delay="0"/>
                                   </p:stCondLst>
                                   <p:childTnLst>
                                     <p:set>
                                       <p:cBhvr>
+                                        <p:cTn id="33" dur="1" fill="hold">
+                                          <p:stCondLst>
+                                            <p:cond delay="0"/>
+                                          </p:stCondLst>
+                                        </p:cTn>
+                                        <p:tgtEl>
+                                          <p:spTgt spid="16"/>
+                                        </p:tgtEl>
+                                        <p:attrNameLst>
+                                          <p:attrName>style.visibility</p:attrName>
+                                        </p:attrNameLst>
+                                      </p:cBhvr>
+                                      <p:to>
+                                        <p:strVal val="visible"/>
+                                      </p:to>
+                                    </p:set>
+                                    <p:animEffect transition="in" filter="fade">
+                                      <p:cBhvr>
+                                        <p:cTn id="34" dur="500"/>
+                                        <p:tgtEl>
+                                          <p:spTgt spid="16"/>
+                                        </p:tgtEl>
+                                      </p:cBhvr>
+                                    </p:animEffect>
+                                  </p:childTnLst>
+                                </p:cTn>
+                              </p:par>
+                              <p:par>
+                                <p:cTn id="35" presetID="10" presetClass="entr" presetSubtype="0" fill="hold" grpId="0" nodeType="withEffect">
+                                  <p:stCondLst>
+                                    <p:cond delay="0"/>
+                                  </p:stCondLst>
+                                  <p:childTnLst>
+                                    <p:set>
+                                      <p:cBhvr>
                                         <p:cTn id="36" dur="1" fill="hold">
                                           <p:stCondLst>
                                             <p:cond delay="0"/>
                                           </p:stCondLst>
                                         </p:cTn>
                                         <p:tgtEl>
-                                          <p:spTgt spid="16"/>
+                                          <p:spTgt spid="17"/>
                                         </p:tgtEl>
                                         <p:attrNameLst>
                                           <p:attrName>style.visibility</p:attrName>
@@ -49995,57 +49022,6 @@
                                     <p:animEffect transition="in" filter="fade">
                                       <p:cBhvr>
                                         <p:cTn id="37" dur="500"/>
-                                        <p:tgtEl>
-                                          <p:spTgt spid="16"/>
-                                        </p:tgtEl>
-                                      </p:cBhvr>
-                                    </p:animEffect>
-                                  </p:childTnLst>
-                                  <p:subTnLst>
-                                    <p:audio>
-                                      <p:cMediaNode vol="50000" showWhenStopped="0">
-                                        <p:cTn id="38" display="0" masterRel="sameClick">
-                                          <p:stCondLst>
-                                            <p:cond evt="onBegin" delay="0">
-                                              <p:tn val="35"/>
-                                            </p:cond>
-                                          </p:stCondLst>
-                                        </p:cTn>
-                                        <p:tgtEl>
-                                          <p:sndTgt r:embed="rId6" name="chime.wav"/>
-                                        </p:tgtEl>
-                                      </p:cMediaNode>
-                                    </p:audio>
-                                  </p:subTnLst>
-                                </p:cTn>
-                              </p:par>
-                              <p:par>
-                                <p:cTn id="39" presetID="10" presetClass="entr" presetSubtype="0" fill="hold" grpId="0" nodeType="withEffect">
-                                  <p:stCondLst>
-                                    <p:cond delay="0"/>
-                                  </p:stCondLst>
-                                  <p:childTnLst>
-                                    <p:set>
-                                      <p:cBhvr>
-                                        <p:cTn id="40" dur="1" fill="hold">
-                                          <p:stCondLst>
-                                            <p:cond delay="0"/>
-                                          </p:stCondLst>
-                                        </p:cTn>
-                                        <p:tgtEl>
-                                          <p:spTgt spid="17"/>
-                                        </p:tgtEl>
-                                        <p:attrNameLst>
-                                          <p:attrName>style.visibility</p:attrName>
-                                        </p:attrNameLst>
-                                      </p:cBhvr>
-                                      <p:to>
-                                        <p:strVal val="visible"/>
-                                      </p:to>
-                                    </p:set>
-                                    <p:animEffect transition="in" filter="fade">
-                                      <p:cBhvr>
-                                        <p:cTn id="41" dur="500"/>
                                         <p:tgtEl>
                                           <p:spTgt spid="17"/>
                                         </p:tgtEl>
